--- a/09-Presentation/IAM-Healthcare-Automation-Professional.pptx
+++ b/09-Presentation/IAM-Healthcare-Automation-Professional.pptx
@@ -116,6 +116,11 @@
       </a:defRPr>
     </a:lvl9pPr>
   </p:defaultTextStyle>
+  <p:extLst>
+    <p:ext uri="{EFAFB233-063F-42B5-8137-9DF3F51BA10A}">
+      <p15:sldGuideLst xmlns:p15="http://schemas.microsoft.com/office/powerpoint/2012/main"/>
+    </p:ext>
+  </p:extLst>
 </p:presentation>
 </file>
 
@@ -266,7 +271,7 @@
           <a:p>
             <a:fld id="{6EC124F2-B461-4993-8DAA-E392A8E68310}" type="datetimeFigureOut">
               <a:rPr lang="en-US" smtClean="0"/>
-              <a:t>6/5/2026</a:t>
+              <a:t>6/8/2026</a:t>
             </a:fld>
             <a:endParaRPr lang="en-US"/>
           </a:p>
@@ -464,7 +469,7 @@
           <a:p>
             <a:fld id="{6EC124F2-B461-4993-8DAA-E392A8E68310}" type="datetimeFigureOut">
               <a:rPr lang="en-US" smtClean="0"/>
-              <a:t>6/5/2026</a:t>
+              <a:t>6/8/2026</a:t>
             </a:fld>
             <a:endParaRPr lang="en-US"/>
           </a:p>
@@ -672,7 +677,7 @@
           <a:p>
             <a:fld id="{6EC124F2-B461-4993-8DAA-E392A8E68310}" type="datetimeFigureOut">
               <a:rPr lang="en-US" smtClean="0"/>
-              <a:t>6/5/2026</a:t>
+              <a:t>6/8/2026</a:t>
             </a:fld>
             <a:endParaRPr lang="en-US"/>
           </a:p>
@@ -870,7 +875,7 @@
           <a:p>
             <a:fld id="{6EC124F2-B461-4993-8DAA-E392A8E68310}" type="datetimeFigureOut">
               <a:rPr lang="en-US" smtClean="0"/>
-              <a:t>6/5/2026</a:t>
+              <a:t>6/8/2026</a:t>
             </a:fld>
             <a:endParaRPr lang="en-US"/>
           </a:p>
@@ -1145,7 +1150,7 @@
           <a:p>
             <a:fld id="{6EC124F2-B461-4993-8DAA-E392A8E68310}" type="datetimeFigureOut">
               <a:rPr lang="en-US" smtClean="0"/>
-              <a:t>6/5/2026</a:t>
+              <a:t>6/8/2026</a:t>
             </a:fld>
             <a:endParaRPr lang="en-US"/>
           </a:p>
@@ -1410,7 +1415,7 @@
           <a:p>
             <a:fld id="{6EC124F2-B461-4993-8DAA-E392A8E68310}" type="datetimeFigureOut">
               <a:rPr lang="en-US" smtClean="0"/>
-              <a:t>6/5/2026</a:t>
+              <a:t>6/8/2026</a:t>
             </a:fld>
             <a:endParaRPr lang="en-US"/>
           </a:p>
@@ -1822,7 +1827,7 @@
           <a:p>
             <a:fld id="{6EC124F2-B461-4993-8DAA-E392A8E68310}" type="datetimeFigureOut">
               <a:rPr lang="en-US" smtClean="0"/>
-              <a:t>6/5/2026</a:t>
+              <a:t>6/8/2026</a:t>
             </a:fld>
             <a:endParaRPr lang="en-US"/>
           </a:p>
@@ -1963,7 +1968,7 @@
           <a:p>
             <a:fld id="{6EC124F2-B461-4993-8DAA-E392A8E68310}" type="datetimeFigureOut">
               <a:rPr lang="en-US" smtClean="0"/>
-              <a:t>6/5/2026</a:t>
+              <a:t>6/8/2026</a:t>
             </a:fld>
             <a:endParaRPr lang="en-US"/>
           </a:p>
@@ -2076,7 +2081,7 @@
           <a:p>
             <a:fld id="{6EC124F2-B461-4993-8DAA-E392A8E68310}" type="datetimeFigureOut">
               <a:rPr lang="en-US" smtClean="0"/>
-              <a:t>6/5/2026</a:t>
+              <a:t>6/8/2026</a:t>
             </a:fld>
             <a:endParaRPr lang="en-US"/>
           </a:p>
@@ -2387,7 +2392,7 @@
           <a:p>
             <a:fld id="{6EC124F2-B461-4993-8DAA-E392A8E68310}" type="datetimeFigureOut">
               <a:rPr lang="en-US" smtClean="0"/>
-              <a:t>6/5/2026</a:t>
+              <a:t>6/8/2026</a:t>
             </a:fld>
             <a:endParaRPr lang="en-US"/>
           </a:p>
@@ -2675,7 +2680,7 @@
           <a:p>
             <a:fld id="{6EC124F2-B461-4993-8DAA-E392A8E68310}" type="datetimeFigureOut">
               <a:rPr lang="en-US" smtClean="0"/>
-              <a:t>6/5/2026</a:t>
+              <a:t>6/8/2026</a:t>
             </a:fld>
             <a:endParaRPr lang="en-US"/>
           </a:p>
@@ -2916,7 +2921,7 @@
           <a:p>
             <a:fld id="{6EC124F2-B461-4993-8DAA-E392A8E68310}" type="datetimeFigureOut">
               <a:rPr lang="en-US" smtClean="0"/>
-              <a:t>6/5/2026</a:t>
+              <a:t>6/8/2026</a:t>
             </a:fld>
             <a:endParaRPr lang="en-US"/>
           </a:p>
@@ -3355,14 +3360,25 @@
             <p:ph type="ctrTitle"/>
           </p:nvPr>
         </p:nvSpPr>
-        <p:spPr/>
-        <p:txBody>
-          <a:bodyPr/>
-          <a:lstStyle/>
-          <a:p>
+        <p:spPr>
+          <a:xfrm>
+            <a:off x="1445342" y="188299"/>
+            <a:ext cx="9144000" cy="1748656"/>
+          </a:xfrm>
+        </p:spPr>
+        <p:txBody>
+          <a:bodyPr>
+            <a:normAutofit/>
+          </a:bodyPr>
+          <a:lstStyle/>
+          <a:p>
+            <a:r>
+              <a:rPr lang="en-US" dirty="0" err="1"/>
+              <a:t>Automatisation</a:t>
+            </a:r>
             <a:r>
               <a:rPr lang="en-US" dirty="0"/>
-              <a:t>Healthcare IAM Lifecycle Automation</a:t>
+              <a:t> du Cycle de Vie des Identités (IAM)</a:t>
             </a:r>
           </a:p>
         </p:txBody>
@@ -3383,11 +3399,81 @@
             <p:ph type="subTitle" idx="1"/>
           </p:nvPr>
         </p:nvSpPr>
-        <p:spPr/>
-        <p:txBody>
-          <a:bodyPr/>
-          <a:lstStyle/>
-          <a:p>
+        <p:spPr>
+          <a:xfrm>
+            <a:off x="1524000" y="2143433"/>
+            <a:ext cx="9144000" cy="4237702"/>
+          </a:xfrm>
+        </p:spPr>
+        <p:txBody>
+          <a:bodyPr>
+            <a:normAutofit fontScale="92500" lnSpcReduction="20000"/>
+          </a:bodyPr>
+          <a:lstStyle/>
+          <a:p>
+            <a:pPr algn="l"/>
+            <a:r>
+              <a:rPr lang="fr-FR" dirty="0"/>
+              <a:t>Automatisation du Cycle de Vie des Identités (IAM)</a:t>
+            </a:r>
+          </a:p>
+          <a:p>
+            <a:pPr algn="l"/>
+            <a:endParaRPr lang="fr-FR" dirty="0"/>
+          </a:p>
+          <a:p>
+            <a:pPr algn="l"/>
+            <a:r>
+              <a:rPr lang="fr-FR" dirty="0"/>
+              <a:t>Preuve de Concept (PoC)</a:t>
+            </a:r>
+          </a:p>
+          <a:p>
+            <a:pPr algn="l"/>
+            <a:endParaRPr lang="fr-FR" dirty="0"/>
+          </a:p>
+          <a:p>
+            <a:pPr algn="l"/>
+            <a:r>
+              <a:rPr lang="fr-FR" dirty="0"/>
+              <a:t>Secteur de la Santé</a:t>
+            </a:r>
+          </a:p>
+          <a:p>
+            <a:pPr algn="l"/>
+            <a:endParaRPr lang="fr-FR" dirty="0"/>
+          </a:p>
+          <a:p>
+            <a:pPr algn="l"/>
+            <a:r>
+              <a:rPr lang="fr-FR" dirty="0"/>
+              <a:t>Gestion des Identités et des Accès</a:t>
+            </a:r>
+          </a:p>
+          <a:p>
+            <a:pPr algn="l"/>
+            <a:r>
+              <a:rPr lang="fr-FR" dirty="0"/>
+              <a:t>Joiner • Mover • Leaver • RBAC • Gouvernance</a:t>
+            </a:r>
+          </a:p>
+          <a:p>
+            <a:pPr algn="l"/>
+            <a:endParaRPr lang="fr-FR" dirty="0"/>
+          </a:p>
+          <a:p>
+            <a:pPr algn="l"/>
+            <a:r>
+              <a:rPr lang="fr-FR" dirty="0"/>
+              <a:t>Présenté par</a:t>
+            </a:r>
+          </a:p>
+          <a:p>
+            <a:pPr algn="l"/>
+            <a:r>
+              <a:rPr lang="fr-FR" dirty="0"/>
+              <a:t>Gervais Francis Kangaya</a:t>
+            </a:r>
             <a:endParaRPr lang="en-US" dirty="0"/>
           </a:p>
         </p:txBody>
@@ -3408,6 +3494,14 @@
 <file path=ppt/slides/slide10.xml><?xml version="1.0" encoding="utf-8"?>
 <p:sld xmlns:a="http://schemas.openxmlformats.org/drawingml/2006/main" xmlns:r="http://schemas.openxmlformats.org/officeDocument/2006/relationships" xmlns:p="http://schemas.openxmlformats.org/presentationml/2006/main">
   <p:cSld>
+    <p:bg>
+      <p:bgPr>
+        <a:solidFill>
+          <a:schemeClr val="bg1"/>
+        </a:solidFill>
+        <a:effectLst/>
+      </p:bgPr>
+    </p:bg>
     <p:spTree>
       <p:nvGrpSpPr>
         <p:cNvPr id="1" name="">
@@ -3428,6 +3522,309 @@
           <a:chExt cx="0" cy="0"/>
         </a:xfrm>
       </p:grpSpPr>
+      <p:sp useBgFill="1">
+        <p:nvSpPr>
+          <p:cNvPr id="10" name="Rectangle 9">
+            <a:extLst>
+              <a:ext uri="{FF2B5EF4-FFF2-40B4-BE49-F238E27FC236}">
+                <a16:creationId xmlns:a16="http://schemas.microsoft.com/office/drawing/2014/main" id="{A8384FB5-9ADC-4DDC-881B-597D56F5B15D}"/>
+              </a:ext>
+              <a:ext uri="{C183D7F6-B498-43B3-948B-1728B52AA6E4}">
+                <adec:decorative xmlns:adec="http://schemas.microsoft.com/office/drawing/2017/decorative" val="1"/>
+              </a:ext>
+            </a:extLst>
+          </p:cNvPr>
+          <p:cNvSpPr>
+            <a:spLocks noGrp="1" noRot="1" noChangeAspect="1" noMove="1" noResize="1" noEditPoints="1" noAdjustHandles="1" noChangeArrowheads="1" noChangeShapeType="1" noTextEdit="1"/>
+          </p:cNvSpPr>
+          <p:nvPr>
+            <p:extLst>
+              <p:ext uri="{386F3935-93C4-4BCD-93E2-E3B085C9AB24}">
+                <p16:designElem xmlns:p16="http://schemas.microsoft.com/office/powerpoint/2015/main" val="1"/>
+              </p:ext>
+            </p:extLst>
+          </p:nvPr>
+        </p:nvSpPr>
+        <p:spPr>
+          <a:xfrm>
+            <a:off x="0" y="0"/>
+            <a:ext cx="12192000" cy="6858000"/>
+          </a:xfrm>
+          <a:prstGeom prst="rect">
+            <a:avLst/>
+          </a:prstGeom>
+          <a:ln w="12700" cap="flat" cmpd="sng" algn="ctr">
+            <a:noFill/>
+            <a:prstDash val="solid"/>
+            <a:miter lim="800000"/>
+          </a:ln>
+          <a:effectLst/>
+          <a:extLst>
+            <a:ext uri="{91240B29-F687-4F45-9708-019B960494DF}">
+              <a14:hiddenLine xmlns:a14="http://schemas.microsoft.com/office/drawing/2010/main" w="12700" cap="flat" cmpd="sng" algn="ctr">
+                <a:solidFill>
+                  <a:schemeClr val="accent1">
+                    <a:shade val="50000"/>
+                  </a:schemeClr>
+                </a:solidFill>
+                <a:prstDash val="solid"/>
+                <a:miter lim="800000"/>
+              </a14:hiddenLine>
+            </a:ext>
+          </a:extLst>
+        </p:spPr>
+        <p:style>
+          <a:lnRef idx="2">
+            <a:schemeClr val="accent1">
+              <a:shade val="50000"/>
+            </a:schemeClr>
+          </a:lnRef>
+          <a:fillRef idx="1">
+            <a:schemeClr val="accent1"/>
+          </a:fillRef>
+          <a:effectRef idx="0">
+            <a:schemeClr val="accent1"/>
+          </a:effectRef>
+          <a:fontRef idx="minor">
+            <a:schemeClr val="lt1"/>
+          </a:fontRef>
+        </p:style>
+        <p:txBody>
+          <a:bodyPr rtlCol="0" anchor="ctr"/>
+          <a:lstStyle/>
+          <a:p>
+            <a:pPr algn="ctr"/>
+            <a:endParaRPr lang="en-US"/>
+          </a:p>
+        </p:txBody>
+      </p:sp>
+      <p:sp>
+        <p:nvSpPr>
+          <p:cNvPr id="12" name="Rectangle 11">
+            <a:extLst>
+              <a:ext uri="{FF2B5EF4-FFF2-40B4-BE49-F238E27FC236}">
+                <a16:creationId xmlns:a16="http://schemas.microsoft.com/office/drawing/2014/main" id="{1199E1B1-A8C0-4FE8-A5A8-1CB41D69F857}"/>
+              </a:ext>
+              <a:ext uri="{C183D7F6-B498-43B3-948B-1728B52AA6E4}">
+                <adec:decorative xmlns:adec="http://schemas.microsoft.com/office/drawing/2017/decorative" val="1"/>
+              </a:ext>
+            </a:extLst>
+          </p:cNvPr>
+          <p:cNvSpPr>
+            <a:spLocks noGrp="1" noRot="1" noChangeAspect="1" noMove="1" noResize="1" noEditPoints="1" noAdjustHandles="1" noChangeArrowheads="1" noChangeShapeType="1" noTextEdit="1"/>
+          </p:cNvSpPr>
+          <p:nvPr>
+            <p:extLst>
+              <p:ext uri="{386F3935-93C4-4BCD-93E2-E3B085C9AB24}">
+                <p16:designElem xmlns:p16="http://schemas.microsoft.com/office/powerpoint/2015/main" val="1"/>
+              </p:ext>
+            </p:extLst>
+          </p:nvPr>
+        </p:nvSpPr>
+        <p:spPr>
+          <a:xfrm rot="10800000" flipH="1">
+            <a:off x="2" y="0"/>
+            <a:ext cx="12191998" cy="1575955"/>
+          </a:xfrm>
+          <a:prstGeom prst="rect">
+            <a:avLst/>
+          </a:prstGeom>
+          <a:gradFill>
+            <a:gsLst>
+              <a:gs pos="0">
+                <a:srgbClr val="000000">
+                  <a:alpha val="96000"/>
+                </a:srgbClr>
+              </a:gs>
+              <a:gs pos="100000">
+                <a:schemeClr val="accent1">
+                  <a:lumMod val="75000"/>
+                </a:schemeClr>
+              </a:gs>
+            </a:gsLst>
+            <a:lin ang="6000000" scaled="0"/>
+          </a:gradFill>
+          <a:ln>
+            <a:noFill/>
+          </a:ln>
+        </p:spPr>
+        <p:style>
+          <a:lnRef idx="2">
+            <a:schemeClr val="accent1">
+              <a:shade val="50000"/>
+            </a:schemeClr>
+          </a:lnRef>
+          <a:fillRef idx="1">
+            <a:schemeClr val="accent1"/>
+          </a:fillRef>
+          <a:effectRef idx="0">
+            <a:schemeClr val="accent1"/>
+          </a:effectRef>
+          <a:fontRef idx="minor">
+            <a:schemeClr val="lt1"/>
+          </a:fontRef>
+        </p:style>
+        <p:txBody>
+          <a:bodyPr rtlCol="0" anchor="ctr"/>
+          <a:lstStyle/>
+          <a:p>
+            <a:pPr algn="ctr"/>
+            <a:endParaRPr lang="en-US"/>
+          </a:p>
+        </p:txBody>
+      </p:sp>
+      <p:sp>
+        <p:nvSpPr>
+          <p:cNvPr id="14" name="Rectangle 13">
+            <a:extLst>
+              <a:ext uri="{FF2B5EF4-FFF2-40B4-BE49-F238E27FC236}">
+                <a16:creationId xmlns:a16="http://schemas.microsoft.com/office/drawing/2014/main" id="{84A8DE83-DE75-4B41-9DB4-A7EC0B0DEC0B}"/>
+              </a:ext>
+              <a:ext uri="{C183D7F6-B498-43B3-948B-1728B52AA6E4}">
+                <adec:decorative xmlns:adec="http://schemas.microsoft.com/office/drawing/2017/decorative" val="1"/>
+              </a:ext>
+            </a:extLst>
+          </p:cNvPr>
+          <p:cNvSpPr>
+            <a:spLocks noGrp="1" noRot="1" noChangeAspect="1" noMove="1" noResize="1" noEditPoints="1" noAdjustHandles="1" noChangeArrowheads="1" noChangeShapeType="1" noTextEdit="1"/>
+          </p:cNvSpPr>
+          <p:nvPr>
+            <p:extLst>
+              <p:ext uri="{386F3935-93C4-4BCD-93E2-E3B085C9AB24}">
+                <p16:designElem xmlns:p16="http://schemas.microsoft.com/office/powerpoint/2015/main" val="1"/>
+              </p:ext>
+            </p:extLst>
+          </p:nvPr>
+        </p:nvSpPr>
+        <p:spPr>
+          <a:xfrm>
+            <a:off x="0" y="0"/>
+            <a:ext cx="8128856" cy="1575461"/>
+          </a:xfrm>
+          <a:prstGeom prst="rect">
+            <a:avLst/>
+          </a:prstGeom>
+          <a:gradFill>
+            <a:gsLst>
+              <a:gs pos="0">
+                <a:schemeClr val="accent1">
+                  <a:alpha val="41000"/>
+                </a:schemeClr>
+              </a:gs>
+              <a:gs pos="74000">
+                <a:schemeClr val="accent1">
+                  <a:lumMod val="60000"/>
+                  <a:lumOff val="40000"/>
+                  <a:alpha val="0"/>
+                </a:schemeClr>
+              </a:gs>
+            </a:gsLst>
+            <a:lin ang="8400000" scaled="0"/>
+          </a:gradFill>
+          <a:ln>
+            <a:noFill/>
+          </a:ln>
+        </p:spPr>
+        <p:style>
+          <a:lnRef idx="2">
+            <a:schemeClr val="accent1">
+              <a:shade val="50000"/>
+            </a:schemeClr>
+          </a:lnRef>
+          <a:fillRef idx="1">
+            <a:schemeClr val="accent1"/>
+          </a:fillRef>
+          <a:effectRef idx="0">
+            <a:schemeClr val="accent1"/>
+          </a:effectRef>
+          <a:fontRef idx="minor">
+            <a:schemeClr val="lt1"/>
+          </a:fontRef>
+        </p:style>
+        <p:txBody>
+          <a:bodyPr rtlCol="0" anchor="ctr"/>
+          <a:lstStyle/>
+          <a:p>
+            <a:pPr algn="ctr"/>
+            <a:endParaRPr lang="en-US"/>
+          </a:p>
+        </p:txBody>
+      </p:sp>
+      <p:sp>
+        <p:nvSpPr>
+          <p:cNvPr id="16" name="Rectangle 15">
+            <a:extLst>
+              <a:ext uri="{FF2B5EF4-FFF2-40B4-BE49-F238E27FC236}">
+                <a16:creationId xmlns:a16="http://schemas.microsoft.com/office/drawing/2014/main" id="{A7009A0A-BEF5-4EAC-AF15-E4F9F002E239}"/>
+              </a:ext>
+              <a:ext uri="{C183D7F6-B498-43B3-948B-1728B52AA6E4}">
+                <adec:decorative xmlns:adec="http://schemas.microsoft.com/office/drawing/2017/decorative" val="1"/>
+              </a:ext>
+            </a:extLst>
+          </p:cNvPr>
+          <p:cNvSpPr>
+            <a:spLocks noGrp="1" noRot="1" noChangeAspect="1" noMove="1" noResize="1" noEditPoints="1" noAdjustHandles="1" noChangeArrowheads="1" noChangeShapeType="1" noTextEdit="1"/>
+          </p:cNvSpPr>
+          <p:nvPr>
+            <p:extLst>
+              <p:ext uri="{386F3935-93C4-4BCD-93E2-E3B085C9AB24}">
+                <p16:designElem xmlns:p16="http://schemas.microsoft.com/office/powerpoint/2015/main" val="1"/>
+              </p:ext>
+            </p:extLst>
+          </p:nvPr>
+        </p:nvSpPr>
+        <p:spPr>
+          <a:xfrm flipH="1">
+            <a:off x="-3" y="-1"/>
+            <a:ext cx="12192002" cy="1574311"/>
+          </a:xfrm>
+          <a:prstGeom prst="rect">
+            <a:avLst/>
+          </a:prstGeom>
+          <a:gradFill>
+            <a:gsLst>
+              <a:gs pos="0">
+                <a:srgbClr val="000000">
+                  <a:alpha val="63000"/>
+                </a:srgbClr>
+              </a:gs>
+              <a:gs pos="78000">
+                <a:schemeClr val="accent1">
+                  <a:alpha val="15000"/>
+                </a:schemeClr>
+              </a:gs>
+            </a:gsLst>
+            <a:lin ang="15600000" scaled="0"/>
+          </a:gradFill>
+          <a:ln>
+            <a:noFill/>
+          </a:ln>
+        </p:spPr>
+        <p:style>
+          <a:lnRef idx="2">
+            <a:schemeClr val="accent1">
+              <a:shade val="50000"/>
+            </a:schemeClr>
+          </a:lnRef>
+          <a:fillRef idx="1">
+            <a:schemeClr val="accent1"/>
+          </a:fillRef>
+          <a:effectRef idx="0">
+            <a:schemeClr val="accent1"/>
+          </a:effectRef>
+          <a:fontRef idx="minor">
+            <a:schemeClr val="lt1"/>
+          </a:fontRef>
+        </p:style>
+        <p:txBody>
+          <a:bodyPr rtlCol="0" anchor="ctr"/>
+          <a:lstStyle/>
+          <a:p>
+            <a:pPr algn="ctr"/>
+            <a:endParaRPr lang="en-US"/>
+          </a:p>
+        </p:txBody>
+      </p:sp>
       <p:sp>
         <p:nvSpPr>
           <p:cNvPr id="2" name="Title 1">
@@ -3444,13 +3841,25 @@
             <p:ph type="ctrTitle"/>
           </p:nvPr>
         </p:nvSpPr>
-        <p:spPr/>
-        <p:txBody>
-          <a:bodyPr/>
-          <a:lstStyle/>
-          <a:p>
-            <a:r>
-              <a:rPr lang="en-US" dirty="0"/>
+        <p:spPr>
+          <a:xfrm>
+            <a:off x="699713" y="248038"/>
+            <a:ext cx="7063721" cy="1159200"/>
+          </a:xfrm>
+        </p:spPr>
+        <p:txBody>
+          <a:bodyPr anchor="ctr">
+            <a:normAutofit/>
+          </a:bodyPr>
+          <a:lstStyle/>
+          <a:p>
+            <a:pPr algn="l"/>
+            <a:r>
+              <a:rPr lang="en-US" sz="4000">
+                <a:solidFill>
+                  <a:srgbClr val="FFFFFF"/>
+                </a:solidFill>
+              </a:rPr>
               <a:t>Audit &amp; Reporting</a:t>
             </a:r>
           </a:p>
@@ -3472,15 +3881,57 @@
             <p:ph type="subTitle" idx="1"/>
           </p:nvPr>
         </p:nvSpPr>
-        <p:spPr/>
-        <p:txBody>
-          <a:bodyPr/>
-          <a:lstStyle/>
-          <a:p>
-            <a:endParaRPr lang="en-US"/>
-          </a:p>
-        </p:txBody>
-      </p:sp>
+        <p:spPr>
+          <a:xfrm>
+            <a:off x="8572499" y="390832"/>
+            <a:ext cx="3233585" cy="873612"/>
+          </a:xfrm>
+        </p:spPr>
+        <p:txBody>
+          <a:bodyPr anchor="ctr">
+            <a:normAutofit/>
+          </a:bodyPr>
+          <a:lstStyle/>
+          <a:p>
+            <a:pPr algn="l"/>
+            <a:endParaRPr lang="en-US" sz="2000">
+              <a:solidFill>
+                <a:srgbClr val="FFFFFF"/>
+              </a:solidFill>
+            </a:endParaRPr>
+          </a:p>
+        </p:txBody>
+      </p:sp>
+      <p:pic>
+        <p:nvPicPr>
+          <p:cNvPr id="5" name="Picture 4">
+            <a:extLst>
+              <a:ext uri="{FF2B5EF4-FFF2-40B4-BE49-F238E27FC236}">
+                <a16:creationId xmlns:a16="http://schemas.microsoft.com/office/drawing/2014/main" id="{971B3BF0-195A-30E3-FD0F-E3C41C77E94D}"/>
+              </a:ext>
+            </a:extLst>
+          </p:cNvPr>
+          <p:cNvPicPr>
+            <a:picLocks noChangeAspect="1"/>
+          </p:cNvPicPr>
+          <p:nvPr/>
+        </p:nvPicPr>
+        <p:blipFill>
+          <a:blip r:embed="rId2"/>
+          <a:stretch>
+            <a:fillRect/>
+          </a:stretch>
+        </p:blipFill>
+        <p:spPr>
+          <a:xfrm>
+            <a:off x="619432" y="1655276"/>
+            <a:ext cx="11186652" cy="4954686"/>
+          </a:xfrm>
+          <a:prstGeom prst="rect">
+            <a:avLst/>
+          </a:prstGeom>
+        </p:spPr>
+      </p:pic>
     </p:spTree>
     <p:extLst>
       <p:ext uri="{BB962C8B-B14F-4D97-AF65-F5344CB8AC3E}">
@@ -3497,6 +3948,14 @@
 <file path=ppt/slides/slide11.xml><?xml version="1.0" encoding="utf-8"?>
 <p:sld xmlns:a="http://schemas.openxmlformats.org/drawingml/2006/main" xmlns:r="http://schemas.openxmlformats.org/officeDocument/2006/relationships" xmlns:p="http://schemas.openxmlformats.org/presentationml/2006/main">
   <p:cSld>
+    <p:bg>
+      <p:bgPr>
+        <a:solidFill>
+          <a:schemeClr val="bg1"/>
+        </a:solidFill>
+        <a:effectLst/>
+      </p:bgPr>
+    </p:bg>
     <p:spTree>
       <p:nvGrpSpPr>
         <p:cNvPr id="1" name="">
@@ -3517,6 +3976,479 @@
           <a:chExt cx="0" cy="0"/>
         </a:xfrm>
       </p:grpSpPr>
+      <p:sp useBgFill="1">
+        <p:nvSpPr>
+          <p:cNvPr id="10" name="Rectangle 9">
+            <a:extLst>
+              <a:ext uri="{FF2B5EF4-FFF2-40B4-BE49-F238E27FC236}">
+                <a16:creationId xmlns:a16="http://schemas.microsoft.com/office/drawing/2014/main" id="{A8384FB5-9ADC-4DDC-881B-597D56F5B15D}"/>
+              </a:ext>
+              <a:ext uri="{C183D7F6-B498-43B3-948B-1728B52AA6E4}">
+                <adec:decorative xmlns:adec="http://schemas.microsoft.com/office/drawing/2017/decorative" val="1"/>
+              </a:ext>
+            </a:extLst>
+          </p:cNvPr>
+          <p:cNvSpPr>
+            <a:spLocks noGrp="1" noRot="1" noChangeAspect="1" noMove="1" noResize="1" noEditPoints="1" noAdjustHandles="1" noChangeArrowheads="1" noChangeShapeType="1" noTextEdit="1"/>
+          </p:cNvSpPr>
+          <p:nvPr>
+            <p:extLst>
+              <p:ext uri="{386F3935-93C4-4BCD-93E2-E3B085C9AB24}">
+                <p16:designElem xmlns:p16="http://schemas.microsoft.com/office/powerpoint/2015/main" val="1"/>
+              </p:ext>
+            </p:extLst>
+          </p:nvPr>
+        </p:nvSpPr>
+        <p:spPr>
+          <a:xfrm>
+            <a:off x="0" y="0"/>
+            <a:ext cx="12192000" cy="6858000"/>
+          </a:xfrm>
+          <a:prstGeom prst="rect">
+            <a:avLst/>
+          </a:prstGeom>
+          <a:ln w="12700" cap="flat" cmpd="sng" algn="ctr">
+            <a:noFill/>
+            <a:prstDash val="solid"/>
+            <a:miter lim="800000"/>
+          </a:ln>
+          <a:effectLst/>
+          <a:extLst>
+            <a:ext uri="{91240B29-F687-4F45-9708-019B960494DF}">
+              <a14:hiddenLine xmlns:a14="http://schemas.microsoft.com/office/drawing/2010/main" w="12700" cap="flat" cmpd="sng" algn="ctr">
+                <a:solidFill>
+                  <a:schemeClr val="accent1">
+                    <a:shade val="50000"/>
+                  </a:schemeClr>
+                </a:solidFill>
+                <a:prstDash val="solid"/>
+                <a:miter lim="800000"/>
+              </a14:hiddenLine>
+            </a:ext>
+          </a:extLst>
+        </p:spPr>
+        <p:style>
+          <a:lnRef idx="2">
+            <a:schemeClr val="accent1">
+              <a:shade val="50000"/>
+            </a:schemeClr>
+          </a:lnRef>
+          <a:fillRef idx="1">
+            <a:schemeClr val="accent1"/>
+          </a:fillRef>
+          <a:effectRef idx="0">
+            <a:schemeClr val="accent1"/>
+          </a:effectRef>
+          <a:fontRef idx="minor">
+            <a:schemeClr val="lt1"/>
+          </a:fontRef>
+        </p:style>
+        <p:txBody>
+          <a:bodyPr rtlCol="0" anchor="ctr"/>
+          <a:lstStyle/>
+          <a:p>
+            <a:pPr algn="ctr"/>
+            <a:endParaRPr lang="en-US"/>
+          </a:p>
+        </p:txBody>
+      </p:sp>
+      <p:sp>
+        <p:nvSpPr>
+          <p:cNvPr id="12" name="Rectangle 11">
+            <a:extLst>
+              <a:ext uri="{FF2B5EF4-FFF2-40B4-BE49-F238E27FC236}">
+                <a16:creationId xmlns:a16="http://schemas.microsoft.com/office/drawing/2014/main" id="{91E5A9A7-95C6-4F4F-B00E-C82E07FE62EF}"/>
+              </a:ext>
+              <a:ext uri="{C183D7F6-B498-43B3-948B-1728B52AA6E4}">
+                <adec:decorative xmlns:adec="http://schemas.microsoft.com/office/drawing/2017/decorative" val="1"/>
+              </a:ext>
+            </a:extLst>
+          </p:cNvPr>
+          <p:cNvSpPr>
+            <a:spLocks noGrp="1" noRot="1" noChangeAspect="1" noMove="1" noResize="1" noEditPoints="1" noAdjustHandles="1" noChangeArrowheads="1" noChangeShapeType="1" noTextEdit="1"/>
+          </p:cNvSpPr>
+          <p:nvPr>
+            <p:extLst>
+              <p:ext uri="{386F3935-93C4-4BCD-93E2-E3B085C9AB24}">
+                <p16:designElem xmlns:p16="http://schemas.microsoft.com/office/powerpoint/2015/main" val="1"/>
+              </p:ext>
+            </p:extLst>
+          </p:nvPr>
+        </p:nvSpPr>
+        <p:spPr>
+          <a:xfrm rot="5400000" flipH="1">
+            <a:off x="-1417539" y="1417538"/>
+            <a:ext cx="6875818" cy="4040744"/>
+          </a:xfrm>
+          <a:prstGeom prst="rect">
+            <a:avLst/>
+          </a:prstGeom>
+          <a:gradFill>
+            <a:gsLst>
+              <a:gs pos="0">
+                <a:srgbClr val="000000"/>
+              </a:gs>
+              <a:gs pos="100000">
+                <a:schemeClr val="accent1">
+                  <a:lumMod val="75000"/>
+                </a:schemeClr>
+              </a:gs>
+            </a:gsLst>
+            <a:lin ang="18600000" scaled="0"/>
+          </a:gradFill>
+          <a:ln>
+            <a:noFill/>
+          </a:ln>
+        </p:spPr>
+        <p:style>
+          <a:lnRef idx="2">
+            <a:schemeClr val="accent1">
+              <a:shade val="50000"/>
+            </a:schemeClr>
+          </a:lnRef>
+          <a:fillRef idx="1">
+            <a:schemeClr val="accent1"/>
+          </a:fillRef>
+          <a:effectRef idx="0">
+            <a:schemeClr val="accent1"/>
+          </a:effectRef>
+          <a:fontRef idx="minor">
+            <a:schemeClr val="lt1"/>
+          </a:fontRef>
+        </p:style>
+        <p:txBody>
+          <a:bodyPr rtlCol="0" anchor="ctr"/>
+          <a:lstStyle/>
+          <a:p>
+            <a:pPr algn="ctr"/>
+            <a:endParaRPr lang="en-US" dirty="0"/>
+          </a:p>
+        </p:txBody>
+      </p:sp>
+      <p:sp>
+        <p:nvSpPr>
+          <p:cNvPr id="14" name="Rectangle 13">
+            <a:extLst>
+              <a:ext uri="{FF2B5EF4-FFF2-40B4-BE49-F238E27FC236}">
+                <a16:creationId xmlns:a16="http://schemas.microsoft.com/office/drawing/2014/main" id="{D07DD2DE-F619-49DD-B5E7-03A290FF4ED1}"/>
+              </a:ext>
+              <a:ext uri="{C183D7F6-B498-43B3-948B-1728B52AA6E4}">
+                <adec:decorative xmlns:adec="http://schemas.microsoft.com/office/drawing/2017/decorative" val="1"/>
+              </a:ext>
+            </a:extLst>
+          </p:cNvPr>
+          <p:cNvSpPr>
+            <a:spLocks noGrp="1" noRot="1" noChangeAspect="1" noMove="1" noResize="1" noEditPoints="1" noAdjustHandles="1" noChangeArrowheads="1" noChangeShapeType="1" noTextEdit="1"/>
+          </p:cNvSpPr>
+          <p:nvPr>
+            <p:extLst>
+              <p:ext uri="{386F3935-93C4-4BCD-93E2-E3B085C9AB24}">
+                <p16:designElem xmlns:p16="http://schemas.microsoft.com/office/powerpoint/2015/main" val="1"/>
+              </p:ext>
+            </p:extLst>
+          </p:nvPr>
+        </p:nvSpPr>
+        <p:spPr>
+          <a:xfrm rot="16200000">
+            <a:off x="-158495" y="2660473"/>
+            <a:ext cx="4355594" cy="4038603"/>
+          </a:xfrm>
+          <a:prstGeom prst="rect">
+            <a:avLst/>
+          </a:prstGeom>
+          <a:gradFill>
+            <a:gsLst>
+              <a:gs pos="0">
+                <a:schemeClr val="accent1">
+                  <a:alpha val="50000"/>
+                </a:schemeClr>
+              </a:gs>
+              <a:gs pos="100000">
+                <a:schemeClr val="accent1">
+                  <a:lumMod val="50000"/>
+                  <a:alpha val="0"/>
+                </a:schemeClr>
+              </a:gs>
+            </a:gsLst>
+            <a:lin ang="11400000" scaled="0"/>
+          </a:gradFill>
+          <a:ln>
+            <a:noFill/>
+          </a:ln>
+        </p:spPr>
+        <p:style>
+          <a:lnRef idx="2">
+            <a:schemeClr val="accent1">
+              <a:shade val="50000"/>
+            </a:schemeClr>
+          </a:lnRef>
+          <a:fillRef idx="1">
+            <a:schemeClr val="accent1"/>
+          </a:fillRef>
+          <a:effectRef idx="0">
+            <a:schemeClr val="accent1"/>
+          </a:effectRef>
+          <a:fontRef idx="minor">
+            <a:schemeClr val="lt1"/>
+          </a:fontRef>
+        </p:style>
+        <p:txBody>
+          <a:bodyPr rtlCol="0" anchor="ctr"/>
+          <a:lstStyle/>
+          <a:p>
+            <a:pPr algn="ctr"/>
+            <a:endParaRPr lang="en-US"/>
+          </a:p>
+        </p:txBody>
+      </p:sp>
+      <p:sp>
+        <p:nvSpPr>
+          <p:cNvPr id="16" name="Rectangle 15">
+            <a:extLst>
+              <a:ext uri="{FF2B5EF4-FFF2-40B4-BE49-F238E27FC236}">
+                <a16:creationId xmlns:a16="http://schemas.microsoft.com/office/drawing/2014/main" id="{85149191-5F60-4A28-AAFF-039F96B0F3EC}"/>
+              </a:ext>
+              <a:ext uri="{C183D7F6-B498-43B3-948B-1728B52AA6E4}">
+                <adec:decorative xmlns:adec="http://schemas.microsoft.com/office/drawing/2017/decorative" val="1"/>
+              </a:ext>
+            </a:extLst>
+          </p:cNvPr>
+          <p:cNvSpPr>
+            <a:spLocks noGrp="1" noRot="1" noChangeAspect="1" noMove="1" noResize="1" noEditPoints="1" noAdjustHandles="1" noChangeArrowheads="1" noChangeShapeType="1" noTextEdit="1"/>
+          </p:cNvSpPr>
+          <p:nvPr>
+            <p:extLst>
+              <p:ext uri="{386F3935-93C4-4BCD-93E2-E3B085C9AB24}">
+                <p16:designElem xmlns:p16="http://schemas.microsoft.com/office/powerpoint/2015/main" val="1"/>
+              </p:ext>
+            </p:extLst>
+          </p:nvPr>
+        </p:nvSpPr>
+        <p:spPr>
+          <a:xfrm rot="16200000" flipH="1">
+            <a:off x="-1180882" y="1638085"/>
+            <a:ext cx="6857572" cy="3581401"/>
+          </a:xfrm>
+          <a:prstGeom prst="rect">
+            <a:avLst/>
+          </a:prstGeom>
+          <a:gradFill>
+            <a:gsLst>
+              <a:gs pos="0">
+                <a:srgbClr val="000000">
+                  <a:alpha val="59000"/>
+                </a:srgbClr>
+              </a:gs>
+              <a:gs pos="69000">
+                <a:schemeClr val="accent1">
+                  <a:alpha val="0"/>
+                </a:schemeClr>
+              </a:gs>
+            </a:gsLst>
+            <a:lin ang="13200000" scaled="0"/>
+          </a:gradFill>
+          <a:ln>
+            <a:noFill/>
+          </a:ln>
+        </p:spPr>
+        <p:style>
+          <a:lnRef idx="2">
+            <a:schemeClr val="accent1">
+              <a:shade val="50000"/>
+            </a:schemeClr>
+          </a:lnRef>
+          <a:fillRef idx="1">
+            <a:schemeClr val="accent1"/>
+          </a:fillRef>
+          <a:effectRef idx="0">
+            <a:schemeClr val="accent1"/>
+          </a:effectRef>
+          <a:fontRef idx="minor">
+            <a:schemeClr val="lt1"/>
+          </a:fontRef>
+        </p:style>
+        <p:txBody>
+          <a:bodyPr rtlCol="0" anchor="ctr"/>
+          <a:lstStyle/>
+          <a:p>
+            <a:pPr algn="ctr"/>
+            <a:endParaRPr lang="en-US" dirty="0"/>
+          </a:p>
+        </p:txBody>
+      </p:sp>
+      <p:sp>
+        <p:nvSpPr>
+          <p:cNvPr id="18" name="Freeform: Shape 17">
+            <a:extLst>
+              <a:ext uri="{FF2B5EF4-FFF2-40B4-BE49-F238E27FC236}">
+                <a16:creationId xmlns:a16="http://schemas.microsoft.com/office/drawing/2014/main" id="{F8260ED5-17F7-4158-B241-D51DD4CF1B7E}"/>
+              </a:ext>
+              <a:ext uri="{C183D7F6-B498-43B3-948B-1728B52AA6E4}">
+                <adec:decorative xmlns:adec="http://schemas.microsoft.com/office/drawing/2017/decorative" val="1"/>
+              </a:ext>
+            </a:extLst>
+          </p:cNvPr>
+          <p:cNvSpPr>
+            <a:spLocks noGrp="1" noRot="1" noChangeAspect="1" noMove="1" noResize="1" noEditPoints="1" noAdjustHandles="1" noChangeArrowheads="1" noChangeShapeType="1" noTextEdit="1"/>
+          </p:cNvSpPr>
+          <p:nvPr>
+            <p:extLst>
+              <p:ext uri="{386F3935-93C4-4BCD-93E2-E3B085C9AB24}">
+                <p16:designElem xmlns:p16="http://schemas.microsoft.com/office/powerpoint/2015/main" val="1"/>
+              </p:ext>
+            </p:extLst>
+          </p:nvPr>
+        </p:nvSpPr>
+        <p:spPr>
+          <a:xfrm rot="6097846">
+            <a:off x="-747355" y="1201312"/>
+            <a:ext cx="4808302" cy="4088666"/>
+          </a:xfrm>
+          <a:custGeom>
+            <a:avLst/>
+            <a:gdLst>
+              <a:gd name="connsiteX0" fmla="*/ 48844 w 4808302"/>
+              <a:gd name="connsiteY0" fmla="*/ 2888671 h 4088666"/>
+              <a:gd name="connsiteX1" fmla="*/ 0 w 4808302"/>
+              <a:gd name="connsiteY1" fmla="*/ 2404151 h 4088666"/>
+              <a:gd name="connsiteX2" fmla="*/ 2404151 w 4808302"/>
+              <a:gd name="connsiteY2" fmla="*/ 0 h 4088666"/>
+              <a:gd name="connsiteX3" fmla="*/ 4808302 w 4808302"/>
+              <a:gd name="connsiteY3" fmla="*/ 2404151 h 4088666"/>
+              <a:gd name="connsiteX4" fmla="*/ 4700216 w 4808302"/>
+              <a:gd name="connsiteY4" fmla="*/ 3119072 h 4088666"/>
+              <a:gd name="connsiteX5" fmla="*/ 4643143 w 4808302"/>
+              <a:gd name="connsiteY5" fmla="*/ 3275009 h 4088666"/>
+              <a:gd name="connsiteX6" fmla="*/ 690093 w 4808302"/>
+              <a:gd name="connsiteY6" fmla="*/ 4088666 h 4088666"/>
+              <a:gd name="connsiteX7" fmla="*/ 548991 w 4808302"/>
+              <a:gd name="connsiteY7" fmla="*/ 3933414 h 4088666"/>
+              <a:gd name="connsiteX8" fmla="*/ 48844 w 4808302"/>
+              <a:gd name="connsiteY8" fmla="*/ 2888671 h 4088666"/>
+            </a:gdLst>
+            <a:ahLst/>
+            <a:cxnLst>
+              <a:cxn ang="0">
+                <a:pos x="connsiteX0" y="connsiteY0"/>
+              </a:cxn>
+              <a:cxn ang="0">
+                <a:pos x="connsiteX1" y="connsiteY1"/>
+              </a:cxn>
+              <a:cxn ang="0">
+                <a:pos x="connsiteX2" y="connsiteY2"/>
+              </a:cxn>
+              <a:cxn ang="0">
+                <a:pos x="connsiteX3" y="connsiteY3"/>
+              </a:cxn>
+              <a:cxn ang="0">
+                <a:pos x="connsiteX4" y="connsiteY4"/>
+              </a:cxn>
+              <a:cxn ang="0">
+                <a:pos x="connsiteX5" y="connsiteY5"/>
+              </a:cxn>
+              <a:cxn ang="0">
+                <a:pos x="connsiteX6" y="connsiteY6"/>
+              </a:cxn>
+              <a:cxn ang="0">
+                <a:pos x="connsiteX7" y="connsiteY7"/>
+              </a:cxn>
+              <a:cxn ang="0">
+                <a:pos x="connsiteX8" y="connsiteY8"/>
+              </a:cxn>
+            </a:cxnLst>
+            <a:rect l="l" t="t" r="r" b="b"/>
+            <a:pathLst>
+              <a:path w="4808302" h="4088666">
+                <a:moveTo>
+                  <a:pt x="48844" y="2888671"/>
+                </a:moveTo>
+                <a:cubicBezTo>
+                  <a:pt x="16818" y="2732167"/>
+                  <a:pt x="0" y="2570123"/>
+                  <a:pt x="0" y="2404151"/>
+                </a:cubicBezTo>
+                <a:cubicBezTo>
+                  <a:pt x="0" y="1076375"/>
+                  <a:pt x="1076375" y="0"/>
+                  <a:pt x="2404151" y="0"/>
+                </a:cubicBezTo>
+                <a:cubicBezTo>
+                  <a:pt x="3731927" y="0"/>
+                  <a:pt x="4808302" y="1076375"/>
+                  <a:pt x="4808302" y="2404151"/>
+                </a:cubicBezTo>
+                <a:cubicBezTo>
+                  <a:pt x="4808302" y="2653109"/>
+                  <a:pt x="4770461" y="2893229"/>
+                  <a:pt x="4700216" y="3119072"/>
+                </a:cubicBezTo>
+                <a:lnTo>
+                  <a:pt x="4643143" y="3275009"/>
+                </a:lnTo>
+                <a:lnTo>
+                  <a:pt x="690093" y="4088666"/>
+                </a:lnTo>
+                <a:lnTo>
+                  <a:pt x="548991" y="3933414"/>
+                </a:lnTo>
+                <a:cubicBezTo>
+                  <a:pt x="304015" y="3636572"/>
+                  <a:pt x="128908" y="3279932"/>
+                  <a:pt x="48844" y="2888671"/>
+                </a:cubicBezTo>
+                <a:close/>
+              </a:path>
+            </a:pathLst>
+          </a:custGeom>
+          <a:gradFill>
+            <a:gsLst>
+              <a:gs pos="39000">
+                <a:schemeClr val="accent1">
+                  <a:lumMod val="60000"/>
+                  <a:lumOff val="40000"/>
+                  <a:alpha val="0"/>
+                </a:schemeClr>
+              </a:gs>
+              <a:gs pos="100000">
+                <a:schemeClr val="accent1">
+                  <a:lumMod val="75000"/>
+                  <a:alpha val="26000"/>
+                </a:schemeClr>
+              </a:gs>
+            </a:gsLst>
+            <a:lin ang="18600000" scaled="0"/>
+          </a:gradFill>
+          <a:ln>
+            <a:noFill/>
+          </a:ln>
+        </p:spPr>
+        <p:style>
+          <a:lnRef idx="2">
+            <a:schemeClr val="accent1">
+              <a:shade val="50000"/>
+            </a:schemeClr>
+          </a:lnRef>
+          <a:fillRef idx="1">
+            <a:schemeClr val="accent1"/>
+          </a:fillRef>
+          <a:effectRef idx="0">
+            <a:schemeClr val="accent1"/>
+          </a:effectRef>
+          <a:fontRef idx="minor">
+            <a:schemeClr val="lt1"/>
+          </a:fontRef>
+        </p:style>
+        <p:txBody>
+          <a:bodyPr wrap="square" rtlCol="0" anchor="ctr">
+            <a:noAutofit/>
+          </a:bodyPr>
+          <a:lstStyle/>
+          <a:p>
+            <a:pPr algn="ctr"/>
+            <a:endParaRPr lang="en-US" dirty="0"/>
+          </a:p>
+        </p:txBody>
+      </p:sp>
       <p:sp>
         <p:nvSpPr>
           <p:cNvPr id="2" name="Title 1">
@@ -3533,13 +4465,25 @@
             <p:ph type="ctrTitle"/>
           </p:nvPr>
         </p:nvSpPr>
-        <p:spPr/>
-        <p:txBody>
-          <a:bodyPr/>
-          <a:lstStyle/>
-          <a:p>
-            <a:r>
-              <a:rPr lang="en-US" dirty="0"/>
+        <p:spPr>
+          <a:xfrm>
+            <a:off x="660041" y="2767106"/>
+            <a:ext cx="2880828" cy="3071906"/>
+          </a:xfrm>
+        </p:spPr>
+        <p:txBody>
+          <a:bodyPr anchor="t">
+            <a:normAutofit/>
+          </a:bodyPr>
+          <a:lstStyle/>
+          <a:p>
+            <a:pPr algn="l"/>
+            <a:r>
+              <a:rPr lang="en-US" sz="4000">
+                <a:solidFill>
+                  <a:srgbClr val="FFFFFF"/>
+                </a:solidFill>
+              </a:rPr>
               <a:t>Future Enterprise Architecture</a:t>
             </a:r>
           </a:p>
@@ -3561,15 +4505,128 @@
             <p:ph type="subTitle" idx="1"/>
           </p:nvPr>
         </p:nvSpPr>
-        <p:spPr/>
-        <p:txBody>
-          <a:bodyPr/>
-          <a:lstStyle/>
-          <a:p>
-            <a:endParaRPr lang="en-US"/>
-          </a:p>
-        </p:txBody>
-      </p:sp>
+        <p:spPr>
+          <a:xfrm>
+            <a:off x="640586" y="4562169"/>
+            <a:ext cx="2919738" cy="2074606"/>
+          </a:xfrm>
+        </p:spPr>
+        <p:txBody>
+          <a:bodyPr anchor="b">
+            <a:normAutofit fontScale="77500" lnSpcReduction="20000"/>
+          </a:bodyPr>
+          <a:lstStyle/>
+          <a:p>
+            <a:pPr algn="l"/>
+            <a:r>
+              <a:rPr lang="fr-FR" sz="2000" dirty="0">
+                <a:solidFill>
+                  <a:srgbClr val="FFFFFF"/>
+                </a:solidFill>
+              </a:rPr>
+              <a:t>Prochaine phase du projet :</a:t>
+            </a:r>
+          </a:p>
+          <a:p>
+            <a:pPr algn="l"/>
+            <a:endParaRPr lang="fr-FR" sz="2000" dirty="0">
+              <a:solidFill>
+                <a:srgbClr val="FFFFFF"/>
+              </a:solidFill>
+            </a:endParaRPr>
+          </a:p>
+          <a:p>
+            <a:pPr algn="l"/>
+            <a:r>
+              <a:rPr lang="fr-FR" sz="2000" dirty="0">
+                <a:solidFill>
+                  <a:srgbClr val="FFFFFF"/>
+                </a:solidFill>
+              </a:rPr>
+              <a:t>• Windows Server 2022</a:t>
+            </a:r>
+          </a:p>
+          <a:p>
+            <a:pPr algn="l"/>
+            <a:r>
+              <a:rPr lang="fr-FR" sz="2000" dirty="0">
+                <a:solidFill>
+                  <a:srgbClr val="FFFFFF"/>
+                </a:solidFill>
+              </a:rPr>
+              <a:t>• Active Directory</a:t>
+            </a:r>
+          </a:p>
+          <a:p>
+            <a:pPr algn="l"/>
+            <a:r>
+              <a:rPr lang="fr-FR" sz="2000" dirty="0">
+                <a:solidFill>
+                  <a:srgbClr val="FFFFFF"/>
+                </a:solidFill>
+              </a:rPr>
+              <a:t>• Microsoft Entra ID</a:t>
+            </a:r>
+          </a:p>
+          <a:p>
+            <a:pPr algn="l"/>
+            <a:r>
+              <a:rPr lang="fr-FR" sz="2000" dirty="0">
+                <a:solidFill>
+                  <a:srgbClr val="FFFFFF"/>
+                </a:solidFill>
+              </a:rPr>
+              <a:t>• Microsoft 365</a:t>
+            </a:r>
+          </a:p>
+          <a:p>
+            <a:pPr algn="l"/>
+            <a:r>
+              <a:rPr lang="fr-FR" sz="2000" dirty="0">
+                <a:solidFill>
+                  <a:srgbClr val="FFFFFF"/>
+                </a:solidFill>
+              </a:rPr>
+              <a:t>• Intégration ITSM</a:t>
+            </a:r>
+            <a:endParaRPr lang="en-US" sz="2000" dirty="0">
+              <a:solidFill>
+                <a:srgbClr val="FFFFFF"/>
+              </a:solidFill>
+            </a:endParaRPr>
+          </a:p>
+        </p:txBody>
+      </p:sp>
+      <p:pic>
+        <p:nvPicPr>
+          <p:cNvPr id="5" name="Picture 4">
+            <a:extLst>
+              <a:ext uri="{FF2B5EF4-FFF2-40B4-BE49-F238E27FC236}">
+                <a16:creationId xmlns:a16="http://schemas.microsoft.com/office/drawing/2014/main" id="{0EE988A8-A4EF-BD17-E474-5A07167C68E2}"/>
+              </a:ext>
+            </a:extLst>
+          </p:cNvPr>
+          <p:cNvPicPr>
+            <a:picLocks noChangeAspect="1"/>
+          </p:cNvPicPr>
+          <p:nvPr/>
+        </p:nvPicPr>
+        <p:blipFill>
+          <a:blip r:embed="rId2"/>
+          <a:stretch>
+            <a:fillRect/>
+          </a:stretch>
+        </p:blipFill>
+        <p:spPr>
+          <a:xfrm>
+            <a:off x="4546877" y="467208"/>
+            <a:ext cx="7136849" cy="5923584"/>
+          </a:xfrm>
+          <a:prstGeom prst="rect">
+            <a:avLst/>
+          </a:prstGeom>
+        </p:spPr>
+      </p:pic>
     </p:spTree>
     <p:extLst>
       <p:ext uri="{BB962C8B-B14F-4D97-AF65-F5344CB8AC3E}">
@@ -3586,6 +4643,14 @@
 <file path=ppt/slides/slide12.xml><?xml version="1.0" encoding="utf-8"?>
 <p:sld xmlns:a="http://schemas.openxmlformats.org/drawingml/2006/main" xmlns:r="http://schemas.openxmlformats.org/officeDocument/2006/relationships" xmlns:p="http://schemas.openxmlformats.org/presentationml/2006/main">
   <p:cSld>
+    <p:bg>
+      <p:bgPr>
+        <a:solidFill>
+          <a:schemeClr val="bg1"/>
+        </a:solidFill>
+        <a:effectLst/>
+      </p:bgPr>
+    </p:bg>
     <p:spTree>
       <p:nvGrpSpPr>
         <p:cNvPr id="1" name="">
@@ -3606,6 +4671,479 @@
           <a:chExt cx="0" cy="0"/>
         </a:xfrm>
       </p:grpSpPr>
+      <p:sp useBgFill="1">
+        <p:nvSpPr>
+          <p:cNvPr id="10" name="Rectangle 9">
+            <a:extLst>
+              <a:ext uri="{FF2B5EF4-FFF2-40B4-BE49-F238E27FC236}">
+                <a16:creationId xmlns:a16="http://schemas.microsoft.com/office/drawing/2014/main" id="{A8384FB5-9ADC-4DDC-881B-597D56F5B15D}"/>
+              </a:ext>
+              <a:ext uri="{C183D7F6-B498-43B3-948B-1728B52AA6E4}">
+                <adec:decorative xmlns:adec="http://schemas.microsoft.com/office/drawing/2017/decorative" val="1"/>
+              </a:ext>
+            </a:extLst>
+          </p:cNvPr>
+          <p:cNvSpPr>
+            <a:spLocks noGrp="1" noRot="1" noChangeAspect="1" noMove="1" noResize="1" noEditPoints="1" noAdjustHandles="1" noChangeArrowheads="1" noChangeShapeType="1" noTextEdit="1"/>
+          </p:cNvSpPr>
+          <p:nvPr>
+            <p:extLst>
+              <p:ext uri="{386F3935-93C4-4BCD-93E2-E3B085C9AB24}">
+                <p16:designElem xmlns:p16="http://schemas.microsoft.com/office/powerpoint/2015/main" val="1"/>
+              </p:ext>
+            </p:extLst>
+          </p:nvPr>
+        </p:nvSpPr>
+        <p:spPr>
+          <a:xfrm>
+            <a:off x="0" y="0"/>
+            <a:ext cx="12192000" cy="6858000"/>
+          </a:xfrm>
+          <a:prstGeom prst="rect">
+            <a:avLst/>
+          </a:prstGeom>
+          <a:ln w="12700" cap="flat" cmpd="sng" algn="ctr">
+            <a:noFill/>
+            <a:prstDash val="solid"/>
+            <a:miter lim="800000"/>
+          </a:ln>
+          <a:effectLst/>
+          <a:extLst>
+            <a:ext uri="{91240B29-F687-4F45-9708-019B960494DF}">
+              <a14:hiddenLine xmlns:a14="http://schemas.microsoft.com/office/drawing/2010/main" w="12700" cap="flat" cmpd="sng" algn="ctr">
+                <a:solidFill>
+                  <a:schemeClr val="accent1">
+                    <a:shade val="50000"/>
+                  </a:schemeClr>
+                </a:solidFill>
+                <a:prstDash val="solid"/>
+                <a:miter lim="800000"/>
+              </a14:hiddenLine>
+            </a:ext>
+          </a:extLst>
+        </p:spPr>
+        <p:style>
+          <a:lnRef idx="2">
+            <a:schemeClr val="accent1">
+              <a:shade val="50000"/>
+            </a:schemeClr>
+          </a:lnRef>
+          <a:fillRef idx="1">
+            <a:schemeClr val="accent1"/>
+          </a:fillRef>
+          <a:effectRef idx="0">
+            <a:schemeClr val="accent1"/>
+          </a:effectRef>
+          <a:fontRef idx="minor">
+            <a:schemeClr val="lt1"/>
+          </a:fontRef>
+        </p:style>
+        <p:txBody>
+          <a:bodyPr rtlCol="0" anchor="ctr"/>
+          <a:lstStyle/>
+          <a:p>
+            <a:pPr algn="ctr"/>
+            <a:endParaRPr lang="en-US"/>
+          </a:p>
+        </p:txBody>
+      </p:sp>
+      <p:sp>
+        <p:nvSpPr>
+          <p:cNvPr id="12" name="Rectangle 11">
+            <a:extLst>
+              <a:ext uri="{FF2B5EF4-FFF2-40B4-BE49-F238E27FC236}">
+                <a16:creationId xmlns:a16="http://schemas.microsoft.com/office/drawing/2014/main" id="{91E5A9A7-95C6-4F4F-B00E-C82E07FE62EF}"/>
+              </a:ext>
+              <a:ext uri="{C183D7F6-B498-43B3-948B-1728B52AA6E4}">
+                <adec:decorative xmlns:adec="http://schemas.microsoft.com/office/drawing/2017/decorative" val="1"/>
+              </a:ext>
+            </a:extLst>
+          </p:cNvPr>
+          <p:cNvSpPr>
+            <a:spLocks noGrp="1" noRot="1" noChangeAspect="1" noMove="1" noResize="1" noEditPoints="1" noAdjustHandles="1" noChangeArrowheads="1" noChangeShapeType="1" noTextEdit="1"/>
+          </p:cNvSpPr>
+          <p:nvPr>
+            <p:extLst>
+              <p:ext uri="{386F3935-93C4-4BCD-93E2-E3B085C9AB24}">
+                <p16:designElem xmlns:p16="http://schemas.microsoft.com/office/powerpoint/2015/main" val="1"/>
+              </p:ext>
+            </p:extLst>
+          </p:nvPr>
+        </p:nvSpPr>
+        <p:spPr>
+          <a:xfrm rot="5400000" flipH="1">
+            <a:off x="-1417539" y="1417538"/>
+            <a:ext cx="6875818" cy="4040744"/>
+          </a:xfrm>
+          <a:prstGeom prst="rect">
+            <a:avLst/>
+          </a:prstGeom>
+          <a:gradFill>
+            <a:gsLst>
+              <a:gs pos="0">
+                <a:srgbClr val="000000"/>
+              </a:gs>
+              <a:gs pos="100000">
+                <a:schemeClr val="accent1">
+                  <a:lumMod val="75000"/>
+                </a:schemeClr>
+              </a:gs>
+            </a:gsLst>
+            <a:lin ang="18600000" scaled="0"/>
+          </a:gradFill>
+          <a:ln>
+            <a:noFill/>
+          </a:ln>
+        </p:spPr>
+        <p:style>
+          <a:lnRef idx="2">
+            <a:schemeClr val="accent1">
+              <a:shade val="50000"/>
+            </a:schemeClr>
+          </a:lnRef>
+          <a:fillRef idx="1">
+            <a:schemeClr val="accent1"/>
+          </a:fillRef>
+          <a:effectRef idx="0">
+            <a:schemeClr val="accent1"/>
+          </a:effectRef>
+          <a:fontRef idx="minor">
+            <a:schemeClr val="lt1"/>
+          </a:fontRef>
+        </p:style>
+        <p:txBody>
+          <a:bodyPr rtlCol="0" anchor="ctr"/>
+          <a:lstStyle/>
+          <a:p>
+            <a:pPr algn="ctr"/>
+            <a:endParaRPr lang="en-US" dirty="0"/>
+          </a:p>
+        </p:txBody>
+      </p:sp>
+      <p:sp>
+        <p:nvSpPr>
+          <p:cNvPr id="14" name="Rectangle 13">
+            <a:extLst>
+              <a:ext uri="{FF2B5EF4-FFF2-40B4-BE49-F238E27FC236}">
+                <a16:creationId xmlns:a16="http://schemas.microsoft.com/office/drawing/2014/main" id="{D07DD2DE-F619-49DD-B5E7-03A290FF4ED1}"/>
+              </a:ext>
+              <a:ext uri="{C183D7F6-B498-43B3-948B-1728B52AA6E4}">
+                <adec:decorative xmlns:adec="http://schemas.microsoft.com/office/drawing/2017/decorative" val="1"/>
+              </a:ext>
+            </a:extLst>
+          </p:cNvPr>
+          <p:cNvSpPr>
+            <a:spLocks noGrp="1" noRot="1" noChangeAspect="1" noMove="1" noResize="1" noEditPoints="1" noAdjustHandles="1" noChangeArrowheads="1" noChangeShapeType="1" noTextEdit="1"/>
+          </p:cNvSpPr>
+          <p:nvPr>
+            <p:extLst>
+              <p:ext uri="{386F3935-93C4-4BCD-93E2-E3B085C9AB24}">
+                <p16:designElem xmlns:p16="http://schemas.microsoft.com/office/powerpoint/2015/main" val="1"/>
+              </p:ext>
+            </p:extLst>
+          </p:nvPr>
+        </p:nvSpPr>
+        <p:spPr>
+          <a:xfrm rot="16200000">
+            <a:off x="-158495" y="2660473"/>
+            <a:ext cx="4355594" cy="4038603"/>
+          </a:xfrm>
+          <a:prstGeom prst="rect">
+            <a:avLst/>
+          </a:prstGeom>
+          <a:gradFill>
+            <a:gsLst>
+              <a:gs pos="0">
+                <a:schemeClr val="accent1">
+                  <a:alpha val="50000"/>
+                </a:schemeClr>
+              </a:gs>
+              <a:gs pos="100000">
+                <a:schemeClr val="accent1">
+                  <a:lumMod val="50000"/>
+                  <a:alpha val="0"/>
+                </a:schemeClr>
+              </a:gs>
+            </a:gsLst>
+            <a:lin ang="11400000" scaled="0"/>
+          </a:gradFill>
+          <a:ln>
+            <a:noFill/>
+          </a:ln>
+        </p:spPr>
+        <p:style>
+          <a:lnRef idx="2">
+            <a:schemeClr val="accent1">
+              <a:shade val="50000"/>
+            </a:schemeClr>
+          </a:lnRef>
+          <a:fillRef idx="1">
+            <a:schemeClr val="accent1"/>
+          </a:fillRef>
+          <a:effectRef idx="0">
+            <a:schemeClr val="accent1"/>
+          </a:effectRef>
+          <a:fontRef idx="minor">
+            <a:schemeClr val="lt1"/>
+          </a:fontRef>
+        </p:style>
+        <p:txBody>
+          <a:bodyPr rtlCol="0" anchor="ctr"/>
+          <a:lstStyle/>
+          <a:p>
+            <a:pPr algn="ctr"/>
+            <a:endParaRPr lang="en-US"/>
+          </a:p>
+        </p:txBody>
+      </p:sp>
+      <p:sp>
+        <p:nvSpPr>
+          <p:cNvPr id="16" name="Rectangle 15">
+            <a:extLst>
+              <a:ext uri="{FF2B5EF4-FFF2-40B4-BE49-F238E27FC236}">
+                <a16:creationId xmlns:a16="http://schemas.microsoft.com/office/drawing/2014/main" id="{85149191-5F60-4A28-AAFF-039F96B0F3EC}"/>
+              </a:ext>
+              <a:ext uri="{C183D7F6-B498-43B3-948B-1728B52AA6E4}">
+                <adec:decorative xmlns:adec="http://schemas.microsoft.com/office/drawing/2017/decorative" val="1"/>
+              </a:ext>
+            </a:extLst>
+          </p:cNvPr>
+          <p:cNvSpPr>
+            <a:spLocks noGrp="1" noRot="1" noChangeAspect="1" noMove="1" noResize="1" noEditPoints="1" noAdjustHandles="1" noChangeArrowheads="1" noChangeShapeType="1" noTextEdit="1"/>
+          </p:cNvSpPr>
+          <p:nvPr>
+            <p:extLst>
+              <p:ext uri="{386F3935-93C4-4BCD-93E2-E3B085C9AB24}">
+                <p16:designElem xmlns:p16="http://schemas.microsoft.com/office/powerpoint/2015/main" val="1"/>
+              </p:ext>
+            </p:extLst>
+          </p:nvPr>
+        </p:nvSpPr>
+        <p:spPr>
+          <a:xfrm rot="16200000" flipH="1">
+            <a:off x="-1180882" y="1638085"/>
+            <a:ext cx="6857572" cy="3581401"/>
+          </a:xfrm>
+          <a:prstGeom prst="rect">
+            <a:avLst/>
+          </a:prstGeom>
+          <a:gradFill>
+            <a:gsLst>
+              <a:gs pos="0">
+                <a:srgbClr val="000000">
+                  <a:alpha val="59000"/>
+                </a:srgbClr>
+              </a:gs>
+              <a:gs pos="69000">
+                <a:schemeClr val="accent1">
+                  <a:alpha val="0"/>
+                </a:schemeClr>
+              </a:gs>
+            </a:gsLst>
+            <a:lin ang="13200000" scaled="0"/>
+          </a:gradFill>
+          <a:ln>
+            <a:noFill/>
+          </a:ln>
+        </p:spPr>
+        <p:style>
+          <a:lnRef idx="2">
+            <a:schemeClr val="accent1">
+              <a:shade val="50000"/>
+            </a:schemeClr>
+          </a:lnRef>
+          <a:fillRef idx="1">
+            <a:schemeClr val="accent1"/>
+          </a:fillRef>
+          <a:effectRef idx="0">
+            <a:schemeClr val="accent1"/>
+          </a:effectRef>
+          <a:fontRef idx="minor">
+            <a:schemeClr val="lt1"/>
+          </a:fontRef>
+        </p:style>
+        <p:txBody>
+          <a:bodyPr rtlCol="0" anchor="ctr"/>
+          <a:lstStyle/>
+          <a:p>
+            <a:pPr algn="ctr"/>
+            <a:endParaRPr lang="en-US" dirty="0"/>
+          </a:p>
+        </p:txBody>
+      </p:sp>
+      <p:sp>
+        <p:nvSpPr>
+          <p:cNvPr id="18" name="Freeform: Shape 17">
+            <a:extLst>
+              <a:ext uri="{FF2B5EF4-FFF2-40B4-BE49-F238E27FC236}">
+                <a16:creationId xmlns:a16="http://schemas.microsoft.com/office/drawing/2014/main" id="{F8260ED5-17F7-4158-B241-D51DD4CF1B7E}"/>
+              </a:ext>
+              <a:ext uri="{C183D7F6-B498-43B3-948B-1728B52AA6E4}">
+                <adec:decorative xmlns:adec="http://schemas.microsoft.com/office/drawing/2017/decorative" val="1"/>
+              </a:ext>
+            </a:extLst>
+          </p:cNvPr>
+          <p:cNvSpPr>
+            <a:spLocks noGrp="1" noRot="1" noChangeAspect="1" noMove="1" noResize="1" noEditPoints="1" noAdjustHandles="1" noChangeArrowheads="1" noChangeShapeType="1" noTextEdit="1"/>
+          </p:cNvSpPr>
+          <p:nvPr>
+            <p:extLst>
+              <p:ext uri="{386F3935-93C4-4BCD-93E2-E3B085C9AB24}">
+                <p16:designElem xmlns:p16="http://schemas.microsoft.com/office/powerpoint/2015/main" val="1"/>
+              </p:ext>
+            </p:extLst>
+          </p:nvPr>
+        </p:nvSpPr>
+        <p:spPr>
+          <a:xfrm rot="6097846">
+            <a:off x="-747355" y="1201312"/>
+            <a:ext cx="4808302" cy="4088666"/>
+          </a:xfrm>
+          <a:custGeom>
+            <a:avLst/>
+            <a:gdLst>
+              <a:gd name="connsiteX0" fmla="*/ 48844 w 4808302"/>
+              <a:gd name="connsiteY0" fmla="*/ 2888671 h 4088666"/>
+              <a:gd name="connsiteX1" fmla="*/ 0 w 4808302"/>
+              <a:gd name="connsiteY1" fmla="*/ 2404151 h 4088666"/>
+              <a:gd name="connsiteX2" fmla="*/ 2404151 w 4808302"/>
+              <a:gd name="connsiteY2" fmla="*/ 0 h 4088666"/>
+              <a:gd name="connsiteX3" fmla="*/ 4808302 w 4808302"/>
+              <a:gd name="connsiteY3" fmla="*/ 2404151 h 4088666"/>
+              <a:gd name="connsiteX4" fmla="*/ 4700216 w 4808302"/>
+              <a:gd name="connsiteY4" fmla="*/ 3119072 h 4088666"/>
+              <a:gd name="connsiteX5" fmla="*/ 4643143 w 4808302"/>
+              <a:gd name="connsiteY5" fmla="*/ 3275009 h 4088666"/>
+              <a:gd name="connsiteX6" fmla="*/ 690093 w 4808302"/>
+              <a:gd name="connsiteY6" fmla="*/ 4088666 h 4088666"/>
+              <a:gd name="connsiteX7" fmla="*/ 548991 w 4808302"/>
+              <a:gd name="connsiteY7" fmla="*/ 3933414 h 4088666"/>
+              <a:gd name="connsiteX8" fmla="*/ 48844 w 4808302"/>
+              <a:gd name="connsiteY8" fmla="*/ 2888671 h 4088666"/>
+            </a:gdLst>
+            <a:ahLst/>
+            <a:cxnLst>
+              <a:cxn ang="0">
+                <a:pos x="connsiteX0" y="connsiteY0"/>
+              </a:cxn>
+              <a:cxn ang="0">
+                <a:pos x="connsiteX1" y="connsiteY1"/>
+              </a:cxn>
+              <a:cxn ang="0">
+                <a:pos x="connsiteX2" y="connsiteY2"/>
+              </a:cxn>
+              <a:cxn ang="0">
+                <a:pos x="connsiteX3" y="connsiteY3"/>
+              </a:cxn>
+              <a:cxn ang="0">
+                <a:pos x="connsiteX4" y="connsiteY4"/>
+              </a:cxn>
+              <a:cxn ang="0">
+                <a:pos x="connsiteX5" y="connsiteY5"/>
+              </a:cxn>
+              <a:cxn ang="0">
+                <a:pos x="connsiteX6" y="connsiteY6"/>
+              </a:cxn>
+              <a:cxn ang="0">
+                <a:pos x="connsiteX7" y="connsiteY7"/>
+              </a:cxn>
+              <a:cxn ang="0">
+                <a:pos x="connsiteX8" y="connsiteY8"/>
+              </a:cxn>
+            </a:cxnLst>
+            <a:rect l="l" t="t" r="r" b="b"/>
+            <a:pathLst>
+              <a:path w="4808302" h="4088666">
+                <a:moveTo>
+                  <a:pt x="48844" y="2888671"/>
+                </a:moveTo>
+                <a:cubicBezTo>
+                  <a:pt x="16818" y="2732167"/>
+                  <a:pt x="0" y="2570123"/>
+                  <a:pt x="0" y="2404151"/>
+                </a:cubicBezTo>
+                <a:cubicBezTo>
+                  <a:pt x="0" y="1076375"/>
+                  <a:pt x="1076375" y="0"/>
+                  <a:pt x="2404151" y="0"/>
+                </a:cubicBezTo>
+                <a:cubicBezTo>
+                  <a:pt x="3731927" y="0"/>
+                  <a:pt x="4808302" y="1076375"/>
+                  <a:pt x="4808302" y="2404151"/>
+                </a:cubicBezTo>
+                <a:cubicBezTo>
+                  <a:pt x="4808302" y="2653109"/>
+                  <a:pt x="4770461" y="2893229"/>
+                  <a:pt x="4700216" y="3119072"/>
+                </a:cubicBezTo>
+                <a:lnTo>
+                  <a:pt x="4643143" y="3275009"/>
+                </a:lnTo>
+                <a:lnTo>
+                  <a:pt x="690093" y="4088666"/>
+                </a:lnTo>
+                <a:lnTo>
+                  <a:pt x="548991" y="3933414"/>
+                </a:lnTo>
+                <a:cubicBezTo>
+                  <a:pt x="304015" y="3636572"/>
+                  <a:pt x="128908" y="3279932"/>
+                  <a:pt x="48844" y="2888671"/>
+                </a:cubicBezTo>
+                <a:close/>
+              </a:path>
+            </a:pathLst>
+          </a:custGeom>
+          <a:gradFill>
+            <a:gsLst>
+              <a:gs pos="39000">
+                <a:schemeClr val="accent1">
+                  <a:lumMod val="60000"/>
+                  <a:lumOff val="40000"/>
+                  <a:alpha val="0"/>
+                </a:schemeClr>
+              </a:gs>
+              <a:gs pos="100000">
+                <a:schemeClr val="accent1">
+                  <a:lumMod val="75000"/>
+                  <a:alpha val="26000"/>
+                </a:schemeClr>
+              </a:gs>
+            </a:gsLst>
+            <a:lin ang="18600000" scaled="0"/>
+          </a:gradFill>
+          <a:ln>
+            <a:noFill/>
+          </a:ln>
+        </p:spPr>
+        <p:style>
+          <a:lnRef idx="2">
+            <a:schemeClr val="accent1">
+              <a:shade val="50000"/>
+            </a:schemeClr>
+          </a:lnRef>
+          <a:fillRef idx="1">
+            <a:schemeClr val="accent1"/>
+          </a:fillRef>
+          <a:effectRef idx="0">
+            <a:schemeClr val="accent1"/>
+          </a:effectRef>
+          <a:fontRef idx="minor">
+            <a:schemeClr val="lt1"/>
+          </a:fontRef>
+        </p:style>
+        <p:txBody>
+          <a:bodyPr wrap="square" rtlCol="0" anchor="ctr">
+            <a:noAutofit/>
+          </a:bodyPr>
+          <a:lstStyle/>
+          <a:p>
+            <a:pPr algn="ctr"/>
+            <a:endParaRPr lang="en-US" dirty="0"/>
+          </a:p>
+        </p:txBody>
+      </p:sp>
       <p:sp>
         <p:nvSpPr>
           <p:cNvPr id="2" name="Title 1">
@@ -3622,14 +5160,26 @@
             <p:ph type="ctrTitle"/>
           </p:nvPr>
         </p:nvSpPr>
-        <p:spPr/>
-        <p:txBody>
-          <a:bodyPr/>
-          <a:lstStyle/>
-          <a:p>
-            <a:r>
-              <a:rPr lang="en-US" dirty="0"/>
-              <a:t>Roadmap</a:t>
+        <p:spPr>
+          <a:xfrm>
+            <a:off x="660041" y="2767106"/>
+            <a:ext cx="2880828" cy="3071906"/>
+          </a:xfrm>
+        </p:spPr>
+        <p:txBody>
+          <a:bodyPr anchor="t">
+            <a:normAutofit/>
+          </a:bodyPr>
+          <a:lstStyle/>
+          <a:p>
+            <a:pPr algn="l"/>
+            <a:r>
+              <a:rPr lang="en-US" sz="4000">
+                <a:solidFill>
+                  <a:srgbClr val="FFFFFF"/>
+                </a:solidFill>
+              </a:rPr>
+              <a:t>Feuille de Route</a:t>
             </a:r>
           </a:p>
         </p:txBody>
@@ -3650,15 +5200,117 @@
             <p:ph type="subTitle" idx="1"/>
           </p:nvPr>
         </p:nvSpPr>
-        <p:spPr/>
-        <p:txBody>
-          <a:bodyPr/>
-          <a:lstStyle/>
-          <a:p>
-            <a:endParaRPr lang="en-US"/>
-          </a:p>
-        </p:txBody>
-      </p:sp>
+        <p:spPr>
+          <a:xfrm>
+            <a:off x="255639" y="4060723"/>
+            <a:ext cx="3490451" cy="2430567"/>
+          </a:xfrm>
+        </p:spPr>
+        <p:txBody>
+          <a:bodyPr anchor="b">
+            <a:normAutofit/>
+          </a:bodyPr>
+          <a:lstStyle/>
+          <a:p>
+            <a:pPr algn="l"/>
+            <a:r>
+              <a:rPr lang="en-US" sz="2000" dirty="0">
+                <a:solidFill>
+                  <a:srgbClr val="FFFFFF"/>
+                </a:solidFill>
+              </a:rPr>
+              <a:t>Phase 1  MVP Local          ✓</a:t>
+            </a:r>
+          </a:p>
+          <a:p>
+            <a:pPr algn="l"/>
+            <a:r>
+              <a:rPr lang="en-US" sz="2000" dirty="0">
+                <a:solidFill>
+                  <a:srgbClr val="FFFFFF"/>
+                </a:solidFill>
+              </a:rPr>
+              <a:t>Phase 2  Active Directory</a:t>
+            </a:r>
+          </a:p>
+          <a:p>
+            <a:pPr algn="l"/>
+            <a:r>
+              <a:rPr lang="en-US" sz="2000" dirty="0">
+                <a:solidFill>
+                  <a:srgbClr val="FFFFFF"/>
+                </a:solidFill>
+              </a:rPr>
+              <a:t>Phase 3  Entra ID</a:t>
+            </a:r>
+          </a:p>
+          <a:p>
+            <a:pPr algn="l"/>
+            <a:r>
+              <a:rPr lang="en-US" sz="2000" dirty="0">
+                <a:solidFill>
+                  <a:srgbClr val="FFFFFF"/>
+                </a:solidFill>
+              </a:rPr>
+              <a:t>Phase 4  ITSM</a:t>
+            </a:r>
+          </a:p>
+          <a:p>
+            <a:pPr algn="l"/>
+            <a:r>
+              <a:rPr lang="en-US" sz="2000" dirty="0">
+                <a:solidFill>
+                  <a:srgbClr val="FFFFFF"/>
+                </a:solidFill>
+              </a:rPr>
+              <a:t>Phase 5  IAM </a:t>
+            </a:r>
+            <a:r>
+              <a:rPr lang="en-US" sz="2000" dirty="0" err="1">
+                <a:solidFill>
+                  <a:srgbClr val="FFFFFF"/>
+                </a:solidFill>
+              </a:rPr>
+              <a:t>Entreprise</a:t>
+            </a:r>
+            <a:endParaRPr lang="en-US" sz="2000" dirty="0">
+              <a:solidFill>
+                <a:srgbClr val="FFFFFF"/>
+              </a:solidFill>
+            </a:endParaRPr>
+          </a:p>
+        </p:txBody>
+      </p:sp>
+      <p:pic>
+        <p:nvPicPr>
+          <p:cNvPr id="5" name="Picture 4">
+            <a:extLst>
+              <a:ext uri="{FF2B5EF4-FFF2-40B4-BE49-F238E27FC236}">
+                <a16:creationId xmlns:a16="http://schemas.microsoft.com/office/drawing/2014/main" id="{EFDB99E8-90D3-AFEC-79EE-AB36438B7EF4}"/>
+              </a:ext>
+            </a:extLst>
+          </p:cNvPr>
+          <p:cNvPicPr>
+            <a:picLocks noChangeAspect="1"/>
+          </p:cNvPicPr>
+          <p:nvPr/>
+        </p:nvPicPr>
+        <p:blipFill>
+          <a:blip r:embed="rId2"/>
+          <a:stretch>
+            <a:fillRect/>
+          </a:stretch>
+        </p:blipFill>
+        <p:spPr>
+          <a:xfrm>
+            <a:off x="6249373" y="467208"/>
+            <a:ext cx="3731857" cy="5923584"/>
+          </a:xfrm>
+          <a:prstGeom prst="rect">
+            <a:avLst/>
+          </a:prstGeom>
+        </p:spPr>
+      </p:pic>
     </p:spTree>
     <p:extLst>
       <p:ext uri="{BB962C8B-B14F-4D97-AF65-F5344CB8AC3E}">
@@ -3675,6 +5327,14 @@
 <file path=ppt/slides/slide13.xml><?xml version="1.0" encoding="utf-8"?>
 <p:sld xmlns:a="http://schemas.openxmlformats.org/drawingml/2006/main" xmlns:r="http://schemas.openxmlformats.org/officeDocument/2006/relationships" xmlns:p="http://schemas.openxmlformats.org/presentationml/2006/main">
   <p:cSld>
+    <p:bg>
+      <p:bgPr>
+        <a:solidFill>
+          <a:schemeClr val="bg1"/>
+        </a:solidFill>
+        <a:effectLst/>
+      </p:bgPr>
+    </p:bg>
     <p:spTree>
       <p:nvGrpSpPr>
         <p:cNvPr id="1" name="">
@@ -3695,6 +5355,479 @@
           <a:chExt cx="0" cy="0"/>
         </a:xfrm>
       </p:grpSpPr>
+      <p:sp useBgFill="1">
+        <p:nvSpPr>
+          <p:cNvPr id="10" name="Rectangle 9">
+            <a:extLst>
+              <a:ext uri="{FF2B5EF4-FFF2-40B4-BE49-F238E27FC236}">
+                <a16:creationId xmlns:a16="http://schemas.microsoft.com/office/drawing/2014/main" id="{A8384FB5-9ADC-4DDC-881B-597D56F5B15D}"/>
+              </a:ext>
+              <a:ext uri="{C183D7F6-B498-43B3-948B-1728B52AA6E4}">
+                <adec:decorative xmlns:adec="http://schemas.microsoft.com/office/drawing/2017/decorative" val="1"/>
+              </a:ext>
+            </a:extLst>
+          </p:cNvPr>
+          <p:cNvSpPr>
+            <a:spLocks noGrp="1" noRot="1" noChangeAspect="1" noMove="1" noResize="1" noEditPoints="1" noAdjustHandles="1" noChangeArrowheads="1" noChangeShapeType="1" noTextEdit="1"/>
+          </p:cNvSpPr>
+          <p:nvPr>
+            <p:extLst>
+              <p:ext uri="{386F3935-93C4-4BCD-93E2-E3B085C9AB24}">
+                <p16:designElem xmlns:p16="http://schemas.microsoft.com/office/powerpoint/2015/main" val="1"/>
+              </p:ext>
+            </p:extLst>
+          </p:nvPr>
+        </p:nvSpPr>
+        <p:spPr>
+          <a:xfrm>
+            <a:off x="0" y="0"/>
+            <a:ext cx="12192000" cy="6858000"/>
+          </a:xfrm>
+          <a:prstGeom prst="rect">
+            <a:avLst/>
+          </a:prstGeom>
+          <a:ln w="12700" cap="flat" cmpd="sng" algn="ctr">
+            <a:noFill/>
+            <a:prstDash val="solid"/>
+            <a:miter lim="800000"/>
+          </a:ln>
+          <a:effectLst/>
+          <a:extLst>
+            <a:ext uri="{91240B29-F687-4F45-9708-019B960494DF}">
+              <a14:hiddenLine xmlns:a14="http://schemas.microsoft.com/office/drawing/2010/main" w="12700" cap="flat" cmpd="sng" algn="ctr">
+                <a:solidFill>
+                  <a:schemeClr val="accent1">
+                    <a:shade val="50000"/>
+                  </a:schemeClr>
+                </a:solidFill>
+                <a:prstDash val="solid"/>
+                <a:miter lim="800000"/>
+              </a14:hiddenLine>
+            </a:ext>
+          </a:extLst>
+        </p:spPr>
+        <p:style>
+          <a:lnRef idx="2">
+            <a:schemeClr val="accent1">
+              <a:shade val="50000"/>
+            </a:schemeClr>
+          </a:lnRef>
+          <a:fillRef idx="1">
+            <a:schemeClr val="accent1"/>
+          </a:fillRef>
+          <a:effectRef idx="0">
+            <a:schemeClr val="accent1"/>
+          </a:effectRef>
+          <a:fontRef idx="minor">
+            <a:schemeClr val="lt1"/>
+          </a:fontRef>
+        </p:style>
+        <p:txBody>
+          <a:bodyPr rtlCol="0" anchor="ctr"/>
+          <a:lstStyle/>
+          <a:p>
+            <a:pPr algn="ctr"/>
+            <a:endParaRPr lang="en-US"/>
+          </a:p>
+        </p:txBody>
+      </p:sp>
+      <p:sp>
+        <p:nvSpPr>
+          <p:cNvPr id="12" name="Rectangle 11">
+            <a:extLst>
+              <a:ext uri="{FF2B5EF4-FFF2-40B4-BE49-F238E27FC236}">
+                <a16:creationId xmlns:a16="http://schemas.microsoft.com/office/drawing/2014/main" id="{91E5A9A7-95C6-4F4F-B00E-C82E07FE62EF}"/>
+              </a:ext>
+              <a:ext uri="{C183D7F6-B498-43B3-948B-1728B52AA6E4}">
+                <adec:decorative xmlns:adec="http://schemas.microsoft.com/office/drawing/2017/decorative" val="1"/>
+              </a:ext>
+            </a:extLst>
+          </p:cNvPr>
+          <p:cNvSpPr>
+            <a:spLocks noGrp="1" noRot="1" noChangeAspect="1" noMove="1" noResize="1" noEditPoints="1" noAdjustHandles="1" noChangeArrowheads="1" noChangeShapeType="1" noTextEdit="1"/>
+          </p:cNvSpPr>
+          <p:nvPr>
+            <p:extLst>
+              <p:ext uri="{386F3935-93C4-4BCD-93E2-E3B085C9AB24}">
+                <p16:designElem xmlns:p16="http://schemas.microsoft.com/office/powerpoint/2015/main" val="1"/>
+              </p:ext>
+            </p:extLst>
+          </p:nvPr>
+        </p:nvSpPr>
+        <p:spPr>
+          <a:xfrm rot="5400000" flipH="1">
+            <a:off x="-1417539" y="1417538"/>
+            <a:ext cx="6875818" cy="4040744"/>
+          </a:xfrm>
+          <a:prstGeom prst="rect">
+            <a:avLst/>
+          </a:prstGeom>
+          <a:gradFill>
+            <a:gsLst>
+              <a:gs pos="0">
+                <a:srgbClr val="000000"/>
+              </a:gs>
+              <a:gs pos="100000">
+                <a:schemeClr val="accent1">
+                  <a:lumMod val="75000"/>
+                </a:schemeClr>
+              </a:gs>
+            </a:gsLst>
+            <a:lin ang="18600000" scaled="0"/>
+          </a:gradFill>
+          <a:ln>
+            <a:noFill/>
+          </a:ln>
+        </p:spPr>
+        <p:style>
+          <a:lnRef idx="2">
+            <a:schemeClr val="accent1">
+              <a:shade val="50000"/>
+            </a:schemeClr>
+          </a:lnRef>
+          <a:fillRef idx="1">
+            <a:schemeClr val="accent1"/>
+          </a:fillRef>
+          <a:effectRef idx="0">
+            <a:schemeClr val="accent1"/>
+          </a:effectRef>
+          <a:fontRef idx="minor">
+            <a:schemeClr val="lt1"/>
+          </a:fontRef>
+        </p:style>
+        <p:txBody>
+          <a:bodyPr rtlCol="0" anchor="ctr"/>
+          <a:lstStyle/>
+          <a:p>
+            <a:pPr algn="ctr"/>
+            <a:endParaRPr lang="en-US" dirty="0"/>
+          </a:p>
+        </p:txBody>
+      </p:sp>
+      <p:sp>
+        <p:nvSpPr>
+          <p:cNvPr id="14" name="Rectangle 13">
+            <a:extLst>
+              <a:ext uri="{FF2B5EF4-FFF2-40B4-BE49-F238E27FC236}">
+                <a16:creationId xmlns:a16="http://schemas.microsoft.com/office/drawing/2014/main" id="{D07DD2DE-F619-49DD-B5E7-03A290FF4ED1}"/>
+              </a:ext>
+              <a:ext uri="{C183D7F6-B498-43B3-948B-1728B52AA6E4}">
+                <adec:decorative xmlns:adec="http://schemas.microsoft.com/office/drawing/2017/decorative" val="1"/>
+              </a:ext>
+            </a:extLst>
+          </p:cNvPr>
+          <p:cNvSpPr>
+            <a:spLocks noGrp="1" noRot="1" noChangeAspect="1" noMove="1" noResize="1" noEditPoints="1" noAdjustHandles="1" noChangeArrowheads="1" noChangeShapeType="1" noTextEdit="1"/>
+          </p:cNvSpPr>
+          <p:nvPr>
+            <p:extLst>
+              <p:ext uri="{386F3935-93C4-4BCD-93E2-E3B085C9AB24}">
+                <p16:designElem xmlns:p16="http://schemas.microsoft.com/office/powerpoint/2015/main" val="1"/>
+              </p:ext>
+            </p:extLst>
+          </p:nvPr>
+        </p:nvSpPr>
+        <p:spPr>
+          <a:xfrm rot="16200000">
+            <a:off x="-158495" y="2660473"/>
+            <a:ext cx="4355594" cy="4038603"/>
+          </a:xfrm>
+          <a:prstGeom prst="rect">
+            <a:avLst/>
+          </a:prstGeom>
+          <a:gradFill>
+            <a:gsLst>
+              <a:gs pos="0">
+                <a:schemeClr val="accent1">
+                  <a:alpha val="50000"/>
+                </a:schemeClr>
+              </a:gs>
+              <a:gs pos="100000">
+                <a:schemeClr val="accent1">
+                  <a:lumMod val="50000"/>
+                  <a:alpha val="0"/>
+                </a:schemeClr>
+              </a:gs>
+            </a:gsLst>
+            <a:lin ang="11400000" scaled="0"/>
+          </a:gradFill>
+          <a:ln>
+            <a:noFill/>
+          </a:ln>
+        </p:spPr>
+        <p:style>
+          <a:lnRef idx="2">
+            <a:schemeClr val="accent1">
+              <a:shade val="50000"/>
+            </a:schemeClr>
+          </a:lnRef>
+          <a:fillRef idx="1">
+            <a:schemeClr val="accent1"/>
+          </a:fillRef>
+          <a:effectRef idx="0">
+            <a:schemeClr val="accent1"/>
+          </a:effectRef>
+          <a:fontRef idx="minor">
+            <a:schemeClr val="lt1"/>
+          </a:fontRef>
+        </p:style>
+        <p:txBody>
+          <a:bodyPr rtlCol="0" anchor="ctr"/>
+          <a:lstStyle/>
+          <a:p>
+            <a:pPr algn="ctr"/>
+            <a:endParaRPr lang="en-US"/>
+          </a:p>
+        </p:txBody>
+      </p:sp>
+      <p:sp>
+        <p:nvSpPr>
+          <p:cNvPr id="16" name="Rectangle 15">
+            <a:extLst>
+              <a:ext uri="{FF2B5EF4-FFF2-40B4-BE49-F238E27FC236}">
+                <a16:creationId xmlns:a16="http://schemas.microsoft.com/office/drawing/2014/main" id="{85149191-5F60-4A28-AAFF-039F96B0F3EC}"/>
+              </a:ext>
+              <a:ext uri="{C183D7F6-B498-43B3-948B-1728B52AA6E4}">
+                <adec:decorative xmlns:adec="http://schemas.microsoft.com/office/drawing/2017/decorative" val="1"/>
+              </a:ext>
+            </a:extLst>
+          </p:cNvPr>
+          <p:cNvSpPr>
+            <a:spLocks noGrp="1" noRot="1" noChangeAspect="1" noMove="1" noResize="1" noEditPoints="1" noAdjustHandles="1" noChangeArrowheads="1" noChangeShapeType="1" noTextEdit="1"/>
+          </p:cNvSpPr>
+          <p:nvPr>
+            <p:extLst>
+              <p:ext uri="{386F3935-93C4-4BCD-93E2-E3B085C9AB24}">
+                <p16:designElem xmlns:p16="http://schemas.microsoft.com/office/powerpoint/2015/main" val="1"/>
+              </p:ext>
+            </p:extLst>
+          </p:nvPr>
+        </p:nvSpPr>
+        <p:spPr>
+          <a:xfrm rot="16200000" flipH="1">
+            <a:off x="-1180882" y="1638085"/>
+            <a:ext cx="6857572" cy="3581401"/>
+          </a:xfrm>
+          <a:prstGeom prst="rect">
+            <a:avLst/>
+          </a:prstGeom>
+          <a:gradFill>
+            <a:gsLst>
+              <a:gs pos="0">
+                <a:srgbClr val="000000">
+                  <a:alpha val="59000"/>
+                </a:srgbClr>
+              </a:gs>
+              <a:gs pos="69000">
+                <a:schemeClr val="accent1">
+                  <a:alpha val="0"/>
+                </a:schemeClr>
+              </a:gs>
+            </a:gsLst>
+            <a:lin ang="13200000" scaled="0"/>
+          </a:gradFill>
+          <a:ln>
+            <a:noFill/>
+          </a:ln>
+        </p:spPr>
+        <p:style>
+          <a:lnRef idx="2">
+            <a:schemeClr val="accent1">
+              <a:shade val="50000"/>
+            </a:schemeClr>
+          </a:lnRef>
+          <a:fillRef idx="1">
+            <a:schemeClr val="accent1"/>
+          </a:fillRef>
+          <a:effectRef idx="0">
+            <a:schemeClr val="accent1"/>
+          </a:effectRef>
+          <a:fontRef idx="minor">
+            <a:schemeClr val="lt1"/>
+          </a:fontRef>
+        </p:style>
+        <p:txBody>
+          <a:bodyPr rtlCol="0" anchor="ctr"/>
+          <a:lstStyle/>
+          <a:p>
+            <a:pPr algn="ctr"/>
+            <a:endParaRPr lang="en-US" dirty="0"/>
+          </a:p>
+        </p:txBody>
+      </p:sp>
+      <p:sp>
+        <p:nvSpPr>
+          <p:cNvPr id="18" name="Freeform: Shape 17">
+            <a:extLst>
+              <a:ext uri="{FF2B5EF4-FFF2-40B4-BE49-F238E27FC236}">
+                <a16:creationId xmlns:a16="http://schemas.microsoft.com/office/drawing/2014/main" id="{F8260ED5-17F7-4158-B241-D51DD4CF1B7E}"/>
+              </a:ext>
+              <a:ext uri="{C183D7F6-B498-43B3-948B-1728B52AA6E4}">
+                <adec:decorative xmlns:adec="http://schemas.microsoft.com/office/drawing/2017/decorative" val="1"/>
+              </a:ext>
+            </a:extLst>
+          </p:cNvPr>
+          <p:cNvSpPr>
+            <a:spLocks noGrp="1" noRot="1" noChangeAspect="1" noMove="1" noResize="1" noEditPoints="1" noAdjustHandles="1" noChangeArrowheads="1" noChangeShapeType="1" noTextEdit="1"/>
+          </p:cNvSpPr>
+          <p:nvPr>
+            <p:extLst>
+              <p:ext uri="{386F3935-93C4-4BCD-93E2-E3B085C9AB24}">
+                <p16:designElem xmlns:p16="http://schemas.microsoft.com/office/powerpoint/2015/main" val="1"/>
+              </p:ext>
+            </p:extLst>
+          </p:nvPr>
+        </p:nvSpPr>
+        <p:spPr>
+          <a:xfrm rot="6097846">
+            <a:off x="-747355" y="1201312"/>
+            <a:ext cx="4808302" cy="4088666"/>
+          </a:xfrm>
+          <a:custGeom>
+            <a:avLst/>
+            <a:gdLst>
+              <a:gd name="connsiteX0" fmla="*/ 48844 w 4808302"/>
+              <a:gd name="connsiteY0" fmla="*/ 2888671 h 4088666"/>
+              <a:gd name="connsiteX1" fmla="*/ 0 w 4808302"/>
+              <a:gd name="connsiteY1" fmla="*/ 2404151 h 4088666"/>
+              <a:gd name="connsiteX2" fmla="*/ 2404151 w 4808302"/>
+              <a:gd name="connsiteY2" fmla="*/ 0 h 4088666"/>
+              <a:gd name="connsiteX3" fmla="*/ 4808302 w 4808302"/>
+              <a:gd name="connsiteY3" fmla="*/ 2404151 h 4088666"/>
+              <a:gd name="connsiteX4" fmla="*/ 4700216 w 4808302"/>
+              <a:gd name="connsiteY4" fmla="*/ 3119072 h 4088666"/>
+              <a:gd name="connsiteX5" fmla="*/ 4643143 w 4808302"/>
+              <a:gd name="connsiteY5" fmla="*/ 3275009 h 4088666"/>
+              <a:gd name="connsiteX6" fmla="*/ 690093 w 4808302"/>
+              <a:gd name="connsiteY6" fmla="*/ 4088666 h 4088666"/>
+              <a:gd name="connsiteX7" fmla="*/ 548991 w 4808302"/>
+              <a:gd name="connsiteY7" fmla="*/ 3933414 h 4088666"/>
+              <a:gd name="connsiteX8" fmla="*/ 48844 w 4808302"/>
+              <a:gd name="connsiteY8" fmla="*/ 2888671 h 4088666"/>
+            </a:gdLst>
+            <a:ahLst/>
+            <a:cxnLst>
+              <a:cxn ang="0">
+                <a:pos x="connsiteX0" y="connsiteY0"/>
+              </a:cxn>
+              <a:cxn ang="0">
+                <a:pos x="connsiteX1" y="connsiteY1"/>
+              </a:cxn>
+              <a:cxn ang="0">
+                <a:pos x="connsiteX2" y="connsiteY2"/>
+              </a:cxn>
+              <a:cxn ang="0">
+                <a:pos x="connsiteX3" y="connsiteY3"/>
+              </a:cxn>
+              <a:cxn ang="0">
+                <a:pos x="connsiteX4" y="connsiteY4"/>
+              </a:cxn>
+              <a:cxn ang="0">
+                <a:pos x="connsiteX5" y="connsiteY5"/>
+              </a:cxn>
+              <a:cxn ang="0">
+                <a:pos x="connsiteX6" y="connsiteY6"/>
+              </a:cxn>
+              <a:cxn ang="0">
+                <a:pos x="connsiteX7" y="connsiteY7"/>
+              </a:cxn>
+              <a:cxn ang="0">
+                <a:pos x="connsiteX8" y="connsiteY8"/>
+              </a:cxn>
+            </a:cxnLst>
+            <a:rect l="l" t="t" r="r" b="b"/>
+            <a:pathLst>
+              <a:path w="4808302" h="4088666">
+                <a:moveTo>
+                  <a:pt x="48844" y="2888671"/>
+                </a:moveTo>
+                <a:cubicBezTo>
+                  <a:pt x="16818" y="2732167"/>
+                  <a:pt x="0" y="2570123"/>
+                  <a:pt x="0" y="2404151"/>
+                </a:cubicBezTo>
+                <a:cubicBezTo>
+                  <a:pt x="0" y="1076375"/>
+                  <a:pt x="1076375" y="0"/>
+                  <a:pt x="2404151" y="0"/>
+                </a:cubicBezTo>
+                <a:cubicBezTo>
+                  <a:pt x="3731927" y="0"/>
+                  <a:pt x="4808302" y="1076375"/>
+                  <a:pt x="4808302" y="2404151"/>
+                </a:cubicBezTo>
+                <a:cubicBezTo>
+                  <a:pt x="4808302" y="2653109"/>
+                  <a:pt x="4770461" y="2893229"/>
+                  <a:pt x="4700216" y="3119072"/>
+                </a:cubicBezTo>
+                <a:lnTo>
+                  <a:pt x="4643143" y="3275009"/>
+                </a:lnTo>
+                <a:lnTo>
+                  <a:pt x="690093" y="4088666"/>
+                </a:lnTo>
+                <a:lnTo>
+                  <a:pt x="548991" y="3933414"/>
+                </a:lnTo>
+                <a:cubicBezTo>
+                  <a:pt x="304015" y="3636572"/>
+                  <a:pt x="128908" y="3279932"/>
+                  <a:pt x="48844" y="2888671"/>
+                </a:cubicBezTo>
+                <a:close/>
+              </a:path>
+            </a:pathLst>
+          </a:custGeom>
+          <a:gradFill>
+            <a:gsLst>
+              <a:gs pos="39000">
+                <a:schemeClr val="accent1">
+                  <a:lumMod val="60000"/>
+                  <a:lumOff val="40000"/>
+                  <a:alpha val="0"/>
+                </a:schemeClr>
+              </a:gs>
+              <a:gs pos="100000">
+                <a:schemeClr val="accent1">
+                  <a:lumMod val="75000"/>
+                  <a:alpha val="26000"/>
+                </a:schemeClr>
+              </a:gs>
+            </a:gsLst>
+            <a:lin ang="18600000" scaled="0"/>
+          </a:gradFill>
+          <a:ln>
+            <a:noFill/>
+          </a:ln>
+        </p:spPr>
+        <p:style>
+          <a:lnRef idx="2">
+            <a:schemeClr val="accent1">
+              <a:shade val="50000"/>
+            </a:schemeClr>
+          </a:lnRef>
+          <a:fillRef idx="1">
+            <a:schemeClr val="accent1"/>
+          </a:fillRef>
+          <a:effectRef idx="0">
+            <a:schemeClr val="accent1"/>
+          </a:effectRef>
+          <a:fontRef idx="minor">
+            <a:schemeClr val="lt1"/>
+          </a:fontRef>
+        </p:style>
+        <p:txBody>
+          <a:bodyPr wrap="square" rtlCol="0" anchor="ctr">
+            <a:noAutofit/>
+          </a:bodyPr>
+          <a:lstStyle/>
+          <a:p>
+            <a:pPr algn="ctr"/>
+            <a:endParaRPr lang="en-US" dirty="0"/>
+          </a:p>
+        </p:txBody>
+      </p:sp>
       <p:sp>
         <p:nvSpPr>
           <p:cNvPr id="2" name="Title 1">
@@ -3711,16 +5844,56 @@
             <p:ph type="ctrTitle"/>
           </p:nvPr>
         </p:nvSpPr>
-        <p:spPr/>
-        <p:txBody>
-          <a:bodyPr/>
-          <a:lstStyle/>
-          <a:p>
-            <a:r>
-              <a:rPr lang="en-US"/>
-              <a:t>Author</a:t>
-            </a:r>
-            <a:endParaRPr lang="en-US" dirty="0"/>
+        <p:spPr>
+          <a:xfrm>
+            <a:off x="660041" y="2767106"/>
+            <a:ext cx="2880828" cy="3071906"/>
+          </a:xfrm>
+        </p:spPr>
+        <p:txBody>
+          <a:bodyPr anchor="t">
+            <a:normAutofit/>
+          </a:bodyPr>
+          <a:lstStyle/>
+          <a:p>
+            <a:pPr algn="l"/>
+            <a:r>
+              <a:rPr lang="en-US" sz="4000" dirty="0">
+                <a:solidFill>
+                  <a:schemeClr val="bg1"/>
+                </a:solidFill>
+              </a:rPr>
+              <a:t>À </a:t>
+            </a:r>
+            <a:r>
+              <a:rPr lang="en-US" sz="4000" dirty="0" err="1">
+                <a:solidFill>
+                  <a:schemeClr val="bg1"/>
+                </a:solidFill>
+              </a:rPr>
+              <a:t>propos</a:t>
+            </a:r>
+            <a:r>
+              <a:rPr lang="en-US" sz="4000" dirty="0">
+                <a:solidFill>
+                  <a:schemeClr val="bg1"/>
+                </a:solidFill>
+              </a:rPr>
+              <a:t> de </a:t>
+            </a:r>
+            <a:r>
+              <a:rPr lang="en-US" sz="4000" dirty="0" err="1">
+                <a:solidFill>
+                  <a:schemeClr val="bg1"/>
+                </a:solidFill>
+              </a:rPr>
+              <a:t>l’auteur</a:t>
+            </a:r>
+            <a:endParaRPr lang="en-US" sz="4000" dirty="0">
+              <a:solidFill>
+                <a:schemeClr val="bg1"/>
+              </a:solidFill>
+            </a:endParaRPr>
           </a:p>
         </p:txBody>
       </p:sp>
@@ -3740,15 +5913,57 @@
             <p:ph type="subTitle" idx="1"/>
           </p:nvPr>
         </p:nvSpPr>
-        <p:spPr/>
-        <p:txBody>
-          <a:bodyPr/>
-          <a:lstStyle/>
-          <a:p>
-            <a:endParaRPr lang="en-US"/>
-          </a:p>
-        </p:txBody>
-      </p:sp>
+        <p:spPr>
+          <a:xfrm>
+            <a:off x="660042" y="806824"/>
+            <a:ext cx="2919738" cy="1494117"/>
+          </a:xfrm>
+        </p:spPr>
+        <p:txBody>
+          <a:bodyPr anchor="b">
+            <a:normAutofit/>
+          </a:bodyPr>
+          <a:lstStyle/>
+          <a:p>
+            <a:pPr algn="l"/>
+            <a:endParaRPr lang="en-US" sz="2000">
+              <a:solidFill>
+                <a:srgbClr val="FFFFFF"/>
+              </a:solidFill>
+            </a:endParaRPr>
+          </a:p>
+        </p:txBody>
+      </p:sp>
+      <p:pic>
+        <p:nvPicPr>
+          <p:cNvPr id="5" name="Picture 4">
+            <a:extLst>
+              <a:ext uri="{FF2B5EF4-FFF2-40B4-BE49-F238E27FC236}">
+                <a16:creationId xmlns:a16="http://schemas.microsoft.com/office/drawing/2014/main" id="{2D3F6BE2-1DF4-DB8E-4A76-EFBFF0918722}"/>
+              </a:ext>
+            </a:extLst>
+          </p:cNvPr>
+          <p:cNvPicPr>
+            <a:picLocks noChangeAspect="1"/>
+          </p:cNvPicPr>
+          <p:nvPr/>
+        </p:nvPicPr>
+        <p:blipFill>
+          <a:blip r:embed="rId2"/>
+          <a:stretch>
+            <a:fillRect/>
+          </a:stretch>
+        </p:blipFill>
+        <p:spPr>
+          <a:xfrm>
+            <a:off x="5568161" y="467208"/>
+            <a:ext cx="5094281" cy="5923584"/>
+          </a:xfrm>
+          <a:prstGeom prst="rect">
+            <a:avLst/>
+          </a:prstGeom>
+        </p:spPr>
+      </p:pic>
     </p:spTree>
     <p:extLst>
       <p:ext uri="{BB962C8B-B14F-4D97-AF65-F5344CB8AC3E}">
@@ -3795,14 +6010,23 @@
             <p:ph type="ctrTitle"/>
           </p:nvPr>
         </p:nvSpPr>
-        <p:spPr/>
+        <p:spPr>
+          <a:xfrm>
+            <a:off x="1524000" y="406400"/>
+            <a:ext cx="9144000" cy="950452"/>
+          </a:xfrm>
+        </p:spPr>
         <p:txBody>
           <a:bodyPr/>
           <a:lstStyle/>
           <a:p>
             <a:r>
+              <a:rPr lang="en-US" dirty="0" err="1"/>
+              <a:t>Défis</a:t>
+            </a:r>
+            <a:r>
               <a:rPr lang="en-US" dirty="0"/>
-              <a:t>Business Challenge</a:t>
+              <a:t> Métier</a:t>
             </a:r>
           </a:p>
         </p:txBody>
@@ -3823,12 +6047,81 @@
             <p:ph type="subTitle" idx="1"/>
           </p:nvPr>
         </p:nvSpPr>
-        <p:spPr/>
-        <p:txBody>
-          <a:bodyPr/>
-          <a:lstStyle/>
-          <a:p>
-            <a:endParaRPr lang="en-US"/>
+        <p:spPr>
+          <a:xfrm>
+            <a:off x="1524000" y="1543665"/>
+            <a:ext cx="9144000" cy="4109883"/>
+          </a:xfrm>
+        </p:spPr>
+        <p:txBody>
+          <a:bodyPr>
+            <a:normAutofit fontScale="92500" lnSpcReduction="10000"/>
+          </a:bodyPr>
+          <a:lstStyle/>
+          <a:p>
+            <a:pPr algn="l"/>
+            <a:r>
+              <a:rPr lang="fr-FR" dirty="0"/>
+              <a:t>Les établissements de santé font face à plusieurs défis :</a:t>
+            </a:r>
+          </a:p>
+          <a:p>
+            <a:pPr algn="l"/>
+            <a:endParaRPr lang="fr-FR" dirty="0"/>
+          </a:p>
+          <a:p>
+            <a:pPr algn="l"/>
+            <a:r>
+              <a:rPr lang="fr-FR" dirty="0"/>
+              <a:t>• Création manuelle des comptes</a:t>
+            </a:r>
+          </a:p>
+          <a:p>
+            <a:pPr algn="l"/>
+            <a:r>
+              <a:rPr lang="fr-FR" dirty="0"/>
+              <a:t>• Attribution tardive des accès</a:t>
+            </a:r>
+          </a:p>
+          <a:p>
+            <a:pPr algn="l"/>
+            <a:r>
+              <a:rPr lang="fr-FR" dirty="0"/>
+              <a:t>• Permissions excessives</a:t>
+            </a:r>
+          </a:p>
+          <a:p>
+            <a:pPr algn="l"/>
+            <a:r>
+              <a:rPr lang="fr-FR" dirty="0"/>
+              <a:t>• Comptes orphelins après le départ d'employés</a:t>
+            </a:r>
+          </a:p>
+          <a:p>
+            <a:pPr algn="l"/>
+            <a:r>
+              <a:rPr lang="fr-FR" dirty="0"/>
+              <a:t>• Difficultés d'audit et de conformité</a:t>
+            </a:r>
+          </a:p>
+          <a:p>
+            <a:pPr algn="l"/>
+            <a:r>
+              <a:rPr lang="fr-FR" dirty="0"/>
+              <a:t>• Risques d'erreurs humaines</a:t>
+            </a:r>
+          </a:p>
+          <a:p>
+            <a:pPr algn="l"/>
+            <a:endParaRPr lang="fr-FR" dirty="0"/>
+          </a:p>
+          <a:p>
+            <a:pPr algn="l"/>
+            <a:r>
+              <a:rPr lang="fr-FR" dirty="0"/>
+              <a:t>Ces défis augmentent les risques de sécurité et les coûts opérationnels.</a:t>
+            </a:r>
+            <a:endParaRPr lang="en-US" dirty="0"/>
           </a:p>
         </p:txBody>
       </p:sp>
@@ -3848,6 +6141,14 @@
 <file path=ppt/slides/slide3.xml><?xml version="1.0" encoding="utf-8"?>
 <p:sld xmlns:a="http://schemas.openxmlformats.org/drawingml/2006/main" xmlns:r="http://schemas.openxmlformats.org/officeDocument/2006/relationships" xmlns:p="http://schemas.openxmlformats.org/presentationml/2006/main">
   <p:cSld>
+    <p:bg>
+      <p:bgPr>
+        <a:solidFill>
+          <a:schemeClr val="bg1"/>
+        </a:solidFill>
+        <a:effectLst/>
+      </p:bgPr>
+    </p:bg>
     <p:spTree>
       <p:nvGrpSpPr>
         <p:cNvPr id="1" name="">
@@ -3868,6 +6169,371 @@
           <a:chExt cx="0" cy="0"/>
         </a:xfrm>
       </p:grpSpPr>
+      <p:sp useBgFill="1">
+        <p:nvSpPr>
+          <p:cNvPr id="25" name="Rectangle 24">
+            <a:extLst>
+              <a:ext uri="{FF2B5EF4-FFF2-40B4-BE49-F238E27FC236}">
+                <a16:creationId xmlns:a16="http://schemas.microsoft.com/office/drawing/2014/main" id="{1DF91F20-B96F-4F77-AC3E-2CDD3BAA10C2}"/>
+              </a:ext>
+              <a:ext uri="{C183D7F6-B498-43B3-948B-1728B52AA6E4}">
+                <adec:decorative xmlns:adec="http://schemas.microsoft.com/office/drawing/2017/decorative" val="1"/>
+              </a:ext>
+            </a:extLst>
+          </p:cNvPr>
+          <p:cNvSpPr>
+            <a:spLocks noGrp="1" noRot="1" noChangeAspect="1" noMove="1" noResize="1" noEditPoints="1" noAdjustHandles="1" noChangeArrowheads="1" noChangeShapeType="1" noTextEdit="1"/>
+          </p:cNvSpPr>
+          <p:nvPr>
+            <p:extLst>
+              <p:ext uri="{386F3935-93C4-4BCD-93E2-E3B085C9AB24}">
+                <p16:designElem xmlns:p16="http://schemas.microsoft.com/office/powerpoint/2015/main" val="1"/>
+              </p:ext>
+            </p:extLst>
+          </p:nvPr>
+        </p:nvSpPr>
+        <p:spPr>
+          <a:xfrm>
+            <a:off x="-2" y="0"/>
+            <a:ext cx="12192004" cy="6858000"/>
+          </a:xfrm>
+          <a:prstGeom prst="rect">
+            <a:avLst/>
+          </a:prstGeom>
+          <a:ln>
+            <a:noFill/>
+          </a:ln>
+        </p:spPr>
+        <p:style>
+          <a:lnRef idx="2">
+            <a:schemeClr val="accent1">
+              <a:shade val="50000"/>
+            </a:schemeClr>
+          </a:lnRef>
+          <a:fillRef idx="1">
+            <a:schemeClr val="accent1"/>
+          </a:fillRef>
+          <a:effectRef idx="0">
+            <a:schemeClr val="accent1"/>
+          </a:effectRef>
+          <a:fontRef idx="minor">
+            <a:schemeClr val="lt1"/>
+          </a:fontRef>
+        </p:style>
+        <p:txBody>
+          <a:bodyPr rtlCol="0" anchor="ctr"/>
+          <a:lstStyle/>
+          <a:p>
+            <a:pPr algn="ctr"/>
+            <a:endParaRPr lang="en-US"/>
+          </a:p>
+        </p:txBody>
+      </p:sp>
+      <p:sp>
+        <p:nvSpPr>
+          <p:cNvPr id="27" name="Rectangle 26">
+            <a:extLst>
+              <a:ext uri="{FF2B5EF4-FFF2-40B4-BE49-F238E27FC236}">
+                <a16:creationId xmlns:a16="http://schemas.microsoft.com/office/drawing/2014/main" id="{C3D487F7-9050-4871-B351-34A72ADB296C}"/>
+              </a:ext>
+              <a:ext uri="{C183D7F6-B498-43B3-948B-1728B52AA6E4}">
+                <adec:decorative xmlns:adec="http://schemas.microsoft.com/office/drawing/2017/decorative" val="1"/>
+              </a:ext>
+            </a:extLst>
+          </p:cNvPr>
+          <p:cNvSpPr>
+            <a:spLocks noGrp="1" noRot="1" noChangeAspect="1" noMove="1" noResize="1" noEditPoints="1" noAdjustHandles="1" noChangeArrowheads="1" noChangeShapeType="1" noTextEdit="1"/>
+          </p:cNvSpPr>
+          <p:nvPr>
+            <p:extLst>
+              <p:ext uri="{386F3935-93C4-4BCD-93E2-E3B085C9AB24}">
+                <p16:designElem xmlns:p16="http://schemas.microsoft.com/office/powerpoint/2015/main" val="1"/>
+              </p:ext>
+            </p:extLst>
+          </p:nvPr>
+        </p:nvSpPr>
+        <p:spPr>
+          <a:xfrm rot="10800000" flipH="1">
+            <a:off x="-484" y="-1"/>
+            <a:ext cx="8111296" cy="6858000"/>
+          </a:xfrm>
+          <a:prstGeom prst="rect">
+            <a:avLst/>
+          </a:prstGeom>
+          <a:gradFill>
+            <a:gsLst>
+              <a:gs pos="8000">
+                <a:srgbClr val="000000">
+                  <a:alpha val="94000"/>
+                </a:srgbClr>
+              </a:gs>
+              <a:gs pos="100000">
+                <a:schemeClr val="accent1"/>
+              </a:gs>
+            </a:gsLst>
+            <a:lin ang="2400000" scaled="0"/>
+          </a:gradFill>
+          <a:ln>
+            <a:noFill/>
+          </a:ln>
+        </p:spPr>
+        <p:style>
+          <a:lnRef idx="2">
+            <a:schemeClr val="accent1">
+              <a:shade val="50000"/>
+            </a:schemeClr>
+          </a:lnRef>
+          <a:fillRef idx="1">
+            <a:schemeClr val="accent1"/>
+          </a:fillRef>
+          <a:effectRef idx="0">
+            <a:schemeClr val="accent1"/>
+          </a:effectRef>
+          <a:fontRef idx="minor">
+            <a:schemeClr val="lt1"/>
+          </a:fontRef>
+        </p:style>
+        <p:txBody>
+          <a:bodyPr rtlCol="0" anchor="ctr"/>
+          <a:lstStyle/>
+          <a:p>
+            <a:pPr algn="ctr"/>
+            <a:endParaRPr lang="en-US"/>
+          </a:p>
+        </p:txBody>
+      </p:sp>
+      <p:sp>
+        <p:nvSpPr>
+          <p:cNvPr id="29" name="Rectangle 28">
+            <a:extLst>
+              <a:ext uri="{FF2B5EF4-FFF2-40B4-BE49-F238E27FC236}">
+                <a16:creationId xmlns:a16="http://schemas.microsoft.com/office/drawing/2014/main" id="{F43C27DD-EF6A-4C48-9669-C2970E71A814}"/>
+              </a:ext>
+              <a:ext uri="{C183D7F6-B498-43B3-948B-1728B52AA6E4}">
+                <adec:decorative xmlns:adec="http://schemas.microsoft.com/office/drawing/2017/decorative" val="1"/>
+              </a:ext>
+            </a:extLst>
+          </p:cNvPr>
+          <p:cNvSpPr>
+            <a:spLocks noGrp="1" noRot="1" noChangeAspect="1" noMove="1" noResize="1" noEditPoints="1" noAdjustHandles="1" noChangeArrowheads="1" noChangeShapeType="1" noTextEdit="1"/>
+          </p:cNvSpPr>
+          <p:nvPr>
+            <p:extLst>
+              <p:ext uri="{386F3935-93C4-4BCD-93E2-E3B085C9AB24}">
+                <p16:designElem xmlns:p16="http://schemas.microsoft.com/office/powerpoint/2015/main" val="1"/>
+              </p:ext>
+            </p:extLst>
+          </p:nvPr>
+        </p:nvSpPr>
+        <p:spPr>
+          <a:xfrm rot="16200000" flipH="1">
+            <a:off x="858281" y="-401562"/>
+            <a:ext cx="6858004" cy="7661129"/>
+          </a:xfrm>
+          <a:prstGeom prst="rect">
+            <a:avLst/>
+          </a:prstGeom>
+          <a:gradFill>
+            <a:gsLst>
+              <a:gs pos="0">
+                <a:schemeClr val="accent1">
+                  <a:alpha val="23000"/>
+                </a:schemeClr>
+              </a:gs>
+              <a:gs pos="71000">
+                <a:schemeClr val="accent1">
+                  <a:lumMod val="50000"/>
+                  <a:alpha val="0"/>
+                </a:schemeClr>
+              </a:gs>
+              <a:gs pos="100000">
+                <a:srgbClr val="000000">
+                  <a:alpha val="0"/>
+                </a:srgbClr>
+              </a:gs>
+            </a:gsLst>
+            <a:lin ang="8400000" scaled="0"/>
+          </a:gradFill>
+          <a:ln>
+            <a:noFill/>
+          </a:ln>
+        </p:spPr>
+        <p:style>
+          <a:lnRef idx="2">
+            <a:schemeClr val="accent1">
+              <a:shade val="50000"/>
+            </a:schemeClr>
+          </a:lnRef>
+          <a:fillRef idx="1">
+            <a:schemeClr val="accent1"/>
+          </a:fillRef>
+          <a:effectRef idx="0">
+            <a:schemeClr val="accent1"/>
+          </a:effectRef>
+          <a:fontRef idx="minor">
+            <a:schemeClr val="lt1"/>
+          </a:fontRef>
+        </p:style>
+        <p:txBody>
+          <a:bodyPr rtlCol="0" anchor="ctr"/>
+          <a:lstStyle/>
+          <a:p>
+            <a:pPr algn="ctr"/>
+            <a:endParaRPr lang="en-US" dirty="0"/>
+          </a:p>
+        </p:txBody>
+      </p:sp>
+      <p:sp>
+        <p:nvSpPr>
+          <p:cNvPr id="31" name="Rectangle 30">
+            <a:extLst>
+              <a:ext uri="{FF2B5EF4-FFF2-40B4-BE49-F238E27FC236}">
+                <a16:creationId xmlns:a16="http://schemas.microsoft.com/office/drawing/2014/main" id="{C84384FE-1C88-4CAA-8FB8-2313A3AE734D}"/>
+              </a:ext>
+              <a:ext uri="{C183D7F6-B498-43B3-948B-1728B52AA6E4}">
+                <adec:decorative xmlns:adec="http://schemas.microsoft.com/office/drawing/2017/decorative" val="1"/>
+              </a:ext>
+            </a:extLst>
+          </p:cNvPr>
+          <p:cNvSpPr>
+            <a:spLocks noGrp="1" noRot="1" noChangeAspect="1" noMove="1" noResize="1" noEditPoints="1" noAdjustHandles="1" noChangeArrowheads="1" noChangeShapeType="1" noTextEdit="1"/>
+          </p:cNvSpPr>
+          <p:nvPr>
+            <p:extLst>
+              <p:ext uri="{386F3935-93C4-4BCD-93E2-E3B085C9AB24}">
+                <p16:designElem xmlns:p16="http://schemas.microsoft.com/office/powerpoint/2015/main" val="1"/>
+              </p:ext>
+            </p:extLst>
+          </p:nvPr>
+        </p:nvSpPr>
+        <p:spPr>
+          <a:xfrm rot="10800000" flipH="1">
+            <a:off x="-7519" y="-1"/>
+            <a:ext cx="8118331" cy="6858000"/>
+          </a:xfrm>
+          <a:prstGeom prst="rect">
+            <a:avLst/>
+          </a:prstGeom>
+          <a:gradFill>
+            <a:gsLst>
+              <a:gs pos="14000">
+                <a:schemeClr val="accent1">
+                  <a:alpha val="0"/>
+                </a:schemeClr>
+              </a:gs>
+              <a:gs pos="100000">
+                <a:srgbClr val="000000">
+                  <a:alpha val="82000"/>
+                </a:srgbClr>
+              </a:gs>
+            </a:gsLst>
+            <a:lin ang="4200000" scaled="0"/>
+          </a:gradFill>
+          <a:ln>
+            <a:noFill/>
+          </a:ln>
+        </p:spPr>
+        <p:style>
+          <a:lnRef idx="2">
+            <a:schemeClr val="accent1">
+              <a:shade val="50000"/>
+            </a:schemeClr>
+          </a:lnRef>
+          <a:fillRef idx="1">
+            <a:schemeClr val="accent1"/>
+          </a:fillRef>
+          <a:effectRef idx="0">
+            <a:schemeClr val="accent1"/>
+          </a:effectRef>
+          <a:fontRef idx="minor">
+            <a:schemeClr val="lt1"/>
+          </a:fontRef>
+        </p:style>
+        <p:txBody>
+          <a:bodyPr rtlCol="0" anchor="ctr"/>
+          <a:lstStyle/>
+          <a:p>
+            <a:pPr algn="ctr"/>
+            <a:endParaRPr lang="en-US" dirty="0"/>
+          </a:p>
+        </p:txBody>
+      </p:sp>
+      <p:sp>
+        <p:nvSpPr>
+          <p:cNvPr id="33" name="Oval 32">
+            <a:extLst>
+              <a:ext uri="{FF2B5EF4-FFF2-40B4-BE49-F238E27FC236}">
+                <a16:creationId xmlns:a16="http://schemas.microsoft.com/office/drawing/2014/main" id="{87B6A113-58CD-406C-BCE4-6E1F1F2BE696}"/>
+              </a:ext>
+              <a:ext uri="{C183D7F6-B498-43B3-948B-1728B52AA6E4}">
+                <adec:decorative xmlns:adec="http://schemas.microsoft.com/office/drawing/2017/decorative" val="1"/>
+              </a:ext>
+            </a:extLst>
+          </p:cNvPr>
+          <p:cNvSpPr>
+            <a:spLocks noGrp="1" noRot="1" noChangeAspect="1" noMove="1" noResize="1" noEditPoints="1" noAdjustHandles="1" noChangeArrowheads="1" noChangeShapeType="1" noTextEdit="1"/>
+          </p:cNvSpPr>
+          <p:nvPr>
+            <p:extLst>
+              <p:ext uri="{386F3935-93C4-4BCD-93E2-E3B085C9AB24}">
+                <p16:designElem xmlns:p16="http://schemas.microsoft.com/office/powerpoint/2015/main" val="1"/>
+              </p:ext>
+            </p:extLst>
+          </p:nvPr>
+        </p:nvSpPr>
+        <p:spPr>
+          <a:xfrm rot="15449520">
+            <a:off x="2569700" y="983306"/>
+            <a:ext cx="5005754" cy="5005754"/>
+          </a:xfrm>
+          <a:prstGeom prst="ellipse">
+            <a:avLst/>
+          </a:prstGeom>
+          <a:gradFill>
+            <a:gsLst>
+              <a:gs pos="17000">
+                <a:schemeClr val="accent1">
+                  <a:lumMod val="75000"/>
+                  <a:alpha val="0"/>
+                </a:schemeClr>
+              </a:gs>
+              <a:gs pos="82000">
+                <a:srgbClr val="000000">
+                  <a:alpha val="24000"/>
+                </a:srgbClr>
+              </a:gs>
+            </a:gsLst>
+            <a:lin ang="9000000" scaled="0"/>
+          </a:gradFill>
+          <a:ln>
+            <a:noFill/>
+          </a:ln>
+        </p:spPr>
+        <p:style>
+          <a:lnRef idx="2">
+            <a:schemeClr val="accent1">
+              <a:shade val="50000"/>
+            </a:schemeClr>
+          </a:lnRef>
+          <a:fillRef idx="1">
+            <a:schemeClr val="accent1"/>
+          </a:fillRef>
+          <a:effectRef idx="0">
+            <a:schemeClr val="accent1"/>
+          </a:effectRef>
+          <a:fontRef idx="minor">
+            <a:schemeClr val="lt1"/>
+          </a:fontRef>
+        </p:style>
+        <p:txBody>
+          <a:bodyPr rtlCol="0" anchor="ctr"/>
+          <a:lstStyle/>
+          <a:p>
+            <a:pPr algn="ctr"/>
+            <a:endParaRPr lang="en-US" dirty="0"/>
+          </a:p>
+        </p:txBody>
+      </p:sp>
       <p:sp>
         <p:nvSpPr>
           <p:cNvPr id="2" name="Title 1">
@@ -3884,24 +6550,112 @@
             <p:ph type="ctrTitle"/>
           </p:nvPr>
         </p:nvSpPr>
-        <p:spPr/>
-        <p:txBody>
-          <a:bodyPr/>
-          <a:lstStyle/>
-          <a:p>
-            <a:r>
-              <a:rPr lang="en-US" dirty="0"/>
-              <a:t>Solution Overview</a:t>
-            </a:r>
-          </a:p>
-        </p:txBody>
-      </p:sp>
-      <p:sp>
-        <p:nvSpPr>
-          <p:cNvPr id="3" name="Subtitle 2">
-            <a:extLst>
-              <a:ext uri="{FF2B5EF4-FFF2-40B4-BE49-F238E27FC236}">
-                <a16:creationId xmlns:a16="http://schemas.microsoft.com/office/drawing/2014/main" id="{C22B5A63-CFB3-8022-3F73-5C4FC6AF39AA}"/>
+        <p:spPr>
+          <a:xfrm>
+            <a:off x="1011948" y="857251"/>
+            <a:ext cx="6219582" cy="3160113"/>
+          </a:xfrm>
+        </p:spPr>
+        <p:txBody>
+          <a:bodyPr anchor="b">
+            <a:normAutofit/>
+          </a:bodyPr>
+          <a:lstStyle/>
+          <a:p>
+            <a:pPr algn="l"/>
+            <a:r>
+              <a:rPr lang="en-US" sz="4800">
+                <a:solidFill>
+                  <a:srgbClr val="FFFFFF"/>
+                </a:solidFill>
+              </a:rPr>
+              <a:t>Vue d’Ensemble de la Solution</a:t>
+            </a:r>
+          </a:p>
+        </p:txBody>
+      </p:sp>
+      <p:sp>
+        <p:nvSpPr>
+          <p:cNvPr id="35" name="Rectangle 34">
+            <a:extLst>
+              <a:ext uri="{FF2B5EF4-FFF2-40B4-BE49-F238E27FC236}">
+                <a16:creationId xmlns:a16="http://schemas.microsoft.com/office/drawing/2014/main" id="{05A1AA86-B7E6-4C02-AA34-F1A25CD4CCBD}"/>
+              </a:ext>
+              <a:ext uri="{C183D7F6-B498-43B3-948B-1728B52AA6E4}">
+                <adec:decorative xmlns:adec="http://schemas.microsoft.com/office/drawing/2017/decorative" val="1"/>
+              </a:ext>
+            </a:extLst>
+          </p:cNvPr>
+          <p:cNvSpPr>
+            <a:spLocks noGrp="1" noRot="1" noChangeAspect="1" noMove="1" noResize="1" noEditPoints="1" noAdjustHandles="1" noChangeArrowheads="1" noChangeShapeType="1" noTextEdit="1"/>
+          </p:cNvSpPr>
+          <p:nvPr>
+            <p:extLst>
+              <p:ext uri="{386F3935-93C4-4BCD-93E2-E3B085C9AB24}">
+                <p16:designElem xmlns:p16="http://schemas.microsoft.com/office/powerpoint/2015/main" val="1"/>
+              </p:ext>
+            </p:extLst>
+          </p:nvPr>
+        </p:nvSpPr>
+        <p:spPr>
+          <a:xfrm rot="10800000" flipH="1">
+            <a:off x="-7518" y="4354178"/>
+            <a:ext cx="8118330" cy="2503817"/>
+          </a:xfrm>
+          <a:prstGeom prst="rect">
+            <a:avLst/>
+          </a:prstGeom>
+          <a:gradFill>
+            <a:gsLst>
+              <a:gs pos="0">
+                <a:schemeClr val="accent1">
+                  <a:lumMod val="75000"/>
+                  <a:alpha val="33000"/>
+                </a:schemeClr>
+              </a:gs>
+              <a:gs pos="83000">
+                <a:srgbClr val="000000">
+                  <a:alpha val="21000"/>
+                </a:srgbClr>
+              </a:gs>
+            </a:gsLst>
+            <a:lin ang="8400000" scaled="0"/>
+          </a:gradFill>
+          <a:ln>
+            <a:noFill/>
+          </a:ln>
+        </p:spPr>
+        <p:style>
+          <a:lnRef idx="2">
+            <a:schemeClr val="accent1">
+              <a:shade val="50000"/>
+            </a:schemeClr>
+          </a:lnRef>
+          <a:fillRef idx="1">
+            <a:schemeClr val="accent1"/>
+          </a:fillRef>
+          <a:effectRef idx="0">
+            <a:schemeClr val="accent1"/>
+          </a:effectRef>
+          <a:fontRef idx="minor">
+            <a:schemeClr val="lt1"/>
+          </a:fontRef>
+        </p:style>
+        <p:txBody>
+          <a:bodyPr rtlCol="0" anchor="ctr"/>
+          <a:lstStyle/>
+          <a:p>
+            <a:pPr algn="ctr"/>
+            <a:endParaRPr lang="en-US" dirty="0"/>
+          </a:p>
+        </p:txBody>
+      </p:sp>
+      <p:sp>
+        <p:nvSpPr>
+          <p:cNvPr id="7" name="Subtitle 6">
+            <a:extLst>
+              <a:ext uri="{FF2B5EF4-FFF2-40B4-BE49-F238E27FC236}">
+                <a16:creationId xmlns:a16="http://schemas.microsoft.com/office/drawing/2014/main" id="{BB06E2AE-6DB9-FDE5-F89B-EAD160B0D055}"/>
               </a:ext>
             </a:extLst>
           </p:cNvPr>
@@ -3912,15 +6666,57 @@
             <p:ph type="subTitle" idx="1"/>
           </p:nvPr>
         </p:nvSpPr>
-        <p:spPr/>
-        <p:txBody>
-          <a:bodyPr/>
-          <a:lstStyle/>
-          <a:p>
-            <a:endParaRPr lang="en-US" dirty="0"/>
-          </a:p>
-        </p:txBody>
-      </p:sp>
+        <p:spPr>
+          <a:xfrm>
+            <a:off x="1105661" y="4800600"/>
+            <a:ext cx="5179879" cy="1200149"/>
+          </a:xfrm>
+        </p:spPr>
+        <p:txBody>
+          <a:bodyPr anchor="t">
+            <a:normAutofit/>
+          </a:bodyPr>
+          <a:lstStyle/>
+          <a:p>
+            <a:pPr algn="l"/>
+            <a:endParaRPr lang="en-US">
+              <a:solidFill>
+                <a:srgbClr val="FFFFFF"/>
+              </a:solidFill>
+            </a:endParaRPr>
+          </a:p>
+        </p:txBody>
+      </p:sp>
+      <p:pic>
+        <p:nvPicPr>
+          <p:cNvPr id="5" name="Picture 4">
+            <a:extLst>
+              <a:ext uri="{FF2B5EF4-FFF2-40B4-BE49-F238E27FC236}">
+                <a16:creationId xmlns:a16="http://schemas.microsoft.com/office/drawing/2014/main" id="{4767D998-7D07-7EC4-699F-EB1AB3575100}"/>
+              </a:ext>
+            </a:extLst>
+          </p:cNvPr>
+          <p:cNvPicPr>
+            <a:picLocks noChangeAspect="1"/>
+          </p:cNvPicPr>
+          <p:nvPr/>
+        </p:nvPicPr>
+        <p:blipFill>
+          <a:blip r:embed="rId2"/>
+          <a:stretch>
+            <a:fillRect/>
+          </a:stretch>
+        </p:blipFill>
+        <p:spPr>
+          <a:xfrm>
+            <a:off x="8560981" y="905373"/>
+            <a:ext cx="3173819" cy="5047254"/>
+          </a:xfrm>
+          <a:prstGeom prst="rect">
+            <a:avLst/>
+          </a:prstGeom>
+        </p:spPr>
+      </p:pic>
     </p:spTree>
     <p:extLst>
       <p:ext uri="{BB962C8B-B14F-4D97-AF65-F5344CB8AC3E}">
@@ -3937,6 +6733,14 @@
 <file path=ppt/slides/slide4.xml><?xml version="1.0" encoding="utf-8"?>
 <p:sld xmlns:a="http://schemas.openxmlformats.org/drawingml/2006/main" xmlns:r="http://schemas.openxmlformats.org/officeDocument/2006/relationships" xmlns:p="http://schemas.openxmlformats.org/presentationml/2006/main">
   <p:cSld>
+    <p:bg>
+      <p:bgPr>
+        <a:solidFill>
+          <a:schemeClr val="bg1"/>
+        </a:solidFill>
+        <a:effectLst/>
+      </p:bgPr>
+    </p:bg>
     <p:spTree>
       <p:nvGrpSpPr>
         <p:cNvPr id="1" name="">
@@ -3957,6 +6761,309 @@
           <a:chExt cx="0" cy="0"/>
         </a:xfrm>
       </p:grpSpPr>
+      <p:sp useBgFill="1">
+        <p:nvSpPr>
+          <p:cNvPr id="10" name="Rectangle 9">
+            <a:extLst>
+              <a:ext uri="{FF2B5EF4-FFF2-40B4-BE49-F238E27FC236}">
+                <a16:creationId xmlns:a16="http://schemas.microsoft.com/office/drawing/2014/main" id="{A8384FB5-9ADC-4DDC-881B-597D56F5B15D}"/>
+              </a:ext>
+              <a:ext uri="{C183D7F6-B498-43B3-948B-1728B52AA6E4}">
+                <adec:decorative xmlns:adec="http://schemas.microsoft.com/office/drawing/2017/decorative" val="1"/>
+              </a:ext>
+            </a:extLst>
+          </p:cNvPr>
+          <p:cNvSpPr>
+            <a:spLocks noGrp="1" noRot="1" noChangeAspect="1" noMove="1" noResize="1" noEditPoints="1" noAdjustHandles="1" noChangeArrowheads="1" noChangeShapeType="1" noTextEdit="1"/>
+          </p:cNvSpPr>
+          <p:nvPr>
+            <p:extLst>
+              <p:ext uri="{386F3935-93C4-4BCD-93E2-E3B085C9AB24}">
+                <p16:designElem xmlns:p16="http://schemas.microsoft.com/office/powerpoint/2015/main" val="1"/>
+              </p:ext>
+            </p:extLst>
+          </p:nvPr>
+        </p:nvSpPr>
+        <p:spPr>
+          <a:xfrm>
+            <a:off x="0" y="0"/>
+            <a:ext cx="12192000" cy="6858000"/>
+          </a:xfrm>
+          <a:prstGeom prst="rect">
+            <a:avLst/>
+          </a:prstGeom>
+          <a:ln w="12700" cap="flat" cmpd="sng" algn="ctr">
+            <a:noFill/>
+            <a:prstDash val="solid"/>
+            <a:miter lim="800000"/>
+          </a:ln>
+          <a:effectLst/>
+          <a:extLst>
+            <a:ext uri="{91240B29-F687-4F45-9708-019B960494DF}">
+              <a14:hiddenLine xmlns:a14="http://schemas.microsoft.com/office/drawing/2010/main" w="12700" cap="flat" cmpd="sng" algn="ctr">
+                <a:solidFill>
+                  <a:schemeClr val="accent1">
+                    <a:shade val="50000"/>
+                  </a:schemeClr>
+                </a:solidFill>
+                <a:prstDash val="solid"/>
+                <a:miter lim="800000"/>
+              </a14:hiddenLine>
+            </a:ext>
+          </a:extLst>
+        </p:spPr>
+        <p:style>
+          <a:lnRef idx="2">
+            <a:schemeClr val="accent1">
+              <a:shade val="50000"/>
+            </a:schemeClr>
+          </a:lnRef>
+          <a:fillRef idx="1">
+            <a:schemeClr val="accent1"/>
+          </a:fillRef>
+          <a:effectRef idx="0">
+            <a:schemeClr val="accent1"/>
+          </a:effectRef>
+          <a:fontRef idx="minor">
+            <a:schemeClr val="lt1"/>
+          </a:fontRef>
+        </p:style>
+        <p:txBody>
+          <a:bodyPr rtlCol="0" anchor="ctr"/>
+          <a:lstStyle/>
+          <a:p>
+            <a:pPr algn="ctr"/>
+            <a:endParaRPr lang="en-US"/>
+          </a:p>
+        </p:txBody>
+      </p:sp>
+      <p:sp>
+        <p:nvSpPr>
+          <p:cNvPr id="12" name="Rectangle 11">
+            <a:extLst>
+              <a:ext uri="{FF2B5EF4-FFF2-40B4-BE49-F238E27FC236}">
+                <a16:creationId xmlns:a16="http://schemas.microsoft.com/office/drawing/2014/main" id="{1199E1B1-A8C0-4FE8-A5A8-1CB41D69F857}"/>
+              </a:ext>
+              <a:ext uri="{C183D7F6-B498-43B3-948B-1728B52AA6E4}">
+                <adec:decorative xmlns:adec="http://schemas.microsoft.com/office/drawing/2017/decorative" val="1"/>
+              </a:ext>
+            </a:extLst>
+          </p:cNvPr>
+          <p:cNvSpPr>
+            <a:spLocks noGrp="1" noRot="1" noChangeAspect="1" noMove="1" noResize="1" noEditPoints="1" noAdjustHandles="1" noChangeArrowheads="1" noChangeShapeType="1" noTextEdit="1"/>
+          </p:cNvSpPr>
+          <p:nvPr>
+            <p:extLst>
+              <p:ext uri="{386F3935-93C4-4BCD-93E2-E3B085C9AB24}">
+                <p16:designElem xmlns:p16="http://schemas.microsoft.com/office/powerpoint/2015/main" val="1"/>
+              </p:ext>
+            </p:extLst>
+          </p:nvPr>
+        </p:nvSpPr>
+        <p:spPr>
+          <a:xfrm rot="10800000" flipH="1">
+            <a:off x="2" y="0"/>
+            <a:ext cx="12191998" cy="1575955"/>
+          </a:xfrm>
+          <a:prstGeom prst="rect">
+            <a:avLst/>
+          </a:prstGeom>
+          <a:gradFill>
+            <a:gsLst>
+              <a:gs pos="0">
+                <a:srgbClr val="000000">
+                  <a:alpha val="96000"/>
+                </a:srgbClr>
+              </a:gs>
+              <a:gs pos="100000">
+                <a:schemeClr val="accent1">
+                  <a:lumMod val="75000"/>
+                </a:schemeClr>
+              </a:gs>
+            </a:gsLst>
+            <a:lin ang="6000000" scaled="0"/>
+          </a:gradFill>
+          <a:ln>
+            <a:noFill/>
+          </a:ln>
+        </p:spPr>
+        <p:style>
+          <a:lnRef idx="2">
+            <a:schemeClr val="accent1">
+              <a:shade val="50000"/>
+            </a:schemeClr>
+          </a:lnRef>
+          <a:fillRef idx="1">
+            <a:schemeClr val="accent1"/>
+          </a:fillRef>
+          <a:effectRef idx="0">
+            <a:schemeClr val="accent1"/>
+          </a:effectRef>
+          <a:fontRef idx="minor">
+            <a:schemeClr val="lt1"/>
+          </a:fontRef>
+        </p:style>
+        <p:txBody>
+          <a:bodyPr rtlCol="0" anchor="ctr"/>
+          <a:lstStyle/>
+          <a:p>
+            <a:pPr algn="ctr"/>
+            <a:endParaRPr lang="en-US"/>
+          </a:p>
+        </p:txBody>
+      </p:sp>
+      <p:sp>
+        <p:nvSpPr>
+          <p:cNvPr id="14" name="Rectangle 13">
+            <a:extLst>
+              <a:ext uri="{FF2B5EF4-FFF2-40B4-BE49-F238E27FC236}">
+                <a16:creationId xmlns:a16="http://schemas.microsoft.com/office/drawing/2014/main" id="{84A8DE83-DE75-4B41-9DB4-A7EC0B0DEC0B}"/>
+              </a:ext>
+              <a:ext uri="{C183D7F6-B498-43B3-948B-1728B52AA6E4}">
+                <adec:decorative xmlns:adec="http://schemas.microsoft.com/office/drawing/2017/decorative" val="1"/>
+              </a:ext>
+            </a:extLst>
+          </p:cNvPr>
+          <p:cNvSpPr>
+            <a:spLocks noGrp="1" noRot="1" noChangeAspect="1" noMove="1" noResize="1" noEditPoints="1" noAdjustHandles="1" noChangeArrowheads="1" noChangeShapeType="1" noTextEdit="1"/>
+          </p:cNvSpPr>
+          <p:nvPr>
+            <p:extLst>
+              <p:ext uri="{386F3935-93C4-4BCD-93E2-E3B085C9AB24}">
+                <p16:designElem xmlns:p16="http://schemas.microsoft.com/office/powerpoint/2015/main" val="1"/>
+              </p:ext>
+            </p:extLst>
+          </p:nvPr>
+        </p:nvSpPr>
+        <p:spPr>
+          <a:xfrm>
+            <a:off x="0" y="0"/>
+            <a:ext cx="8128856" cy="1575461"/>
+          </a:xfrm>
+          <a:prstGeom prst="rect">
+            <a:avLst/>
+          </a:prstGeom>
+          <a:gradFill>
+            <a:gsLst>
+              <a:gs pos="0">
+                <a:schemeClr val="accent1">
+                  <a:alpha val="41000"/>
+                </a:schemeClr>
+              </a:gs>
+              <a:gs pos="74000">
+                <a:schemeClr val="accent1">
+                  <a:lumMod val="60000"/>
+                  <a:lumOff val="40000"/>
+                  <a:alpha val="0"/>
+                </a:schemeClr>
+              </a:gs>
+            </a:gsLst>
+            <a:lin ang="8400000" scaled="0"/>
+          </a:gradFill>
+          <a:ln>
+            <a:noFill/>
+          </a:ln>
+        </p:spPr>
+        <p:style>
+          <a:lnRef idx="2">
+            <a:schemeClr val="accent1">
+              <a:shade val="50000"/>
+            </a:schemeClr>
+          </a:lnRef>
+          <a:fillRef idx="1">
+            <a:schemeClr val="accent1"/>
+          </a:fillRef>
+          <a:effectRef idx="0">
+            <a:schemeClr val="accent1"/>
+          </a:effectRef>
+          <a:fontRef idx="minor">
+            <a:schemeClr val="lt1"/>
+          </a:fontRef>
+        </p:style>
+        <p:txBody>
+          <a:bodyPr rtlCol="0" anchor="ctr"/>
+          <a:lstStyle/>
+          <a:p>
+            <a:pPr algn="ctr"/>
+            <a:endParaRPr lang="en-US"/>
+          </a:p>
+        </p:txBody>
+      </p:sp>
+      <p:sp>
+        <p:nvSpPr>
+          <p:cNvPr id="16" name="Rectangle 15">
+            <a:extLst>
+              <a:ext uri="{FF2B5EF4-FFF2-40B4-BE49-F238E27FC236}">
+                <a16:creationId xmlns:a16="http://schemas.microsoft.com/office/drawing/2014/main" id="{A7009A0A-BEF5-4EAC-AF15-E4F9F002E239}"/>
+              </a:ext>
+              <a:ext uri="{C183D7F6-B498-43B3-948B-1728B52AA6E4}">
+                <adec:decorative xmlns:adec="http://schemas.microsoft.com/office/drawing/2017/decorative" val="1"/>
+              </a:ext>
+            </a:extLst>
+          </p:cNvPr>
+          <p:cNvSpPr>
+            <a:spLocks noGrp="1" noRot="1" noChangeAspect="1" noMove="1" noResize="1" noEditPoints="1" noAdjustHandles="1" noChangeArrowheads="1" noChangeShapeType="1" noTextEdit="1"/>
+          </p:cNvSpPr>
+          <p:nvPr>
+            <p:extLst>
+              <p:ext uri="{386F3935-93C4-4BCD-93E2-E3B085C9AB24}">
+                <p16:designElem xmlns:p16="http://schemas.microsoft.com/office/powerpoint/2015/main" val="1"/>
+              </p:ext>
+            </p:extLst>
+          </p:nvPr>
+        </p:nvSpPr>
+        <p:spPr>
+          <a:xfrm flipH="1">
+            <a:off x="-3" y="-1"/>
+            <a:ext cx="12192002" cy="1574311"/>
+          </a:xfrm>
+          <a:prstGeom prst="rect">
+            <a:avLst/>
+          </a:prstGeom>
+          <a:gradFill>
+            <a:gsLst>
+              <a:gs pos="0">
+                <a:srgbClr val="000000">
+                  <a:alpha val="63000"/>
+                </a:srgbClr>
+              </a:gs>
+              <a:gs pos="78000">
+                <a:schemeClr val="accent1">
+                  <a:alpha val="15000"/>
+                </a:schemeClr>
+              </a:gs>
+            </a:gsLst>
+            <a:lin ang="15600000" scaled="0"/>
+          </a:gradFill>
+          <a:ln>
+            <a:noFill/>
+          </a:ln>
+        </p:spPr>
+        <p:style>
+          <a:lnRef idx="2">
+            <a:schemeClr val="accent1">
+              <a:shade val="50000"/>
+            </a:schemeClr>
+          </a:lnRef>
+          <a:fillRef idx="1">
+            <a:schemeClr val="accent1"/>
+          </a:fillRef>
+          <a:effectRef idx="0">
+            <a:schemeClr val="accent1"/>
+          </a:effectRef>
+          <a:fontRef idx="minor">
+            <a:schemeClr val="lt1"/>
+          </a:fontRef>
+        </p:style>
+        <p:txBody>
+          <a:bodyPr rtlCol="0" anchor="ctr"/>
+          <a:lstStyle/>
+          <a:p>
+            <a:pPr algn="ctr"/>
+            <a:endParaRPr lang="en-US"/>
+          </a:p>
+        </p:txBody>
+      </p:sp>
       <p:sp>
         <p:nvSpPr>
           <p:cNvPr id="2" name="Title 1">
@@ -3973,13 +7080,25 @@
             <p:ph type="ctrTitle"/>
           </p:nvPr>
         </p:nvSpPr>
-        <p:spPr/>
-        <p:txBody>
-          <a:bodyPr/>
-          <a:lstStyle/>
-          <a:p>
-            <a:r>
-              <a:rPr lang="en-US" dirty="0"/>
+        <p:spPr>
+          <a:xfrm>
+            <a:off x="699713" y="248038"/>
+            <a:ext cx="7063721" cy="1159200"/>
+          </a:xfrm>
+        </p:spPr>
+        <p:txBody>
+          <a:bodyPr anchor="ctr">
+            <a:normAutofit/>
+          </a:bodyPr>
+          <a:lstStyle/>
+          <a:p>
+            <a:pPr algn="l"/>
+            <a:r>
+              <a:rPr lang="en-US" sz="4000">
+                <a:solidFill>
+                  <a:srgbClr val="FFFFFF"/>
+                </a:solidFill>
+              </a:rPr>
               <a:t>Local MVP Architecture</a:t>
             </a:r>
           </a:p>
@@ -4001,15 +7120,57 @@
             <p:ph type="subTitle" idx="1"/>
           </p:nvPr>
         </p:nvSpPr>
-        <p:spPr/>
-        <p:txBody>
-          <a:bodyPr/>
-          <a:lstStyle/>
-          <a:p>
-            <a:endParaRPr lang="en-US"/>
-          </a:p>
-        </p:txBody>
-      </p:sp>
+        <p:spPr>
+          <a:xfrm>
+            <a:off x="8572499" y="390832"/>
+            <a:ext cx="3233585" cy="873612"/>
+          </a:xfrm>
+        </p:spPr>
+        <p:txBody>
+          <a:bodyPr anchor="ctr">
+            <a:normAutofit/>
+          </a:bodyPr>
+          <a:lstStyle/>
+          <a:p>
+            <a:pPr algn="l"/>
+            <a:endParaRPr lang="en-US" sz="2000" dirty="0">
+              <a:solidFill>
+                <a:srgbClr val="FFFFFF"/>
+              </a:solidFill>
+            </a:endParaRPr>
+          </a:p>
+        </p:txBody>
+      </p:sp>
+      <p:pic>
+        <p:nvPicPr>
+          <p:cNvPr id="5" name="Picture 4">
+            <a:extLst>
+              <a:ext uri="{FF2B5EF4-FFF2-40B4-BE49-F238E27FC236}">
+                <a16:creationId xmlns:a16="http://schemas.microsoft.com/office/drawing/2014/main" id="{AFCA4B0F-95E7-A1C4-A95C-03FF85695A7A}"/>
+              </a:ext>
+            </a:extLst>
+          </p:cNvPr>
+          <p:cNvPicPr>
+            <a:picLocks noChangeAspect="1"/>
+          </p:cNvPicPr>
+          <p:nvPr/>
+        </p:nvPicPr>
+        <p:blipFill>
+          <a:blip r:embed="rId2"/>
+          <a:stretch>
+            <a:fillRect/>
+          </a:stretch>
+        </p:blipFill>
+        <p:spPr>
+          <a:xfrm>
+            <a:off x="478535" y="1973342"/>
+            <a:ext cx="11327549" cy="4417742"/>
+          </a:xfrm>
+          <a:prstGeom prst="rect">
+            <a:avLst/>
+          </a:prstGeom>
+        </p:spPr>
+      </p:pic>
     </p:spTree>
     <p:extLst>
       <p:ext uri="{BB962C8B-B14F-4D97-AF65-F5344CB8AC3E}">
@@ -4026,6 +7187,14 @@
 <file path=ppt/slides/slide5.xml><?xml version="1.0" encoding="utf-8"?>
 <p:sld xmlns:a="http://schemas.openxmlformats.org/drawingml/2006/main" xmlns:r="http://schemas.openxmlformats.org/officeDocument/2006/relationships" xmlns:p="http://schemas.openxmlformats.org/presentationml/2006/main">
   <p:cSld>
+    <p:bg>
+      <p:bgPr>
+        <a:solidFill>
+          <a:schemeClr val="bg1"/>
+        </a:solidFill>
+        <a:effectLst/>
+      </p:bgPr>
+    </p:bg>
     <p:spTree>
       <p:nvGrpSpPr>
         <p:cNvPr id="1" name="">
@@ -4046,6 +7215,479 @@
           <a:chExt cx="0" cy="0"/>
         </a:xfrm>
       </p:grpSpPr>
+      <p:sp useBgFill="1">
+        <p:nvSpPr>
+          <p:cNvPr id="21" name="Rectangle 20">
+            <a:extLst>
+              <a:ext uri="{FF2B5EF4-FFF2-40B4-BE49-F238E27FC236}">
+                <a16:creationId xmlns:a16="http://schemas.microsoft.com/office/drawing/2014/main" id="{A8384FB5-9ADC-4DDC-881B-597D56F5B15D}"/>
+              </a:ext>
+              <a:ext uri="{C183D7F6-B498-43B3-948B-1728B52AA6E4}">
+                <adec:decorative xmlns:adec="http://schemas.microsoft.com/office/drawing/2017/decorative" val="1"/>
+              </a:ext>
+            </a:extLst>
+          </p:cNvPr>
+          <p:cNvSpPr>
+            <a:spLocks noGrp="1" noRot="1" noChangeAspect="1" noMove="1" noResize="1" noEditPoints="1" noAdjustHandles="1" noChangeArrowheads="1" noChangeShapeType="1" noTextEdit="1"/>
+          </p:cNvSpPr>
+          <p:nvPr>
+            <p:extLst>
+              <p:ext uri="{386F3935-93C4-4BCD-93E2-E3B085C9AB24}">
+                <p16:designElem xmlns:p16="http://schemas.microsoft.com/office/powerpoint/2015/main" val="1"/>
+              </p:ext>
+            </p:extLst>
+          </p:nvPr>
+        </p:nvSpPr>
+        <p:spPr>
+          <a:xfrm>
+            <a:off x="0" y="0"/>
+            <a:ext cx="12192000" cy="6858000"/>
+          </a:xfrm>
+          <a:prstGeom prst="rect">
+            <a:avLst/>
+          </a:prstGeom>
+          <a:ln w="12700" cap="flat" cmpd="sng" algn="ctr">
+            <a:noFill/>
+            <a:prstDash val="solid"/>
+            <a:miter lim="800000"/>
+          </a:ln>
+          <a:effectLst/>
+          <a:extLst>
+            <a:ext uri="{91240B29-F687-4F45-9708-019B960494DF}">
+              <a14:hiddenLine xmlns:a14="http://schemas.microsoft.com/office/drawing/2010/main" w="12700" cap="flat" cmpd="sng" algn="ctr">
+                <a:solidFill>
+                  <a:schemeClr val="accent1">
+                    <a:shade val="50000"/>
+                  </a:schemeClr>
+                </a:solidFill>
+                <a:prstDash val="solid"/>
+                <a:miter lim="800000"/>
+              </a14:hiddenLine>
+            </a:ext>
+          </a:extLst>
+        </p:spPr>
+        <p:style>
+          <a:lnRef idx="2">
+            <a:schemeClr val="accent1">
+              <a:shade val="50000"/>
+            </a:schemeClr>
+          </a:lnRef>
+          <a:fillRef idx="1">
+            <a:schemeClr val="accent1"/>
+          </a:fillRef>
+          <a:effectRef idx="0">
+            <a:schemeClr val="accent1"/>
+          </a:effectRef>
+          <a:fontRef idx="minor">
+            <a:schemeClr val="lt1"/>
+          </a:fontRef>
+        </p:style>
+        <p:txBody>
+          <a:bodyPr rtlCol="0" anchor="ctr"/>
+          <a:lstStyle/>
+          <a:p>
+            <a:pPr algn="ctr"/>
+            <a:endParaRPr lang="en-US"/>
+          </a:p>
+        </p:txBody>
+      </p:sp>
+      <p:sp>
+        <p:nvSpPr>
+          <p:cNvPr id="23" name="Rectangle 22">
+            <a:extLst>
+              <a:ext uri="{FF2B5EF4-FFF2-40B4-BE49-F238E27FC236}">
+                <a16:creationId xmlns:a16="http://schemas.microsoft.com/office/drawing/2014/main" id="{91E5A9A7-95C6-4F4F-B00E-C82E07FE62EF}"/>
+              </a:ext>
+              <a:ext uri="{C183D7F6-B498-43B3-948B-1728B52AA6E4}">
+                <adec:decorative xmlns:adec="http://schemas.microsoft.com/office/drawing/2017/decorative" val="1"/>
+              </a:ext>
+            </a:extLst>
+          </p:cNvPr>
+          <p:cNvSpPr>
+            <a:spLocks noGrp="1" noRot="1" noChangeAspect="1" noMove="1" noResize="1" noEditPoints="1" noAdjustHandles="1" noChangeArrowheads="1" noChangeShapeType="1" noTextEdit="1"/>
+          </p:cNvSpPr>
+          <p:nvPr>
+            <p:extLst>
+              <p:ext uri="{386F3935-93C4-4BCD-93E2-E3B085C9AB24}">
+                <p16:designElem xmlns:p16="http://schemas.microsoft.com/office/powerpoint/2015/main" val="1"/>
+              </p:ext>
+            </p:extLst>
+          </p:nvPr>
+        </p:nvSpPr>
+        <p:spPr>
+          <a:xfrm rot="5400000" flipH="1">
+            <a:off x="-1417539" y="1417538"/>
+            <a:ext cx="6875818" cy="4040744"/>
+          </a:xfrm>
+          <a:prstGeom prst="rect">
+            <a:avLst/>
+          </a:prstGeom>
+          <a:gradFill>
+            <a:gsLst>
+              <a:gs pos="0">
+                <a:srgbClr val="000000"/>
+              </a:gs>
+              <a:gs pos="100000">
+                <a:schemeClr val="accent1">
+                  <a:lumMod val="75000"/>
+                </a:schemeClr>
+              </a:gs>
+            </a:gsLst>
+            <a:lin ang="18600000" scaled="0"/>
+          </a:gradFill>
+          <a:ln>
+            <a:noFill/>
+          </a:ln>
+        </p:spPr>
+        <p:style>
+          <a:lnRef idx="2">
+            <a:schemeClr val="accent1">
+              <a:shade val="50000"/>
+            </a:schemeClr>
+          </a:lnRef>
+          <a:fillRef idx="1">
+            <a:schemeClr val="accent1"/>
+          </a:fillRef>
+          <a:effectRef idx="0">
+            <a:schemeClr val="accent1"/>
+          </a:effectRef>
+          <a:fontRef idx="minor">
+            <a:schemeClr val="lt1"/>
+          </a:fontRef>
+        </p:style>
+        <p:txBody>
+          <a:bodyPr rtlCol="0" anchor="ctr"/>
+          <a:lstStyle/>
+          <a:p>
+            <a:pPr algn="ctr"/>
+            <a:endParaRPr lang="en-US" dirty="0"/>
+          </a:p>
+        </p:txBody>
+      </p:sp>
+      <p:sp>
+        <p:nvSpPr>
+          <p:cNvPr id="25" name="Rectangle 24">
+            <a:extLst>
+              <a:ext uri="{FF2B5EF4-FFF2-40B4-BE49-F238E27FC236}">
+                <a16:creationId xmlns:a16="http://schemas.microsoft.com/office/drawing/2014/main" id="{D07DD2DE-F619-49DD-B5E7-03A290FF4ED1}"/>
+              </a:ext>
+              <a:ext uri="{C183D7F6-B498-43B3-948B-1728B52AA6E4}">
+                <adec:decorative xmlns:adec="http://schemas.microsoft.com/office/drawing/2017/decorative" val="1"/>
+              </a:ext>
+            </a:extLst>
+          </p:cNvPr>
+          <p:cNvSpPr>
+            <a:spLocks noGrp="1" noRot="1" noChangeAspect="1" noMove="1" noResize="1" noEditPoints="1" noAdjustHandles="1" noChangeArrowheads="1" noChangeShapeType="1" noTextEdit="1"/>
+          </p:cNvSpPr>
+          <p:nvPr>
+            <p:extLst>
+              <p:ext uri="{386F3935-93C4-4BCD-93E2-E3B085C9AB24}">
+                <p16:designElem xmlns:p16="http://schemas.microsoft.com/office/powerpoint/2015/main" val="1"/>
+              </p:ext>
+            </p:extLst>
+          </p:nvPr>
+        </p:nvSpPr>
+        <p:spPr>
+          <a:xfrm rot="16200000">
+            <a:off x="-158495" y="2660473"/>
+            <a:ext cx="4355594" cy="4038603"/>
+          </a:xfrm>
+          <a:prstGeom prst="rect">
+            <a:avLst/>
+          </a:prstGeom>
+          <a:gradFill>
+            <a:gsLst>
+              <a:gs pos="0">
+                <a:schemeClr val="accent1">
+                  <a:alpha val="50000"/>
+                </a:schemeClr>
+              </a:gs>
+              <a:gs pos="100000">
+                <a:schemeClr val="accent1">
+                  <a:lumMod val="50000"/>
+                  <a:alpha val="0"/>
+                </a:schemeClr>
+              </a:gs>
+            </a:gsLst>
+            <a:lin ang="11400000" scaled="0"/>
+          </a:gradFill>
+          <a:ln>
+            <a:noFill/>
+          </a:ln>
+        </p:spPr>
+        <p:style>
+          <a:lnRef idx="2">
+            <a:schemeClr val="accent1">
+              <a:shade val="50000"/>
+            </a:schemeClr>
+          </a:lnRef>
+          <a:fillRef idx="1">
+            <a:schemeClr val="accent1"/>
+          </a:fillRef>
+          <a:effectRef idx="0">
+            <a:schemeClr val="accent1"/>
+          </a:effectRef>
+          <a:fontRef idx="minor">
+            <a:schemeClr val="lt1"/>
+          </a:fontRef>
+        </p:style>
+        <p:txBody>
+          <a:bodyPr rtlCol="0" anchor="ctr"/>
+          <a:lstStyle/>
+          <a:p>
+            <a:pPr algn="ctr"/>
+            <a:endParaRPr lang="en-US"/>
+          </a:p>
+        </p:txBody>
+      </p:sp>
+      <p:sp>
+        <p:nvSpPr>
+          <p:cNvPr id="27" name="Rectangle 26">
+            <a:extLst>
+              <a:ext uri="{FF2B5EF4-FFF2-40B4-BE49-F238E27FC236}">
+                <a16:creationId xmlns:a16="http://schemas.microsoft.com/office/drawing/2014/main" id="{85149191-5F60-4A28-AAFF-039F96B0F3EC}"/>
+              </a:ext>
+              <a:ext uri="{C183D7F6-B498-43B3-948B-1728B52AA6E4}">
+                <adec:decorative xmlns:adec="http://schemas.microsoft.com/office/drawing/2017/decorative" val="1"/>
+              </a:ext>
+            </a:extLst>
+          </p:cNvPr>
+          <p:cNvSpPr>
+            <a:spLocks noGrp="1" noRot="1" noChangeAspect="1" noMove="1" noResize="1" noEditPoints="1" noAdjustHandles="1" noChangeArrowheads="1" noChangeShapeType="1" noTextEdit="1"/>
+          </p:cNvSpPr>
+          <p:nvPr>
+            <p:extLst>
+              <p:ext uri="{386F3935-93C4-4BCD-93E2-E3B085C9AB24}">
+                <p16:designElem xmlns:p16="http://schemas.microsoft.com/office/powerpoint/2015/main" val="1"/>
+              </p:ext>
+            </p:extLst>
+          </p:nvPr>
+        </p:nvSpPr>
+        <p:spPr>
+          <a:xfrm rot="16200000" flipH="1">
+            <a:off x="-1180882" y="1638085"/>
+            <a:ext cx="6857572" cy="3581401"/>
+          </a:xfrm>
+          <a:prstGeom prst="rect">
+            <a:avLst/>
+          </a:prstGeom>
+          <a:gradFill>
+            <a:gsLst>
+              <a:gs pos="0">
+                <a:srgbClr val="000000">
+                  <a:alpha val="59000"/>
+                </a:srgbClr>
+              </a:gs>
+              <a:gs pos="69000">
+                <a:schemeClr val="accent1">
+                  <a:alpha val="0"/>
+                </a:schemeClr>
+              </a:gs>
+            </a:gsLst>
+            <a:lin ang="13200000" scaled="0"/>
+          </a:gradFill>
+          <a:ln>
+            <a:noFill/>
+          </a:ln>
+        </p:spPr>
+        <p:style>
+          <a:lnRef idx="2">
+            <a:schemeClr val="accent1">
+              <a:shade val="50000"/>
+            </a:schemeClr>
+          </a:lnRef>
+          <a:fillRef idx="1">
+            <a:schemeClr val="accent1"/>
+          </a:fillRef>
+          <a:effectRef idx="0">
+            <a:schemeClr val="accent1"/>
+          </a:effectRef>
+          <a:fontRef idx="minor">
+            <a:schemeClr val="lt1"/>
+          </a:fontRef>
+        </p:style>
+        <p:txBody>
+          <a:bodyPr rtlCol="0" anchor="ctr"/>
+          <a:lstStyle/>
+          <a:p>
+            <a:pPr algn="ctr"/>
+            <a:endParaRPr lang="en-US" dirty="0"/>
+          </a:p>
+        </p:txBody>
+      </p:sp>
+      <p:sp>
+        <p:nvSpPr>
+          <p:cNvPr id="29" name="Freeform: Shape 28">
+            <a:extLst>
+              <a:ext uri="{FF2B5EF4-FFF2-40B4-BE49-F238E27FC236}">
+                <a16:creationId xmlns:a16="http://schemas.microsoft.com/office/drawing/2014/main" id="{F8260ED5-17F7-4158-B241-D51DD4CF1B7E}"/>
+              </a:ext>
+              <a:ext uri="{C183D7F6-B498-43B3-948B-1728B52AA6E4}">
+                <adec:decorative xmlns:adec="http://schemas.microsoft.com/office/drawing/2017/decorative" val="1"/>
+              </a:ext>
+            </a:extLst>
+          </p:cNvPr>
+          <p:cNvSpPr>
+            <a:spLocks noGrp="1" noRot="1" noChangeAspect="1" noMove="1" noResize="1" noEditPoints="1" noAdjustHandles="1" noChangeArrowheads="1" noChangeShapeType="1" noTextEdit="1"/>
+          </p:cNvSpPr>
+          <p:nvPr>
+            <p:extLst>
+              <p:ext uri="{386F3935-93C4-4BCD-93E2-E3B085C9AB24}">
+                <p16:designElem xmlns:p16="http://schemas.microsoft.com/office/powerpoint/2015/main" val="1"/>
+              </p:ext>
+            </p:extLst>
+          </p:nvPr>
+        </p:nvSpPr>
+        <p:spPr>
+          <a:xfrm rot="6097846">
+            <a:off x="-747355" y="1201312"/>
+            <a:ext cx="4808302" cy="4088666"/>
+          </a:xfrm>
+          <a:custGeom>
+            <a:avLst/>
+            <a:gdLst>
+              <a:gd name="connsiteX0" fmla="*/ 48844 w 4808302"/>
+              <a:gd name="connsiteY0" fmla="*/ 2888671 h 4088666"/>
+              <a:gd name="connsiteX1" fmla="*/ 0 w 4808302"/>
+              <a:gd name="connsiteY1" fmla="*/ 2404151 h 4088666"/>
+              <a:gd name="connsiteX2" fmla="*/ 2404151 w 4808302"/>
+              <a:gd name="connsiteY2" fmla="*/ 0 h 4088666"/>
+              <a:gd name="connsiteX3" fmla="*/ 4808302 w 4808302"/>
+              <a:gd name="connsiteY3" fmla="*/ 2404151 h 4088666"/>
+              <a:gd name="connsiteX4" fmla="*/ 4700216 w 4808302"/>
+              <a:gd name="connsiteY4" fmla="*/ 3119072 h 4088666"/>
+              <a:gd name="connsiteX5" fmla="*/ 4643143 w 4808302"/>
+              <a:gd name="connsiteY5" fmla="*/ 3275009 h 4088666"/>
+              <a:gd name="connsiteX6" fmla="*/ 690093 w 4808302"/>
+              <a:gd name="connsiteY6" fmla="*/ 4088666 h 4088666"/>
+              <a:gd name="connsiteX7" fmla="*/ 548991 w 4808302"/>
+              <a:gd name="connsiteY7" fmla="*/ 3933414 h 4088666"/>
+              <a:gd name="connsiteX8" fmla="*/ 48844 w 4808302"/>
+              <a:gd name="connsiteY8" fmla="*/ 2888671 h 4088666"/>
+            </a:gdLst>
+            <a:ahLst/>
+            <a:cxnLst>
+              <a:cxn ang="0">
+                <a:pos x="connsiteX0" y="connsiteY0"/>
+              </a:cxn>
+              <a:cxn ang="0">
+                <a:pos x="connsiteX1" y="connsiteY1"/>
+              </a:cxn>
+              <a:cxn ang="0">
+                <a:pos x="connsiteX2" y="connsiteY2"/>
+              </a:cxn>
+              <a:cxn ang="0">
+                <a:pos x="connsiteX3" y="connsiteY3"/>
+              </a:cxn>
+              <a:cxn ang="0">
+                <a:pos x="connsiteX4" y="connsiteY4"/>
+              </a:cxn>
+              <a:cxn ang="0">
+                <a:pos x="connsiteX5" y="connsiteY5"/>
+              </a:cxn>
+              <a:cxn ang="0">
+                <a:pos x="connsiteX6" y="connsiteY6"/>
+              </a:cxn>
+              <a:cxn ang="0">
+                <a:pos x="connsiteX7" y="connsiteY7"/>
+              </a:cxn>
+              <a:cxn ang="0">
+                <a:pos x="connsiteX8" y="connsiteY8"/>
+              </a:cxn>
+            </a:cxnLst>
+            <a:rect l="l" t="t" r="r" b="b"/>
+            <a:pathLst>
+              <a:path w="4808302" h="4088666">
+                <a:moveTo>
+                  <a:pt x="48844" y="2888671"/>
+                </a:moveTo>
+                <a:cubicBezTo>
+                  <a:pt x="16818" y="2732167"/>
+                  <a:pt x="0" y="2570123"/>
+                  <a:pt x="0" y="2404151"/>
+                </a:cubicBezTo>
+                <a:cubicBezTo>
+                  <a:pt x="0" y="1076375"/>
+                  <a:pt x="1076375" y="0"/>
+                  <a:pt x="2404151" y="0"/>
+                </a:cubicBezTo>
+                <a:cubicBezTo>
+                  <a:pt x="3731927" y="0"/>
+                  <a:pt x="4808302" y="1076375"/>
+                  <a:pt x="4808302" y="2404151"/>
+                </a:cubicBezTo>
+                <a:cubicBezTo>
+                  <a:pt x="4808302" y="2653109"/>
+                  <a:pt x="4770461" y="2893229"/>
+                  <a:pt x="4700216" y="3119072"/>
+                </a:cubicBezTo>
+                <a:lnTo>
+                  <a:pt x="4643143" y="3275009"/>
+                </a:lnTo>
+                <a:lnTo>
+                  <a:pt x="690093" y="4088666"/>
+                </a:lnTo>
+                <a:lnTo>
+                  <a:pt x="548991" y="3933414"/>
+                </a:lnTo>
+                <a:cubicBezTo>
+                  <a:pt x="304015" y="3636572"/>
+                  <a:pt x="128908" y="3279932"/>
+                  <a:pt x="48844" y="2888671"/>
+                </a:cubicBezTo>
+                <a:close/>
+              </a:path>
+            </a:pathLst>
+          </a:custGeom>
+          <a:gradFill>
+            <a:gsLst>
+              <a:gs pos="39000">
+                <a:schemeClr val="accent1">
+                  <a:lumMod val="60000"/>
+                  <a:lumOff val="40000"/>
+                  <a:alpha val="0"/>
+                </a:schemeClr>
+              </a:gs>
+              <a:gs pos="100000">
+                <a:schemeClr val="accent1">
+                  <a:lumMod val="75000"/>
+                  <a:alpha val="26000"/>
+                </a:schemeClr>
+              </a:gs>
+            </a:gsLst>
+            <a:lin ang="18600000" scaled="0"/>
+          </a:gradFill>
+          <a:ln>
+            <a:noFill/>
+          </a:ln>
+        </p:spPr>
+        <p:style>
+          <a:lnRef idx="2">
+            <a:schemeClr val="accent1">
+              <a:shade val="50000"/>
+            </a:schemeClr>
+          </a:lnRef>
+          <a:fillRef idx="1">
+            <a:schemeClr val="accent1"/>
+          </a:fillRef>
+          <a:effectRef idx="0">
+            <a:schemeClr val="accent1"/>
+          </a:effectRef>
+          <a:fontRef idx="minor">
+            <a:schemeClr val="lt1"/>
+          </a:fontRef>
+        </p:style>
+        <p:txBody>
+          <a:bodyPr wrap="square" rtlCol="0" anchor="ctr">
+            <a:noAutofit/>
+          </a:bodyPr>
+          <a:lstStyle/>
+          <a:p>
+            <a:pPr algn="ctr"/>
+            <a:endParaRPr lang="en-US" dirty="0"/>
+          </a:p>
+        </p:txBody>
+      </p:sp>
       <p:sp>
         <p:nvSpPr>
           <p:cNvPr id="2" name="Title 1">
@@ -4062,13 +7704,25 @@
             <p:ph type="ctrTitle"/>
           </p:nvPr>
         </p:nvSpPr>
-        <p:spPr/>
-        <p:txBody>
-          <a:bodyPr/>
-          <a:lstStyle/>
-          <a:p>
-            <a:r>
-              <a:rPr lang="en-US" dirty="0"/>
+        <p:spPr>
+          <a:xfrm>
+            <a:off x="660041" y="2767106"/>
+            <a:ext cx="2880828" cy="3071906"/>
+          </a:xfrm>
+        </p:spPr>
+        <p:txBody>
+          <a:bodyPr anchor="t">
+            <a:normAutofit/>
+          </a:bodyPr>
+          <a:lstStyle/>
+          <a:p>
+            <a:pPr algn="l"/>
+            <a:r>
+              <a:rPr lang="en-US" sz="4000">
+                <a:solidFill>
+                  <a:srgbClr val="FFFFFF"/>
+                </a:solidFill>
+              </a:rPr>
               <a:t>Joiner Workflow</a:t>
             </a:r>
           </a:p>
@@ -4090,15 +7744,57 @@
             <p:ph type="subTitle" idx="1"/>
           </p:nvPr>
         </p:nvSpPr>
-        <p:spPr/>
-        <p:txBody>
-          <a:bodyPr/>
-          <a:lstStyle/>
-          <a:p>
-            <a:endParaRPr lang="en-US"/>
-          </a:p>
-        </p:txBody>
-      </p:sp>
+        <p:spPr>
+          <a:xfrm>
+            <a:off x="660042" y="806824"/>
+            <a:ext cx="2919738" cy="1494117"/>
+          </a:xfrm>
+        </p:spPr>
+        <p:txBody>
+          <a:bodyPr anchor="b">
+            <a:normAutofit/>
+          </a:bodyPr>
+          <a:lstStyle/>
+          <a:p>
+            <a:pPr algn="l"/>
+            <a:endParaRPr lang="en-US" sz="2000">
+              <a:solidFill>
+                <a:srgbClr val="FFFFFF"/>
+              </a:solidFill>
+            </a:endParaRPr>
+          </a:p>
+        </p:txBody>
+      </p:sp>
+      <p:pic>
+        <p:nvPicPr>
+          <p:cNvPr id="5" name="Picture 4">
+            <a:extLst>
+              <a:ext uri="{FF2B5EF4-FFF2-40B4-BE49-F238E27FC236}">
+                <a16:creationId xmlns:a16="http://schemas.microsoft.com/office/drawing/2014/main" id="{CD11E1C4-AE5B-4383-9430-6AC32492D84A}"/>
+              </a:ext>
+            </a:extLst>
+          </p:cNvPr>
+          <p:cNvPicPr>
+            <a:picLocks noChangeAspect="1"/>
+          </p:cNvPicPr>
+          <p:nvPr/>
+        </p:nvPicPr>
+        <p:blipFill>
+          <a:blip r:embed="rId2"/>
+          <a:stretch>
+            <a:fillRect/>
+          </a:stretch>
+        </p:blipFill>
+        <p:spPr>
+          <a:xfrm>
+            <a:off x="4870988" y="0"/>
+            <a:ext cx="6386292" cy="6705600"/>
+          </a:xfrm>
+          <a:prstGeom prst="rect">
+            <a:avLst/>
+          </a:prstGeom>
+        </p:spPr>
+      </p:pic>
     </p:spTree>
     <p:extLst>
       <p:ext uri="{BB962C8B-B14F-4D97-AF65-F5344CB8AC3E}">
@@ -4115,6 +7811,14 @@
 <file path=ppt/slides/slide6.xml><?xml version="1.0" encoding="utf-8"?>
 <p:sld xmlns:a="http://schemas.openxmlformats.org/drawingml/2006/main" xmlns:r="http://schemas.openxmlformats.org/officeDocument/2006/relationships" xmlns:p="http://schemas.openxmlformats.org/presentationml/2006/main">
   <p:cSld>
+    <p:bg>
+      <p:bgPr>
+        <a:solidFill>
+          <a:schemeClr val="bg1"/>
+        </a:solidFill>
+        <a:effectLst/>
+      </p:bgPr>
+    </p:bg>
     <p:spTree>
       <p:nvGrpSpPr>
         <p:cNvPr id="1" name="">
@@ -4135,6 +7839,479 @@
           <a:chExt cx="0" cy="0"/>
         </a:xfrm>
       </p:grpSpPr>
+      <p:sp useBgFill="1">
+        <p:nvSpPr>
+          <p:cNvPr id="21" name="Rectangle 20">
+            <a:extLst>
+              <a:ext uri="{FF2B5EF4-FFF2-40B4-BE49-F238E27FC236}">
+                <a16:creationId xmlns:a16="http://schemas.microsoft.com/office/drawing/2014/main" id="{A8384FB5-9ADC-4DDC-881B-597D56F5B15D}"/>
+              </a:ext>
+              <a:ext uri="{C183D7F6-B498-43B3-948B-1728B52AA6E4}">
+                <adec:decorative xmlns:adec="http://schemas.microsoft.com/office/drawing/2017/decorative" val="1"/>
+              </a:ext>
+            </a:extLst>
+          </p:cNvPr>
+          <p:cNvSpPr>
+            <a:spLocks noGrp="1" noRot="1" noChangeAspect="1" noMove="1" noResize="1" noEditPoints="1" noAdjustHandles="1" noChangeArrowheads="1" noChangeShapeType="1" noTextEdit="1"/>
+          </p:cNvSpPr>
+          <p:nvPr>
+            <p:extLst>
+              <p:ext uri="{386F3935-93C4-4BCD-93E2-E3B085C9AB24}">
+                <p16:designElem xmlns:p16="http://schemas.microsoft.com/office/powerpoint/2015/main" val="1"/>
+              </p:ext>
+            </p:extLst>
+          </p:nvPr>
+        </p:nvSpPr>
+        <p:spPr>
+          <a:xfrm>
+            <a:off x="0" y="0"/>
+            <a:ext cx="12192000" cy="6858000"/>
+          </a:xfrm>
+          <a:prstGeom prst="rect">
+            <a:avLst/>
+          </a:prstGeom>
+          <a:ln w="12700" cap="flat" cmpd="sng" algn="ctr">
+            <a:noFill/>
+            <a:prstDash val="solid"/>
+            <a:miter lim="800000"/>
+          </a:ln>
+          <a:effectLst/>
+          <a:extLst>
+            <a:ext uri="{91240B29-F687-4F45-9708-019B960494DF}">
+              <a14:hiddenLine xmlns:a14="http://schemas.microsoft.com/office/drawing/2010/main" w="12700" cap="flat" cmpd="sng" algn="ctr">
+                <a:solidFill>
+                  <a:schemeClr val="accent1">
+                    <a:shade val="50000"/>
+                  </a:schemeClr>
+                </a:solidFill>
+                <a:prstDash val="solid"/>
+                <a:miter lim="800000"/>
+              </a14:hiddenLine>
+            </a:ext>
+          </a:extLst>
+        </p:spPr>
+        <p:style>
+          <a:lnRef idx="2">
+            <a:schemeClr val="accent1">
+              <a:shade val="50000"/>
+            </a:schemeClr>
+          </a:lnRef>
+          <a:fillRef idx="1">
+            <a:schemeClr val="accent1"/>
+          </a:fillRef>
+          <a:effectRef idx="0">
+            <a:schemeClr val="accent1"/>
+          </a:effectRef>
+          <a:fontRef idx="minor">
+            <a:schemeClr val="lt1"/>
+          </a:fontRef>
+        </p:style>
+        <p:txBody>
+          <a:bodyPr rtlCol="0" anchor="ctr"/>
+          <a:lstStyle/>
+          <a:p>
+            <a:pPr algn="ctr"/>
+            <a:endParaRPr lang="en-US"/>
+          </a:p>
+        </p:txBody>
+      </p:sp>
+      <p:sp>
+        <p:nvSpPr>
+          <p:cNvPr id="23" name="Rectangle 22">
+            <a:extLst>
+              <a:ext uri="{FF2B5EF4-FFF2-40B4-BE49-F238E27FC236}">
+                <a16:creationId xmlns:a16="http://schemas.microsoft.com/office/drawing/2014/main" id="{91E5A9A7-95C6-4F4F-B00E-C82E07FE62EF}"/>
+              </a:ext>
+              <a:ext uri="{C183D7F6-B498-43B3-948B-1728B52AA6E4}">
+                <adec:decorative xmlns:adec="http://schemas.microsoft.com/office/drawing/2017/decorative" val="1"/>
+              </a:ext>
+            </a:extLst>
+          </p:cNvPr>
+          <p:cNvSpPr>
+            <a:spLocks noGrp="1" noRot="1" noChangeAspect="1" noMove="1" noResize="1" noEditPoints="1" noAdjustHandles="1" noChangeArrowheads="1" noChangeShapeType="1" noTextEdit="1"/>
+          </p:cNvSpPr>
+          <p:nvPr>
+            <p:extLst>
+              <p:ext uri="{386F3935-93C4-4BCD-93E2-E3B085C9AB24}">
+                <p16:designElem xmlns:p16="http://schemas.microsoft.com/office/powerpoint/2015/main" val="1"/>
+              </p:ext>
+            </p:extLst>
+          </p:nvPr>
+        </p:nvSpPr>
+        <p:spPr>
+          <a:xfrm rot="5400000" flipH="1">
+            <a:off x="-1417539" y="1417538"/>
+            <a:ext cx="6875818" cy="4040744"/>
+          </a:xfrm>
+          <a:prstGeom prst="rect">
+            <a:avLst/>
+          </a:prstGeom>
+          <a:gradFill>
+            <a:gsLst>
+              <a:gs pos="0">
+                <a:srgbClr val="000000"/>
+              </a:gs>
+              <a:gs pos="100000">
+                <a:schemeClr val="accent1">
+                  <a:lumMod val="75000"/>
+                </a:schemeClr>
+              </a:gs>
+            </a:gsLst>
+            <a:lin ang="18600000" scaled="0"/>
+          </a:gradFill>
+          <a:ln>
+            <a:noFill/>
+          </a:ln>
+        </p:spPr>
+        <p:style>
+          <a:lnRef idx="2">
+            <a:schemeClr val="accent1">
+              <a:shade val="50000"/>
+            </a:schemeClr>
+          </a:lnRef>
+          <a:fillRef idx="1">
+            <a:schemeClr val="accent1"/>
+          </a:fillRef>
+          <a:effectRef idx="0">
+            <a:schemeClr val="accent1"/>
+          </a:effectRef>
+          <a:fontRef idx="minor">
+            <a:schemeClr val="lt1"/>
+          </a:fontRef>
+        </p:style>
+        <p:txBody>
+          <a:bodyPr rtlCol="0" anchor="ctr"/>
+          <a:lstStyle/>
+          <a:p>
+            <a:pPr algn="ctr"/>
+            <a:endParaRPr lang="en-US" dirty="0"/>
+          </a:p>
+        </p:txBody>
+      </p:sp>
+      <p:sp>
+        <p:nvSpPr>
+          <p:cNvPr id="25" name="Rectangle 24">
+            <a:extLst>
+              <a:ext uri="{FF2B5EF4-FFF2-40B4-BE49-F238E27FC236}">
+                <a16:creationId xmlns:a16="http://schemas.microsoft.com/office/drawing/2014/main" id="{D07DD2DE-F619-49DD-B5E7-03A290FF4ED1}"/>
+              </a:ext>
+              <a:ext uri="{C183D7F6-B498-43B3-948B-1728B52AA6E4}">
+                <adec:decorative xmlns:adec="http://schemas.microsoft.com/office/drawing/2017/decorative" val="1"/>
+              </a:ext>
+            </a:extLst>
+          </p:cNvPr>
+          <p:cNvSpPr>
+            <a:spLocks noGrp="1" noRot="1" noChangeAspect="1" noMove="1" noResize="1" noEditPoints="1" noAdjustHandles="1" noChangeArrowheads="1" noChangeShapeType="1" noTextEdit="1"/>
+          </p:cNvSpPr>
+          <p:nvPr>
+            <p:extLst>
+              <p:ext uri="{386F3935-93C4-4BCD-93E2-E3B085C9AB24}">
+                <p16:designElem xmlns:p16="http://schemas.microsoft.com/office/powerpoint/2015/main" val="1"/>
+              </p:ext>
+            </p:extLst>
+          </p:nvPr>
+        </p:nvSpPr>
+        <p:spPr>
+          <a:xfrm rot="16200000">
+            <a:off x="-158495" y="2660473"/>
+            <a:ext cx="4355594" cy="4038603"/>
+          </a:xfrm>
+          <a:prstGeom prst="rect">
+            <a:avLst/>
+          </a:prstGeom>
+          <a:gradFill>
+            <a:gsLst>
+              <a:gs pos="0">
+                <a:schemeClr val="accent1">
+                  <a:alpha val="50000"/>
+                </a:schemeClr>
+              </a:gs>
+              <a:gs pos="100000">
+                <a:schemeClr val="accent1">
+                  <a:lumMod val="50000"/>
+                  <a:alpha val="0"/>
+                </a:schemeClr>
+              </a:gs>
+            </a:gsLst>
+            <a:lin ang="11400000" scaled="0"/>
+          </a:gradFill>
+          <a:ln>
+            <a:noFill/>
+          </a:ln>
+        </p:spPr>
+        <p:style>
+          <a:lnRef idx="2">
+            <a:schemeClr val="accent1">
+              <a:shade val="50000"/>
+            </a:schemeClr>
+          </a:lnRef>
+          <a:fillRef idx="1">
+            <a:schemeClr val="accent1"/>
+          </a:fillRef>
+          <a:effectRef idx="0">
+            <a:schemeClr val="accent1"/>
+          </a:effectRef>
+          <a:fontRef idx="minor">
+            <a:schemeClr val="lt1"/>
+          </a:fontRef>
+        </p:style>
+        <p:txBody>
+          <a:bodyPr rtlCol="0" anchor="ctr"/>
+          <a:lstStyle/>
+          <a:p>
+            <a:pPr algn="ctr"/>
+            <a:endParaRPr lang="en-US"/>
+          </a:p>
+        </p:txBody>
+      </p:sp>
+      <p:sp>
+        <p:nvSpPr>
+          <p:cNvPr id="27" name="Rectangle 26">
+            <a:extLst>
+              <a:ext uri="{FF2B5EF4-FFF2-40B4-BE49-F238E27FC236}">
+                <a16:creationId xmlns:a16="http://schemas.microsoft.com/office/drawing/2014/main" id="{85149191-5F60-4A28-AAFF-039F96B0F3EC}"/>
+              </a:ext>
+              <a:ext uri="{C183D7F6-B498-43B3-948B-1728B52AA6E4}">
+                <adec:decorative xmlns:adec="http://schemas.microsoft.com/office/drawing/2017/decorative" val="1"/>
+              </a:ext>
+            </a:extLst>
+          </p:cNvPr>
+          <p:cNvSpPr>
+            <a:spLocks noGrp="1" noRot="1" noChangeAspect="1" noMove="1" noResize="1" noEditPoints="1" noAdjustHandles="1" noChangeArrowheads="1" noChangeShapeType="1" noTextEdit="1"/>
+          </p:cNvSpPr>
+          <p:nvPr>
+            <p:extLst>
+              <p:ext uri="{386F3935-93C4-4BCD-93E2-E3B085C9AB24}">
+                <p16:designElem xmlns:p16="http://schemas.microsoft.com/office/powerpoint/2015/main" val="1"/>
+              </p:ext>
+            </p:extLst>
+          </p:nvPr>
+        </p:nvSpPr>
+        <p:spPr>
+          <a:xfrm rot="16200000" flipH="1">
+            <a:off x="-1180882" y="1638085"/>
+            <a:ext cx="6857572" cy="3581401"/>
+          </a:xfrm>
+          <a:prstGeom prst="rect">
+            <a:avLst/>
+          </a:prstGeom>
+          <a:gradFill>
+            <a:gsLst>
+              <a:gs pos="0">
+                <a:srgbClr val="000000">
+                  <a:alpha val="59000"/>
+                </a:srgbClr>
+              </a:gs>
+              <a:gs pos="69000">
+                <a:schemeClr val="accent1">
+                  <a:alpha val="0"/>
+                </a:schemeClr>
+              </a:gs>
+            </a:gsLst>
+            <a:lin ang="13200000" scaled="0"/>
+          </a:gradFill>
+          <a:ln>
+            <a:noFill/>
+          </a:ln>
+        </p:spPr>
+        <p:style>
+          <a:lnRef idx="2">
+            <a:schemeClr val="accent1">
+              <a:shade val="50000"/>
+            </a:schemeClr>
+          </a:lnRef>
+          <a:fillRef idx="1">
+            <a:schemeClr val="accent1"/>
+          </a:fillRef>
+          <a:effectRef idx="0">
+            <a:schemeClr val="accent1"/>
+          </a:effectRef>
+          <a:fontRef idx="minor">
+            <a:schemeClr val="lt1"/>
+          </a:fontRef>
+        </p:style>
+        <p:txBody>
+          <a:bodyPr rtlCol="0" anchor="ctr"/>
+          <a:lstStyle/>
+          <a:p>
+            <a:pPr algn="ctr"/>
+            <a:endParaRPr lang="en-US" dirty="0"/>
+          </a:p>
+        </p:txBody>
+      </p:sp>
+      <p:sp>
+        <p:nvSpPr>
+          <p:cNvPr id="29" name="Freeform: Shape 28">
+            <a:extLst>
+              <a:ext uri="{FF2B5EF4-FFF2-40B4-BE49-F238E27FC236}">
+                <a16:creationId xmlns:a16="http://schemas.microsoft.com/office/drawing/2014/main" id="{F8260ED5-17F7-4158-B241-D51DD4CF1B7E}"/>
+              </a:ext>
+              <a:ext uri="{C183D7F6-B498-43B3-948B-1728B52AA6E4}">
+                <adec:decorative xmlns:adec="http://schemas.microsoft.com/office/drawing/2017/decorative" val="1"/>
+              </a:ext>
+            </a:extLst>
+          </p:cNvPr>
+          <p:cNvSpPr>
+            <a:spLocks noGrp="1" noRot="1" noChangeAspect="1" noMove="1" noResize="1" noEditPoints="1" noAdjustHandles="1" noChangeArrowheads="1" noChangeShapeType="1" noTextEdit="1"/>
+          </p:cNvSpPr>
+          <p:nvPr>
+            <p:extLst>
+              <p:ext uri="{386F3935-93C4-4BCD-93E2-E3B085C9AB24}">
+                <p16:designElem xmlns:p16="http://schemas.microsoft.com/office/powerpoint/2015/main" val="1"/>
+              </p:ext>
+            </p:extLst>
+          </p:nvPr>
+        </p:nvSpPr>
+        <p:spPr>
+          <a:xfrm rot="6097846">
+            <a:off x="-747355" y="1201312"/>
+            <a:ext cx="4808302" cy="4088666"/>
+          </a:xfrm>
+          <a:custGeom>
+            <a:avLst/>
+            <a:gdLst>
+              <a:gd name="connsiteX0" fmla="*/ 48844 w 4808302"/>
+              <a:gd name="connsiteY0" fmla="*/ 2888671 h 4088666"/>
+              <a:gd name="connsiteX1" fmla="*/ 0 w 4808302"/>
+              <a:gd name="connsiteY1" fmla="*/ 2404151 h 4088666"/>
+              <a:gd name="connsiteX2" fmla="*/ 2404151 w 4808302"/>
+              <a:gd name="connsiteY2" fmla="*/ 0 h 4088666"/>
+              <a:gd name="connsiteX3" fmla="*/ 4808302 w 4808302"/>
+              <a:gd name="connsiteY3" fmla="*/ 2404151 h 4088666"/>
+              <a:gd name="connsiteX4" fmla="*/ 4700216 w 4808302"/>
+              <a:gd name="connsiteY4" fmla="*/ 3119072 h 4088666"/>
+              <a:gd name="connsiteX5" fmla="*/ 4643143 w 4808302"/>
+              <a:gd name="connsiteY5" fmla="*/ 3275009 h 4088666"/>
+              <a:gd name="connsiteX6" fmla="*/ 690093 w 4808302"/>
+              <a:gd name="connsiteY6" fmla="*/ 4088666 h 4088666"/>
+              <a:gd name="connsiteX7" fmla="*/ 548991 w 4808302"/>
+              <a:gd name="connsiteY7" fmla="*/ 3933414 h 4088666"/>
+              <a:gd name="connsiteX8" fmla="*/ 48844 w 4808302"/>
+              <a:gd name="connsiteY8" fmla="*/ 2888671 h 4088666"/>
+            </a:gdLst>
+            <a:ahLst/>
+            <a:cxnLst>
+              <a:cxn ang="0">
+                <a:pos x="connsiteX0" y="connsiteY0"/>
+              </a:cxn>
+              <a:cxn ang="0">
+                <a:pos x="connsiteX1" y="connsiteY1"/>
+              </a:cxn>
+              <a:cxn ang="0">
+                <a:pos x="connsiteX2" y="connsiteY2"/>
+              </a:cxn>
+              <a:cxn ang="0">
+                <a:pos x="connsiteX3" y="connsiteY3"/>
+              </a:cxn>
+              <a:cxn ang="0">
+                <a:pos x="connsiteX4" y="connsiteY4"/>
+              </a:cxn>
+              <a:cxn ang="0">
+                <a:pos x="connsiteX5" y="connsiteY5"/>
+              </a:cxn>
+              <a:cxn ang="0">
+                <a:pos x="connsiteX6" y="connsiteY6"/>
+              </a:cxn>
+              <a:cxn ang="0">
+                <a:pos x="connsiteX7" y="connsiteY7"/>
+              </a:cxn>
+              <a:cxn ang="0">
+                <a:pos x="connsiteX8" y="connsiteY8"/>
+              </a:cxn>
+            </a:cxnLst>
+            <a:rect l="l" t="t" r="r" b="b"/>
+            <a:pathLst>
+              <a:path w="4808302" h="4088666">
+                <a:moveTo>
+                  <a:pt x="48844" y="2888671"/>
+                </a:moveTo>
+                <a:cubicBezTo>
+                  <a:pt x="16818" y="2732167"/>
+                  <a:pt x="0" y="2570123"/>
+                  <a:pt x="0" y="2404151"/>
+                </a:cubicBezTo>
+                <a:cubicBezTo>
+                  <a:pt x="0" y="1076375"/>
+                  <a:pt x="1076375" y="0"/>
+                  <a:pt x="2404151" y="0"/>
+                </a:cubicBezTo>
+                <a:cubicBezTo>
+                  <a:pt x="3731927" y="0"/>
+                  <a:pt x="4808302" y="1076375"/>
+                  <a:pt x="4808302" y="2404151"/>
+                </a:cubicBezTo>
+                <a:cubicBezTo>
+                  <a:pt x="4808302" y="2653109"/>
+                  <a:pt x="4770461" y="2893229"/>
+                  <a:pt x="4700216" y="3119072"/>
+                </a:cubicBezTo>
+                <a:lnTo>
+                  <a:pt x="4643143" y="3275009"/>
+                </a:lnTo>
+                <a:lnTo>
+                  <a:pt x="690093" y="4088666"/>
+                </a:lnTo>
+                <a:lnTo>
+                  <a:pt x="548991" y="3933414"/>
+                </a:lnTo>
+                <a:cubicBezTo>
+                  <a:pt x="304015" y="3636572"/>
+                  <a:pt x="128908" y="3279932"/>
+                  <a:pt x="48844" y="2888671"/>
+                </a:cubicBezTo>
+                <a:close/>
+              </a:path>
+            </a:pathLst>
+          </a:custGeom>
+          <a:gradFill>
+            <a:gsLst>
+              <a:gs pos="39000">
+                <a:schemeClr val="accent1">
+                  <a:lumMod val="60000"/>
+                  <a:lumOff val="40000"/>
+                  <a:alpha val="0"/>
+                </a:schemeClr>
+              </a:gs>
+              <a:gs pos="100000">
+                <a:schemeClr val="accent1">
+                  <a:lumMod val="75000"/>
+                  <a:alpha val="26000"/>
+                </a:schemeClr>
+              </a:gs>
+            </a:gsLst>
+            <a:lin ang="18600000" scaled="0"/>
+          </a:gradFill>
+          <a:ln>
+            <a:noFill/>
+          </a:ln>
+        </p:spPr>
+        <p:style>
+          <a:lnRef idx="2">
+            <a:schemeClr val="accent1">
+              <a:shade val="50000"/>
+            </a:schemeClr>
+          </a:lnRef>
+          <a:fillRef idx="1">
+            <a:schemeClr val="accent1"/>
+          </a:fillRef>
+          <a:effectRef idx="0">
+            <a:schemeClr val="accent1"/>
+          </a:effectRef>
+          <a:fontRef idx="minor">
+            <a:schemeClr val="lt1"/>
+          </a:fontRef>
+        </p:style>
+        <p:txBody>
+          <a:bodyPr wrap="square" rtlCol="0" anchor="ctr">
+            <a:noAutofit/>
+          </a:bodyPr>
+          <a:lstStyle/>
+          <a:p>
+            <a:pPr algn="ctr"/>
+            <a:endParaRPr lang="en-US" dirty="0"/>
+          </a:p>
+        </p:txBody>
+      </p:sp>
       <p:sp>
         <p:nvSpPr>
           <p:cNvPr id="2" name="Title 1">
@@ -4151,13 +8328,25 @@
             <p:ph type="ctrTitle"/>
           </p:nvPr>
         </p:nvSpPr>
-        <p:spPr/>
-        <p:txBody>
-          <a:bodyPr/>
-          <a:lstStyle/>
-          <a:p>
-            <a:r>
-              <a:rPr lang="en-US" dirty="0"/>
+        <p:spPr>
+          <a:xfrm>
+            <a:off x="660041" y="2767106"/>
+            <a:ext cx="2880828" cy="3071906"/>
+          </a:xfrm>
+        </p:spPr>
+        <p:txBody>
+          <a:bodyPr anchor="t">
+            <a:normAutofit/>
+          </a:bodyPr>
+          <a:lstStyle/>
+          <a:p>
+            <a:pPr algn="l"/>
+            <a:r>
+              <a:rPr lang="en-US" sz="4000">
+                <a:solidFill>
+                  <a:srgbClr val="FFFFFF"/>
+                </a:solidFill>
+              </a:rPr>
               <a:t>Mover Workflow</a:t>
             </a:r>
           </a:p>
@@ -4179,15 +8368,57 @@
             <p:ph type="subTitle" idx="1"/>
           </p:nvPr>
         </p:nvSpPr>
-        <p:spPr/>
-        <p:txBody>
-          <a:bodyPr/>
-          <a:lstStyle/>
-          <a:p>
-            <a:endParaRPr lang="en-US"/>
-          </a:p>
-        </p:txBody>
-      </p:sp>
+        <p:spPr>
+          <a:xfrm>
+            <a:off x="660042" y="806824"/>
+            <a:ext cx="2919738" cy="1494117"/>
+          </a:xfrm>
+        </p:spPr>
+        <p:txBody>
+          <a:bodyPr anchor="b">
+            <a:normAutofit/>
+          </a:bodyPr>
+          <a:lstStyle/>
+          <a:p>
+            <a:pPr algn="l"/>
+            <a:endParaRPr lang="en-US" sz="2000">
+              <a:solidFill>
+                <a:srgbClr val="FFFFFF"/>
+              </a:solidFill>
+            </a:endParaRPr>
+          </a:p>
+        </p:txBody>
+      </p:sp>
+      <p:pic>
+        <p:nvPicPr>
+          <p:cNvPr id="5" name="Picture 4">
+            <a:extLst>
+              <a:ext uri="{FF2B5EF4-FFF2-40B4-BE49-F238E27FC236}">
+                <a16:creationId xmlns:a16="http://schemas.microsoft.com/office/drawing/2014/main" id="{389B2645-F115-7204-8A61-26EE0B28DC15}"/>
+              </a:ext>
+            </a:extLst>
+          </p:cNvPr>
+          <p:cNvPicPr>
+            <a:picLocks noChangeAspect="1"/>
+          </p:cNvPicPr>
+          <p:nvPr/>
+        </p:nvPicPr>
+        <p:blipFill>
+          <a:blip r:embed="rId2"/>
+          <a:stretch>
+            <a:fillRect/>
+          </a:stretch>
+        </p:blipFill>
+        <p:spPr>
+          <a:xfrm>
+            <a:off x="5156965" y="280067"/>
+            <a:ext cx="5328155" cy="6595752"/>
+          </a:xfrm>
+          <a:prstGeom prst="rect">
+            <a:avLst/>
+          </a:prstGeom>
+        </p:spPr>
+      </p:pic>
     </p:spTree>
     <p:extLst>
       <p:ext uri="{BB962C8B-B14F-4D97-AF65-F5344CB8AC3E}">
@@ -4204,6 +8435,14 @@
 <file path=ppt/slides/slide7.xml><?xml version="1.0" encoding="utf-8"?>
 <p:sld xmlns:a="http://schemas.openxmlformats.org/drawingml/2006/main" xmlns:r="http://schemas.openxmlformats.org/officeDocument/2006/relationships" xmlns:p="http://schemas.openxmlformats.org/presentationml/2006/main">
   <p:cSld>
+    <p:bg>
+      <p:bgPr>
+        <a:solidFill>
+          <a:schemeClr val="bg1"/>
+        </a:solidFill>
+        <a:effectLst/>
+      </p:bgPr>
+    </p:bg>
     <p:spTree>
       <p:nvGrpSpPr>
         <p:cNvPr id="1" name="">
@@ -4224,6 +8463,479 @@
           <a:chExt cx="0" cy="0"/>
         </a:xfrm>
       </p:grpSpPr>
+      <p:sp useBgFill="1">
+        <p:nvSpPr>
+          <p:cNvPr id="10" name="Rectangle 9">
+            <a:extLst>
+              <a:ext uri="{FF2B5EF4-FFF2-40B4-BE49-F238E27FC236}">
+                <a16:creationId xmlns:a16="http://schemas.microsoft.com/office/drawing/2014/main" id="{A8384FB5-9ADC-4DDC-881B-597D56F5B15D}"/>
+              </a:ext>
+              <a:ext uri="{C183D7F6-B498-43B3-948B-1728B52AA6E4}">
+                <adec:decorative xmlns:adec="http://schemas.microsoft.com/office/drawing/2017/decorative" val="1"/>
+              </a:ext>
+            </a:extLst>
+          </p:cNvPr>
+          <p:cNvSpPr>
+            <a:spLocks noGrp="1" noRot="1" noChangeAspect="1" noMove="1" noResize="1" noEditPoints="1" noAdjustHandles="1" noChangeArrowheads="1" noChangeShapeType="1" noTextEdit="1"/>
+          </p:cNvSpPr>
+          <p:nvPr>
+            <p:extLst>
+              <p:ext uri="{386F3935-93C4-4BCD-93E2-E3B085C9AB24}">
+                <p16:designElem xmlns:p16="http://schemas.microsoft.com/office/powerpoint/2015/main" val="1"/>
+              </p:ext>
+            </p:extLst>
+          </p:nvPr>
+        </p:nvSpPr>
+        <p:spPr>
+          <a:xfrm>
+            <a:off x="0" y="0"/>
+            <a:ext cx="12192000" cy="6858000"/>
+          </a:xfrm>
+          <a:prstGeom prst="rect">
+            <a:avLst/>
+          </a:prstGeom>
+          <a:ln w="12700" cap="flat" cmpd="sng" algn="ctr">
+            <a:noFill/>
+            <a:prstDash val="solid"/>
+            <a:miter lim="800000"/>
+          </a:ln>
+          <a:effectLst/>
+          <a:extLst>
+            <a:ext uri="{91240B29-F687-4F45-9708-019B960494DF}">
+              <a14:hiddenLine xmlns:a14="http://schemas.microsoft.com/office/drawing/2010/main" w="12700" cap="flat" cmpd="sng" algn="ctr">
+                <a:solidFill>
+                  <a:schemeClr val="accent1">
+                    <a:shade val="50000"/>
+                  </a:schemeClr>
+                </a:solidFill>
+                <a:prstDash val="solid"/>
+                <a:miter lim="800000"/>
+              </a14:hiddenLine>
+            </a:ext>
+          </a:extLst>
+        </p:spPr>
+        <p:style>
+          <a:lnRef idx="2">
+            <a:schemeClr val="accent1">
+              <a:shade val="50000"/>
+            </a:schemeClr>
+          </a:lnRef>
+          <a:fillRef idx="1">
+            <a:schemeClr val="accent1"/>
+          </a:fillRef>
+          <a:effectRef idx="0">
+            <a:schemeClr val="accent1"/>
+          </a:effectRef>
+          <a:fontRef idx="minor">
+            <a:schemeClr val="lt1"/>
+          </a:fontRef>
+        </p:style>
+        <p:txBody>
+          <a:bodyPr rtlCol="0" anchor="ctr"/>
+          <a:lstStyle/>
+          <a:p>
+            <a:pPr algn="ctr"/>
+            <a:endParaRPr lang="en-US"/>
+          </a:p>
+        </p:txBody>
+      </p:sp>
+      <p:sp>
+        <p:nvSpPr>
+          <p:cNvPr id="12" name="Rectangle 11">
+            <a:extLst>
+              <a:ext uri="{FF2B5EF4-FFF2-40B4-BE49-F238E27FC236}">
+                <a16:creationId xmlns:a16="http://schemas.microsoft.com/office/drawing/2014/main" id="{91E5A9A7-95C6-4F4F-B00E-C82E07FE62EF}"/>
+              </a:ext>
+              <a:ext uri="{C183D7F6-B498-43B3-948B-1728B52AA6E4}">
+                <adec:decorative xmlns:adec="http://schemas.microsoft.com/office/drawing/2017/decorative" val="1"/>
+              </a:ext>
+            </a:extLst>
+          </p:cNvPr>
+          <p:cNvSpPr>
+            <a:spLocks noGrp="1" noRot="1" noChangeAspect="1" noMove="1" noResize="1" noEditPoints="1" noAdjustHandles="1" noChangeArrowheads="1" noChangeShapeType="1" noTextEdit="1"/>
+          </p:cNvSpPr>
+          <p:nvPr>
+            <p:extLst>
+              <p:ext uri="{386F3935-93C4-4BCD-93E2-E3B085C9AB24}">
+                <p16:designElem xmlns:p16="http://schemas.microsoft.com/office/powerpoint/2015/main" val="1"/>
+              </p:ext>
+            </p:extLst>
+          </p:nvPr>
+        </p:nvSpPr>
+        <p:spPr>
+          <a:xfrm rot="5400000" flipH="1">
+            <a:off x="-1417539" y="1417538"/>
+            <a:ext cx="6875818" cy="4040744"/>
+          </a:xfrm>
+          <a:prstGeom prst="rect">
+            <a:avLst/>
+          </a:prstGeom>
+          <a:gradFill>
+            <a:gsLst>
+              <a:gs pos="0">
+                <a:srgbClr val="000000"/>
+              </a:gs>
+              <a:gs pos="100000">
+                <a:schemeClr val="accent1">
+                  <a:lumMod val="75000"/>
+                </a:schemeClr>
+              </a:gs>
+            </a:gsLst>
+            <a:lin ang="18600000" scaled="0"/>
+          </a:gradFill>
+          <a:ln>
+            <a:noFill/>
+          </a:ln>
+        </p:spPr>
+        <p:style>
+          <a:lnRef idx="2">
+            <a:schemeClr val="accent1">
+              <a:shade val="50000"/>
+            </a:schemeClr>
+          </a:lnRef>
+          <a:fillRef idx="1">
+            <a:schemeClr val="accent1"/>
+          </a:fillRef>
+          <a:effectRef idx="0">
+            <a:schemeClr val="accent1"/>
+          </a:effectRef>
+          <a:fontRef idx="minor">
+            <a:schemeClr val="lt1"/>
+          </a:fontRef>
+        </p:style>
+        <p:txBody>
+          <a:bodyPr rtlCol="0" anchor="ctr"/>
+          <a:lstStyle/>
+          <a:p>
+            <a:pPr algn="ctr"/>
+            <a:endParaRPr lang="en-US" dirty="0"/>
+          </a:p>
+        </p:txBody>
+      </p:sp>
+      <p:sp>
+        <p:nvSpPr>
+          <p:cNvPr id="14" name="Rectangle 13">
+            <a:extLst>
+              <a:ext uri="{FF2B5EF4-FFF2-40B4-BE49-F238E27FC236}">
+                <a16:creationId xmlns:a16="http://schemas.microsoft.com/office/drawing/2014/main" id="{D07DD2DE-F619-49DD-B5E7-03A290FF4ED1}"/>
+              </a:ext>
+              <a:ext uri="{C183D7F6-B498-43B3-948B-1728B52AA6E4}">
+                <adec:decorative xmlns:adec="http://schemas.microsoft.com/office/drawing/2017/decorative" val="1"/>
+              </a:ext>
+            </a:extLst>
+          </p:cNvPr>
+          <p:cNvSpPr>
+            <a:spLocks noGrp="1" noRot="1" noChangeAspect="1" noMove="1" noResize="1" noEditPoints="1" noAdjustHandles="1" noChangeArrowheads="1" noChangeShapeType="1" noTextEdit="1"/>
+          </p:cNvSpPr>
+          <p:nvPr>
+            <p:extLst>
+              <p:ext uri="{386F3935-93C4-4BCD-93E2-E3B085C9AB24}">
+                <p16:designElem xmlns:p16="http://schemas.microsoft.com/office/powerpoint/2015/main" val="1"/>
+              </p:ext>
+            </p:extLst>
+          </p:nvPr>
+        </p:nvSpPr>
+        <p:spPr>
+          <a:xfrm rot="16200000">
+            <a:off x="-158495" y="2660473"/>
+            <a:ext cx="4355594" cy="4038603"/>
+          </a:xfrm>
+          <a:prstGeom prst="rect">
+            <a:avLst/>
+          </a:prstGeom>
+          <a:gradFill>
+            <a:gsLst>
+              <a:gs pos="0">
+                <a:schemeClr val="accent1">
+                  <a:alpha val="50000"/>
+                </a:schemeClr>
+              </a:gs>
+              <a:gs pos="100000">
+                <a:schemeClr val="accent1">
+                  <a:lumMod val="50000"/>
+                  <a:alpha val="0"/>
+                </a:schemeClr>
+              </a:gs>
+            </a:gsLst>
+            <a:lin ang="11400000" scaled="0"/>
+          </a:gradFill>
+          <a:ln>
+            <a:noFill/>
+          </a:ln>
+        </p:spPr>
+        <p:style>
+          <a:lnRef idx="2">
+            <a:schemeClr val="accent1">
+              <a:shade val="50000"/>
+            </a:schemeClr>
+          </a:lnRef>
+          <a:fillRef idx="1">
+            <a:schemeClr val="accent1"/>
+          </a:fillRef>
+          <a:effectRef idx="0">
+            <a:schemeClr val="accent1"/>
+          </a:effectRef>
+          <a:fontRef idx="minor">
+            <a:schemeClr val="lt1"/>
+          </a:fontRef>
+        </p:style>
+        <p:txBody>
+          <a:bodyPr rtlCol="0" anchor="ctr"/>
+          <a:lstStyle/>
+          <a:p>
+            <a:pPr algn="ctr"/>
+            <a:endParaRPr lang="en-US"/>
+          </a:p>
+        </p:txBody>
+      </p:sp>
+      <p:sp>
+        <p:nvSpPr>
+          <p:cNvPr id="16" name="Rectangle 15">
+            <a:extLst>
+              <a:ext uri="{FF2B5EF4-FFF2-40B4-BE49-F238E27FC236}">
+                <a16:creationId xmlns:a16="http://schemas.microsoft.com/office/drawing/2014/main" id="{85149191-5F60-4A28-AAFF-039F96B0F3EC}"/>
+              </a:ext>
+              <a:ext uri="{C183D7F6-B498-43B3-948B-1728B52AA6E4}">
+                <adec:decorative xmlns:adec="http://schemas.microsoft.com/office/drawing/2017/decorative" val="1"/>
+              </a:ext>
+            </a:extLst>
+          </p:cNvPr>
+          <p:cNvSpPr>
+            <a:spLocks noGrp="1" noRot="1" noChangeAspect="1" noMove="1" noResize="1" noEditPoints="1" noAdjustHandles="1" noChangeArrowheads="1" noChangeShapeType="1" noTextEdit="1"/>
+          </p:cNvSpPr>
+          <p:nvPr>
+            <p:extLst>
+              <p:ext uri="{386F3935-93C4-4BCD-93E2-E3B085C9AB24}">
+                <p16:designElem xmlns:p16="http://schemas.microsoft.com/office/powerpoint/2015/main" val="1"/>
+              </p:ext>
+            </p:extLst>
+          </p:nvPr>
+        </p:nvSpPr>
+        <p:spPr>
+          <a:xfrm rot="16200000" flipH="1">
+            <a:off x="-1180882" y="1638085"/>
+            <a:ext cx="6857572" cy="3581401"/>
+          </a:xfrm>
+          <a:prstGeom prst="rect">
+            <a:avLst/>
+          </a:prstGeom>
+          <a:gradFill>
+            <a:gsLst>
+              <a:gs pos="0">
+                <a:srgbClr val="000000">
+                  <a:alpha val="59000"/>
+                </a:srgbClr>
+              </a:gs>
+              <a:gs pos="69000">
+                <a:schemeClr val="accent1">
+                  <a:alpha val="0"/>
+                </a:schemeClr>
+              </a:gs>
+            </a:gsLst>
+            <a:lin ang="13200000" scaled="0"/>
+          </a:gradFill>
+          <a:ln>
+            <a:noFill/>
+          </a:ln>
+        </p:spPr>
+        <p:style>
+          <a:lnRef idx="2">
+            <a:schemeClr val="accent1">
+              <a:shade val="50000"/>
+            </a:schemeClr>
+          </a:lnRef>
+          <a:fillRef idx="1">
+            <a:schemeClr val="accent1"/>
+          </a:fillRef>
+          <a:effectRef idx="0">
+            <a:schemeClr val="accent1"/>
+          </a:effectRef>
+          <a:fontRef idx="minor">
+            <a:schemeClr val="lt1"/>
+          </a:fontRef>
+        </p:style>
+        <p:txBody>
+          <a:bodyPr rtlCol="0" anchor="ctr"/>
+          <a:lstStyle/>
+          <a:p>
+            <a:pPr algn="ctr"/>
+            <a:endParaRPr lang="en-US" dirty="0"/>
+          </a:p>
+        </p:txBody>
+      </p:sp>
+      <p:sp>
+        <p:nvSpPr>
+          <p:cNvPr id="18" name="Freeform: Shape 17">
+            <a:extLst>
+              <a:ext uri="{FF2B5EF4-FFF2-40B4-BE49-F238E27FC236}">
+                <a16:creationId xmlns:a16="http://schemas.microsoft.com/office/drawing/2014/main" id="{F8260ED5-17F7-4158-B241-D51DD4CF1B7E}"/>
+              </a:ext>
+              <a:ext uri="{C183D7F6-B498-43B3-948B-1728B52AA6E4}">
+                <adec:decorative xmlns:adec="http://schemas.microsoft.com/office/drawing/2017/decorative" val="1"/>
+              </a:ext>
+            </a:extLst>
+          </p:cNvPr>
+          <p:cNvSpPr>
+            <a:spLocks noGrp="1" noRot="1" noChangeAspect="1" noMove="1" noResize="1" noEditPoints="1" noAdjustHandles="1" noChangeArrowheads="1" noChangeShapeType="1" noTextEdit="1"/>
+          </p:cNvSpPr>
+          <p:nvPr>
+            <p:extLst>
+              <p:ext uri="{386F3935-93C4-4BCD-93E2-E3B085C9AB24}">
+                <p16:designElem xmlns:p16="http://schemas.microsoft.com/office/powerpoint/2015/main" val="1"/>
+              </p:ext>
+            </p:extLst>
+          </p:nvPr>
+        </p:nvSpPr>
+        <p:spPr>
+          <a:xfrm rot="6097846">
+            <a:off x="-747355" y="1201312"/>
+            <a:ext cx="4808302" cy="4088666"/>
+          </a:xfrm>
+          <a:custGeom>
+            <a:avLst/>
+            <a:gdLst>
+              <a:gd name="connsiteX0" fmla="*/ 48844 w 4808302"/>
+              <a:gd name="connsiteY0" fmla="*/ 2888671 h 4088666"/>
+              <a:gd name="connsiteX1" fmla="*/ 0 w 4808302"/>
+              <a:gd name="connsiteY1" fmla="*/ 2404151 h 4088666"/>
+              <a:gd name="connsiteX2" fmla="*/ 2404151 w 4808302"/>
+              <a:gd name="connsiteY2" fmla="*/ 0 h 4088666"/>
+              <a:gd name="connsiteX3" fmla="*/ 4808302 w 4808302"/>
+              <a:gd name="connsiteY3" fmla="*/ 2404151 h 4088666"/>
+              <a:gd name="connsiteX4" fmla="*/ 4700216 w 4808302"/>
+              <a:gd name="connsiteY4" fmla="*/ 3119072 h 4088666"/>
+              <a:gd name="connsiteX5" fmla="*/ 4643143 w 4808302"/>
+              <a:gd name="connsiteY5" fmla="*/ 3275009 h 4088666"/>
+              <a:gd name="connsiteX6" fmla="*/ 690093 w 4808302"/>
+              <a:gd name="connsiteY6" fmla="*/ 4088666 h 4088666"/>
+              <a:gd name="connsiteX7" fmla="*/ 548991 w 4808302"/>
+              <a:gd name="connsiteY7" fmla="*/ 3933414 h 4088666"/>
+              <a:gd name="connsiteX8" fmla="*/ 48844 w 4808302"/>
+              <a:gd name="connsiteY8" fmla="*/ 2888671 h 4088666"/>
+            </a:gdLst>
+            <a:ahLst/>
+            <a:cxnLst>
+              <a:cxn ang="0">
+                <a:pos x="connsiteX0" y="connsiteY0"/>
+              </a:cxn>
+              <a:cxn ang="0">
+                <a:pos x="connsiteX1" y="connsiteY1"/>
+              </a:cxn>
+              <a:cxn ang="0">
+                <a:pos x="connsiteX2" y="connsiteY2"/>
+              </a:cxn>
+              <a:cxn ang="0">
+                <a:pos x="connsiteX3" y="connsiteY3"/>
+              </a:cxn>
+              <a:cxn ang="0">
+                <a:pos x="connsiteX4" y="connsiteY4"/>
+              </a:cxn>
+              <a:cxn ang="0">
+                <a:pos x="connsiteX5" y="connsiteY5"/>
+              </a:cxn>
+              <a:cxn ang="0">
+                <a:pos x="connsiteX6" y="connsiteY6"/>
+              </a:cxn>
+              <a:cxn ang="0">
+                <a:pos x="connsiteX7" y="connsiteY7"/>
+              </a:cxn>
+              <a:cxn ang="0">
+                <a:pos x="connsiteX8" y="connsiteY8"/>
+              </a:cxn>
+            </a:cxnLst>
+            <a:rect l="l" t="t" r="r" b="b"/>
+            <a:pathLst>
+              <a:path w="4808302" h="4088666">
+                <a:moveTo>
+                  <a:pt x="48844" y="2888671"/>
+                </a:moveTo>
+                <a:cubicBezTo>
+                  <a:pt x="16818" y="2732167"/>
+                  <a:pt x="0" y="2570123"/>
+                  <a:pt x="0" y="2404151"/>
+                </a:cubicBezTo>
+                <a:cubicBezTo>
+                  <a:pt x="0" y="1076375"/>
+                  <a:pt x="1076375" y="0"/>
+                  <a:pt x="2404151" y="0"/>
+                </a:cubicBezTo>
+                <a:cubicBezTo>
+                  <a:pt x="3731927" y="0"/>
+                  <a:pt x="4808302" y="1076375"/>
+                  <a:pt x="4808302" y="2404151"/>
+                </a:cubicBezTo>
+                <a:cubicBezTo>
+                  <a:pt x="4808302" y="2653109"/>
+                  <a:pt x="4770461" y="2893229"/>
+                  <a:pt x="4700216" y="3119072"/>
+                </a:cubicBezTo>
+                <a:lnTo>
+                  <a:pt x="4643143" y="3275009"/>
+                </a:lnTo>
+                <a:lnTo>
+                  <a:pt x="690093" y="4088666"/>
+                </a:lnTo>
+                <a:lnTo>
+                  <a:pt x="548991" y="3933414"/>
+                </a:lnTo>
+                <a:cubicBezTo>
+                  <a:pt x="304015" y="3636572"/>
+                  <a:pt x="128908" y="3279932"/>
+                  <a:pt x="48844" y="2888671"/>
+                </a:cubicBezTo>
+                <a:close/>
+              </a:path>
+            </a:pathLst>
+          </a:custGeom>
+          <a:gradFill>
+            <a:gsLst>
+              <a:gs pos="39000">
+                <a:schemeClr val="accent1">
+                  <a:lumMod val="60000"/>
+                  <a:lumOff val="40000"/>
+                  <a:alpha val="0"/>
+                </a:schemeClr>
+              </a:gs>
+              <a:gs pos="100000">
+                <a:schemeClr val="accent1">
+                  <a:lumMod val="75000"/>
+                  <a:alpha val="26000"/>
+                </a:schemeClr>
+              </a:gs>
+            </a:gsLst>
+            <a:lin ang="18600000" scaled="0"/>
+          </a:gradFill>
+          <a:ln>
+            <a:noFill/>
+          </a:ln>
+        </p:spPr>
+        <p:style>
+          <a:lnRef idx="2">
+            <a:schemeClr val="accent1">
+              <a:shade val="50000"/>
+            </a:schemeClr>
+          </a:lnRef>
+          <a:fillRef idx="1">
+            <a:schemeClr val="accent1"/>
+          </a:fillRef>
+          <a:effectRef idx="0">
+            <a:schemeClr val="accent1"/>
+          </a:effectRef>
+          <a:fontRef idx="minor">
+            <a:schemeClr val="lt1"/>
+          </a:fontRef>
+        </p:style>
+        <p:txBody>
+          <a:bodyPr wrap="square" rtlCol="0" anchor="ctr">
+            <a:noAutofit/>
+          </a:bodyPr>
+          <a:lstStyle/>
+          <a:p>
+            <a:pPr algn="ctr"/>
+            <a:endParaRPr lang="en-US" dirty="0"/>
+          </a:p>
+        </p:txBody>
+      </p:sp>
       <p:sp>
         <p:nvSpPr>
           <p:cNvPr id="2" name="Title 1">
@@ -4240,13 +8952,25 @@
             <p:ph type="ctrTitle"/>
           </p:nvPr>
         </p:nvSpPr>
-        <p:spPr/>
-        <p:txBody>
-          <a:bodyPr/>
-          <a:lstStyle/>
-          <a:p>
-            <a:r>
-              <a:rPr lang="en-US" dirty="0"/>
+        <p:spPr>
+          <a:xfrm>
+            <a:off x="660041" y="2767106"/>
+            <a:ext cx="2880828" cy="3071906"/>
+          </a:xfrm>
+        </p:spPr>
+        <p:txBody>
+          <a:bodyPr anchor="t">
+            <a:normAutofit/>
+          </a:bodyPr>
+          <a:lstStyle/>
+          <a:p>
+            <a:pPr algn="l"/>
+            <a:r>
+              <a:rPr lang="en-US" sz="4000">
+                <a:solidFill>
+                  <a:srgbClr val="FFFFFF"/>
+                </a:solidFill>
+              </a:rPr>
               <a:t>Leaver Workflow</a:t>
             </a:r>
           </a:p>
@@ -4268,15 +8992,57 @@
             <p:ph type="subTitle" idx="1"/>
           </p:nvPr>
         </p:nvSpPr>
-        <p:spPr/>
-        <p:txBody>
-          <a:bodyPr/>
-          <a:lstStyle/>
-          <a:p>
-            <a:endParaRPr lang="en-US"/>
-          </a:p>
-        </p:txBody>
-      </p:sp>
+        <p:spPr>
+          <a:xfrm>
+            <a:off x="660042" y="806824"/>
+            <a:ext cx="2919738" cy="1494117"/>
+          </a:xfrm>
+        </p:spPr>
+        <p:txBody>
+          <a:bodyPr anchor="b">
+            <a:normAutofit/>
+          </a:bodyPr>
+          <a:lstStyle/>
+          <a:p>
+            <a:pPr algn="l"/>
+            <a:endParaRPr lang="en-US" sz="2000">
+              <a:solidFill>
+                <a:srgbClr val="FFFFFF"/>
+              </a:solidFill>
+            </a:endParaRPr>
+          </a:p>
+        </p:txBody>
+      </p:sp>
+      <p:pic>
+        <p:nvPicPr>
+          <p:cNvPr id="5" name="Picture 4">
+            <a:extLst>
+              <a:ext uri="{FF2B5EF4-FFF2-40B4-BE49-F238E27FC236}">
+                <a16:creationId xmlns:a16="http://schemas.microsoft.com/office/drawing/2014/main" id="{03B9D63C-08E3-D2CC-4E9A-E5028718A87E}"/>
+              </a:ext>
+            </a:extLst>
+          </p:cNvPr>
+          <p:cNvPicPr>
+            <a:picLocks noChangeAspect="1"/>
+          </p:cNvPicPr>
+          <p:nvPr/>
+        </p:nvPicPr>
+        <p:blipFill>
+          <a:blip r:embed="rId2"/>
+          <a:stretch>
+            <a:fillRect/>
+          </a:stretch>
+        </p:blipFill>
+        <p:spPr>
+          <a:xfrm>
+            <a:off x="5953760" y="91440"/>
+            <a:ext cx="4368800" cy="6583680"/>
+          </a:xfrm>
+          <a:prstGeom prst="rect">
+            <a:avLst/>
+          </a:prstGeom>
+        </p:spPr>
+      </p:pic>
     </p:spTree>
     <p:extLst>
       <p:ext uri="{BB962C8B-B14F-4D97-AF65-F5344CB8AC3E}">
@@ -4293,6 +9059,14 @@
 <file path=ppt/slides/slide8.xml><?xml version="1.0" encoding="utf-8"?>
 <p:sld xmlns:a="http://schemas.openxmlformats.org/drawingml/2006/main" xmlns:r="http://schemas.openxmlformats.org/officeDocument/2006/relationships" xmlns:p="http://schemas.openxmlformats.org/presentationml/2006/main">
   <p:cSld>
+    <p:bg>
+      <p:bgPr>
+        <a:solidFill>
+          <a:schemeClr val="bg1"/>
+        </a:solidFill>
+        <a:effectLst/>
+      </p:bgPr>
+    </p:bg>
     <p:spTree>
       <p:nvGrpSpPr>
         <p:cNvPr id="1" name="">
@@ -4313,6 +9087,66 @@
           <a:chExt cx="0" cy="0"/>
         </a:xfrm>
       </p:grpSpPr>
+      <p:sp useBgFill="1">
+        <p:nvSpPr>
+          <p:cNvPr id="9" name="Rectangle 8">
+            <a:extLst>
+              <a:ext uri="{FF2B5EF4-FFF2-40B4-BE49-F238E27FC236}">
+                <a16:creationId xmlns:a16="http://schemas.microsoft.com/office/drawing/2014/main" id="{8A94871E-96FC-4ADE-815B-41A636E34F1A}"/>
+              </a:ext>
+              <a:ext uri="{C183D7F6-B498-43B3-948B-1728B52AA6E4}">
+                <adec:decorative xmlns:adec="http://schemas.microsoft.com/office/drawing/2017/decorative" val="1"/>
+              </a:ext>
+            </a:extLst>
+          </p:cNvPr>
+          <p:cNvSpPr>
+            <a:spLocks noGrp="1" noRot="1" noChangeAspect="1" noMove="1" noResize="1" noEditPoints="1" noAdjustHandles="1" noChangeArrowheads="1" noChangeShapeType="1" noTextEdit="1"/>
+          </p:cNvSpPr>
+          <p:nvPr>
+            <p:extLst>
+              <p:ext uri="{386F3935-93C4-4BCD-93E2-E3B085C9AB24}">
+                <p16:designElem xmlns:p16="http://schemas.microsoft.com/office/powerpoint/2015/main" val="1"/>
+              </p:ext>
+            </p:extLst>
+          </p:nvPr>
+        </p:nvSpPr>
+        <p:spPr>
+          <a:xfrm>
+            <a:off x="0" y="0"/>
+            <a:ext cx="12192000" cy="6858000"/>
+          </a:xfrm>
+          <a:prstGeom prst="rect">
+            <a:avLst/>
+          </a:prstGeom>
+          <a:ln>
+            <a:noFill/>
+          </a:ln>
+        </p:spPr>
+        <p:style>
+          <a:lnRef idx="2">
+            <a:schemeClr val="accent1">
+              <a:shade val="50000"/>
+            </a:schemeClr>
+          </a:lnRef>
+          <a:fillRef idx="1">
+            <a:schemeClr val="accent1"/>
+          </a:fillRef>
+          <a:effectRef idx="0">
+            <a:schemeClr val="accent1"/>
+          </a:effectRef>
+          <a:fontRef idx="minor">
+            <a:schemeClr val="lt1"/>
+          </a:fontRef>
+        </p:style>
+        <p:txBody>
+          <a:bodyPr rtlCol="0" anchor="ctr"/>
+          <a:lstStyle/>
+          <a:p>
+            <a:pPr algn="ctr"/>
+            <a:endParaRPr lang="en-US"/>
+          </a:p>
+        </p:txBody>
+      </p:sp>
       <p:sp>
         <p:nvSpPr>
           <p:cNvPr id="2" name="Title 1">
@@ -4329,14 +9163,22 @@
             <p:ph type="ctrTitle"/>
           </p:nvPr>
         </p:nvSpPr>
-        <p:spPr/>
-        <p:txBody>
-          <a:bodyPr/>
-          <a:lstStyle/>
-          <a:p>
-            <a:r>
-              <a:rPr lang="en-US" dirty="0"/>
-              <a:t>RBAC Model</a:t>
+        <p:spPr>
+          <a:xfrm>
+            <a:off x="640080" y="320040"/>
+            <a:ext cx="6692827" cy="3892669"/>
+          </a:xfrm>
+        </p:spPr>
+        <p:txBody>
+          <a:bodyPr>
+            <a:normAutofit/>
+          </a:bodyPr>
+          <a:lstStyle/>
+          <a:p>
+            <a:pPr algn="l"/>
+            <a:r>
+              <a:rPr lang="en-US" sz="6600"/>
+              <a:t>Contrôle d’Accès Basé sur les Rôles (RBAC)</a:t>
             </a:r>
           </a:p>
         </p:txBody>
@@ -4357,15 +9199,1074 @@
             <p:ph type="subTitle" idx="1"/>
           </p:nvPr>
         </p:nvSpPr>
-        <p:spPr/>
-        <p:txBody>
-          <a:bodyPr/>
-          <a:lstStyle/>
-          <a:p>
+        <p:spPr>
+          <a:xfrm>
+            <a:off x="640080" y="4532750"/>
+            <a:ext cx="6692827" cy="2005210"/>
+          </a:xfrm>
+        </p:spPr>
+        <p:txBody>
+          <a:bodyPr>
+            <a:normAutofit fontScale="70000" lnSpcReduction="20000"/>
+          </a:bodyPr>
+          <a:lstStyle/>
+          <a:p>
+            <a:pPr algn="l"/>
+            <a:r>
+              <a:rPr lang="fr-FR" dirty="0"/>
+              <a:t>Les accès sont attribués automatiquement selon les responsabilités du poste.</a:t>
+            </a:r>
+          </a:p>
+          <a:p>
+            <a:pPr algn="l"/>
+            <a:endParaRPr lang="fr-FR" dirty="0"/>
+          </a:p>
+          <a:p>
+            <a:pPr algn="l"/>
+            <a:r>
+              <a:rPr lang="fr-FR" dirty="0"/>
+              <a:t>Principe du moindre privilège</a:t>
+            </a:r>
+          </a:p>
+          <a:p>
+            <a:pPr algn="l"/>
+            <a:endParaRPr lang="fr-FR" dirty="0"/>
+          </a:p>
+          <a:p>
+            <a:pPr algn="l"/>
+            <a:r>
+              <a:rPr lang="fr-FR" dirty="0"/>
+              <a:t>Chaque employé reçoit uniquement les accès nécessaires à l'exercice de ses fonctions.</a:t>
+            </a:r>
+            <a:endParaRPr lang="en-US" dirty="0"/>
+          </a:p>
+        </p:txBody>
+      </p:sp>
+      <p:sp>
+        <p:nvSpPr>
+          <p:cNvPr id="11" name="sketch line">
+            <a:extLst>
+              <a:ext uri="{FF2B5EF4-FFF2-40B4-BE49-F238E27FC236}">
+                <a16:creationId xmlns:a16="http://schemas.microsoft.com/office/drawing/2014/main" id="{3FCFB1DE-0B7E-48CC-BA90-B2AB0889F9D6}"/>
+              </a:ext>
+              <a:ext uri="{C183D7F6-B498-43B3-948B-1728B52AA6E4}">
+                <adec:decorative xmlns:adec="http://schemas.microsoft.com/office/drawing/2017/decorative" val="1"/>
+              </a:ext>
+            </a:extLst>
+          </p:cNvPr>
+          <p:cNvSpPr>
+            <a:spLocks noGrp="1" noRot="1" noChangeAspect="1" noMove="1" noResize="1" noEditPoints="1" noAdjustHandles="1" noChangeArrowheads="1" noChangeShapeType="1" noTextEdit="1"/>
+          </p:cNvSpPr>
+          <p:nvPr>
+            <p:extLst>
+              <p:ext uri="{386F3935-93C4-4BCD-93E2-E3B085C9AB24}">
+                <p16:designElem xmlns:p16="http://schemas.microsoft.com/office/powerpoint/2015/main" val="1"/>
+              </p:ext>
+            </p:extLst>
+          </p:nvPr>
+        </p:nvSpPr>
+        <p:spPr>
+          <a:xfrm>
+            <a:off x="714562" y="4409267"/>
+            <a:ext cx="4243589" cy="18288"/>
+          </a:xfrm>
+          <a:custGeom>
+            <a:avLst/>
+            <a:gdLst>
+              <a:gd name="csX0" fmla="*/ 0 w 4243589"/>
+              <a:gd name="csY0" fmla="*/ 0 h 18288"/>
+              <a:gd name="csX1" fmla="*/ 563791 w 4243589"/>
+              <a:gd name="csY1" fmla="*/ 0 h 18288"/>
+              <a:gd name="csX2" fmla="*/ 1042710 w 4243589"/>
+              <a:gd name="csY2" fmla="*/ 0 h 18288"/>
+              <a:gd name="csX3" fmla="*/ 1564066 w 4243589"/>
+              <a:gd name="csY3" fmla="*/ 0 h 18288"/>
+              <a:gd name="csX4" fmla="*/ 2212729 w 4243589"/>
+              <a:gd name="csY4" fmla="*/ 0 h 18288"/>
+              <a:gd name="csX5" fmla="*/ 2776520 w 4243589"/>
+              <a:gd name="csY5" fmla="*/ 0 h 18288"/>
+              <a:gd name="csX6" fmla="*/ 3297875 w 4243589"/>
+              <a:gd name="csY6" fmla="*/ 0 h 18288"/>
+              <a:gd name="csX7" fmla="*/ 4243589 w 4243589"/>
+              <a:gd name="csY7" fmla="*/ 0 h 18288"/>
+              <a:gd name="csX8" fmla="*/ 4243589 w 4243589"/>
+              <a:gd name="csY8" fmla="*/ 18288 h 18288"/>
+              <a:gd name="csX9" fmla="*/ 3637362 w 4243589"/>
+              <a:gd name="csY9" fmla="*/ 18288 h 18288"/>
+              <a:gd name="csX10" fmla="*/ 3116007 w 4243589"/>
+              <a:gd name="csY10" fmla="*/ 18288 h 18288"/>
+              <a:gd name="csX11" fmla="*/ 2424908 w 4243589"/>
+              <a:gd name="csY11" fmla="*/ 18288 h 18288"/>
+              <a:gd name="csX12" fmla="*/ 1861117 w 4243589"/>
+              <a:gd name="csY12" fmla="*/ 18288 h 18288"/>
+              <a:gd name="csX13" fmla="*/ 1382198 w 4243589"/>
+              <a:gd name="csY13" fmla="*/ 18288 h 18288"/>
+              <a:gd name="csX14" fmla="*/ 733535 w 4243589"/>
+              <a:gd name="csY14" fmla="*/ 18288 h 18288"/>
+              <a:gd name="csX15" fmla="*/ 0 w 4243589"/>
+              <a:gd name="csY15" fmla="*/ 18288 h 18288"/>
+              <a:gd name="csX16" fmla="*/ 0 w 4243589"/>
+              <a:gd name="csY16" fmla="*/ 0 h 18288"/>
+            </a:gdLst>
+            <a:ahLst/>
+            <a:cxnLst>
+              <a:cxn ang="0">
+                <a:pos x="csX0" y="csY0"/>
+              </a:cxn>
+              <a:cxn ang="0">
+                <a:pos x="csX1" y="csY1"/>
+              </a:cxn>
+              <a:cxn ang="0">
+                <a:pos x="csX2" y="csY2"/>
+              </a:cxn>
+              <a:cxn ang="0">
+                <a:pos x="csX3" y="csY3"/>
+              </a:cxn>
+              <a:cxn ang="0">
+                <a:pos x="csX4" y="csY4"/>
+              </a:cxn>
+              <a:cxn ang="0">
+                <a:pos x="csX5" y="csY5"/>
+              </a:cxn>
+              <a:cxn ang="0">
+                <a:pos x="csX6" y="csY6"/>
+              </a:cxn>
+              <a:cxn ang="0">
+                <a:pos x="csX7" y="csY7"/>
+              </a:cxn>
+              <a:cxn ang="0">
+                <a:pos x="csX8" y="csY8"/>
+              </a:cxn>
+              <a:cxn ang="0">
+                <a:pos x="csX9" y="csY9"/>
+              </a:cxn>
+              <a:cxn ang="0">
+                <a:pos x="csX10" y="csY10"/>
+              </a:cxn>
+              <a:cxn ang="0">
+                <a:pos x="csX11" y="csY11"/>
+              </a:cxn>
+              <a:cxn ang="0">
+                <a:pos x="csX12" y="csY12"/>
+              </a:cxn>
+              <a:cxn ang="0">
+                <a:pos x="csX13" y="csY13"/>
+              </a:cxn>
+              <a:cxn ang="0">
+                <a:pos x="csX14" y="csY14"/>
+              </a:cxn>
+              <a:cxn ang="0">
+                <a:pos x="csX15" y="csY15"/>
+              </a:cxn>
+              <a:cxn ang="0">
+                <a:pos x="csX16" y="csY16"/>
+              </a:cxn>
+            </a:cxnLst>
+            <a:rect l="l" t="t" r="r" b="b"/>
+            <a:pathLst>
+              <a:path w="4243589" h="18288" fill="none" extrusionOk="0">
+                <a:moveTo>
+                  <a:pt x="0" y="0"/>
+                </a:moveTo>
+                <a:cubicBezTo>
+                  <a:pt x="157351" y="-15653"/>
+                  <a:pt x="378877" y="-5828"/>
+                  <a:pt x="563791" y="0"/>
+                </a:cubicBezTo>
+                <a:cubicBezTo>
+                  <a:pt x="748705" y="5828"/>
+                  <a:pt x="905659" y="-5525"/>
+                  <a:pt x="1042710" y="0"/>
+                </a:cubicBezTo>
+                <a:cubicBezTo>
+                  <a:pt x="1179761" y="5525"/>
+                  <a:pt x="1356845" y="-21288"/>
+                  <a:pt x="1564066" y="0"/>
+                </a:cubicBezTo>
+                <a:cubicBezTo>
+                  <a:pt x="1771287" y="21288"/>
+                  <a:pt x="1912099" y="25135"/>
+                  <a:pt x="2212729" y="0"/>
+                </a:cubicBezTo>
+                <a:cubicBezTo>
+                  <a:pt x="2513359" y="-25135"/>
+                  <a:pt x="2514918" y="-27119"/>
+                  <a:pt x="2776520" y="0"/>
+                </a:cubicBezTo>
+                <a:cubicBezTo>
+                  <a:pt x="3038122" y="27119"/>
+                  <a:pt x="3178771" y="18116"/>
+                  <a:pt x="3297875" y="0"/>
+                </a:cubicBezTo>
+                <a:cubicBezTo>
+                  <a:pt x="3416980" y="-18116"/>
+                  <a:pt x="4012240" y="-40869"/>
+                  <a:pt x="4243589" y="0"/>
+                </a:cubicBezTo>
+                <a:cubicBezTo>
+                  <a:pt x="4243987" y="7429"/>
+                  <a:pt x="4243569" y="10822"/>
+                  <a:pt x="4243589" y="18288"/>
+                </a:cubicBezTo>
+                <a:cubicBezTo>
+                  <a:pt x="4112949" y="-2855"/>
+                  <a:pt x="3928037" y="1831"/>
+                  <a:pt x="3637362" y="18288"/>
+                </a:cubicBezTo>
+                <a:cubicBezTo>
+                  <a:pt x="3346687" y="34745"/>
+                  <a:pt x="3254446" y="26669"/>
+                  <a:pt x="3116007" y="18288"/>
+                </a:cubicBezTo>
+                <a:cubicBezTo>
+                  <a:pt x="2977569" y="9907"/>
+                  <a:pt x="2620228" y="28873"/>
+                  <a:pt x="2424908" y="18288"/>
+                </a:cubicBezTo>
+                <a:cubicBezTo>
+                  <a:pt x="2229588" y="7703"/>
+                  <a:pt x="2088287" y="-3854"/>
+                  <a:pt x="1861117" y="18288"/>
+                </a:cubicBezTo>
+                <a:cubicBezTo>
+                  <a:pt x="1633947" y="40430"/>
+                  <a:pt x="1502447" y="-871"/>
+                  <a:pt x="1382198" y="18288"/>
+                </a:cubicBezTo>
+                <a:cubicBezTo>
+                  <a:pt x="1261949" y="37447"/>
+                  <a:pt x="1045440" y="28353"/>
+                  <a:pt x="733535" y="18288"/>
+                </a:cubicBezTo>
+                <a:cubicBezTo>
+                  <a:pt x="421630" y="8223"/>
+                  <a:pt x="341257" y="-18359"/>
+                  <a:pt x="0" y="18288"/>
+                </a:cubicBezTo>
+                <a:cubicBezTo>
+                  <a:pt x="-591" y="13205"/>
+                  <a:pt x="-663" y="6329"/>
+                  <a:pt x="0" y="0"/>
+                </a:cubicBezTo>
+                <a:close/>
+              </a:path>
+              <a:path w="4243589" h="18288" stroke="0" extrusionOk="0">
+                <a:moveTo>
+                  <a:pt x="0" y="0"/>
+                </a:moveTo>
+                <a:cubicBezTo>
+                  <a:pt x="128164" y="17204"/>
+                  <a:pt x="312653" y="1129"/>
+                  <a:pt x="563791" y="0"/>
+                </a:cubicBezTo>
+                <a:cubicBezTo>
+                  <a:pt x="814929" y="-1129"/>
+                  <a:pt x="837271" y="8503"/>
+                  <a:pt x="1042710" y="0"/>
+                </a:cubicBezTo>
+                <a:cubicBezTo>
+                  <a:pt x="1248149" y="-8503"/>
+                  <a:pt x="1588432" y="-28862"/>
+                  <a:pt x="1733809" y="0"/>
+                </a:cubicBezTo>
+                <a:cubicBezTo>
+                  <a:pt x="1879186" y="28862"/>
+                  <a:pt x="2052815" y="5974"/>
+                  <a:pt x="2297600" y="0"/>
+                </a:cubicBezTo>
+                <a:cubicBezTo>
+                  <a:pt x="2542385" y="-5974"/>
+                  <a:pt x="2699960" y="-23550"/>
+                  <a:pt x="2861391" y="0"/>
+                </a:cubicBezTo>
+                <a:cubicBezTo>
+                  <a:pt x="3022822" y="23550"/>
+                  <a:pt x="3390411" y="25272"/>
+                  <a:pt x="3552490" y="0"/>
+                </a:cubicBezTo>
+                <a:cubicBezTo>
+                  <a:pt x="3714569" y="-25272"/>
+                  <a:pt x="3950585" y="-31327"/>
+                  <a:pt x="4243589" y="0"/>
+                </a:cubicBezTo>
+                <a:cubicBezTo>
+                  <a:pt x="4242703" y="5429"/>
+                  <a:pt x="4244410" y="14046"/>
+                  <a:pt x="4243589" y="18288"/>
+                </a:cubicBezTo>
+                <a:cubicBezTo>
+                  <a:pt x="4130424" y="-1240"/>
+                  <a:pt x="3932803" y="42249"/>
+                  <a:pt x="3722234" y="18288"/>
+                </a:cubicBezTo>
+                <a:cubicBezTo>
+                  <a:pt x="3511665" y="-5673"/>
+                  <a:pt x="3269903" y="45994"/>
+                  <a:pt x="3116007" y="18288"/>
+                </a:cubicBezTo>
+                <a:cubicBezTo>
+                  <a:pt x="2962111" y="-9418"/>
+                  <a:pt x="2744280" y="23224"/>
+                  <a:pt x="2509780" y="18288"/>
+                </a:cubicBezTo>
+                <a:cubicBezTo>
+                  <a:pt x="2275280" y="13352"/>
+                  <a:pt x="2066059" y="43664"/>
+                  <a:pt x="1945989" y="18288"/>
+                </a:cubicBezTo>
+                <a:cubicBezTo>
+                  <a:pt x="1825919" y="-7088"/>
+                  <a:pt x="1407329" y="12616"/>
+                  <a:pt x="1254890" y="18288"/>
+                </a:cubicBezTo>
+                <a:cubicBezTo>
+                  <a:pt x="1102451" y="23960"/>
+                  <a:pt x="837950" y="31673"/>
+                  <a:pt x="563791" y="18288"/>
+                </a:cubicBezTo>
+                <a:cubicBezTo>
+                  <a:pt x="289632" y="4903"/>
+                  <a:pt x="132768" y="7105"/>
+                  <a:pt x="0" y="18288"/>
+                </a:cubicBezTo>
+                <a:cubicBezTo>
+                  <a:pt x="668" y="13665"/>
+                  <a:pt x="578" y="5675"/>
+                  <a:pt x="0" y="0"/>
+                </a:cubicBezTo>
+                <a:close/>
+              </a:path>
+            </a:pathLst>
+          </a:custGeom>
+          <a:solidFill>
+            <a:schemeClr val="accent2"/>
+          </a:solidFill>
+          <a:ln w="38100" cap="rnd">
+            <a:solidFill>
+              <a:schemeClr val="accent2"/>
+            </a:solidFill>
+            <a:round/>
+            <a:extLst>
+              <a:ext uri="{C807C97D-BFC1-408E-A445-0C87EB9F89A2}">
+                <ask:lineSketchStyleProps xmlns:ask="http://schemas.microsoft.com/office/drawing/2018/sketchyshapes" sd="1219033472">
+                  <a:prstGeom prst="rect">
+                    <a:avLst/>
+                  </a:prstGeom>
+                  <ask:type>
+                    <ask:lineSketchFreehand/>
+                  </ask:type>
+                </ask:lineSketchStyleProps>
+              </a:ext>
+            </a:extLst>
+          </a:ln>
+        </p:spPr>
+        <p:style>
+          <a:lnRef idx="2">
+            <a:schemeClr val="accent1">
+              <a:shade val="50000"/>
+            </a:schemeClr>
+          </a:lnRef>
+          <a:fillRef idx="1">
+            <a:schemeClr val="accent1"/>
+          </a:fillRef>
+          <a:effectRef idx="0">
+            <a:schemeClr val="accent1"/>
+          </a:effectRef>
+          <a:fontRef idx="minor">
+            <a:schemeClr val="lt1"/>
+          </a:fontRef>
+        </p:style>
+        <p:txBody>
+          <a:bodyPr rtlCol="0" anchor="ctr"/>
+          <a:lstStyle/>
+          <a:p>
+            <a:pPr algn="ctr"/>
             <a:endParaRPr lang="en-US"/>
           </a:p>
         </p:txBody>
       </p:sp>
+      <p:graphicFrame>
+        <p:nvGraphicFramePr>
+          <p:cNvPr id="4" name="Table 3">
+            <a:extLst>
+              <a:ext uri="{FF2B5EF4-FFF2-40B4-BE49-F238E27FC236}">
+                <a16:creationId xmlns:a16="http://schemas.microsoft.com/office/drawing/2014/main" id="{CFC62470-5539-2F14-D8B2-CF2BC4C0094C}"/>
+              </a:ext>
+            </a:extLst>
+          </p:cNvPr>
+          <p:cNvGraphicFramePr>
+            <a:graphicFrameLocks noGrp="1"/>
+          </p:cNvGraphicFramePr>
+          <p:nvPr>
+            <p:extLst>
+              <p:ext uri="{D42A27DB-BD31-4B8C-83A1-F6EECF244321}">
+                <p14:modId xmlns:p14="http://schemas.microsoft.com/office/powerpoint/2010/main" val="3194775741"/>
+              </p:ext>
+            </p:extLst>
+          </p:nvPr>
+        </p:nvGraphicFramePr>
+        <p:xfrm>
+          <a:off x="7781544" y="1550456"/>
+          <a:ext cx="4087369" cy="3520618"/>
+        </p:xfrm>
+        <a:graphic>
+          <a:graphicData uri="http://schemas.openxmlformats.org/drawingml/2006/table">
+            <a:tbl>
+              <a:tblPr>
+                <a:solidFill>
+                  <a:schemeClr val="bg1"/>
+                </a:solidFill>
+              </a:tblPr>
+              <a:tblGrid>
+                <a:gridCol w="1375515">
+                  <a:extLst>
+                    <a:ext uri="{9D8B030D-6E8A-4147-A177-3AD203B41FA5}">
+                      <a16:colId xmlns:a16="http://schemas.microsoft.com/office/drawing/2014/main" val="2595530736"/>
+                    </a:ext>
+                  </a:extLst>
+                </a:gridCol>
+                <a:gridCol w="2711854">
+                  <a:extLst>
+                    <a:ext uri="{9D8B030D-6E8A-4147-A177-3AD203B41FA5}">
+                      <a16:colId xmlns:a16="http://schemas.microsoft.com/office/drawing/2014/main" val="1755134806"/>
+                    </a:ext>
+                  </a:extLst>
+                </a:gridCol>
+              </a:tblGrid>
+              <a:tr h="415913">
+                <a:tc>
+                  <a:txBody>
+                    <a:bodyPr/>
+                    <a:lstStyle/>
+                    <a:p>
+                      <a:pPr>
+                        <a:buNone/>
+                      </a:pPr>
+                      <a:r>
+                        <a:rPr lang="en-US" sz="1300" cap="none" spc="0">
+                          <a:solidFill>
+                            <a:schemeClr val="tx1"/>
+                          </a:solidFill>
+                        </a:rPr>
+                        <a:t>Rôle</a:t>
+                      </a:r>
+                    </a:p>
+                  </a:txBody>
+                  <a:tcPr marL="114230" marR="87869" marT="87869" marB="87869" anchor="ctr">
+                    <a:lnL w="19050" cap="flat" cmpd="sng" algn="ctr">
+                      <a:solidFill>
+                        <a:schemeClr val="tx1"/>
+                      </a:solidFill>
+                      <a:prstDash val="solid"/>
+                    </a:lnL>
+                    <a:lnR w="6350" cap="flat" cmpd="sng" algn="ctr">
+                      <a:solidFill>
+                        <a:schemeClr val="tx1">
+                          <a:lumMod val="50000"/>
+                          <a:lumOff val="50000"/>
+                        </a:schemeClr>
+                      </a:solidFill>
+                      <a:prstDash val="solid"/>
+                    </a:lnR>
+                    <a:lnT w="19050" cap="flat" cmpd="sng" algn="ctr">
+                      <a:solidFill>
+                        <a:schemeClr val="tx1"/>
+                      </a:solidFill>
+                      <a:prstDash val="solid"/>
+                    </a:lnT>
+                    <a:lnB w="19050" cap="flat" cmpd="sng" algn="ctr">
+                      <a:solidFill>
+                        <a:schemeClr val="tx1"/>
+                      </a:solidFill>
+                      <a:prstDash val="solid"/>
+                    </a:lnB>
+                    <a:noFill/>
+                  </a:tcPr>
+                </a:tc>
+                <a:tc>
+                  <a:txBody>
+                    <a:bodyPr/>
+                    <a:lstStyle/>
+                    <a:p>
+                      <a:pPr>
+                        <a:buNone/>
+                      </a:pPr>
+                      <a:r>
+                        <a:rPr lang="en-US" sz="1300" cap="none" spc="0">
+                          <a:solidFill>
+                            <a:schemeClr val="tx1"/>
+                          </a:solidFill>
+                        </a:rPr>
+                        <a:t>Groupes attribués</a:t>
+                      </a:r>
+                    </a:p>
+                  </a:txBody>
+                  <a:tcPr marL="114230" marR="87869" marT="87869" marB="87869" anchor="ctr">
+                    <a:lnL w="6350" cap="flat" cmpd="sng" algn="ctr">
+                      <a:solidFill>
+                        <a:schemeClr val="tx1">
+                          <a:lumMod val="50000"/>
+                          <a:lumOff val="50000"/>
+                        </a:schemeClr>
+                      </a:solidFill>
+                      <a:prstDash val="solid"/>
+                    </a:lnL>
+                    <a:lnR w="19050" cap="flat" cmpd="sng" algn="ctr">
+                      <a:solidFill>
+                        <a:schemeClr val="tx1"/>
+                      </a:solidFill>
+                      <a:prstDash val="solid"/>
+                    </a:lnR>
+                    <a:lnT w="19050" cap="flat" cmpd="sng" algn="ctr">
+                      <a:solidFill>
+                        <a:schemeClr val="tx1"/>
+                      </a:solidFill>
+                      <a:prstDash val="solid"/>
+                    </a:lnT>
+                    <a:lnB w="19050" cap="flat" cmpd="sng" algn="ctr">
+                      <a:solidFill>
+                        <a:schemeClr val="tx1"/>
+                      </a:solidFill>
+                      <a:prstDash val="solid"/>
+                    </a:lnB>
+                    <a:noFill/>
+                  </a:tcPr>
+                </a:tc>
+                <a:extLst>
+                  <a:ext uri="{0D108BD9-81ED-4DB2-BD59-A6C34878D82A}">
+                    <a16:rowId xmlns:a16="http://schemas.microsoft.com/office/drawing/2014/main" val="4122563176"/>
+                  </a:ext>
+                </a:extLst>
+              </a:tr>
+              <a:tr h="620941">
+                <a:tc>
+                  <a:txBody>
+                    <a:bodyPr/>
+                    <a:lstStyle/>
+                    <a:p>
+                      <a:pPr>
+                        <a:buNone/>
+                      </a:pPr>
+                      <a:r>
+                        <a:rPr lang="en-US" sz="1300" cap="none" spc="0">
+                          <a:solidFill>
+                            <a:schemeClr val="tx1"/>
+                          </a:solidFill>
+                        </a:rPr>
+                        <a:t>Infirmier(ère)</a:t>
+                      </a:r>
+                    </a:p>
+                  </a:txBody>
+                  <a:tcPr marL="114230" marR="87869" marT="87869" marB="87869" anchor="ctr">
+                    <a:lnL w="19050" cap="flat" cmpd="sng" algn="ctr">
+                      <a:solidFill>
+                        <a:schemeClr val="tx1"/>
+                      </a:solidFill>
+                      <a:prstDash val="solid"/>
+                    </a:lnL>
+                    <a:lnR w="6350" cap="flat" cmpd="sng" algn="ctr">
+                      <a:solidFill>
+                        <a:schemeClr val="tx1">
+                          <a:lumMod val="50000"/>
+                          <a:lumOff val="50000"/>
+                        </a:schemeClr>
+                      </a:solidFill>
+                      <a:prstDash val="solid"/>
+                    </a:lnR>
+                    <a:lnT w="19050" cap="flat" cmpd="sng" algn="ctr">
+                      <a:solidFill>
+                        <a:schemeClr val="tx1"/>
+                      </a:solidFill>
+                      <a:prstDash val="solid"/>
+                    </a:lnT>
+                    <a:lnB w="19050" cap="flat" cmpd="sng" algn="ctr">
+                      <a:solidFill>
+                        <a:schemeClr val="tx1"/>
+                      </a:solidFill>
+                      <a:prstDash val="solid"/>
+                    </a:lnB>
+                    <a:noFill/>
+                  </a:tcPr>
+                </a:tc>
+                <a:tc>
+                  <a:txBody>
+                    <a:bodyPr/>
+                    <a:lstStyle/>
+                    <a:p>
+                      <a:pPr>
+                        <a:buNone/>
+                      </a:pPr>
+                      <a:r>
+                        <a:rPr lang="en-US" sz="1300" cap="none" spc="0">
+                          <a:solidFill>
+                            <a:schemeClr val="tx1"/>
+                          </a:solidFill>
+                        </a:rPr>
+                        <a:t>GRP_NURSES, GRP_PATIENT_PORTAL</a:t>
+                      </a:r>
+                    </a:p>
+                  </a:txBody>
+                  <a:tcPr marL="114230" marR="87869" marT="87869" marB="87869" anchor="ctr">
+                    <a:lnL w="6350" cap="flat" cmpd="sng" algn="ctr">
+                      <a:solidFill>
+                        <a:schemeClr val="tx1">
+                          <a:lumMod val="50000"/>
+                          <a:lumOff val="50000"/>
+                        </a:schemeClr>
+                      </a:solidFill>
+                      <a:prstDash val="solid"/>
+                    </a:lnL>
+                    <a:lnR w="19050" cap="flat" cmpd="sng" algn="ctr">
+                      <a:solidFill>
+                        <a:schemeClr val="tx1"/>
+                      </a:solidFill>
+                      <a:prstDash val="solid"/>
+                    </a:lnR>
+                    <a:lnT w="19050" cap="flat" cmpd="sng" algn="ctr">
+                      <a:solidFill>
+                        <a:schemeClr val="tx1"/>
+                      </a:solidFill>
+                      <a:prstDash val="solid"/>
+                    </a:lnT>
+                    <a:lnB w="19050" cap="flat" cmpd="sng" algn="ctr">
+                      <a:solidFill>
+                        <a:schemeClr val="tx1"/>
+                      </a:solidFill>
+                      <a:prstDash val="solid"/>
+                    </a:lnB>
+                    <a:noFill/>
+                  </a:tcPr>
+                </a:tc>
+                <a:extLst>
+                  <a:ext uri="{0D108BD9-81ED-4DB2-BD59-A6C34878D82A}">
+                    <a16:rowId xmlns:a16="http://schemas.microsoft.com/office/drawing/2014/main" val="2626155050"/>
+                  </a:ext>
+                </a:extLst>
+              </a:tr>
+              <a:tr h="620941">
+                <a:tc>
+                  <a:txBody>
+                    <a:bodyPr/>
+                    <a:lstStyle/>
+                    <a:p>
+                      <a:pPr>
+                        <a:buNone/>
+                      </a:pPr>
+                      <a:r>
+                        <a:rPr lang="en-US" sz="1300" cap="none" spc="0">
+                          <a:solidFill>
+                            <a:schemeClr val="tx1"/>
+                          </a:solidFill>
+                        </a:rPr>
+                        <a:t>Chef infirmier</a:t>
+                      </a:r>
+                    </a:p>
+                  </a:txBody>
+                  <a:tcPr marL="114230" marR="87869" marT="87869" marB="87869" anchor="ctr">
+                    <a:lnL w="19050" cap="flat" cmpd="sng" algn="ctr">
+                      <a:solidFill>
+                        <a:schemeClr val="tx1"/>
+                      </a:solidFill>
+                      <a:prstDash val="solid"/>
+                    </a:lnL>
+                    <a:lnR w="6350" cap="flat" cmpd="sng" algn="ctr">
+                      <a:solidFill>
+                        <a:schemeClr val="tx1">
+                          <a:lumMod val="50000"/>
+                          <a:lumOff val="50000"/>
+                        </a:schemeClr>
+                      </a:solidFill>
+                      <a:prstDash val="solid"/>
+                    </a:lnR>
+                    <a:lnT w="19050" cap="flat" cmpd="sng" algn="ctr">
+                      <a:solidFill>
+                        <a:schemeClr val="tx1"/>
+                      </a:solidFill>
+                      <a:prstDash val="solid"/>
+                    </a:lnT>
+                    <a:lnB w="19050" cap="flat" cmpd="sng" algn="ctr">
+                      <a:solidFill>
+                        <a:schemeClr val="tx1"/>
+                      </a:solidFill>
+                      <a:prstDash val="solid"/>
+                    </a:lnB>
+                    <a:noFill/>
+                  </a:tcPr>
+                </a:tc>
+                <a:tc>
+                  <a:txBody>
+                    <a:bodyPr/>
+                    <a:lstStyle/>
+                    <a:p>
+                      <a:pPr>
+                        <a:buNone/>
+                      </a:pPr>
+                      <a:r>
+                        <a:rPr lang="en-US" sz="1300" cap="none" spc="0">
+                          <a:solidFill>
+                            <a:schemeClr val="tx1"/>
+                          </a:solidFill>
+                        </a:rPr>
+                        <a:t>GRP_NURSES, GRP_NURSE_SUPERVISORS</a:t>
+                      </a:r>
+                    </a:p>
+                  </a:txBody>
+                  <a:tcPr marL="114230" marR="87869" marT="87869" marB="87869" anchor="ctr">
+                    <a:lnL w="6350" cap="flat" cmpd="sng" algn="ctr">
+                      <a:solidFill>
+                        <a:schemeClr val="tx1">
+                          <a:lumMod val="50000"/>
+                          <a:lumOff val="50000"/>
+                        </a:schemeClr>
+                      </a:solidFill>
+                      <a:prstDash val="solid"/>
+                    </a:lnL>
+                    <a:lnR w="19050" cap="flat" cmpd="sng" algn="ctr">
+                      <a:solidFill>
+                        <a:schemeClr val="tx1"/>
+                      </a:solidFill>
+                      <a:prstDash val="solid"/>
+                    </a:lnR>
+                    <a:lnT w="19050" cap="flat" cmpd="sng" algn="ctr">
+                      <a:solidFill>
+                        <a:schemeClr val="tx1"/>
+                      </a:solidFill>
+                      <a:prstDash val="solid"/>
+                    </a:lnT>
+                    <a:lnB w="19050" cap="flat" cmpd="sng" algn="ctr">
+                      <a:solidFill>
+                        <a:schemeClr val="tx1"/>
+                      </a:solidFill>
+                      <a:prstDash val="solid"/>
+                    </a:lnB>
+                    <a:noFill/>
+                  </a:tcPr>
+                </a:tc>
+                <a:extLst>
+                  <a:ext uri="{0D108BD9-81ED-4DB2-BD59-A6C34878D82A}">
+                    <a16:rowId xmlns:a16="http://schemas.microsoft.com/office/drawing/2014/main" val="3404220927"/>
+                  </a:ext>
+                </a:extLst>
+              </a:tr>
+              <a:tr h="620941">
+                <a:tc>
+                  <a:txBody>
+                    <a:bodyPr/>
+                    <a:lstStyle/>
+                    <a:p>
+                      <a:pPr>
+                        <a:buNone/>
+                      </a:pPr>
+                      <a:r>
+                        <a:rPr lang="en-US" sz="1300" cap="none" spc="0">
+                          <a:solidFill>
+                            <a:schemeClr val="tx1"/>
+                          </a:solidFill>
+                        </a:rPr>
+                        <a:t>Analyste IAM</a:t>
+                      </a:r>
+                    </a:p>
+                  </a:txBody>
+                  <a:tcPr marL="114230" marR="87869" marT="87869" marB="87869" anchor="ctr">
+                    <a:lnL w="19050" cap="flat" cmpd="sng" algn="ctr">
+                      <a:solidFill>
+                        <a:schemeClr val="tx1"/>
+                      </a:solidFill>
+                      <a:prstDash val="solid"/>
+                    </a:lnL>
+                    <a:lnR w="6350" cap="flat" cmpd="sng" algn="ctr">
+                      <a:solidFill>
+                        <a:schemeClr val="tx1">
+                          <a:lumMod val="50000"/>
+                          <a:lumOff val="50000"/>
+                        </a:schemeClr>
+                      </a:solidFill>
+                      <a:prstDash val="solid"/>
+                    </a:lnR>
+                    <a:lnT w="19050" cap="flat" cmpd="sng" algn="ctr">
+                      <a:solidFill>
+                        <a:schemeClr val="tx1"/>
+                      </a:solidFill>
+                      <a:prstDash val="solid"/>
+                    </a:lnT>
+                    <a:lnB w="19050" cap="flat" cmpd="sng" algn="ctr">
+                      <a:solidFill>
+                        <a:schemeClr val="tx1"/>
+                      </a:solidFill>
+                      <a:prstDash val="solid"/>
+                    </a:lnB>
+                    <a:noFill/>
+                  </a:tcPr>
+                </a:tc>
+                <a:tc>
+                  <a:txBody>
+                    <a:bodyPr/>
+                    <a:lstStyle/>
+                    <a:p>
+                      <a:pPr>
+                        <a:buNone/>
+                      </a:pPr>
+                      <a:r>
+                        <a:rPr lang="en-US" sz="1300" cap="none" spc="0">
+                          <a:solidFill>
+                            <a:schemeClr val="tx1"/>
+                          </a:solidFill>
+                        </a:rPr>
+                        <a:t>GRP_IT_IAM, GRP_ADMIN_TOOLS</a:t>
+                      </a:r>
+                    </a:p>
+                  </a:txBody>
+                  <a:tcPr marL="114230" marR="87869" marT="87869" marB="87869" anchor="ctr">
+                    <a:lnL w="6350" cap="flat" cmpd="sng" algn="ctr">
+                      <a:solidFill>
+                        <a:schemeClr val="tx1">
+                          <a:lumMod val="50000"/>
+                          <a:lumOff val="50000"/>
+                        </a:schemeClr>
+                      </a:solidFill>
+                      <a:prstDash val="solid"/>
+                    </a:lnL>
+                    <a:lnR w="19050" cap="flat" cmpd="sng" algn="ctr">
+                      <a:solidFill>
+                        <a:schemeClr val="tx1"/>
+                      </a:solidFill>
+                      <a:prstDash val="solid"/>
+                    </a:lnR>
+                    <a:lnT w="19050" cap="flat" cmpd="sng" algn="ctr">
+                      <a:solidFill>
+                        <a:schemeClr val="tx1"/>
+                      </a:solidFill>
+                      <a:prstDash val="solid"/>
+                    </a:lnT>
+                    <a:lnB w="19050" cap="flat" cmpd="sng" algn="ctr">
+                      <a:solidFill>
+                        <a:schemeClr val="tx1"/>
+                      </a:solidFill>
+                      <a:prstDash val="solid"/>
+                    </a:lnB>
+                    <a:noFill/>
+                  </a:tcPr>
+                </a:tc>
+                <a:extLst>
+                  <a:ext uri="{0D108BD9-81ED-4DB2-BD59-A6C34878D82A}">
+                    <a16:rowId xmlns:a16="http://schemas.microsoft.com/office/drawing/2014/main" val="1063993586"/>
+                  </a:ext>
+                </a:extLst>
+              </a:tr>
+              <a:tr h="620941">
+                <a:tc>
+                  <a:txBody>
+                    <a:bodyPr/>
+                    <a:lstStyle/>
+                    <a:p>
+                      <a:pPr>
+                        <a:buNone/>
+                      </a:pPr>
+                      <a:r>
+                        <a:rPr lang="en-US" sz="1300" cap="none" spc="0">
+                          <a:solidFill>
+                            <a:schemeClr val="tx1"/>
+                          </a:solidFill>
+                        </a:rPr>
+                        <a:t>Technicien de laboratoire</a:t>
+                      </a:r>
+                    </a:p>
+                  </a:txBody>
+                  <a:tcPr marL="114230" marR="87869" marT="87869" marB="87869" anchor="ctr">
+                    <a:lnL w="19050" cap="flat" cmpd="sng" algn="ctr">
+                      <a:solidFill>
+                        <a:schemeClr val="tx1"/>
+                      </a:solidFill>
+                      <a:prstDash val="solid"/>
+                    </a:lnL>
+                    <a:lnR w="6350" cap="flat" cmpd="sng" algn="ctr">
+                      <a:solidFill>
+                        <a:schemeClr val="tx1">
+                          <a:lumMod val="50000"/>
+                          <a:lumOff val="50000"/>
+                        </a:schemeClr>
+                      </a:solidFill>
+                      <a:prstDash val="solid"/>
+                    </a:lnR>
+                    <a:lnT w="19050" cap="flat" cmpd="sng" algn="ctr">
+                      <a:solidFill>
+                        <a:schemeClr val="tx1"/>
+                      </a:solidFill>
+                      <a:prstDash val="solid"/>
+                    </a:lnT>
+                    <a:lnB w="19050" cap="flat" cmpd="sng" algn="ctr">
+                      <a:solidFill>
+                        <a:schemeClr val="tx1"/>
+                      </a:solidFill>
+                      <a:prstDash val="solid"/>
+                    </a:lnB>
+                    <a:noFill/>
+                  </a:tcPr>
+                </a:tc>
+                <a:tc>
+                  <a:txBody>
+                    <a:bodyPr/>
+                    <a:lstStyle/>
+                    <a:p>
+                      <a:pPr>
+                        <a:buNone/>
+                      </a:pPr>
+                      <a:r>
+                        <a:rPr lang="en-US" sz="1300" cap="none" spc="0">
+                          <a:solidFill>
+                            <a:schemeClr val="tx1"/>
+                          </a:solidFill>
+                        </a:rPr>
+                        <a:t>GRP_LAB, GRP_LAB_SYSTEM</a:t>
+                      </a:r>
+                    </a:p>
+                  </a:txBody>
+                  <a:tcPr marL="114230" marR="87869" marT="87869" marB="87869" anchor="ctr">
+                    <a:lnL w="6350" cap="flat" cmpd="sng" algn="ctr">
+                      <a:solidFill>
+                        <a:schemeClr val="tx1">
+                          <a:lumMod val="50000"/>
+                          <a:lumOff val="50000"/>
+                        </a:schemeClr>
+                      </a:solidFill>
+                      <a:prstDash val="solid"/>
+                    </a:lnL>
+                    <a:lnR w="19050" cap="flat" cmpd="sng" algn="ctr">
+                      <a:solidFill>
+                        <a:schemeClr val="tx1"/>
+                      </a:solidFill>
+                      <a:prstDash val="solid"/>
+                    </a:lnR>
+                    <a:lnT w="19050" cap="flat" cmpd="sng" algn="ctr">
+                      <a:solidFill>
+                        <a:schemeClr val="tx1"/>
+                      </a:solidFill>
+                      <a:prstDash val="solid"/>
+                    </a:lnT>
+                    <a:lnB w="19050" cap="flat" cmpd="sng" algn="ctr">
+                      <a:solidFill>
+                        <a:schemeClr val="tx1"/>
+                      </a:solidFill>
+                      <a:prstDash val="solid"/>
+                    </a:lnB>
+                    <a:noFill/>
+                  </a:tcPr>
+                </a:tc>
+                <a:extLst>
+                  <a:ext uri="{0D108BD9-81ED-4DB2-BD59-A6C34878D82A}">
+                    <a16:rowId xmlns:a16="http://schemas.microsoft.com/office/drawing/2014/main" val="3116536684"/>
+                  </a:ext>
+                </a:extLst>
+              </a:tr>
+              <a:tr h="620941">
+                <a:tc>
+                  <a:txBody>
+                    <a:bodyPr/>
+                    <a:lstStyle/>
+                    <a:p>
+                      <a:pPr>
+                        <a:buNone/>
+                      </a:pPr>
+                      <a:r>
+                        <a:rPr lang="en-US" sz="1300" cap="none" spc="0">
+                          <a:solidFill>
+                            <a:schemeClr val="tx1"/>
+                          </a:solidFill>
+                        </a:rPr>
+                        <a:t>Comptable</a:t>
+                      </a:r>
+                    </a:p>
+                  </a:txBody>
+                  <a:tcPr marL="114230" marR="87869" marT="87869" marB="87869" anchor="ctr">
+                    <a:lnL w="19050" cap="flat" cmpd="sng" algn="ctr">
+                      <a:solidFill>
+                        <a:schemeClr val="tx1"/>
+                      </a:solidFill>
+                      <a:prstDash val="solid"/>
+                    </a:lnL>
+                    <a:lnR w="6350" cap="flat" cmpd="sng" algn="ctr">
+                      <a:solidFill>
+                        <a:schemeClr val="tx1">
+                          <a:lumMod val="50000"/>
+                          <a:lumOff val="50000"/>
+                        </a:schemeClr>
+                      </a:solidFill>
+                      <a:prstDash val="solid"/>
+                    </a:lnR>
+                    <a:lnT w="19050" cap="flat" cmpd="sng" algn="ctr">
+                      <a:solidFill>
+                        <a:schemeClr val="tx1"/>
+                      </a:solidFill>
+                      <a:prstDash val="solid"/>
+                    </a:lnT>
+                    <a:lnB w="19050" cap="flat" cmpd="sng" algn="ctr">
+                      <a:solidFill>
+                        <a:schemeClr val="tx1"/>
+                      </a:solidFill>
+                      <a:prstDash val="solid"/>
+                    </a:lnB>
+                    <a:noFill/>
+                  </a:tcPr>
+                </a:tc>
+                <a:tc>
+                  <a:txBody>
+                    <a:bodyPr/>
+                    <a:lstStyle/>
+                    <a:p>
+                      <a:pPr>
+                        <a:buNone/>
+                      </a:pPr>
+                      <a:r>
+                        <a:rPr lang="en-US" sz="1300" cap="none" spc="0">
+                          <a:solidFill>
+                            <a:schemeClr val="tx1"/>
+                          </a:solidFill>
+                        </a:rPr>
+                        <a:t>GRP_FINANCE, GRP_FINANCE_SYSTEM</a:t>
+                      </a:r>
+                    </a:p>
+                  </a:txBody>
+                  <a:tcPr marL="114230" marR="87869" marT="87869" marB="87869" anchor="ctr">
+                    <a:lnL w="6350" cap="flat" cmpd="sng" algn="ctr">
+                      <a:solidFill>
+                        <a:schemeClr val="tx1">
+                          <a:lumMod val="50000"/>
+                          <a:lumOff val="50000"/>
+                        </a:schemeClr>
+                      </a:solidFill>
+                      <a:prstDash val="solid"/>
+                    </a:lnL>
+                    <a:lnR w="19050" cap="flat" cmpd="sng" algn="ctr">
+                      <a:solidFill>
+                        <a:schemeClr val="tx1"/>
+                      </a:solidFill>
+                      <a:prstDash val="solid"/>
+                    </a:lnR>
+                    <a:lnT w="19050" cap="flat" cmpd="sng" algn="ctr">
+                      <a:solidFill>
+                        <a:schemeClr val="tx1"/>
+                      </a:solidFill>
+                      <a:prstDash val="solid"/>
+                    </a:lnT>
+                    <a:lnB w="19050" cap="flat" cmpd="sng" algn="ctr">
+                      <a:solidFill>
+                        <a:schemeClr val="tx1"/>
+                      </a:solidFill>
+                      <a:prstDash val="solid"/>
+                    </a:lnB>
+                    <a:noFill/>
+                  </a:tcPr>
+                </a:tc>
+                <a:extLst>
+                  <a:ext uri="{0D108BD9-81ED-4DB2-BD59-A6C34878D82A}">
+                    <a16:rowId xmlns:a16="http://schemas.microsoft.com/office/drawing/2014/main" val="1796771452"/>
+                  </a:ext>
+                </a:extLst>
+              </a:tr>
+            </a:tbl>
+          </a:graphicData>
+        </a:graphic>
+      </p:graphicFrame>
     </p:spTree>
     <p:extLst>
       <p:ext uri="{BB962C8B-B14F-4D97-AF65-F5344CB8AC3E}">
@@ -4382,6 +10283,14 @@
 <file path=ppt/slides/slide9.xml><?xml version="1.0" encoding="utf-8"?>
 <p:sld xmlns:a="http://schemas.openxmlformats.org/drawingml/2006/main" xmlns:r="http://schemas.openxmlformats.org/officeDocument/2006/relationships" xmlns:p="http://schemas.openxmlformats.org/presentationml/2006/main">
   <p:cSld>
+    <p:bg>
+      <p:bgPr>
+        <a:solidFill>
+          <a:schemeClr val="bg1"/>
+        </a:solidFill>
+        <a:effectLst/>
+      </p:bgPr>
+    </p:bg>
     <p:spTree>
       <p:nvGrpSpPr>
         <p:cNvPr id="1" name="">
@@ -4402,6 +10311,552 @@
           <a:chExt cx="0" cy="0"/>
         </a:xfrm>
       </p:grpSpPr>
+      <p:sp useBgFill="1">
+        <p:nvSpPr>
+          <p:cNvPr id="40" name="Rectangle 39">
+            <a:extLst>
+              <a:ext uri="{FF2B5EF4-FFF2-40B4-BE49-F238E27FC236}">
+                <a16:creationId xmlns:a16="http://schemas.microsoft.com/office/drawing/2014/main" id="{C4285719-470E-454C-AF62-8323075F1F5B}"/>
+              </a:ext>
+              <a:ext uri="{C183D7F6-B498-43B3-948B-1728B52AA6E4}">
+                <adec:decorative xmlns:adec="http://schemas.microsoft.com/office/drawing/2017/decorative" val="1"/>
+              </a:ext>
+            </a:extLst>
+          </p:cNvPr>
+          <p:cNvSpPr>
+            <a:spLocks noGrp="1" noRot="1" noChangeAspect="1" noMove="1" noResize="1" noEditPoints="1" noAdjustHandles="1" noChangeArrowheads="1" noChangeShapeType="1" noTextEdit="1"/>
+          </p:cNvSpPr>
+          <p:nvPr>
+            <p:extLst>
+              <p:ext uri="{386F3935-93C4-4BCD-93E2-E3B085C9AB24}">
+                <p16:designElem xmlns:p16="http://schemas.microsoft.com/office/powerpoint/2015/main" val="1"/>
+              </p:ext>
+            </p:extLst>
+          </p:nvPr>
+        </p:nvSpPr>
+        <p:spPr>
+          <a:xfrm>
+            <a:off x="0" y="0"/>
+            <a:ext cx="12188952" cy="6858000"/>
+          </a:xfrm>
+          <a:prstGeom prst="rect">
+            <a:avLst/>
+          </a:prstGeom>
+          <a:ln w="12700" cap="flat" cmpd="sng" algn="ctr">
+            <a:noFill/>
+            <a:prstDash val="solid"/>
+            <a:miter lim="800000"/>
+          </a:ln>
+          <a:effectLst/>
+          <a:extLst>
+            <a:ext uri="{91240B29-F687-4F45-9708-019B960494DF}">
+              <a14:hiddenLine xmlns:a14="http://schemas.microsoft.com/office/drawing/2010/main" w="12700" cap="flat" cmpd="sng" algn="ctr">
+                <a:solidFill>
+                  <a:schemeClr val="accent1">
+                    <a:shade val="50000"/>
+                  </a:schemeClr>
+                </a:solidFill>
+                <a:prstDash val="solid"/>
+                <a:miter lim="800000"/>
+              </a14:hiddenLine>
+            </a:ext>
+          </a:extLst>
+        </p:spPr>
+        <p:style>
+          <a:lnRef idx="2">
+            <a:schemeClr val="accent1">
+              <a:shade val="50000"/>
+            </a:schemeClr>
+          </a:lnRef>
+          <a:fillRef idx="1">
+            <a:schemeClr val="accent1"/>
+          </a:fillRef>
+          <a:effectRef idx="0">
+            <a:schemeClr val="accent1"/>
+          </a:effectRef>
+          <a:fontRef idx="minor">
+            <a:schemeClr val="lt1"/>
+          </a:fontRef>
+        </p:style>
+        <p:txBody>
+          <a:bodyPr rtlCol="0" anchor="ctr"/>
+          <a:lstStyle/>
+          <a:p>
+            <a:pPr algn="ctr"/>
+            <a:endParaRPr lang="en-US"/>
+          </a:p>
+        </p:txBody>
+      </p:sp>
+      <p:sp>
+        <p:nvSpPr>
+          <p:cNvPr id="42" name="Rectangle 41">
+            <a:extLst>
+              <a:ext uri="{FF2B5EF4-FFF2-40B4-BE49-F238E27FC236}">
+                <a16:creationId xmlns:a16="http://schemas.microsoft.com/office/drawing/2014/main" id="{CD9FE4EF-C4D8-49A0-B2FF-81D8DB7D8A24}"/>
+              </a:ext>
+              <a:ext uri="{C183D7F6-B498-43B3-948B-1728B52AA6E4}">
+                <adec:decorative xmlns:adec="http://schemas.microsoft.com/office/drawing/2017/decorative" val="1"/>
+              </a:ext>
+            </a:extLst>
+          </p:cNvPr>
+          <p:cNvSpPr>
+            <a:spLocks noGrp="1" noRot="1" noChangeAspect="1" noMove="1" noResize="1" noEditPoints="1" noAdjustHandles="1" noChangeArrowheads="1" noChangeShapeType="1" noTextEdit="1"/>
+          </p:cNvSpPr>
+          <p:nvPr>
+            <p:extLst>
+              <p:ext uri="{386F3935-93C4-4BCD-93E2-E3B085C9AB24}">
+                <p16:designElem xmlns:p16="http://schemas.microsoft.com/office/powerpoint/2015/main" val="1"/>
+              </p:ext>
+            </p:extLst>
+          </p:nvPr>
+        </p:nvSpPr>
+        <p:spPr>
+          <a:xfrm rot="5400000" flipH="1">
+            <a:off x="-1410084" y="1410082"/>
+            <a:ext cx="6858000" cy="4037836"/>
+          </a:xfrm>
+          <a:prstGeom prst="rect">
+            <a:avLst/>
+          </a:prstGeom>
+          <a:gradFill>
+            <a:gsLst>
+              <a:gs pos="8000">
+                <a:srgbClr val="000000"/>
+              </a:gs>
+              <a:gs pos="100000">
+                <a:schemeClr val="accent1">
+                  <a:lumMod val="75000"/>
+                </a:schemeClr>
+              </a:gs>
+            </a:gsLst>
+            <a:lin ang="3000000" scaled="0"/>
+          </a:gradFill>
+          <a:ln>
+            <a:noFill/>
+          </a:ln>
+        </p:spPr>
+        <p:style>
+          <a:lnRef idx="2">
+            <a:schemeClr val="accent1">
+              <a:shade val="50000"/>
+            </a:schemeClr>
+          </a:lnRef>
+          <a:fillRef idx="1">
+            <a:schemeClr val="accent1"/>
+          </a:fillRef>
+          <a:effectRef idx="0">
+            <a:schemeClr val="accent1"/>
+          </a:effectRef>
+          <a:fontRef idx="minor">
+            <a:schemeClr val="lt1"/>
+          </a:fontRef>
+        </p:style>
+        <p:txBody>
+          <a:bodyPr rtlCol="0" anchor="ctr"/>
+          <a:lstStyle/>
+          <a:p>
+            <a:pPr algn="ctr"/>
+            <a:endParaRPr lang="en-US"/>
+          </a:p>
+        </p:txBody>
+      </p:sp>
+      <p:sp>
+        <p:nvSpPr>
+          <p:cNvPr id="44" name="Rectangle 43">
+            <a:extLst>
+              <a:ext uri="{FF2B5EF4-FFF2-40B4-BE49-F238E27FC236}">
+                <a16:creationId xmlns:a16="http://schemas.microsoft.com/office/drawing/2014/main" id="{4300840D-0A0B-4512-BACA-B439D5B9C57C}"/>
+              </a:ext>
+              <a:ext uri="{C183D7F6-B498-43B3-948B-1728B52AA6E4}">
+                <adec:decorative xmlns:adec="http://schemas.microsoft.com/office/drawing/2017/decorative" val="1"/>
+              </a:ext>
+            </a:extLst>
+          </p:cNvPr>
+          <p:cNvSpPr>
+            <a:spLocks noGrp="1" noRot="1" noChangeAspect="1" noMove="1" noResize="1" noEditPoints="1" noAdjustHandles="1" noChangeArrowheads="1" noChangeShapeType="1" noTextEdit="1"/>
+          </p:cNvSpPr>
+          <p:nvPr>
+            <p:extLst>
+              <p:ext uri="{386F3935-93C4-4BCD-93E2-E3B085C9AB24}">
+                <p16:designElem xmlns:p16="http://schemas.microsoft.com/office/powerpoint/2015/main" val="1"/>
+              </p:ext>
+            </p:extLst>
+          </p:nvPr>
+        </p:nvSpPr>
+        <p:spPr>
+          <a:xfrm rot="5400000" flipH="1">
+            <a:off x="-1410085" y="1420219"/>
+            <a:ext cx="6857999" cy="4037839"/>
+          </a:xfrm>
+          <a:prstGeom prst="rect">
+            <a:avLst/>
+          </a:prstGeom>
+          <a:gradFill>
+            <a:gsLst>
+              <a:gs pos="0">
+                <a:srgbClr val="000000">
+                  <a:alpha val="0"/>
+                </a:srgbClr>
+              </a:gs>
+              <a:gs pos="99000">
+                <a:schemeClr val="accent1">
+                  <a:alpha val="46000"/>
+                </a:schemeClr>
+              </a:gs>
+            </a:gsLst>
+            <a:lin ang="1800000" scaled="0"/>
+          </a:gradFill>
+          <a:ln>
+            <a:noFill/>
+          </a:ln>
+        </p:spPr>
+        <p:style>
+          <a:lnRef idx="2">
+            <a:schemeClr val="accent1">
+              <a:shade val="50000"/>
+            </a:schemeClr>
+          </a:lnRef>
+          <a:fillRef idx="1">
+            <a:schemeClr val="accent1"/>
+          </a:fillRef>
+          <a:effectRef idx="0">
+            <a:schemeClr val="accent1"/>
+          </a:effectRef>
+          <a:fontRef idx="minor">
+            <a:schemeClr val="lt1"/>
+          </a:fontRef>
+        </p:style>
+        <p:txBody>
+          <a:bodyPr rtlCol="0" anchor="ctr"/>
+          <a:lstStyle/>
+          <a:p>
+            <a:pPr algn="ctr"/>
+            <a:endParaRPr lang="en-US"/>
+          </a:p>
+        </p:txBody>
+      </p:sp>
+      <p:sp>
+        <p:nvSpPr>
+          <p:cNvPr id="46" name="Rectangle 45">
+            <a:extLst>
+              <a:ext uri="{FF2B5EF4-FFF2-40B4-BE49-F238E27FC236}">
+                <a16:creationId xmlns:a16="http://schemas.microsoft.com/office/drawing/2014/main" id="{D2B78728-A580-49A7-84F9-6EF6F583ADE0}"/>
+              </a:ext>
+              <a:ext uri="{C183D7F6-B498-43B3-948B-1728B52AA6E4}">
+                <adec:decorative xmlns:adec="http://schemas.microsoft.com/office/drawing/2017/decorative" val="1"/>
+              </a:ext>
+            </a:extLst>
+          </p:cNvPr>
+          <p:cNvSpPr>
+            <a:spLocks noGrp="1" noRot="1" noChangeAspect="1" noMove="1" noResize="1" noEditPoints="1" noAdjustHandles="1" noChangeArrowheads="1" noChangeShapeType="1" noTextEdit="1"/>
+          </p:cNvSpPr>
+          <p:nvPr>
+            <p:extLst>
+              <p:ext uri="{386F3935-93C4-4BCD-93E2-E3B085C9AB24}">
+                <p16:designElem xmlns:p16="http://schemas.microsoft.com/office/powerpoint/2015/main" val="1"/>
+              </p:ext>
+            </p:extLst>
+          </p:nvPr>
+        </p:nvSpPr>
+        <p:spPr>
+          <a:xfrm rot="5400000" flipH="1">
+            <a:off x="767923" y="3588085"/>
+            <a:ext cx="2501979" cy="4037841"/>
+          </a:xfrm>
+          <a:prstGeom prst="rect">
+            <a:avLst/>
+          </a:prstGeom>
+          <a:gradFill>
+            <a:gsLst>
+              <a:gs pos="2000">
+                <a:schemeClr val="accent1">
+                  <a:alpha val="29000"/>
+                </a:schemeClr>
+              </a:gs>
+              <a:gs pos="100000">
+                <a:srgbClr val="000000">
+                  <a:alpha val="30000"/>
+                </a:srgbClr>
+              </a:gs>
+            </a:gsLst>
+            <a:lin ang="7800000" scaled="0"/>
+          </a:gradFill>
+          <a:ln>
+            <a:noFill/>
+          </a:ln>
+        </p:spPr>
+        <p:style>
+          <a:lnRef idx="2">
+            <a:schemeClr val="accent1">
+              <a:shade val="50000"/>
+            </a:schemeClr>
+          </a:lnRef>
+          <a:fillRef idx="1">
+            <a:schemeClr val="accent1"/>
+          </a:fillRef>
+          <a:effectRef idx="0">
+            <a:schemeClr val="accent1"/>
+          </a:effectRef>
+          <a:fontRef idx="minor">
+            <a:schemeClr val="lt1"/>
+          </a:fontRef>
+        </p:style>
+        <p:txBody>
+          <a:bodyPr rtlCol="0" anchor="ctr"/>
+          <a:lstStyle/>
+          <a:p>
+            <a:pPr algn="ctr"/>
+            <a:endParaRPr lang="en-US" dirty="0"/>
+          </a:p>
+        </p:txBody>
+      </p:sp>
+      <p:sp>
+        <p:nvSpPr>
+          <p:cNvPr id="48" name="Freeform: Shape 47">
+            <a:extLst>
+              <a:ext uri="{FF2B5EF4-FFF2-40B4-BE49-F238E27FC236}">
+                <a16:creationId xmlns:a16="http://schemas.microsoft.com/office/drawing/2014/main" id="{38FAA1A1-D861-433F-88FA-1E9D6FD31D11}"/>
+              </a:ext>
+              <a:ext uri="{C183D7F6-B498-43B3-948B-1728B52AA6E4}">
+                <adec:decorative xmlns:adec="http://schemas.microsoft.com/office/drawing/2017/decorative" val="1"/>
+              </a:ext>
+            </a:extLst>
+          </p:cNvPr>
+          <p:cNvSpPr>
+            <a:spLocks noGrp="1" noRot="1" noChangeAspect="1" noMove="1" noResize="1" noEditPoints="1" noAdjustHandles="1" noChangeArrowheads="1" noChangeShapeType="1" noTextEdit="1"/>
+          </p:cNvSpPr>
+          <p:nvPr>
+            <p:extLst>
+              <p:ext uri="{386F3935-93C4-4BCD-93E2-E3B085C9AB24}">
+                <p16:designElem xmlns:p16="http://schemas.microsoft.com/office/powerpoint/2015/main" val="1"/>
+              </p:ext>
+            </p:extLst>
+          </p:nvPr>
+        </p:nvSpPr>
+        <p:spPr>
+          <a:xfrm rot="20635413">
+            <a:off x="-501737" y="969718"/>
+            <a:ext cx="3900357" cy="4178958"/>
+          </a:xfrm>
+          <a:custGeom>
+            <a:avLst/>
+            <a:gdLst>
+              <a:gd name="connsiteX0" fmla="*/ 2432225 w 3900357"/>
+              <a:gd name="connsiteY0" fmla="*/ 93939 h 4178958"/>
+              <a:gd name="connsiteX1" fmla="*/ 3900357 w 3900357"/>
+              <a:gd name="connsiteY1" fmla="*/ 2089479 h 4178958"/>
+              <a:gd name="connsiteX2" fmla="*/ 1810878 w 3900357"/>
+              <a:gd name="connsiteY2" fmla="*/ 4178958 h 4178958"/>
+              <a:gd name="connsiteX3" fmla="*/ 78249 w 3900357"/>
+              <a:gd name="connsiteY3" fmla="*/ 3257727 h 4178958"/>
+              <a:gd name="connsiteX4" fmla="*/ 0 w 3900357"/>
+              <a:gd name="connsiteY4" fmla="*/ 3128923 h 4178958"/>
+              <a:gd name="connsiteX5" fmla="*/ 831324 w 3900357"/>
+              <a:gd name="connsiteY5" fmla="*/ 244281 h 4178958"/>
+              <a:gd name="connsiteX6" fmla="*/ 997559 w 3900357"/>
+              <a:gd name="connsiteY6" fmla="*/ 164202 h 4178958"/>
+              <a:gd name="connsiteX7" fmla="*/ 1810878 w 3900357"/>
+              <a:gd name="connsiteY7" fmla="*/ 0 h 4178958"/>
+              <a:gd name="connsiteX8" fmla="*/ 2432225 w 3900357"/>
+              <a:gd name="connsiteY8" fmla="*/ 93939 h 4178958"/>
+            </a:gdLst>
+            <a:ahLst/>
+            <a:cxnLst>
+              <a:cxn ang="0">
+                <a:pos x="connsiteX0" y="connsiteY0"/>
+              </a:cxn>
+              <a:cxn ang="0">
+                <a:pos x="connsiteX1" y="connsiteY1"/>
+              </a:cxn>
+              <a:cxn ang="0">
+                <a:pos x="connsiteX2" y="connsiteY2"/>
+              </a:cxn>
+              <a:cxn ang="0">
+                <a:pos x="connsiteX3" y="connsiteY3"/>
+              </a:cxn>
+              <a:cxn ang="0">
+                <a:pos x="connsiteX4" y="connsiteY4"/>
+              </a:cxn>
+              <a:cxn ang="0">
+                <a:pos x="connsiteX5" y="connsiteY5"/>
+              </a:cxn>
+              <a:cxn ang="0">
+                <a:pos x="connsiteX6" y="connsiteY6"/>
+              </a:cxn>
+              <a:cxn ang="0">
+                <a:pos x="connsiteX7" y="connsiteY7"/>
+              </a:cxn>
+              <a:cxn ang="0">
+                <a:pos x="connsiteX8" y="connsiteY8"/>
+              </a:cxn>
+            </a:cxnLst>
+            <a:rect l="l" t="t" r="r" b="b"/>
+            <a:pathLst>
+              <a:path w="3900357" h="4178958">
+                <a:moveTo>
+                  <a:pt x="2432225" y="93939"/>
+                </a:moveTo>
+                <a:cubicBezTo>
+                  <a:pt x="3282786" y="358491"/>
+                  <a:pt x="3900357" y="1151865"/>
+                  <a:pt x="3900357" y="2089479"/>
+                </a:cubicBezTo>
+                <a:cubicBezTo>
+                  <a:pt x="3900357" y="3243466"/>
+                  <a:pt x="2964865" y="4178958"/>
+                  <a:pt x="1810878" y="4178958"/>
+                </a:cubicBezTo>
+                <a:cubicBezTo>
+                  <a:pt x="1089636" y="4178958"/>
+                  <a:pt x="453744" y="3813531"/>
+                  <a:pt x="78249" y="3257727"/>
+                </a:cubicBezTo>
+                <a:lnTo>
+                  <a:pt x="0" y="3128923"/>
+                </a:lnTo>
+                <a:lnTo>
+                  <a:pt x="831324" y="244281"/>
+                </a:lnTo>
+                <a:lnTo>
+                  <a:pt x="997559" y="164202"/>
+                </a:lnTo>
+                <a:cubicBezTo>
+                  <a:pt x="1247540" y="58468"/>
+                  <a:pt x="1522381" y="0"/>
+                  <a:pt x="1810878" y="0"/>
+                </a:cubicBezTo>
+                <a:cubicBezTo>
+                  <a:pt x="2027251" y="0"/>
+                  <a:pt x="2235942" y="32888"/>
+                  <a:pt x="2432225" y="93939"/>
+                </a:cubicBezTo>
+                <a:close/>
+              </a:path>
+            </a:pathLst>
+          </a:custGeom>
+          <a:gradFill>
+            <a:gsLst>
+              <a:gs pos="29000">
+                <a:srgbClr val="000000">
+                  <a:alpha val="0"/>
+                </a:srgbClr>
+              </a:gs>
+              <a:gs pos="100000">
+                <a:schemeClr val="accent1">
+                  <a:alpha val="43000"/>
+                </a:schemeClr>
+              </a:gs>
+            </a:gsLst>
+            <a:lin ang="1800000" scaled="0"/>
+          </a:gradFill>
+          <a:ln>
+            <a:noFill/>
+          </a:ln>
+        </p:spPr>
+        <p:style>
+          <a:lnRef idx="2">
+            <a:schemeClr val="accent1">
+              <a:shade val="50000"/>
+            </a:schemeClr>
+          </a:lnRef>
+          <a:fillRef idx="1">
+            <a:schemeClr val="accent1"/>
+          </a:fillRef>
+          <a:effectRef idx="0">
+            <a:schemeClr val="accent1"/>
+          </a:effectRef>
+          <a:fontRef idx="minor">
+            <a:schemeClr val="lt1"/>
+          </a:fontRef>
+        </p:style>
+        <p:txBody>
+          <a:bodyPr wrap="square" rtlCol="0" anchor="ctr">
+            <a:noAutofit/>
+          </a:bodyPr>
+          <a:lstStyle/>
+          <a:p>
+            <a:pPr algn="ctr"/>
+            <a:endParaRPr lang="en-US" dirty="0"/>
+          </a:p>
+        </p:txBody>
+      </p:sp>
+      <p:sp>
+        <p:nvSpPr>
+          <p:cNvPr id="50" name="Rectangle 49">
+            <a:extLst>
+              <a:ext uri="{FF2B5EF4-FFF2-40B4-BE49-F238E27FC236}">
+                <a16:creationId xmlns:a16="http://schemas.microsoft.com/office/drawing/2014/main" id="{8D71EDA1-87BF-4D5D-AB79-F346FD19278A}"/>
+              </a:ext>
+              <a:ext uri="{C183D7F6-B498-43B3-948B-1728B52AA6E4}">
+                <adec:decorative xmlns:adec="http://schemas.microsoft.com/office/drawing/2017/decorative" val="1"/>
+              </a:ext>
+            </a:extLst>
+          </p:cNvPr>
+          <p:cNvSpPr>
+            <a:spLocks noGrp="1" noRot="1" noChangeAspect="1" noMove="1" noResize="1" noEditPoints="1" noAdjustHandles="1" noChangeArrowheads="1" noChangeShapeType="1" noTextEdit="1"/>
+          </p:cNvSpPr>
+          <p:nvPr>
+            <p:extLst>
+              <p:ext uri="{386F3935-93C4-4BCD-93E2-E3B085C9AB24}">
+                <p16:designElem xmlns:p16="http://schemas.microsoft.com/office/powerpoint/2015/main" val="1"/>
+              </p:ext>
+            </p:extLst>
+          </p:nvPr>
+        </p:nvSpPr>
+        <p:spPr>
+          <a:xfrm rot="5400000" flipH="1">
+            <a:off x="-1410093" y="1399943"/>
+            <a:ext cx="6858003" cy="4037835"/>
+          </a:xfrm>
+          <a:prstGeom prst="rect">
+            <a:avLst/>
+          </a:prstGeom>
+          <a:gradFill>
+            <a:gsLst>
+              <a:gs pos="0">
+                <a:srgbClr val="000000">
+                  <a:alpha val="0"/>
+                </a:srgbClr>
+              </a:gs>
+              <a:gs pos="99000">
+                <a:schemeClr val="accent1">
+                  <a:lumMod val="60000"/>
+                  <a:lumOff val="40000"/>
+                  <a:alpha val="11000"/>
+                </a:schemeClr>
+              </a:gs>
+            </a:gsLst>
+            <a:lin ang="7200000" scaled="0"/>
+          </a:gradFill>
+          <a:ln>
+            <a:noFill/>
+          </a:ln>
+        </p:spPr>
+        <p:style>
+          <a:lnRef idx="2">
+            <a:schemeClr val="accent1">
+              <a:shade val="50000"/>
+            </a:schemeClr>
+          </a:lnRef>
+          <a:fillRef idx="1">
+            <a:schemeClr val="accent1"/>
+          </a:fillRef>
+          <a:effectRef idx="0">
+            <a:schemeClr val="accent1"/>
+          </a:effectRef>
+          <a:fontRef idx="minor">
+            <a:schemeClr val="lt1"/>
+          </a:fontRef>
+        </p:style>
+        <p:txBody>
+          <a:bodyPr rtlCol="0" anchor="ctr"/>
+          <a:lstStyle/>
+          <a:p>
+            <a:pPr algn="ctr"/>
+            <a:endParaRPr lang="en-US"/>
+          </a:p>
+        </p:txBody>
+      </p:sp>
       <p:sp>
         <p:nvSpPr>
           <p:cNvPr id="2" name="Title 1">
@@ -4418,14 +10873,29 @@
             <p:ph type="ctrTitle"/>
           </p:nvPr>
         </p:nvSpPr>
-        <p:spPr/>
-        <p:txBody>
-          <a:bodyPr/>
-          <a:lstStyle/>
-          <a:p>
-            <a:r>
-              <a:rPr lang="en-US" dirty="0"/>
-              <a:t>Governance Controls</a:t>
+        <p:spPr>
+          <a:xfrm>
+            <a:off x="466722" y="586855"/>
+            <a:ext cx="3201366" cy="3387497"/>
+          </a:xfrm>
+        </p:spPr>
+        <p:txBody>
+          <a:bodyPr vert="horz" lIns="91440" tIns="45720" rIns="91440" bIns="45720" rtlCol="0" anchor="b">
+            <a:normAutofit/>
+          </a:bodyPr>
+          <a:lstStyle/>
+          <a:p>
+            <a:pPr algn="r"/>
+            <a:r>
+              <a:rPr lang="en-US" sz="4000" kern="1200">
+                <a:solidFill>
+                  <a:srgbClr val="FFFFFF"/>
+                </a:solidFill>
+                <a:latin typeface="+mj-lt"/>
+                <a:ea typeface="+mj-ea"/>
+                <a:cs typeface="+mj-cs"/>
+              </a:rPr>
+              <a:t>Contrôles de Gouvernance</a:t>
             </a:r>
           </a:p>
         </p:txBody>
@@ -4446,15 +10916,416 @@
             <p:ph type="subTitle" idx="1"/>
           </p:nvPr>
         </p:nvSpPr>
-        <p:spPr/>
-        <p:txBody>
-          <a:bodyPr/>
-          <a:lstStyle/>
-          <a:p>
-            <a:endParaRPr lang="en-US"/>
-          </a:p>
-        </p:txBody>
-      </p:sp>
+        <p:spPr>
+          <a:xfrm>
+            <a:off x="4134811" y="649481"/>
+            <a:ext cx="6154388" cy="5517640"/>
+          </a:xfrm>
+        </p:spPr>
+        <p:txBody>
+          <a:bodyPr vert="horz" lIns="91440" tIns="45720" rIns="91440" bIns="45720" rtlCol="0" anchor="ctr">
+            <a:noAutofit/>
+          </a:bodyPr>
+          <a:lstStyle/>
+          <a:p>
+            <a:pPr indent="-228600" algn="l">
+              <a:buFont typeface="Arial" panose="020B0604020202020204" pitchFamily="34" charset="0"/>
+              <a:buChar char="•"/>
+            </a:pPr>
+            <a:r>
+              <a:rPr lang="en-US" sz="1400" dirty="0"/>
+              <a:t>Le </a:t>
+            </a:r>
+            <a:r>
+              <a:rPr lang="en-US" sz="1400" dirty="0" err="1"/>
+              <a:t>système</a:t>
+            </a:r>
+            <a:r>
+              <a:rPr lang="en-US" sz="1400" dirty="0"/>
+              <a:t> </a:t>
+            </a:r>
+            <a:r>
+              <a:rPr lang="en-US" sz="1400" dirty="0" err="1"/>
+              <a:t>valide</a:t>
+            </a:r>
+            <a:r>
+              <a:rPr lang="en-US" sz="1400" dirty="0"/>
+              <a:t> les données RH avant toute attribution </a:t>
+            </a:r>
+            <a:r>
+              <a:rPr lang="en-US" sz="1400" dirty="0" err="1"/>
+              <a:t>d'accès</a:t>
+            </a:r>
+            <a:r>
+              <a:rPr lang="en-US" sz="1400" dirty="0"/>
+              <a:t>.</a:t>
+            </a:r>
+          </a:p>
+          <a:p>
+            <a:pPr indent="-228600" algn="l">
+              <a:buFont typeface="Arial" panose="020B0604020202020204" pitchFamily="34" charset="0"/>
+              <a:buChar char="•"/>
+            </a:pPr>
+            <a:endParaRPr lang="en-US" sz="1400" dirty="0"/>
+          </a:p>
+          <a:p>
+            <a:pPr indent="-228600" algn="l">
+              <a:buFont typeface="Arial" panose="020B0604020202020204" pitchFamily="34" charset="0"/>
+              <a:buChar char="•"/>
+            </a:pPr>
+            <a:r>
+              <a:rPr lang="en-US" sz="1400" dirty="0" err="1"/>
+              <a:t>Contrôles</a:t>
+            </a:r>
+            <a:r>
+              <a:rPr lang="en-US" sz="1400" dirty="0"/>
+              <a:t> </a:t>
+            </a:r>
+            <a:r>
+              <a:rPr lang="en-US" sz="1400" dirty="0" err="1"/>
+              <a:t>obligatoires</a:t>
+            </a:r>
+            <a:r>
+              <a:rPr lang="en-US" sz="1400" dirty="0"/>
+              <a:t> :</a:t>
+            </a:r>
+          </a:p>
+          <a:p>
+            <a:pPr indent="-228600" algn="l">
+              <a:buFont typeface="Arial" panose="020B0604020202020204" pitchFamily="34" charset="0"/>
+              <a:buChar char="•"/>
+            </a:pPr>
+            <a:endParaRPr lang="en-US" sz="1400" dirty="0"/>
+          </a:p>
+          <a:p>
+            <a:pPr indent="-228600" algn="l">
+              <a:buFont typeface="Arial" panose="020B0604020202020204" pitchFamily="34" charset="0"/>
+              <a:buChar char="•"/>
+            </a:pPr>
+            <a:r>
+              <a:rPr lang="en-US" sz="1400" dirty="0"/>
+              <a:t>✓ </a:t>
+            </a:r>
+            <a:r>
+              <a:rPr lang="en-US" sz="1400" dirty="0" err="1"/>
+              <a:t>Gestionnaire</a:t>
+            </a:r>
+            <a:endParaRPr lang="en-US" sz="1400" dirty="0"/>
+          </a:p>
+          <a:p>
+            <a:pPr indent="-228600" algn="l">
+              <a:buFont typeface="Arial" panose="020B0604020202020204" pitchFamily="34" charset="0"/>
+              <a:buChar char="•"/>
+            </a:pPr>
+            <a:r>
+              <a:rPr lang="en-US" sz="1400" dirty="0"/>
+              <a:t>✓ Département</a:t>
+            </a:r>
+          </a:p>
+          <a:p>
+            <a:pPr indent="-228600" algn="l">
+              <a:buFont typeface="Arial" panose="020B0604020202020204" pitchFamily="34" charset="0"/>
+              <a:buChar char="•"/>
+            </a:pPr>
+            <a:r>
+              <a:rPr lang="en-US" sz="1400" dirty="0"/>
+              <a:t>✓ </a:t>
+            </a:r>
+            <a:r>
+              <a:rPr lang="en-US" sz="1400" dirty="0" err="1"/>
+              <a:t>Titre</a:t>
+            </a:r>
+            <a:r>
+              <a:rPr lang="en-US" sz="1400" dirty="0"/>
+              <a:t> du poste</a:t>
+            </a:r>
+          </a:p>
+          <a:p>
+            <a:pPr indent="-228600" algn="l">
+              <a:buFont typeface="Arial" panose="020B0604020202020204" pitchFamily="34" charset="0"/>
+              <a:buChar char="•"/>
+            </a:pPr>
+            <a:r>
+              <a:rPr lang="en-US" sz="1400" dirty="0"/>
+              <a:t>✓ Date de début</a:t>
+            </a:r>
+          </a:p>
+          <a:p>
+            <a:pPr indent="-228600" algn="l">
+              <a:buFont typeface="Arial" panose="020B0604020202020204" pitchFamily="34" charset="0"/>
+              <a:buChar char="•"/>
+            </a:pPr>
+            <a:r>
+              <a:rPr lang="en-US" sz="1400" dirty="0"/>
+              <a:t>✓ </a:t>
+            </a:r>
+            <a:r>
+              <a:rPr lang="en-US" sz="1400" dirty="0" err="1"/>
+              <a:t>Correspondance</a:t>
+            </a:r>
+            <a:r>
+              <a:rPr lang="en-US" sz="1400" dirty="0"/>
+              <a:t> RBAC</a:t>
+            </a:r>
+            <a:br>
+              <a:rPr lang="en-US" sz="1400" dirty="0"/>
+            </a:br>
+            <a:br>
+              <a:rPr lang="en-US" sz="1400" dirty="0"/>
+            </a:br>
+            <a:r>
+              <a:rPr lang="en-US" sz="1400" dirty="0" err="1"/>
+              <a:t>Exemples</a:t>
+            </a:r>
+            <a:r>
+              <a:rPr lang="en-US" sz="1400" dirty="0"/>
+              <a:t> de </a:t>
+            </a:r>
+            <a:r>
+              <a:rPr lang="en-US" sz="1400" dirty="0" err="1"/>
+              <a:t>demandes</a:t>
+            </a:r>
+            <a:r>
+              <a:rPr lang="en-US" sz="1400" dirty="0"/>
+              <a:t> </a:t>
+            </a:r>
+            <a:r>
+              <a:rPr lang="en-US" sz="1400" dirty="0" err="1"/>
+              <a:t>bloquées</a:t>
+            </a:r>
+            <a:r>
+              <a:rPr lang="en-US" sz="1400" dirty="0"/>
+              <a:t> :</a:t>
+            </a:r>
+            <a:br>
+              <a:rPr lang="en-US" sz="1400" dirty="0"/>
+            </a:br>
+            <a:r>
+              <a:rPr lang="en-US" sz="1400" dirty="0"/>
+              <a:t>• </a:t>
+            </a:r>
+            <a:r>
+              <a:rPr lang="en-US" sz="1400" dirty="0" err="1"/>
+              <a:t>Gestionnaire</a:t>
+            </a:r>
+            <a:r>
+              <a:rPr lang="en-US" sz="1400" dirty="0"/>
+              <a:t> </a:t>
+            </a:r>
+            <a:r>
+              <a:rPr lang="en-US" sz="1400" dirty="0" err="1"/>
+              <a:t>manquant</a:t>
+            </a:r>
+            <a:endParaRPr lang="en-US" sz="1400" dirty="0"/>
+          </a:p>
+          <a:p>
+            <a:pPr indent="-228600" algn="l">
+              <a:buFont typeface="Arial" panose="020B0604020202020204" pitchFamily="34" charset="0"/>
+              <a:buChar char="•"/>
+            </a:pPr>
+            <a:r>
+              <a:rPr lang="en-US" sz="1400" dirty="0"/>
+              <a:t>• Département </a:t>
+            </a:r>
+            <a:r>
+              <a:rPr lang="en-US" sz="1400" dirty="0" err="1"/>
+              <a:t>manquant</a:t>
+            </a:r>
+            <a:endParaRPr lang="en-US" sz="1400" dirty="0"/>
+          </a:p>
+          <a:p>
+            <a:pPr indent="-228600" algn="l">
+              <a:buFont typeface="Arial" panose="020B0604020202020204" pitchFamily="34" charset="0"/>
+              <a:buChar char="•"/>
+            </a:pPr>
+            <a:r>
+              <a:rPr lang="en-US" sz="1400" dirty="0"/>
+              <a:t>• Nom </a:t>
+            </a:r>
+            <a:r>
+              <a:rPr lang="en-US" sz="1400" dirty="0" err="1"/>
+              <a:t>manquant</a:t>
+            </a:r>
+            <a:endParaRPr lang="en-US" sz="1400" dirty="0"/>
+          </a:p>
+          <a:p>
+            <a:pPr indent="-228600" algn="l">
+              <a:buFont typeface="Arial" panose="020B0604020202020204" pitchFamily="34" charset="0"/>
+              <a:buChar char="•"/>
+            </a:pPr>
+            <a:r>
+              <a:rPr lang="en-US" sz="1400" dirty="0"/>
+              <a:t>• </a:t>
+            </a:r>
+            <a:r>
+              <a:rPr lang="en-US" sz="1400" dirty="0" err="1"/>
+              <a:t>Rôle</a:t>
+            </a:r>
+            <a:r>
+              <a:rPr lang="en-US" sz="1400" dirty="0"/>
+              <a:t> non </a:t>
+            </a:r>
+            <a:r>
+              <a:rPr lang="en-US" sz="1400" dirty="0" err="1"/>
+              <a:t>défini</a:t>
+            </a:r>
+            <a:r>
+              <a:rPr lang="en-US" sz="1400" dirty="0"/>
+              <a:t> dans le RBAC</a:t>
+            </a:r>
+            <a:br>
+              <a:rPr lang="en-US" sz="1400" dirty="0"/>
+            </a:br>
+            <a:br>
+              <a:rPr lang="en-US" sz="1400" dirty="0"/>
+            </a:br>
+            <a:r>
+              <a:rPr lang="en-US" sz="1400" dirty="0"/>
+              <a:t>Message :</a:t>
+            </a:r>
+            <a:br>
+              <a:rPr lang="en-US" sz="1400" dirty="0"/>
+            </a:br>
+            <a:r>
+              <a:rPr lang="en-US" sz="1400" dirty="0" err="1"/>
+              <a:t>Aucun</a:t>
+            </a:r>
+            <a:r>
+              <a:rPr lang="en-US" sz="1400" dirty="0"/>
+              <a:t> </a:t>
+            </a:r>
+            <a:r>
+              <a:rPr lang="en-US" sz="1400" dirty="0" err="1"/>
+              <a:t>accès</a:t>
+            </a:r>
+            <a:r>
+              <a:rPr lang="en-US" sz="1400" dirty="0"/>
+              <a:t> </a:t>
+            </a:r>
+            <a:r>
+              <a:rPr lang="en-US" sz="1400" dirty="0" err="1"/>
+              <a:t>n'est</a:t>
+            </a:r>
+            <a:r>
+              <a:rPr lang="en-US" sz="1400" dirty="0"/>
+              <a:t> </a:t>
+            </a:r>
+            <a:r>
+              <a:rPr lang="en-US" sz="1400" dirty="0" err="1"/>
+              <a:t>accordé</a:t>
+            </a:r>
+            <a:r>
+              <a:rPr lang="en-US" sz="1400" dirty="0"/>
+              <a:t> tant </a:t>
+            </a:r>
+            <a:r>
+              <a:rPr lang="en-US" sz="1400" dirty="0" err="1"/>
+              <a:t>que</a:t>
+            </a:r>
+            <a:r>
+              <a:rPr lang="en-US" sz="1400" dirty="0"/>
+              <a:t> les données </a:t>
+            </a:r>
+            <a:r>
+              <a:rPr lang="en-US" sz="1400" dirty="0" err="1"/>
+              <a:t>requises</a:t>
+            </a:r>
+            <a:r>
+              <a:rPr lang="en-US" sz="1400" dirty="0"/>
+              <a:t> ne </a:t>
+            </a:r>
+            <a:r>
+              <a:rPr lang="en-US" sz="1400" dirty="0" err="1"/>
+              <a:t>sont</a:t>
+            </a:r>
+            <a:r>
+              <a:rPr lang="en-US" sz="1400" dirty="0"/>
+              <a:t> pas </a:t>
+            </a:r>
+            <a:r>
+              <a:rPr lang="en-US" sz="1400" dirty="0" err="1"/>
+              <a:t>conformes</a:t>
+            </a:r>
+            <a:r>
+              <a:rPr lang="en-US" sz="1400" dirty="0"/>
+              <a:t>.</a:t>
+            </a:r>
+            <a:br>
+              <a:rPr lang="en-US" sz="1400" dirty="0"/>
+            </a:br>
+            <a:r>
+              <a:rPr lang="en-US" sz="1400" dirty="0" err="1"/>
+              <a:t>Aucun</a:t>
+            </a:r>
+            <a:r>
+              <a:rPr lang="en-US" sz="1400" dirty="0"/>
+              <a:t> compte </a:t>
+            </a:r>
+            <a:r>
+              <a:rPr lang="en-US" sz="1400" dirty="0" err="1"/>
+              <a:t>n'est</a:t>
+            </a:r>
+            <a:r>
+              <a:rPr lang="en-US" sz="1400" dirty="0"/>
+              <a:t> </a:t>
+            </a:r>
+            <a:r>
+              <a:rPr lang="en-US" sz="1400" dirty="0" err="1"/>
+              <a:t>créé</a:t>
+            </a:r>
+            <a:r>
+              <a:rPr lang="en-US" sz="1400" dirty="0"/>
+              <a:t> </a:t>
+            </a:r>
+            <a:r>
+              <a:rPr lang="en-US" sz="1400" dirty="0" err="1"/>
+              <a:t>si</a:t>
+            </a:r>
+            <a:r>
+              <a:rPr lang="en-US" sz="1400" dirty="0"/>
+              <a:t> les validations </a:t>
+            </a:r>
+            <a:r>
+              <a:rPr lang="en-US" sz="1400" dirty="0" err="1"/>
+              <a:t>échouent</a:t>
+            </a:r>
+            <a:r>
+              <a:rPr lang="en-US" sz="1400" dirty="0"/>
+              <a:t>.</a:t>
+            </a:r>
+          </a:p>
+        </p:txBody>
+      </p:sp>
+      <p:pic>
+        <p:nvPicPr>
+          <p:cNvPr id="5" name="Picture 4">
+            <a:extLst>
+              <a:ext uri="{FF2B5EF4-FFF2-40B4-BE49-F238E27FC236}">
+                <a16:creationId xmlns:a16="http://schemas.microsoft.com/office/drawing/2014/main" id="{ECBDD05C-DA03-4903-3532-A199CAD818C1}"/>
+              </a:ext>
+            </a:extLst>
+          </p:cNvPr>
+          <p:cNvPicPr>
+            <a:picLocks noChangeAspect="1"/>
+          </p:cNvPicPr>
+          <p:nvPr/>
+        </p:nvPicPr>
+        <p:blipFill>
+          <a:blip r:embed="rId2"/>
+          <a:stretch>
+            <a:fillRect/>
+          </a:stretch>
+        </p:blipFill>
+        <p:spPr>
+          <a:xfrm>
+            <a:off x="10426060" y="535096"/>
+            <a:ext cx="1485040" cy="5348026"/>
+          </a:xfrm>
+          <a:prstGeom prst="rect">
+            <a:avLst/>
+          </a:prstGeom>
+        </p:spPr>
+      </p:pic>
     </p:spTree>
     <p:extLst>
       <p:ext uri="{BB962C8B-B14F-4D97-AF65-F5344CB8AC3E}">

--- a/09-Presentation/IAM-Healthcare-Automation-Professional.pptx
+++ b/09-Presentation/IAM-Healthcare-Automation-Professional.pptx
@@ -4,6 +4,9 @@
   <p:sldMasterIdLst>
     <p:sldMasterId id="2147483648" r:id="rId1"/>
   </p:sldMasterIdLst>
+  <p:notesMasterIdLst>
+    <p:notesMasterId r:id="rId15"/>
+  </p:notesMasterIdLst>
   <p:sldIdLst>
     <p:sldId id="268" r:id="rId2"/>
     <p:sldId id="256" r:id="rId3"/>
@@ -122,6 +125,1285 @@
     </p:ext>
   </p:extLst>
 </p:presentation>
+</file>
+
+<file path=ppt/notesMasters/notesMaster1.xml><?xml version="1.0" encoding="utf-8"?>
+<p:notesMaster xmlns:a="http://schemas.openxmlformats.org/drawingml/2006/main" xmlns:r="http://schemas.openxmlformats.org/officeDocument/2006/relationships" xmlns:p="http://schemas.openxmlformats.org/presentationml/2006/main">
+  <p:cSld>
+    <p:bg>
+      <p:bgRef idx="1001">
+        <a:schemeClr val="bg1"/>
+      </p:bgRef>
+    </p:bg>
+    <p:spTree>
+      <p:nvGrpSpPr>
+        <p:cNvPr id="1" name=""/>
+        <p:cNvGrpSpPr/>
+        <p:nvPr/>
+      </p:nvGrpSpPr>
+      <p:grpSpPr>
+        <a:xfrm>
+          <a:off x="0" y="0"/>
+          <a:ext cx="0" cy="0"/>
+          <a:chOff x="0" y="0"/>
+          <a:chExt cx="0" cy="0"/>
+        </a:xfrm>
+      </p:grpSpPr>
+      <p:sp>
+        <p:nvSpPr>
+          <p:cNvPr id="2" name="Header Placeholder 1"/>
+          <p:cNvSpPr>
+            <a:spLocks noGrp="1"/>
+          </p:cNvSpPr>
+          <p:nvPr>
+            <p:ph type="hdr" sz="quarter"/>
+          </p:nvPr>
+        </p:nvSpPr>
+        <p:spPr>
+          <a:xfrm>
+            <a:off x="0" y="0"/>
+            <a:ext cx="2971800" cy="458788"/>
+          </a:xfrm>
+          <a:prstGeom prst="rect">
+            <a:avLst/>
+          </a:prstGeom>
+        </p:spPr>
+        <p:txBody>
+          <a:bodyPr vert="horz" lIns="91440" tIns="45720" rIns="91440" bIns="45720" rtlCol="0"/>
+          <a:lstStyle>
+            <a:lvl1pPr algn="l">
+              <a:defRPr sz="1200"/>
+            </a:lvl1pPr>
+          </a:lstStyle>
+          <a:p>
+            <a:endParaRPr lang="en-US"/>
+          </a:p>
+        </p:txBody>
+      </p:sp>
+      <p:sp>
+        <p:nvSpPr>
+          <p:cNvPr id="3" name="Date Placeholder 2"/>
+          <p:cNvSpPr>
+            <a:spLocks noGrp="1"/>
+          </p:cNvSpPr>
+          <p:nvPr>
+            <p:ph type="dt" idx="1"/>
+          </p:nvPr>
+        </p:nvSpPr>
+        <p:spPr>
+          <a:xfrm>
+            <a:off x="3884613" y="0"/>
+            <a:ext cx="2971800" cy="458788"/>
+          </a:xfrm>
+          <a:prstGeom prst="rect">
+            <a:avLst/>
+          </a:prstGeom>
+        </p:spPr>
+        <p:txBody>
+          <a:bodyPr vert="horz" lIns="91440" tIns="45720" rIns="91440" bIns="45720" rtlCol="0"/>
+          <a:lstStyle>
+            <a:lvl1pPr algn="r">
+              <a:defRPr sz="1200"/>
+            </a:lvl1pPr>
+          </a:lstStyle>
+          <a:p>
+            <a:fld id="{280E9DBE-3662-4895-B281-A721E3F5222D}" type="datetimeFigureOut">
+              <a:rPr lang="en-US" smtClean="0"/>
+              <a:t>6/8/2026</a:t>
+            </a:fld>
+            <a:endParaRPr lang="en-US"/>
+          </a:p>
+        </p:txBody>
+      </p:sp>
+      <p:sp>
+        <p:nvSpPr>
+          <p:cNvPr id="4" name="Slide Image Placeholder 3"/>
+          <p:cNvSpPr>
+            <a:spLocks noGrp="1" noRot="1" noChangeAspect="1"/>
+          </p:cNvSpPr>
+          <p:nvPr>
+            <p:ph type="sldImg" idx="2"/>
+          </p:nvPr>
+        </p:nvSpPr>
+        <p:spPr>
+          <a:xfrm>
+            <a:off x="685800" y="1143000"/>
+            <a:ext cx="5486400" cy="3086100"/>
+          </a:xfrm>
+          <a:prstGeom prst="rect">
+            <a:avLst/>
+          </a:prstGeom>
+          <a:noFill/>
+          <a:ln w="12700">
+            <a:solidFill>
+              <a:prstClr val="black"/>
+            </a:solidFill>
+          </a:ln>
+        </p:spPr>
+        <p:txBody>
+          <a:bodyPr vert="horz" lIns="91440" tIns="45720" rIns="91440" bIns="45720" rtlCol="0" anchor="ctr"/>
+          <a:lstStyle/>
+          <a:p>
+            <a:endParaRPr lang="en-US"/>
+          </a:p>
+        </p:txBody>
+      </p:sp>
+      <p:sp>
+        <p:nvSpPr>
+          <p:cNvPr id="5" name="Notes Placeholder 4"/>
+          <p:cNvSpPr>
+            <a:spLocks noGrp="1"/>
+          </p:cNvSpPr>
+          <p:nvPr>
+            <p:ph type="body" sz="quarter" idx="3"/>
+          </p:nvPr>
+        </p:nvSpPr>
+        <p:spPr>
+          <a:xfrm>
+            <a:off x="685800" y="4400550"/>
+            <a:ext cx="5486400" cy="3600450"/>
+          </a:xfrm>
+          <a:prstGeom prst="rect">
+            <a:avLst/>
+          </a:prstGeom>
+        </p:spPr>
+        <p:txBody>
+          <a:bodyPr vert="horz" lIns="91440" tIns="45720" rIns="91440" bIns="45720" rtlCol="0"/>
+          <a:lstStyle/>
+          <a:p>
+            <a:pPr lvl="0"/>
+            <a:r>
+              <a:rPr lang="en-US"/>
+              <a:t>Click to edit Master text styles</a:t>
+            </a:r>
+          </a:p>
+          <a:p>
+            <a:pPr lvl="1"/>
+            <a:r>
+              <a:rPr lang="en-US"/>
+              <a:t>Second level</a:t>
+            </a:r>
+          </a:p>
+          <a:p>
+            <a:pPr lvl="2"/>
+            <a:r>
+              <a:rPr lang="en-US"/>
+              <a:t>Third level</a:t>
+            </a:r>
+          </a:p>
+          <a:p>
+            <a:pPr lvl="3"/>
+            <a:r>
+              <a:rPr lang="en-US"/>
+              <a:t>Fourth level</a:t>
+            </a:r>
+          </a:p>
+          <a:p>
+            <a:pPr lvl="4"/>
+            <a:r>
+              <a:rPr lang="en-US"/>
+              <a:t>Fifth level</a:t>
+            </a:r>
+          </a:p>
+        </p:txBody>
+      </p:sp>
+      <p:sp>
+        <p:nvSpPr>
+          <p:cNvPr id="6" name="Footer Placeholder 5"/>
+          <p:cNvSpPr>
+            <a:spLocks noGrp="1"/>
+          </p:cNvSpPr>
+          <p:nvPr>
+            <p:ph type="ftr" sz="quarter" idx="4"/>
+          </p:nvPr>
+        </p:nvSpPr>
+        <p:spPr>
+          <a:xfrm>
+            <a:off x="0" y="8685213"/>
+            <a:ext cx="2971800" cy="458787"/>
+          </a:xfrm>
+          <a:prstGeom prst="rect">
+            <a:avLst/>
+          </a:prstGeom>
+        </p:spPr>
+        <p:txBody>
+          <a:bodyPr vert="horz" lIns="91440" tIns="45720" rIns="91440" bIns="45720" rtlCol="0" anchor="b"/>
+          <a:lstStyle>
+            <a:lvl1pPr algn="l">
+              <a:defRPr sz="1200"/>
+            </a:lvl1pPr>
+          </a:lstStyle>
+          <a:p>
+            <a:endParaRPr lang="en-US"/>
+          </a:p>
+        </p:txBody>
+      </p:sp>
+      <p:sp>
+        <p:nvSpPr>
+          <p:cNvPr id="7" name="Slide Number Placeholder 6"/>
+          <p:cNvSpPr>
+            <a:spLocks noGrp="1"/>
+          </p:cNvSpPr>
+          <p:nvPr>
+            <p:ph type="sldNum" sz="quarter" idx="5"/>
+          </p:nvPr>
+        </p:nvSpPr>
+        <p:spPr>
+          <a:xfrm>
+            <a:off x="3884613" y="8685213"/>
+            <a:ext cx="2971800" cy="458787"/>
+          </a:xfrm>
+          <a:prstGeom prst="rect">
+            <a:avLst/>
+          </a:prstGeom>
+        </p:spPr>
+        <p:txBody>
+          <a:bodyPr vert="horz" lIns="91440" tIns="45720" rIns="91440" bIns="45720" rtlCol="0" anchor="b"/>
+          <a:lstStyle>
+            <a:lvl1pPr algn="r">
+              <a:defRPr sz="1200"/>
+            </a:lvl1pPr>
+          </a:lstStyle>
+          <a:p>
+            <a:fld id="{8CADF99C-AF7E-4688-B727-7B33BD5CCDA3}" type="slidenum">
+              <a:rPr lang="en-US" smtClean="0"/>
+              <a:t>‹#›</a:t>
+            </a:fld>
+            <a:endParaRPr lang="en-US"/>
+          </a:p>
+        </p:txBody>
+      </p:sp>
+    </p:spTree>
+    <p:extLst>
+      <p:ext uri="{BB962C8B-B14F-4D97-AF65-F5344CB8AC3E}">
+        <p14:creationId xmlns:p14="http://schemas.microsoft.com/office/powerpoint/2010/main" val="2491075200"/>
+      </p:ext>
+    </p:extLst>
+  </p:cSld>
+  <p:clrMap bg1="lt1" tx1="dk1" bg2="lt2" tx2="dk2" accent1="accent1" accent2="accent2" accent3="accent3" accent4="accent4" accent5="accent5" accent6="accent6" hlink="hlink" folHlink="folHlink"/>
+  <p:notesStyle>
+    <a:lvl1pPr marL="0" algn="l" defTabSz="914400" rtl="0" eaLnBrk="1" latinLnBrk="0" hangingPunct="1">
+      <a:defRPr sz="1200" kern="1200">
+        <a:solidFill>
+          <a:schemeClr val="tx1"/>
+        </a:solidFill>
+        <a:latin typeface="+mn-lt"/>
+        <a:ea typeface="+mn-ea"/>
+        <a:cs typeface="+mn-cs"/>
+      </a:defRPr>
+    </a:lvl1pPr>
+    <a:lvl2pPr marL="457200" algn="l" defTabSz="914400" rtl="0" eaLnBrk="1" latinLnBrk="0" hangingPunct="1">
+      <a:defRPr sz="1200" kern="1200">
+        <a:solidFill>
+          <a:schemeClr val="tx1"/>
+        </a:solidFill>
+        <a:latin typeface="+mn-lt"/>
+        <a:ea typeface="+mn-ea"/>
+        <a:cs typeface="+mn-cs"/>
+      </a:defRPr>
+    </a:lvl2pPr>
+    <a:lvl3pPr marL="914400" algn="l" defTabSz="914400" rtl="0" eaLnBrk="1" latinLnBrk="0" hangingPunct="1">
+      <a:defRPr sz="1200" kern="1200">
+        <a:solidFill>
+          <a:schemeClr val="tx1"/>
+        </a:solidFill>
+        <a:latin typeface="+mn-lt"/>
+        <a:ea typeface="+mn-ea"/>
+        <a:cs typeface="+mn-cs"/>
+      </a:defRPr>
+    </a:lvl3pPr>
+    <a:lvl4pPr marL="1371600" algn="l" defTabSz="914400" rtl="0" eaLnBrk="1" latinLnBrk="0" hangingPunct="1">
+      <a:defRPr sz="1200" kern="1200">
+        <a:solidFill>
+          <a:schemeClr val="tx1"/>
+        </a:solidFill>
+        <a:latin typeface="+mn-lt"/>
+        <a:ea typeface="+mn-ea"/>
+        <a:cs typeface="+mn-cs"/>
+      </a:defRPr>
+    </a:lvl4pPr>
+    <a:lvl5pPr marL="1828800" algn="l" defTabSz="914400" rtl="0" eaLnBrk="1" latinLnBrk="0" hangingPunct="1">
+      <a:defRPr sz="1200" kern="1200">
+        <a:solidFill>
+          <a:schemeClr val="tx1"/>
+        </a:solidFill>
+        <a:latin typeface="+mn-lt"/>
+        <a:ea typeface="+mn-ea"/>
+        <a:cs typeface="+mn-cs"/>
+      </a:defRPr>
+    </a:lvl5pPr>
+    <a:lvl6pPr marL="2286000" algn="l" defTabSz="914400" rtl="0" eaLnBrk="1" latinLnBrk="0" hangingPunct="1">
+      <a:defRPr sz="1200" kern="1200">
+        <a:solidFill>
+          <a:schemeClr val="tx1"/>
+        </a:solidFill>
+        <a:latin typeface="+mn-lt"/>
+        <a:ea typeface="+mn-ea"/>
+        <a:cs typeface="+mn-cs"/>
+      </a:defRPr>
+    </a:lvl6pPr>
+    <a:lvl7pPr marL="2743200" algn="l" defTabSz="914400" rtl="0" eaLnBrk="1" latinLnBrk="0" hangingPunct="1">
+      <a:defRPr sz="1200" kern="1200">
+        <a:solidFill>
+          <a:schemeClr val="tx1"/>
+        </a:solidFill>
+        <a:latin typeface="+mn-lt"/>
+        <a:ea typeface="+mn-ea"/>
+        <a:cs typeface="+mn-cs"/>
+      </a:defRPr>
+    </a:lvl7pPr>
+    <a:lvl8pPr marL="3200400" algn="l" defTabSz="914400" rtl="0" eaLnBrk="1" latinLnBrk="0" hangingPunct="1">
+      <a:defRPr sz="1200" kern="1200">
+        <a:solidFill>
+          <a:schemeClr val="tx1"/>
+        </a:solidFill>
+        <a:latin typeface="+mn-lt"/>
+        <a:ea typeface="+mn-ea"/>
+        <a:cs typeface="+mn-cs"/>
+      </a:defRPr>
+    </a:lvl8pPr>
+    <a:lvl9pPr marL="3657600" algn="l" defTabSz="914400" rtl="0" eaLnBrk="1" latinLnBrk="0" hangingPunct="1">
+      <a:defRPr sz="1200" kern="1200">
+        <a:solidFill>
+          <a:schemeClr val="tx1"/>
+        </a:solidFill>
+        <a:latin typeface="+mn-lt"/>
+        <a:ea typeface="+mn-ea"/>
+        <a:cs typeface="+mn-cs"/>
+      </a:defRPr>
+    </a:lvl9pPr>
+  </p:notesStyle>
+</p:notesMaster>
+</file>
+
+<file path=ppt/notesSlides/notesSlide1.xml><?xml version="1.0" encoding="utf-8"?>
+<p:notes xmlns:a="http://schemas.openxmlformats.org/drawingml/2006/main" xmlns:r="http://schemas.openxmlformats.org/officeDocument/2006/relationships" xmlns:p="http://schemas.openxmlformats.org/presentationml/2006/main">
+  <p:cSld>
+    <p:spTree>
+      <p:nvGrpSpPr>
+        <p:cNvPr id="1" name=""/>
+        <p:cNvGrpSpPr/>
+        <p:nvPr/>
+      </p:nvGrpSpPr>
+      <p:grpSpPr>
+        <a:xfrm>
+          <a:off x="0" y="0"/>
+          <a:ext cx="0" cy="0"/>
+          <a:chOff x="0" y="0"/>
+          <a:chExt cx="0" cy="0"/>
+        </a:xfrm>
+      </p:grpSpPr>
+      <p:sp>
+        <p:nvSpPr>
+          <p:cNvPr id="2" name="Slide Image Placeholder 1"/>
+          <p:cNvSpPr>
+            <a:spLocks noGrp="1" noRot="1" noChangeAspect="1"/>
+          </p:cNvSpPr>
+          <p:nvPr>
+            <p:ph type="sldImg"/>
+          </p:nvPr>
+        </p:nvSpPr>
+        <p:spPr/>
+      </p:sp>
+      <p:sp>
+        <p:nvSpPr>
+          <p:cNvPr id="3" name="Notes Placeholder 2"/>
+          <p:cNvSpPr>
+            <a:spLocks noGrp="1"/>
+          </p:cNvSpPr>
+          <p:nvPr>
+            <p:ph type="body" idx="1"/>
+          </p:nvPr>
+        </p:nvSpPr>
+        <p:spPr/>
+        <p:txBody>
+          <a:bodyPr/>
+          <a:lstStyle/>
+          <a:p>
+            <a:pPr>
+              <a:buNone/>
+            </a:pPr>
+            <a:r>
+              <a:rPr lang="en-US" sz="2000" dirty="0"/>
+              <a:t>Les </a:t>
+            </a:r>
+            <a:r>
+              <a:rPr lang="en-US" sz="2000" dirty="0" err="1"/>
+              <a:t>établissements</a:t>
+            </a:r>
+            <a:r>
+              <a:rPr lang="en-US" sz="2000" dirty="0"/>
+              <a:t> de santé </a:t>
+            </a:r>
+            <a:r>
+              <a:rPr lang="en-US" sz="2000" dirty="0" err="1"/>
+              <a:t>gèrent</a:t>
+            </a:r>
+            <a:r>
+              <a:rPr lang="en-US" sz="2000" dirty="0"/>
+              <a:t> des </a:t>
+            </a:r>
+            <a:r>
+              <a:rPr lang="en-US" sz="2000" dirty="0" err="1"/>
+              <a:t>centaines</a:t>
+            </a:r>
+            <a:r>
+              <a:rPr lang="en-US" sz="2000" dirty="0"/>
+              <a:t> </a:t>
+            </a:r>
+            <a:r>
+              <a:rPr lang="en-US" sz="2000" dirty="0" err="1"/>
+              <a:t>voire</a:t>
+            </a:r>
+            <a:r>
+              <a:rPr lang="en-US" sz="2000" dirty="0"/>
+              <a:t> des </a:t>
+            </a:r>
+            <a:r>
+              <a:rPr lang="en-US" sz="2000" dirty="0" err="1"/>
+              <a:t>milliers</a:t>
+            </a:r>
+            <a:r>
+              <a:rPr lang="en-US" sz="2000" dirty="0"/>
+              <a:t> </a:t>
+            </a:r>
+            <a:r>
+              <a:rPr lang="en-US" sz="2000" dirty="0" err="1"/>
+              <a:t>d'employés</a:t>
+            </a:r>
+            <a:r>
+              <a:rPr lang="en-US" sz="2000" dirty="0"/>
+              <a:t>. La </a:t>
+            </a:r>
+            <a:r>
+              <a:rPr lang="en-US" sz="2000" dirty="0" err="1"/>
+              <a:t>création</a:t>
+            </a:r>
+            <a:r>
+              <a:rPr lang="en-US" sz="2000" dirty="0"/>
+              <a:t> </a:t>
+            </a:r>
+            <a:r>
+              <a:rPr lang="en-US" sz="2000" dirty="0" err="1"/>
+              <a:t>manuelle</a:t>
+            </a:r>
+            <a:r>
+              <a:rPr lang="en-US" sz="2000" dirty="0"/>
+              <a:t> des </a:t>
+            </a:r>
+            <a:r>
+              <a:rPr lang="en-US" sz="2000" dirty="0" err="1"/>
+              <a:t>comptes</a:t>
+            </a:r>
+            <a:r>
+              <a:rPr lang="en-US" sz="2000" dirty="0"/>
+              <a:t> </a:t>
+            </a:r>
+            <a:r>
+              <a:rPr lang="en-US" sz="2000" dirty="0" err="1"/>
+              <a:t>peut</a:t>
+            </a:r>
+            <a:r>
+              <a:rPr lang="en-US" sz="2000" dirty="0"/>
+              <a:t> </a:t>
+            </a:r>
+            <a:r>
+              <a:rPr lang="en-US" sz="2000" dirty="0" err="1"/>
+              <a:t>entraîner</a:t>
+            </a:r>
+            <a:r>
+              <a:rPr lang="en-US" sz="2000" dirty="0"/>
+              <a:t> des retards, des </a:t>
+            </a:r>
+            <a:r>
+              <a:rPr lang="en-US" sz="2000" dirty="0" err="1"/>
+              <a:t>erreurs</a:t>
+            </a:r>
+            <a:r>
+              <a:rPr lang="en-US" sz="2000" dirty="0"/>
+              <a:t> </a:t>
+            </a:r>
+            <a:r>
+              <a:rPr lang="en-US" sz="2000" dirty="0" err="1"/>
+              <a:t>ou</a:t>
+            </a:r>
+            <a:r>
+              <a:rPr lang="en-US" sz="2000" dirty="0"/>
+              <a:t> des </a:t>
+            </a:r>
+            <a:r>
+              <a:rPr lang="en-US" sz="2000" dirty="0" err="1"/>
+              <a:t>risques</a:t>
+            </a:r>
+            <a:r>
+              <a:rPr lang="en-US" sz="2000" dirty="0"/>
+              <a:t> de sécurité. Notre </a:t>
+            </a:r>
+            <a:r>
+              <a:rPr lang="en-US" sz="2000" dirty="0" err="1"/>
+              <a:t>objectif</a:t>
+            </a:r>
+            <a:r>
+              <a:rPr lang="en-US" sz="2000" dirty="0"/>
+              <a:t> est </a:t>
+            </a:r>
+            <a:r>
+              <a:rPr lang="en-US" sz="2000" dirty="0" err="1"/>
+              <a:t>d'automatiser</a:t>
+            </a:r>
+            <a:r>
+              <a:rPr lang="en-US" sz="2000" dirty="0"/>
+              <a:t> </a:t>
+            </a:r>
+            <a:r>
+              <a:rPr lang="en-US" sz="2000" dirty="0" err="1"/>
+              <a:t>ces</a:t>
+            </a:r>
+            <a:r>
+              <a:rPr lang="en-US" sz="2000" dirty="0"/>
+              <a:t> processus </a:t>
+            </a:r>
+            <a:r>
+              <a:rPr lang="en-US" sz="2000" dirty="0" err="1"/>
+              <a:t>afin</a:t>
+            </a:r>
+            <a:r>
+              <a:rPr lang="en-US" sz="2000" dirty="0"/>
+              <a:t> de </a:t>
+            </a:r>
+            <a:r>
+              <a:rPr lang="en-US" sz="2000" dirty="0" err="1"/>
+              <a:t>réduire</a:t>
+            </a:r>
+            <a:r>
+              <a:rPr lang="en-US" sz="2000" dirty="0"/>
+              <a:t> les </a:t>
+            </a:r>
+            <a:r>
+              <a:rPr lang="en-US" sz="2000" dirty="0" err="1"/>
+              <a:t>risques</a:t>
+            </a:r>
+            <a:r>
+              <a:rPr lang="en-US" sz="2000" dirty="0"/>
+              <a:t> et </a:t>
+            </a:r>
+            <a:r>
+              <a:rPr lang="en-US" sz="2000" dirty="0" err="1"/>
+              <a:t>améliorer</a:t>
+            </a:r>
+            <a:r>
+              <a:rPr lang="en-US" sz="2000" dirty="0"/>
+              <a:t> </a:t>
+            </a:r>
+            <a:r>
+              <a:rPr lang="en-US" sz="2000" dirty="0" err="1"/>
+              <a:t>l'efficacité</a:t>
+            </a:r>
+            <a:r>
+              <a:rPr lang="en-US" sz="2000" dirty="0"/>
+              <a:t> </a:t>
+            </a:r>
+            <a:r>
+              <a:rPr lang="en-US" sz="2000" dirty="0" err="1"/>
+              <a:t>opérationnelle</a:t>
+            </a:r>
+            <a:r>
+              <a:rPr lang="en-US" sz="2000" dirty="0"/>
+              <a:t>.</a:t>
+            </a:r>
+          </a:p>
+          <a:p>
+            <a:endParaRPr lang="en-US" dirty="0"/>
+          </a:p>
+        </p:txBody>
+      </p:sp>
+      <p:sp>
+        <p:nvSpPr>
+          <p:cNvPr id="4" name="Slide Number Placeholder 3"/>
+          <p:cNvSpPr>
+            <a:spLocks noGrp="1"/>
+          </p:cNvSpPr>
+          <p:nvPr>
+            <p:ph type="sldNum" sz="quarter" idx="5"/>
+          </p:nvPr>
+        </p:nvSpPr>
+        <p:spPr/>
+        <p:txBody>
+          <a:bodyPr/>
+          <a:lstStyle/>
+          <a:p>
+            <a:fld id="{8CADF99C-AF7E-4688-B727-7B33BD5CCDA3}" type="slidenum">
+              <a:rPr lang="en-US" smtClean="0"/>
+              <a:t>2</a:t>
+            </a:fld>
+            <a:endParaRPr lang="en-US"/>
+          </a:p>
+        </p:txBody>
+      </p:sp>
+    </p:spTree>
+    <p:extLst>
+      <p:ext uri="{BB962C8B-B14F-4D97-AF65-F5344CB8AC3E}">
+        <p14:creationId xmlns:p14="http://schemas.microsoft.com/office/powerpoint/2010/main" val="3422279232"/>
+      </p:ext>
+    </p:extLst>
+  </p:cSld>
+  <p:clrMapOvr>
+    <a:masterClrMapping/>
+  </p:clrMapOvr>
+</p:notes>
+</file>
+
+<file path=ppt/notesSlides/notesSlide2.xml><?xml version="1.0" encoding="utf-8"?>
+<p:notes xmlns:a="http://schemas.openxmlformats.org/drawingml/2006/main" xmlns:r="http://schemas.openxmlformats.org/officeDocument/2006/relationships" xmlns:p="http://schemas.openxmlformats.org/presentationml/2006/main">
+  <p:cSld>
+    <p:spTree>
+      <p:nvGrpSpPr>
+        <p:cNvPr id="1" name=""/>
+        <p:cNvGrpSpPr/>
+        <p:nvPr/>
+      </p:nvGrpSpPr>
+      <p:grpSpPr>
+        <a:xfrm>
+          <a:off x="0" y="0"/>
+          <a:ext cx="0" cy="0"/>
+          <a:chOff x="0" y="0"/>
+          <a:chExt cx="0" cy="0"/>
+        </a:xfrm>
+      </p:grpSpPr>
+      <p:sp>
+        <p:nvSpPr>
+          <p:cNvPr id="2" name="Slide Image Placeholder 1"/>
+          <p:cNvSpPr>
+            <a:spLocks noGrp="1" noRot="1" noChangeAspect="1"/>
+          </p:cNvSpPr>
+          <p:nvPr>
+            <p:ph type="sldImg"/>
+          </p:nvPr>
+        </p:nvSpPr>
+        <p:spPr/>
+      </p:sp>
+      <p:sp>
+        <p:nvSpPr>
+          <p:cNvPr id="3" name="Notes Placeholder 2"/>
+          <p:cNvSpPr>
+            <a:spLocks noGrp="1"/>
+          </p:cNvSpPr>
+          <p:nvPr>
+            <p:ph type="body" idx="1"/>
+          </p:nvPr>
+        </p:nvSpPr>
+        <p:spPr/>
+        <p:txBody>
+          <a:bodyPr/>
+          <a:lstStyle/>
+          <a:p>
+            <a:r>
+              <a:rPr lang="fr-FR" dirty="0"/>
+              <a:t>Lorsqu'un nouvel employé rejoint l'organisation, le système valide les données RH, vérifie les règles RBAC, crée le compte utilisateur, attribue les groupes nécessaires et enregistre toutes les actions dans les journaux d'audit.</a:t>
+            </a:r>
+            <a:endParaRPr lang="en-US" dirty="0"/>
+          </a:p>
+        </p:txBody>
+      </p:sp>
+      <p:sp>
+        <p:nvSpPr>
+          <p:cNvPr id="4" name="Slide Number Placeholder 3"/>
+          <p:cNvSpPr>
+            <a:spLocks noGrp="1"/>
+          </p:cNvSpPr>
+          <p:nvPr>
+            <p:ph type="sldNum" sz="quarter" idx="5"/>
+          </p:nvPr>
+        </p:nvSpPr>
+        <p:spPr/>
+        <p:txBody>
+          <a:bodyPr/>
+          <a:lstStyle/>
+          <a:p>
+            <a:fld id="{8CADF99C-AF7E-4688-B727-7B33BD5CCDA3}" type="slidenum">
+              <a:rPr lang="en-US" smtClean="0"/>
+              <a:t>5</a:t>
+            </a:fld>
+            <a:endParaRPr lang="en-US"/>
+          </a:p>
+        </p:txBody>
+      </p:sp>
+    </p:spTree>
+    <p:extLst>
+      <p:ext uri="{BB962C8B-B14F-4D97-AF65-F5344CB8AC3E}">
+        <p14:creationId xmlns:p14="http://schemas.microsoft.com/office/powerpoint/2010/main" val="4213608230"/>
+      </p:ext>
+    </p:extLst>
+  </p:cSld>
+  <p:clrMapOvr>
+    <a:masterClrMapping/>
+  </p:clrMapOvr>
+</p:notes>
+</file>
+
+<file path=ppt/notesSlides/notesSlide3.xml><?xml version="1.0" encoding="utf-8"?>
+<p:notes xmlns:a="http://schemas.openxmlformats.org/drawingml/2006/main" xmlns:r="http://schemas.openxmlformats.org/officeDocument/2006/relationships" xmlns:p="http://schemas.openxmlformats.org/presentationml/2006/main">
+  <p:cSld>
+    <p:spTree>
+      <p:nvGrpSpPr>
+        <p:cNvPr id="1" name=""/>
+        <p:cNvGrpSpPr/>
+        <p:nvPr/>
+      </p:nvGrpSpPr>
+      <p:grpSpPr>
+        <a:xfrm>
+          <a:off x="0" y="0"/>
+          <a:ext cx="0" cy="0"/>
+          <a:chOff x="0" y="0"/>
+          <a:chExt cx="0" cy="0"/>
+        </a:xfrm>
+      </p:grpSpPr>
+      <p:sp>
+        <p:nvSpPr>
+          <p:cNvPr id="2" name="Slide Image Placeholder 1"/>
+          <p:cNvSpPr>
+            <a:spLocks noGrp="1" noRot="1" noChangeAspect="1"/>
+          </p:cNvSpPr>
+          <p:nvPr>
+            <p:ph type="sldImg"/>
+          </p:nvPr>
+        </p:nvSpPr>
+        <p:spPr/>
+      </p:sp>
+      <p:sp>
+        <p:nvSpPr>
+          <p:cNvPr id="3" name="Notes Placeholder 2"/>
+          <p:cNvSpPr>
+            <a:spLocks noGrp="1"/>
+          </p:cNvSpPr>
+          <p:nvPr>
+            <p:ph type="body" idx="1"/>
+          </p:nvPr>
+        </p:nvSpPr>
+        <p:spPr/>
+        <p:txBody>
+          <a:bodyPr/>
+          <a:lstStyle/>
+          <a:p>
+            <a:r>
+              <a:rPr lang="en-US" dirty="0"/>
+              <a:t>Le </a:t>
+            </a:r>
+            <a:r>
+              <a:rPr lang="en-US" dirty="0" err="1"/>
+              <a:t>système</a:t>
+            </a:r>
+            <a:r>
+              <a:rPr lang="en-US" dirty="0"/>
+              <a:t> applique le </a:t>
+            </a:r>
+            <a:r>
+              <a:rPr lang="en-US" dirty="0" err="1"/>
+              <a:t>principe</a:t>
+            </a:r>
+            <a:r>
+              <a:rPr lang="en-US" dirty="0"/>
+              <a:t> du </a:t>
+            </a:r>
+            <a:r>
+              <a:rPr lang="en-US" dirty="0" err="1"/>
+              <a:t>moindre</a:t>
+            </a:r>
+            <a:r>
+              <a:rPr lang="en-US" dirty="0"/>
+              <a:t> </a:t>
+            </a:r>
+            <a:r>
+              <a:rPr lang="en-US" dirty="0" err="1"/>
+              <a:t>privilège</a:t>
+            </a:r>
+            <a:r>
+              <a:rPr lang="en-US" dirty="0"/>
+              <a:t>. Les </a:t>
+            </a:r>
+            <a:r>
+              <a:rPr lang="en-US" dirty="0" err="1"/>
+              <a:t>accès</a:t>
+            </a:r>
+            <a:r>
+              <a:rPr lang="en-US" dirty="0"/>
+              <a:t> </a:t>
+            </a:r>
+            <a:r>
+              <a:rPr lang="en-US" dirty="0" err="1"/>
+              <a:t>sont</a:t>
+            </a:r>
+            <a:r>
+              <a:rPr lang="en-US" dirty="0"/>
+              <a:t> </a:t>
+            </a:r>
+            <a:r>
+              <a:rPr lang="en-US" dirty="0" err="1"/>
+              <a:t>attribués</a:t>
+            </a:r>
+            <a:r>
+              <a:rPr lang="en-US" dirty="0"/>
+              <a:t> </a:t>
+            </a:r>
+            <a:r>
+              <a:rPr lang="en-US" dirty="0" err="1"/>
+              <a:t>automatiquement</a:t>
+            </a:r>
+            <a:r>
+              <a:rPr lang="en-US" dirty="0"/>
+              <a:t> </a:t>
+            </a:r>
+            <a:r>
+              <a:rPr lang="en-US" dirty="0" err="1"/>
+              <a:t>selon</a:t>
+            </a:r>
+            <a:r>
+              <a:rPr lang="en-US" dirty="0"/>
+              <a:t> le </a:t>
+            </a:r>
+            <a:r>
+              <a:rPr lang="en-US" dirty="0" err="1"/>
+              <a:t>rôle</a:t>
+            </a:r>
+            <a:r>
+              <a:rPr lang="en-US" dirty="0"/>
+              <a:t> de </a:t>
+            </a:r>
+            <a:r>
+              <a:rPr lang="en-US" dirty="0" err="1"/>
+              <a:t>l'employé</a:t>
+            </a:r>
+            <a:r>
+              <a:rPr lang="en-US" dirty="0"/>
+              <a:t> </a:t>
+            </a:r>
+            <a:r>
+              <a:rPr lang="en-US" dirty="0" err="1"/>
+              <a:t>afin</a:t>
+            </a:r>
+            <a:r>
+              <a:rPr lang="en-US" dirty="0"/>
+              <a:t> de limiter les </a:t>
+            </a:r>
+            <a:r>
+              <a:rPr lang="en-US" dirty="0" err="1"/>
+              <a:t>accès</a:t>
+            </a:r>
+            <a:r>
+              <a:rPr lang="en-US" dirty="0"/>
+              <a:t> </a:t>
+            </a:r>
+            <a:r>
+              <a:rPr lang="en-US" dirty="0" err="1"/>
+              <a:t>excessifs</a:t>
+            </a:r>
+            <a:r>
+              <a:rPr lang="en-US" dirty="0"/>
+              <a:t> et </a:t>
+            </a:r>
+            <a:r>
+              <a:rPr lang="en-US" dirty="0" err="1"/>
+              <a:t>renforcer</a:t>
+            </a:r>
+            <a:r>
+              <a:rPr lang="en-US" dirty="0"/>
+              <a:t> la sécurité.</a:t>
+            </a:r>
+          </a:p>
+        </p:txBody>
+      </p:sp>
+      <p:sp>
+        <p:nvSpPr>
+          <p:cNvPr id="4" name="Slide Number Placeholder 3"/>
+          <p:cNvSpPr>
+            <a:spLocks noGrp="1"/>
+          </p:cNvSpPr>
+          <p:nvPr>
+            <p:ph type="sldNum" sz="quarter" idx="5"/>
+          </p:nvPr>
+        </p:nvSpPr>
+        <p:spPr/>
+        <p:txBody>
+          <a:bodyPr/>
+          <a:lstStyle/>
+          <a:p>
+            <a:fld id="{8CADF99C-AF7E-4688-B727-7B33BD5CCDA3}" type="slidenum">
+              <a:rPr lang="en-US" smtClean="0"/>
+              <a:t>8</a:t>
+            </a:fld>
+            <a:endParaRPr lang="en-US"/>
+          </a:p>
+        </p:txBody>
+      </p:sp>
+    </p:spTree>
+    <p:extLst>
+      <p:ext uri="{BB962C8B-B14F-4D97-AF65-F5344CB8AC3E}">
+        <p14:creationId xmlns:p14="http://schemas.microsoft.com/office/powerpoint/2010/main" val="2516540216"/>
+      </p:ext>
+    </p:extLst>
+  </p:cSld>
+  <p:clrMapOvr>
+    <a:masterClrMapping/>
+  </p:clrMapOvr>
+</p:notes>
+</file>
+
+<file path=ppt/notesSlides/notesSlide4.xml><?xml version="1.0" encoding="utf-8"?>
+<p:notes xmlns:a="http://schemas.openxmlformats.org/drawingml/2006/main" xmlns:r="http://schemas.openxmlformats.org/officeDocument/2006/relationships" xmlns:p="http://schemas.openxmlformats.org/presentationml/2006/main">
+  <p:cSld>
+    <p:spTree>
+      <p:nvGrpSpPr>
+        <p:cNvPr id="1" name=""/>
+        <p:cNvGrpSpPr/>
+        <p:nvPr/>
+      </p:nvGrpSpPr>
+      <p:grpSpPr>
+        <a:xfrm>
+          <a:off x="0" y="0"/>
+          <a:ext cx="0" cy="0"/>
+          <a:chOff x="0" y="0"/>
+          <a:chExt cx="0" cy="0"/>
+        </a:xfrm>
+      </p:grpSpPr>
+      <p:sp>
+        <p:nvSpPr>
+          <p:cNvPr id="2" name="Slide Image Placeholder 1"/>
+          <p:cNvSpPr>
+            <a:spLocks noGrp="1" noRot="1" noChangeAspect="1"/>
+          </p:cNvSpPr>
+          <p:nvPr>
+            <p:ph type="sldImg"/>
+          </p:nvPr>
+        </p:nvSpPr>
+        <p:spPr/>
+      </p:sp>
+      <p:sp>
+        <p:nvSpPr>
+          <p:cNvPr id="3" name="Notes Placeholder 2"/>
+          <p:cNvSpPr>
+            <a:spLocks noGrp="1"/>
+          </p:cNvSpPr>
+          <p:nvPr>
+            <p:ph type="body" idx="1"/>
+          </p:nvPr>
+        </p:nvSpPr>
+        <p:spPr/>
+        <p:txBody>
+          <a:bodyPr/>
+          <a:lstStyle/>
+          <a:p>
+            <a:r>
+              <a:rPr lang="en-US" dirty="0"/>
+              <a:t>Avant toute </a:t>
+            </a:r>
+            <a:r>
+              <a:rPr lang="en-US" dirty="0" err="1"/>
+              <a:t>création</a:t>
+            </a:r>
+            <a:r>
+              <a:rPr lang="en-US" dirty="0"/>
+              <a:t> de compte, le </a:t>
+            </a:r>
+            <a:r>
+              <a:rPr lang="en-US" dirty="0" err="1"/>
+              <a:t>système</a:t>
+            </a:r>
+            <a:r>
+              <a:rPr lang="en-US" dirty="0"/>
+              <a:t> </a:t>
+            </a:r>
+            <a:r>
+              <a:rPr lang="en-US" dirty="0" err="1"/>
+              <a:t>vérifie</a:t>
+            </a:r>
+            <a:r>
+              <a:rPr lang="en-US" dirty="0"/>
+              <a:t> </a:t>
+            </a:r>
+            <a:r>
+              <a:rPr lang="en-US" dirty="0" err="1"/>
+              <a:t>que</a:t>
+            </a:r>
+            <a:r>
+              <a:rPr lang="en-US" dirty="0"/>
+              <a:t> les </a:t>
+            </a:r>
+            <a:r>
+              <a:rPr lang="en-US" dirty="0" err="1"/>
+              <a:t>informations</a:t>
+            </a:r>
+            <a:r>
+              <a:rPr lang="en-US" dirty="0"/>
+              <a:t> </a:t>
+            </a:r>
+            <a:r>
+              <a:rPr lang="en-US" dirty="0" err="1"/>
+              <a:t>essentielles</a:t>
+            </a:r>
+            <a:r>
+              <a:rPr lang="en-US" dirty="0"/>
+              <a:t> </a:t>
+            </a:r>
+            <a:r>
+              <a:rPr lang="en-US" dirty="0" err="1"/>
+              <a:t>sont</a:t>
+            </a:r>
+            <a:r>
+              <a:rPr lang="en-US" dirty="0"/>
+              <a:t> </a:t>
+            </a:r>
+            <a:r>
+              <a:rPr lang="en-US" dirty="0" err="1"/>
+              <a:t>présentes</a:t>
+            </a:r>
+            <a:r>
+              <a:rPr lang="en-US" dirty="0"/>
+              <a:t>. Si un </a:t>
+            </a:r>
+            <a:r>
+              <a:rPr lang="en-US" dirty="0" err="1"/>
+              <a:t>gestionnaire</a:t>
+            </a:r>
+            <a:r>
+              <a:rPr lang="en-US" dirty="0"/>
+              <a:t>, un département </a:t>
+            </a:r>
+            <a:r>
+              <a:rPr lang="en-US" dirty="0" err="1"/>
+              <a:t>ou</a:t>
+            </a:r>
+            <a:r>
+              <a:rPr lang="en-US" dirty="0"/>
+              <a:t> un </a:t>
+            </a:r>
+            <a:r>
+              <a:rPr lang="en-US" dirty="0" err="1"/>
+              <a:t>rôle</a:t>
+            </a:r>
+            <a:r>
+              <a:rPr lang="en-US" dirty="0"/>
+              <a:t> est </a:t>
+            </a:r>
+            <a:r>
+              <a:rPr lang="en-US" dirty="0" err="1"/>
+              <a:t>manquant</a:t>
+            </a:r>
+            <a:r>
+              <a:rPr lang="en-US" dirty="0"/>
+              <a:t>, le processus est </a:t>
+            </a:r>
+            <a:r>
+              <a:rPr lang="en-US" dirty="0" err="1"/>
+              <a:t>bloqué</a:t>
+            </a:r>
+            <a:r>
+              <a:rPr lang="en-US" dirty="0"/>
+              <a:t> </a:t>
+            </a:r>
+            <a:r>
+              <a:rPr lang="en-US" dirty="0" err="1"/>
+              <a:t>afin</a:t>
+            </a:r>
+            <a:r>
+              <a:rPr lang="en-US" dirty="0"/>
+              <a:t> </a:t>
+            </a:r>
+            <a:r>
+              <a:rPr lang="en-US" dirty="0" err="1"/>
+              <a:t>d'éviter</a:t>
+            </a:r>
+            <a:r>
+              <a:rPr lang="en-US" dirty="0"/>
+              <a:t> des </a:t>
+            </a:r>
+            <a:r>
+              <a:rPr lang="en-US" dirty="0" err="1"/>
+              <a:t>erreurs</a:t>
+            </a:r>
+            <a:r>
+              <a:rPr lang="en-US" dirty="0"/>
+              <a:t> de sécurité.</a:t>
+            </a:r>
+          </a:p>
+        </p:txBody>
+      </p:sp>
+      <p:sp>
+        <p:nvSpPr>
+          <p:cNvPr id="4" name="Slide Number Placeholder 3"/>
+          <p:cNvSpPr>
+            <a:spLocks noGrp="1"/>
+          </p:cNvSpPr>
+          <p:nvPr>
+            <p:ph type="sldNum" sz="quarter" idx="5"/>
+          </p:nvPr>
+        </p:nvSpPr>
+        <p:spPr/>
+        <p:txBody>
+          <a:bodyPr/>
+          <a:lstStyle/>
+          <a:p>
+            <a:fld id="{8CADF99C-AF7E-4688-B727-7B33BD5CCDA3}" type="slidenum">
+              <a:rPr lang="en-US" smtClean="0"/>
+              <a:t>9</a:t>
+            </a:fld>
+            <a:endParaRPr lang="en-US"/>
+          </a:p>
+        </p:txBody>
+      </p:sp>
+    </p:spTree>
+    <p:extLst>
+      <p:ext uri="{BB962C8B-B14F-4D97-AF65-F5344CB8AC3E}">
+        <p14:creationId xmlns:p14="http://schemas.microsoft.com/office/powerpoint/2010/main" val="4253024838"/>
+      </p:ext>
+    </p:extLst>
+  </p:cSld>
+  <p:clrMapOvr>
+    <a:masterClrMapping/>
+  </p:clrMapOvr>
+</p:notes>
+</file>
+
+<file path=ppt/notesSlides/notesSlide5.xml><?xml version="1.0" encoding="utf-8"?>
+<p:notes xmlns:a="http://schemas.openxmlformats.org/drawingml/2006/main" xmlns:r="http://schemas.openxmlformats.org/officeDocument/2006/relationships" xmlns:p="http://schemas.openxmlformats.org/presentationml/2006/main">
+  <p:cSld>
+    <p:spTree>
+      <p:nvGrpSpPr>
+        <p:cNvPr id="1" name=""/>
+        <p:cNvGrpSpPr/>
+        <p:nvPr/>
+      </p:nvGrpSpPr>
+      <p:grpSpPr>
+        <a:xfrm>
+          <a:off x="0" y="0"/>
+          <a:ext cx="0" cy="0"/>
+          <a:chOff x="0" y="0"/>
+          <a:chExt cx="0" cy="0"/>
+        </a:xfrm>
+      </p:grpSpPr>
+      <p:sp>
+        <p:nvSpPr>
+          <p:cNvPr id="2" name="Slide Image Placeholder 1"/>
+          <p:cNvSpPr>
+            <a:spLocks noGrp="1" noRot="1" noChangeAspect="1"/>
+          </p:cNvSpPr>
+          <p:nvPr>
+            <p:ph type="sldImg"/>
+          </p:nvPr>
+        </p:nvSpPr>
+        <p:spPr/>
+      </p:sp>
+      <p:sp>
+        <p:nvSpPr>
+          <p:cNvPr id="3" name="Notes Placeholder 2"/>
+          <p:cNvSpPr>
+            <a:spLocks noGrp="1"/>
+          </p:cNvSpPr>
+          <p:nvPr>
+            <p:ph type="body" idx="1"/>
+          </p:nvPr>
+        </p:nvSpPr>
+        <p:spPr/>
+        <p:txBody>
+          <a:bodyPr/>
+          <a:lstStyle/>
+          <a:p>
+            <a:r>
+              <a:rPr lang="en-US" dirty="0"/>
+              <a:t>Cette architecture </a:t>
+            </a:r>
+            <a:r>
+              <a:rPr lang="en-US" dirty="0" err="1"/>
+              <a:t>représente</a:t>
+            </a:r>
+            <a:r>
+              <a:rPr lang="en-US" dirty="0"/>
+              <a:t> </a:t>
+            </a:r>
+            <a:r>
+              <a:rPr lang="en-US" dirty="0" err="1"/>
+              <a:t>l'évolution</a:t>
+            </a:r>
+            <a:r>
+              <a:rPr lang="en-US" dirty="0"/>
+              <a:t> du MVP vers </a:t>
+            </a:r>
+            <a:r>
+              <a:rPr lang="en-US" dirty="0" err="1"/>
+              <a:t>une</a:t>
+            </a:r>
+            <a:r>
+              <a:rPr lang="en-US" dirty="0"/>
+              <a:t> solution </a:t>
+            </a:r>
+            <a:r>
+              <a:rPr lang="en-US" dirty="0" err="1"/>
+              <a:t>d'entreprise</a:t>
+            </a:r>
+            <a:r>
+              <a:rPr lang="en-US" dirty="0"/>
+              <a:t> </a:t>
+            </a:r>
+            <a:r>
+              <a:rPr lang="en-US" dirty="0" err="1"/>
+              <a:t>intégrant</a:t>
+            </a:r>
+            <a:r>
+              <a:rPr lang="en-US" dirty="0"/>
+              <a:t> Active Directory, Microsoft Entra ID, Microsoft 365, les </a:t>
+            </a:r>
+            <a:r>
+              <a:rPr lang="en-US" dirty="0" err="1"/>
+              <a:t>systèmes</a:t>
+            </a:r>
+            <a:r>
+              <a:rPr lang="en-US" dirty="0"/>
+              <a:t> RH et les </a:t>
+            </a:r>
+            <a:r>
+              <a:rPr lang="en-US" dirty="0" err="1"/>
+              <a:t>outils</a:t>
+            </a:r>
+            <a:r>
+              <a:rPr lang="en-US" dirty="0"/>
+              <a:t> ITSM.</a:t>
+            </a:r>
+          </a:p>
+        </p:txBody>
+      </p:sp>
+      <p:sp>
+        <p:nvSpPr>
+          <p:cNvPr id="4" name="Slide Number Placeholder 3"/>
+          <p:cNvSpPr>
+            <a:spLocks noGrp="1"/>
+          </p:cNvSpPr>
+          <p:nvPr>
+            <p:ph type="sldNum" sz="quarter" idx="5"/>
+          </p:nvPr>
+        </p:nvSpPr>
+        <p:spPr/>
+        <p:txBody>
+          <a:bodyPr/>
+          <a:lstStyle/>
+          <a:p>
+            <a:fld id="{8CADF99C-AF7E-4688-B727-7B33BD5CCDA3}" type="slidenum">
+              <a:rPr lang="en-US" smtClean="0"/>
+              <a:t>11</a:t>
+            </a:fld>
+            <a:endParaRPr lang="en-US"/>
+          </a:p>
+        </p:txBody>
+      </p:sp>
+    </p:spTree>
+    <p:extLst>
+      <p:ext uri="{BB962C8B-B14F-4D97-AF65-F5344CB8AC3E}">
+        <p14:creationId xmlns:p14="http://schemas.microsoft.com/office/powerpoint/2010/main" val="2736463003"/>
+      </p:ext>
+    </p:extLst>
+  </p:cSld>
+  <p:clrMapOvr>
+    <a:masterClrMapping/>
+  </p:clrMapOvr>
+</p:notes>
 </file>
 
 <file path=ppt/slideLayouts/slideLayout1.xml><?xml version="1.0" encoding="utf-8"?>
@@ -3894,7 +5176,7 @@
           <a:lstStyle/>
           <a:p>
             <a:pPr algn="l"/>
-            <a:endParaRPr lang="en-US" sz="2000">
+            <a:endParaRPr lang="en-US" sz="2000" dirty="0">
               <a:solidFill>
                 <a:srgbClr val="FFFFFF"/>
               </a:solidFill>
@@ -4612,7 +5894,7 @@
           <p:nvPr/>
         </p:nvPicPr>
         <p:blipFill>
-          <a:blip r:embed="rId2"/>
+          <a:blip r:embed="rId3"/>
           <a:stretch>
             <a:fillRect/>
           </a:stretch>
@@ -7780,7 +9062,7 @@
           <p:nvPr/>
         </p:nvPicPr>
         <p:blipFill>
-          <a:blip r:embed="rId2"/>
+          <a:blip r:embed="rId3"/>
           <a:stretch>
             <a:fillRect/>
           </a:stretch>
@@ -11311,7 +12593,7 @@
           <p:nvPr/>
         </p:nvPicPr>
         <p:blipFill>
-          <a:blip r:embed="rId2"/>
+          <a:blip r:embed="rId3"/>
           <a:stretch>
             <a:fillRect/>
           </a:stretch>
@@ -11652,4 +12934,319 @@
     </a:ext>
   </a:extLst>
 </a:theme>
+</file>
+
+<file path=ppt/theme/theme2.xml><?xml version="1.0" encoding="utf-8"?>
+<a:theme xmlns:a="http://schemas.openxmlformats.org/drawingml/2006/main" name="Office Theme">
+  <a:themeElements>
+    <a:clrScheme name="Office">
+      <a:dk1>
+        <a:sysClr val="windowText" lastClr="000000"/>
+      </a:dk1>
+      <a:lt1>
+        <a:sysClr val="window" lastClr="FFFFFF"/>
+      </a:lt1>
+      <a:dk2>
+        <a:srgbClr val="0E2841"/>
+      </a:dk2>
+      <a:lt2>
+        <a:srgbClr val="E8E8E8"/>
+      </a:lt2>
+      <a:accent1>
+        <a:srgbClr val="156082"/>
+      </a:accent1>
+      <a:accent2>
+        <a:srgbClr val="E97132"/>
+      </a:accent2>
+      <a:accent3>
+        <a:srgbClr val="196B24"/>
+      </a:accent3>
+      <a:accent4>
+        <a:srgbClr val="0F9ED5"/>
+      </a:accent4>
+      <a:accent5>
+        <a:srgbClr val="A02B93"/>
+      </a:accent5>
+      <a:accent6>
+        <a:srgbClr val="4EA72E"/>
+      </a:accent6>
+      <a:hlink>
+        <a:srgbClr val="467886"/>
+      </a:hlink>
+      <a:folHlink>
+        <a:srgbClr val="96607D"/>
+      </a:folHlink>
+    </a:clrScheme>
+    <a:fontScheme name="Office">
+      <a:majorFont>
+        <a:latin typeface="Aptos Display" panose="02110004020202020204"/>
+        <a:ea typeface=""/>
+        <a:cs typeface=""/>
+        <a:font script="Jpan" typeface="游ゴシック Light"/>
+        <a:font script="Hang" typeface="맑은 고딕"/>
+        <a:font script="Hans" typeface="等线 Light"/>
+        <a:font script="Hant" typeface="新細明體"/>
+        <a:font script="Arab" typeface="Times New Roman"/>
+        <a:font script="Hebr" typeface="Times New Roman"/>
+        <a:font script="Thai" typeface="Angsana New"/>
+        <a:font script="Ethi" typeface="Nyala"/>
+        <a:font script="Beng" typeface="Vrinda"/>
+        <a:font script="Gujr" typeface="Shruti"/>
+        <a:font script="Khmr" typeface="MoolBoran"/>
+        <a:font script="Knda" typeface="Tunga"/>
+        <a:font script="Guru" typeface="Raavi"/>
+        <a:font script="Cans" typeface="Euphemia"/>
+        <a:font script="Cher" typeface="Plantagenet Cherokee"/>
+        <a:font script="Yiii" typeface="Microsoft Yi Baiti"/>
+        <a:font script="Tibt" typeface="Microsoft Himalaya"/>
+        <a:font script="Thaa" typeface="MV Boli"/>
+        <a:font script="Deva" typeface="Mangal"/>
+        <a:font script="Telu" typeface="Gautami"/>
+        <a:font script="Taml" typeface="Latha"/>
+        <a:font script="Syrc" typeface="Estrangelo Edessa"/>
+        <a:font script="Orya" typeface="Kalinga"/>
+        <a:font script="Mlym" typeface="Kartika"/>
+        <a:font script="Laoo" typeface="DokChampa"/>
+        <a:font script="Sinh" typeface="Iskoola Pota"/>
+        <a:font script="Mong" typeface="Mongolian Baiti"/>
+        <a:font script="Viet" typeface="Times New Roman"/>
+        <a:font script="Uigh" typeface="Microsoft Uighur"/>
+        <a:font script="Geor" typeface="Sylfaen"/>
+        <a:font script="Armn" typeface="Arial"/>
+        <a:font script="Bugi" typeface="Leelawadee UI"/>
+        <a:font script="Bopo" typeface="Microsoft JhengHei"/>
+        <a:font script="Java" typeface="Javanese Text"/>
+        <a:font script="Lisu" typeface="Segoe UI"/>
+        <a:font script="Mymr" typeface="Myanmar Text"/>
+        <a:font script="Nkoo" typeface="Ebrima"/>
+        <a:font script="Olck" typeface="Nirmala UI"/>
+        <a:font script="Osma" typeface="Ebrima"/>
+        <a:font script="Phag" typeface="Phagspa"/>
+        <a:font script="Syrn" typeface="Estrangelo Edessa"/>
+        <a:font script="Syrj" typeface="Estrangelo Edessa"/>
+        <a:font script="Syre" typeface="Estrangelo Edessa"/>
+        <a:font script="Sora" typeface="Nirmala UI"/>
+        <a:font script="Tale" typeface="Microsoft Tai Le"/>
+        <a:font script="Talu" typeface="Microsoft New Tai Lue"/>
+        <a:font script="Tfng" typeface="Ebrima"/>
+      </a:majorFont>
+      <a:minorFont>
+        <a:latin typeface="Aptos" panose="02110004020202020204"/>
+        <a:ea typeface=""/>
+        <a:cs typeface=""/>
+        <a:font script="Jpan" typeface="游ゴシック"/>
+        <a:font script="Hang" typeface="맑은 고딕"/>
+        <a:font script="Hans" typeface="等线"/>
+        <a:font script="Hant" typeface="新細明體"/>
+        <a:font script="Arab" typeface="Arial"/>
+        <a:font script="Hebr" typeface="Arial"/>
+        <a:font script="Thai" typeface="Cordia New"/>
+        <a:font script="Ethi" typeface="Nyala"/>
+        <a:font script="Beng" typeface="Vrinda"/>
+        <a:font script="Gujr" typeface="Shruti"/>
+        <a:font script="Khmr" typeface="DaunPenh"/>
+        <a:font script="Knda" typeface="Tunga"/>
+        <a:font script="Guru" typeface="Raavi"/>
+        <a:font script="Cans" typeface="Euphemia"/>
+        <a:font script="Cher" typeface="Plantagenet Cherokee"/>
+        <a:font script="Yiii" typeface="Microsoft Yi Baiti"/>
+        <a:font script="Tibt" typeface="Microsoft Himalaya"/>
+        <a:font script="Thaa" typeface="MV Boli"/>
+        <a:font script="Deva" typeface="Mangal"/>
+        <a:font script="Telu" typeface="Gautami"/>
+        <a:font script="Taml" typeface="Latha"/>
+        <a:font script="Syrc" typeface="Estrangelo Edessa"/>
+        <a:font script="Orya" typeface="Kalinga"/>
+        <a:font script="Mlym" typeface="Kartika"/>
+        <a:font script="Laoo" typeface="DokChampa"/>
+        <a:font script="Sinh" typeface="Iskoola Pota"/>
+        <a:font script="Mong" typeface="Mongolian Baiti"/>
+        <a:font script="Viet" typeface="Arial"/>
+        <a:font script="Uigh" typeface="Microsoft Uighur"/>
+        <a:font script="Geor" typeface="Sylfaen"/>
+        <a:font script="Armn" typeface="Arial"/>
+        <a:font script="Bugi" typeface="Leelawadee UI"/>
+        <a:font script="Bopo" typeface="Microsoft JhengHei"/>
+        <a:font script="Java" typeface="Javanese Text"/>
+        <a:font script="Lisu" typeface="Segoe UI"/>
+        <a:font script="Mymr" typeface="Myanmar Text"/>
+        <a:font script="Nkoo" typeface="Ebrima"/>
+        <a:font script="Olck" typeface="Nirmala UI"/>
+        <a:font script="Osma" typeface="Ebrima"/>
+        <a:font script="Phag" typeface="Phagspa"/>
+        <a:font script="Syrn" typeface="Estrangelo Edessa"/>
+        <a:font script="Syrj" typeface="Estrangelo Edessa"/>
+        <a:font script="Syre" typeface="Estrangelo Edessa"/>
+        <a:font script="Sora" typeface="Nirmala UI"/>
+        <a:font script="Tale" typeface="Microsoft Tai Le"/>
+        <a:font script="Talu" typeface="Microsoft New Tai Lue"/>
+        <a:font script="Tfng" typeface="Ebrima"/>
+      </a:minorFont>
+    </a:fontScheme>
+    <a:fmtScheme name="Office">
+      <a:fillStyleLst>
+        <a:solidFill>
+          <a:schemeClr val="phClr"/>
+        </a:solidFill>
+        <a:gradFill rotWithShape="1">
+          <a:gsLst>
+            <a:gs pos="0">
+              <a:schemeClr val="phClr">
+                <a:lumMod val="110000"/>
+                <a:satMod val="105000"/>
+                <a:tint val="67000"/>
+              </a:schemeClr>
+            </a:gs>
+            <a:gs pos="50000">
+              <a:schemeClr val="phClr">
+                <a:lumMod val="105000"/>
+                <a:satMod val="103000"/>
+                <a:tint val="73000"/>
+              </a:schemeClr>
+            </a:gs>
+            <a:gs pos="100000">
+              <a:schemeClr val="phClr">
+                <a:lumMod val="105000"/>
+                <a:satMod val="109000"/>
+                <a:tint val="81000"/>
+              </a:schemeClr>
+            </a:gs>
+          </a:gsLst>
+          <a:lin ang="5400000" scaled="0"/>
+        </a:gradFill>
+        <a:gradFill rotWithShape="1">
+          <a:gsLst>
+            <a:gs pos="0">
+              <a:schemeClr val="phClr">
+                <a:satMod val="103000"/>
+                <a:lumMod val="102000"/>
+                <a:tint val="94000"/>
+              </a:schemeClr>
+            </a:gs>
+            <a:gs pos="50000">
+              <a:schemeClr val="phClr">
+                <a:satMod val="110000"/>
+                <a:lumMod val="100000"/>
+                <a:shade val="100000"/>
+              </a:schemeClr>
+            </a:gs>
+            <a:gs pos="100000">
+              <a:schemeClr val="phClr">
+                <a:lumMod val="99000"/>
+                <a:satMod val="120000"/>
+                <a:shade val="78000"/>
+              </a:schemeClr>
+            </a:gs>
+          </a:gsLst>
+          <a:lin ang="5400000" scaled="0"/>
+        </a:gradFill>
+      </a:fillStyleLst>
+      <a:lnStyleLst>
+        <a:ln w="12700" cap="flat" cmpd="sng" algn="ctr">
+          <a:solidFill>
+            <a:schemeClr val="phClr"/>
+          </a:solidFill>
+          <a:prstDash val="solid"/>
+          <a:miter lim="800000"/>
+        </a:ln>
+        <a:ln w="19050" cap="flat" cmpd="sng" algn="ctr">
+          <a:solidFill>
+            <a:schemeClr val="phClr"/>
+          </a:solidFill>
+          <a:prstDash val="solid"/>
+          <a:miter lim="800000"/>
+        </a:ln>
+        <a:ln w="25400" cap="flat" cmpd="sng" algn="ctr">
+          <a:solidFill>
+            <a:schemeClr val="phClr"/>
+          </a:solidFill>
+          <a:prstDash val="solid"/>
+          <a:miter lim="800000"/>
+        </a:ln>
+      </a:lnStyleLst>
+      <a:effectStyleLst>
+        <a:effectStyle>
+          <a:effectLst/>
+        </a:effectStyle>
+        <a:effectStyle>
+          <a:effectLst/>
+        </a:effectStyle>
+        <a:effectStyle>
+          <a:effectLst>
+            <a:outerShdw blurRad="57150" dist="19050" dir="5400000" algn="ctr" rotWithShape="0">
+              <a:srgbClr val="000000">
+                <a:alpha val="63000"/>
+              </a:srgbClr>
+            </a:outerShdw>
+          </a:effectLst>
+        </a:effectStyle>
+      </a:effectStyleLst>
+      <a:bgFillStyleLst>
+        <a:solidFill>
+          <a:schemeClr val="phClr"/>
+        </a:solidFill>
+        <a:solidFill>
+          <a:schemeClr val="phClr">
+            <a:tint val="95000"/>
+            <a:satMod val="170000"/>
+          </a:schemeClr>
+        </a:solidFill>
+        <a:gradFill rotWithShape="1">
+          <a:gsLst>
+            <a:gs pos="0">
+              <a:schemeClr val="phClr">
+                <a:tint val="93000"/>
+                <a:satMod val="150000"/>
+                <a:shade val="98000"/>
+                <a:lumMod val="102000"/>
+              </a:schemeClr>
+            </a:gs>
+            <a:gs pos="50000">
+              <a:schemeClr val="phClr">
+                <a:tint val="98000"/>
+                <a:satMod val="130000"/>
+                <a:shade val="90000"/>
+                <a:lumMod val="103000"/>
+              </a:schemeClr>
+            </a:gs>
+            <a:gs pos="100000">
+              <a:schemeClr val="phClr">
+                <a:shade val="63000"/>
+                <a:satMod val="120000"/>
+              </a:schemeClr>
+            </a:gs>
+          </a:gsLst>
+          <a:lin ang="5400000" scaled="0"/>
+        </a:gradFill>
+      </a:bgFillStyleLst>
+    </a:fmtScheme>
+  </a:themeElements>
+  <a:objectDefaults>
+    <a:lnDef>
+      <a:spPr/>
+      <a:bodyPr/>
+      <a:lstStyle/>
+      <a:style>
+        <a:lnRef idx="2">
+          <a:schemeClr val="accent1"/>
+        </a:lnRef>
+        <a:fillRef idx="0">
+          <a:schemeClr val="accent1"/>
+        </a:fillRef>
+        <a:effectRef idx="1">
+          <a:schemeClr val="accent1"/>
+        </a:effectRef>
+        <a:fontRef idx="minor">
+          <a:schemeClr val="tx1"/>
+        </a:fontRef>
+      </a:style>
+    </a:lnDef>
+  </a:objectDefaults>
+  <a:extraClrSchemeLst/>
+  <a:extLst>
+    <a:ext uri="{05A4C25C-085E-4340-85A3-A5531E510DB2}">
+      <thm15:themeFamily xmlns:thm15="http://schemas.microsoft.com/office/thememl/2012/main" name="Office Theme" id="{2E142A2C-CD16-42D6-873A-C26D2A0506FA}" vid="{1BDDFF52-6CD6-40A5-AB3C-68EB2F1E4D0A}"/>
+    </a:ext>
+  </a:extLst>
+</a:theme>
 </file>
--- a/09-Presentation/IAM-Healthcare-Automation-Professional.pptx
+++ b/09-Presentation/IAM-Healthcare-Automation-Professional.pptx
@@ -520,200 +520,204 @@
           <a:bodyPr/>
           <a:lstStyle/>
           <a:p>
-            <a:pPr>
-              <a:buNone/>
-            </a:pPr>
-            <a:r>
-              <a:rPr lang="en-US" sz="2000" dirty="0"/>
-              <a:t>Les </a:t>
-            </a:r>
-            <a:r>
-              <a:rPr lang="en-US" sz="2000" dirty="0" err="1"/>
+            <a:r>
+              <a:rPr lang="en-US" dirty="0"/>
+              <a:t>Le </a:t>
+            </a:r>
+            <a:r>
+              <a:rPr lang="en-US" dirty="0" err="1"/>
+              <a:t>projet</a:t>
+            </a:r>
+            <a:r>
+              <a:rPr lang="en-US" dirty="0"/>
+              <a:t> </a:t>
+            </a:r>
+            <a:r>
+              <a:rPr lang="en-US" dirty="0" err="1"/>
+              <a:t>répond</a:t>
+            </a:r>
+            <a:r>
+              <a:rPr lang="en-US" dirty="0"/>
+              <a:t> à un </a:t>
+            </a:r>
+            <a:r>
+              <a:rPr lang="en-US" dirty="0" err="1"/>
+              <a:t>problème</a:t>
+            </a:r>
+            <a:r>
+              <a:rPr lang="en-US" dirty="0"/>
+              <a:t> </a:t>
+            </a:r>
+            <a:r>
+              <a:rPr lang="en-US" dirty="0" err="1"/>
+              <a:t>fréquent</a:t>
+            </a:r>
+            <a:r>
+              <a:rPr lang="en-US" dirty="0"/>
+              <a:t> dans les </a:t>
+            </a:r>
+            <a:r>
+              <a:rPr lang="en-US" dirty="0" err="1"/>
               <a:t>établissements</a:t>
             </a:r>
             <a:r>
-              <a:rPr lang="en-US" sz="2000" dirty="0"/>
-              <a:t> de santé </a:t>
-            </a:r>
-            <a:r>
-              <a:rPr lang="en-US" sz="2000" dirty="0" err="1"/>
-              <a:t>gèrent</a:t>
-            </a:r>
-            <a:r>
-              <a:rPr lang="en-US" sz="2000" dirty="0"/>
+              <a:rPr lang="en-US" dirty="0"/>
+              <a:t> de santé : la gestion du cycle de vie des </a:t>
+            </a:r>
+            <a:r>
+              <a:rPr lang="en-US" dirty="0" err="1"/>
+              <a:t>employés</a:t>
+            </a:r>
+            <a:r>
+              <a:rPr lang="en-US" dirty="0"/>
+              <a:t> et des </a:t>
+            </a:r>
+            <a:r>
+              <a:rPr lang="en-US" dirty="0" err="1"/>
+              <a:t>accès</a:t>
+            </a:r>
+            <a:r>
+              <a:rPr lang="en-US" dirty="0"/>
+              <a:t> </a:t>
+            </a:r>
+            <a:r>
+              <a:rPr lang="en-US" dirty="0" err="1"/>
+              <a:t>associés</a:t>
+            </a:r>
+            <a:r>
+              <a:rPr lang="en-US" dirty="0"/>
+              <a:t>. </a:t>
+            </a:r>
+            <a:r>
+              <a:rPr lang="en-US" dirty="0" err="1"/>
+              <a:t>L'objectif</a:t>
+            </a:r>
+            <a:r>
+              <a:rPr lang="en-US" dirty="0"/>
+              <a:t> est </a:t>
+            </a:r>
+            <a:r>
+              <a:rPr lang="en-US" dirty="0" err="1"/>
+              <a:t>d'automatiser</a:t>
+            </a:r>
+            <a:r>
+              <a:rPr lang="en-US" dirty="0"/>
+              <a:t> </a:t>
+            </a:r>
+            <a:r>
+              <a:rPr lang="en-US" dirty="0" err="1"/>
+              <a:t>l'arrivée</a:t>
+            </a:r>
+            <a:r>
+              <a:rPr lang="en-US" dirty="0"/>
+              <a:t>, les changements de poste et le </a:t>
+            </a:r>
+            <a:r>
+              <a:rPr lang="en-US" dirty="0" err="1"/>
+              <a:t>départ</a:t>
+            </a:r>
+            <a:r>
+              <a:rPr lang="en-US" dirty="0"/>
               <a:t> des </a:t>
             </a:r>
             <a:r>
-              <a:rPr lang="en-US" sz="2000" dirty="0" err="1"/>
-              <a:t>centaines</a:t>
-            </a:r>
-            <a:r>
-              <a:rPr lang="en-US" sz="2000" dirty="0"/>
+              <a:rPr lang="en-US" dirty="0" err="1"/>
+              <a:t>employés</a:t>
+            </a:r>
+            <a:r>
+              <a:rPr lang="en-US" dirty="0"/>
+              <a:t> tout </a:t>
+            </a:r>
+            <a:r>
+              <a:rPr lang="en-US" dirty="0" err="1"/>
+              <a:t>en</a:t>
+            </a:r>
+            <a:r>
+              <a:rPr lang="en-US" dirty="0"/>
               <a:t> </a:t>
             </a:r>
             <a:r>
-              <a:rPr lang="en-US" sz="2000" dirty="0" err="1"/>
-              <a:t>voire</a:t>
-            </a:r>
-            <a:r>
-              <a:rPr lang="en-US" sz="2000" dirty="0"/>
-              <a:t> des </a:t>
-            </a:r>
-            <a:r>
-              <a:rPr lang="en-US" sz="2000" dirty="0" err="1"/>
-              <a:t>milliers</a:t>
-            </a:r>
-            <a:r>
-              <a:rPr lang="en-US" sz="2000" dirty="0"/>
+              <a:rPr lang="en-US" dirty="0" err="1"/>
+              <a:t>appliquant</a:t>
+            </a:r>
+            <a:r>
+              <a:rPr lang="en-US" dirty="0"/>
+              <a:t> les principes de sécurité, de </a:t>
+            </a:r>
+            <a:r>
+              <a:rPr lang="en-US" dirty="0" err="1"/>
+              <a:t>gouvernance</a:t>
+            </a:r>
+            <a:r>
+              <a:rPr lang="en-US" dirty="0"/>
+              <a:t> et de </a:t>
+            </a:r>
+            <a:r>
+              <a:rPr lang="en-US" dirty="0" err="1"/>
+              <a:t>traçabilité</a:t>
+            </a:r>
+            <a:r>
+              <a:rPr lang="en-US" dirty="0"/>
+              <a:t>.</a:t>
+            </a:r>
+            <a:br>
+              <a:rPr lang="en-US" dirty="0"/>
+            </a:br>
+            <a:br>
+              <a:rPr lang="en-US" dirty="0"/>
+            </a:br>
+            <a:r>
+              <a:rPr lang="en-US" dirty="0"/>
+              <a:t>Pour </a:t>
+            </a:r>
+            <a:r>
+              <a:rPr lang="en-US" dirty="0" err="1"/>
+              <a:t>réaliser</a:t>
+            </a:r>
+            <a:r>
+              <a:rPr lang="en-US" dirty="0"/>
               <a:t> </a:t>
             </a:r>
             <a:r>
-              <a:rPr lang="en-US" sz="2000" dirty="0" err="1"/>
-              <a:t>d'employés</a:t>
-            </a:r>
-            <a:r>
-              <a:rPr lang="en-US" sz="2000" dirty="0"/>
-              <a:t>. La </a:t>
-            </a:r>
-            <a:r>
-              <a:rPr lang="en-US" sz="2000" dirty="0" err="1"/>
-              <a:t>création</a:t>
-            </a:r>
-            <a:r>
-              <a:rPr lang="en-US" sz="2000" dirty="0"/>
+              <a:rPr lang="en-US" dirty="0" err="1"/>
+              <a:t>cette</a:t>
+            </a:r>
+            <a:r>
+              <a:rPr lang="en-US" dirty="0"/>
               <a:t> </a:t>
             </a:r>
             <a:r>
-              <a:rPr lang="en-US" sz="2000" dirty="0" err="1"/>
-              <a:t>manuelle</a:t>
-            </a:r>
-            <a:r>
-              <a:rPr lang="en-US" sz="2000" dirty="0"/>
-              <a:t> des </a:t>
-            </a:r>
-            <a:r>
-              <a:rPr lang="en-US" sz="2000" dirty="0" err="1"/>
-              <a:t>comptes</a:t>
-            </a:r>
-            <a:r>
-              <a:rPr lang="en-US" sz="2000" dirty="0"/>
+              <a:rPr lang="en-US" dirty="0" err="1"/>
+              <a:t>preuve</a:t>
+            </a:r>
+            <a:r>
+              <a:rPr lang="en-US" dirty="0"/>
+              <a:t> de concept, </a:t>
+            </a:r>
+            <a:r>
+              <a:rPr lang="en-US" dirty="0" err="1"/>
+              <a:t>j'ai</a:t>
+            </a:r>
+            <a:r>
+              <a:rPr lang="en-US" dirty="0"/>
               <a:t> </a:t>
             </a:r>
             <a:r>
-              <a:rPr lang="en-US" sz="2000" dirty="0" err="1"/>
-              <a:t>peut</a:t>
-            </a:r>
-            <a:r>
-              <a:rPr lang="en-US" sz="2000" dirty="0"/>
-              <a:t> </a:t>
-            </a:r>
-            <a:r>
-              <a:rPr lang="en-US" sz="2000" dirty="0" err="1"/>
-              <a:t>entraîner</a:t>
-            </a:r>
-            <a:r>
-              <a:rPr lang="en-US" sz="2000" dirty="0"/>
-              <a:t> des retards, des </a:t>
-            </a:r>
-            <a:r>
-              <a:rPr lang="en-US" sz="2000" dirty="0" err="1"/>
-              <a:t>erreurs</a:t>
-            </a:r>
-            <a:r>
-              <a:rPr lang="en-US" sz="2000" dirty="0"/>
-              <a:t> </a:t>
-            </a:r>
-            <a:r>
-              <a:rPr lang="en-US" sz="2000" dirty="0" err="1"/>
-              <a:t>ou</a:t>
-            </a:r>
-            <a:r>
-              <a:rPr lang="en-US" sz="2000" dirty="0"/>
-              <a:t> des </a:t>
-            </a:r>
-            <a:r>
-              <a:rPr lang="en-US" sz="2000" dirty="0" err="1"/>
-              <a:t>risques</a:t>
-            </a:r>
-            <a:r>
-              <a:rPr lang="en-US" sz="2000" dirty="0"/>
-              <a:t> de sécurité. Notre </a:t>
-            </a:r>
-            <a:r>
-              <a:rPr lang="en-US" sz="2000" dirty="0" err="1"/>
-              <a:t>objectif</a:t>
-            </a:r>
-            <a:r>
-              <a:rPr lang="en-US" sz="2000" dirty="0"/>
-              <a:t> est </a:t>
-            </a:r>
-            <a:r>
-              <a:rPr lang="en-US" sz="2000" dirty="0" err="1"/>
-              <a:t>d'automatiser</a:t>
-            </a:r>
-            <a:r>
-              <a:rPr lang="en-US" sz="2000" dirty="0"/>
-              <a:t> </a:t>
-            </a:r>
-            <a:r>
-              <a:rPr lang="en-US" sz="2000" dirty="0" err="1"/>
-              <a:t>ces</a:t>
-            </a:r>
-            <a:r>
-              <a:rPr lang="en-US" sz="2000" dirty="0"/>
-              <a:t> processus </a:t>
-            </a:r>
-            <a:r>
-              <a:rPr lang="en-US" sz="2000" dirty="0" err="1"/>
-              <a:t>afin</a:t>
-            </a:r>
-            <a:r>
-              <a:rPr lang="en-US" sz="2000" dirty="0"/>
-              <a:t> de </a:t>
-            </a:r>
-            <a:r>
-              <a:rPr lang="en-US" sz="2000" dirty="0" err="1"/>
-              <a:t>réduire</a:t>
-            </a:r>
-            <a:r>
-              <a:rPr lang="en-US" sz="2000" dirty="0"/>
-              <a:t> les </a:t>
-            </a:r>
-            <a:r>
-              <a:rPr lang="en-US" sz="2000" dirty="0" err="1"/>
-              <a:t>risques</a:t>
-            </a:r>
-            <a:r>
-              <a:rPr lang="en-US" sz="2000" dirty="0"/>
-              <a:t> et </a:t>
-            </a:r>
-            <a:r>
-              <a:rPr lang="en-US" sz="2000" dirty="0" err="1"/>
-              <a:t>améliorer</a:t>
-            </a:r>
-            <a:r>
-              <a:rPr lang="en-US" sz="2000" dirty="0"/>
-              <a:t> </a:t>
-            </a:r>
-            <a:r>
-              <a:rPr lang="en-US" sz="2000" dirty="0" err="1"/>
-              <a:t>l'efficacité</a:t>
-            </a:r>
-            <a:r>
-              <a:rPr lang="en-US" sz="2000" dirty="0"/>
-              <a:t> </a:t>
-            </a:r>
-            <a:r>
-              <a:rPr lang="en-US" sz="2000" dirty="0" err="1"/>
-              <a:t>opérationnelle</a:t>
-            </a:r>
-            <a:r>
-              <a:rPr lang="en-US" sz="2000" dirty="0"/>
-              <a:t>.</a:t>
-            </a:r>
-          </a:p>
-          <a:p>
-            <a:endParaRPr lang="en-US" dirty="0"/>
+              <a:rPr lang="en-US" dirty="0" err="1"/>
+              <a:t>utilisé</a:t>
+            </a:r>
+            <a:r>
+              <a:rPr lang="en-US" dirty="0"/>
+              <a:t> PowerShell, Visual Studio Code, des </a:t>
+            </a:r>
+            <a:r>
+              <a:rPr lang="en-US" dirty="0" err="1"/>
+              <a:t>fichiers</a:t>
+            </a:r>
+            <a:r>
+              <a:rPr lang="en-US" dirty="0"/>
+              <a:t> CSV et un rapport HTML</a:t>
+            </a:r>
           </a:p>
         </p:txBody>
       </p:sp>
@@ -734,7 +738,7 @@
           <a:p>
             <a:fld id="{8CADF99C-AF7E-4688-B727-7B33BD5CCDA3}" type="slidenum">
               <a:rPr lang="en-US" smtClean="0"/>
-              <a:t>2</a:t>
+              <a:t>1</a:t>
             </a:fld>
             <a:endParaRPr lang="en-US"/>
           </a:p>
@@ -743,7 +747,238 @@
     </p:spTree>
     <p:extLst>
       <p:ext uri="{BB962C8B-B14F-4D97-AF65-F5344CB8AC3E}">
-        <p14:creationId xmlns:p14="http://schemas.microsoft.com/office/powerpoint/2010/main" val="3422279232"/>
+        <p14:creationId xmlns:p14="http://schemas.microsoft.com/office/powerpoint/2010/main" val="373943753"/>
+      </p:ext>
+    </p:extLst>
+  </p:cSld>
+  <p:clrMapOvr>
+    <a:masterClrMapping/>
+  </p:clrMapOvr>
+</p:notes>
+</file>
+
+<file path=ppt/notesSlides/notesSlide10.xml><?xml version="1.0" encoding="utf-8"?>
+<p:notes xmlns:a="http://schemas.openxmlformats.org/drawingml/2006/main" xmlns:r="http://schemas.openxmlformats.org/officeDocument/2006/relationships" xmlns:p="http://schemas.openxmlformats.org/presentationml/2006/main">
+  <p:cSld>
+    <p:spTree>
+      <p:nvGrpSpPr>
+        <p:cNvPr id="1" name=""/>
+        <p:cNvGrpSpPr/>
+        <p:nvPr/>
+      </p:nvGrpSpPr>
+      <p:grpSpPr>
+        <a:xfrm>
+          <a:off x="0" y="0"/>
+          <a:ext cx="0" cy="0"/>
+          <a:chOff x="0" y="0"/>
+          <a:chExt cx="0" cy="0"/>
+        </a:xfrm>
+      </p:grpSpPr>
+      <p:sp>
+        <p:nvSpPr>
+          <p:cNvPr id="2" name="Slide Image Placeholder 1"/>
+          <p:cNvSpPr>
+            <a:spLocks noGrp="1" noRot="1" noChangeAspect="1"/>
+          </p:cNvSpPr>
+          <p:nvPr>
+            <p:ph type="sldImg"/>
+          </p:nvPr>
+        </p:nvSpPr>
+        <p:spPr/>
+      </p:sp>
+      <p:sp>
+        <p:nvSpPr>
+          <p:cNvPr id="3" name="Notes Placeholder 2"/>
+          <p:cNvSpPr>
+            <a:spLocks noGrp="1"/>
+          </p:cNvSpPr>
+          <p:nvPr>
+            <p:ph type="body" idx="1"/>
+          </p:nvPr>
+        </p:nvSpPr>
+        <p:spPr/>
+        <p:txBody>
+          <a:bodyPr/>
+          <a:lstStyle/>
+          <a:p>
+            <a:r>
+              <a:rPr lang="fr-FR" dirty="0"/>
+              <a:t>Le rapport HTML permet de visualiser les résultats du traitement, les opérations réalisées ainsi que les erreurs détectées par le système. Il constitue également un élément important pour l'audit et la conformité.</a:t>
+            </a:r>
+            <a:endParaRPr lang="en-US" dirty="0"/>
+          </a:p>
+        </p:txBody>
+      </p:sp>
+      <p:sp>
+        <p:nvSpPr>
+          <p:cNvPr id="4" name="Slide Number Placeholder 3"/>
+          <p:cNvSpPr>
+            <a:spLocks noGrp="1"/>
+          </p:cNvSpPr>
+          <p:nvPr>
+            <p:ph type="sldNum" sz="quarter" idx="5"/>
+          </p:nvPr>
+        </p:nvSpPr>
+        <p:spPr/>
+        <p:txBody>
+          <a:bodyPr/>
+          <a:lstStyle/>
+          <a:p>
+            <a:fld id="{8CADF99C-AF7E-4688-B727-7B33BD5CCDA3}" type="slidenum">
+              <a:rPr lang="en-US" smtClean="0"/>
+              <a:t>10</a:t>
+            </a:fld>
+            <a:endParaRPr lang="en-US"/>
+          </a:p>
+        </p:txBody>
+      </p:sp>
+    </p:spTree>
+    <p:extLst>
+      <p:ext uri="{BB962C8B-B14F-4D97-AF65-F5344CB8AC3E}">
+        <p14:creationId xmlns:p14="http://schemas.microsoft.com/office/powerpoint/2010/main" val="1492159719"/>
+      </p:ext>
+    </p:extLst>
+  </p:cSld>
+  <p:clrMapOvr>
+    <a:masterClrMapping/>
+  </p:clrMapOvr>
+</p:notes>
+</file>
+
+<file path=ppt/notesSlides/notesSlide11.xml><?xml version="1.0" encoding="utf-8"?>
+<p:notes xmlns:a="http://schemas.openxmlformats.org/drawingml/2006/main" xmlns:r="http://schemas.openxmlformats.org/officeDocument/2006/relationships" xmlns:p="http://schemas.openxmlformats.org/presentationml/2006/main">
+  <p:cSld>
+    <p:spTree>
+      <p:nvGrpSpPr>
+        <p:cNvPr id="1" name=""/>
+        <p:cNvGrpSpPr/>
+        <p:nvPr/>
+      </p:nvGrpSpPr>
+      <p:grpSpPr>
+        <a:xfrm>
+          <a:off x="0" y="0"/>
+          <a:ext cx="0" cy="0"/>
+          <a:chOff x="0" y="0"/>
+          <a:chExt cx="0" cy="0"/>
+        </a:xfrm>
+      </p:grpSpPr>
+      <p:sp>
+        <p:nvSpPr>
+          <p:cNvPr id="2" name="Slide Image Placeholder 1"/>
+          <p:cNvSpPr>
+            <a:spLocks noGrp="1" noRot="1" noChangeAspect="1"/>
+          </p:cNvSpPr>
+          <p:nvPr>
+            <p:ph type="sldImg"/>
+          </p:nvPr>
+        </p:nvSpPr>
+        <p:spPr/>
+      </p:sp>
+      <p:sp>
+        <p:nvSpPr>
+          <p:cNvPr id="3" name="Notes Placeholder 2"/>
+          <p:cNvSpPr>
+            <a:spLocks noGrp="1"/>
+          </p:cNvSpPr>
+          <p:nvPr>
+            <p:ph type="body" idx="1"/>
+          </p:nvPr>
+        </p:nvSpPr>
+        <p:spPr/>
+        <p:txBody>
+          <a:bodyPr/>
+          <a:lstStyle/>
+          <a:p>
+            <a:r>
+              <a:rPr lang="en-US" dirty="0"/>
+              <a:t>Cette architecture </a:t>
+            </a:r>
+            <a:r>
+              <a:rPr lang="en-US" dirty="0" err="1"/>
+              <a:t>représente</a:t>
+            </a:r>
+            <a:r>
+              <a:rPr lang="en-US" dirty="0"/>
+              <a:t> </a:t>
+            </a:r>
+            <a:r>
+              <a:rPr lang="en-US" dirty="0" err="1"/>
+              <a:t>l'évolution</a:t>
+            </a:r>
+            <a:r>
+              <a:rPr lang="en-US" dirty="0"/>
+              <a:t> du MVP vers </a:t>
+            </a:r>
+            <a:r>
+              <a:rPr lang="en-US" dirty="0" err="1"/>
+              <a:t>une</a:t>
+            </a:r>
+            <a:r>
+              <a:rPr lang="en-US" dirty="0"/>
+              <a:t> solution </a:t>
+            </a:r>
+            <a:r>
+              <a:rPr lang="en-US" dirty="0" err="1"/>
+              <a:t>d'entreprise</a:t>
+            </a:r>
+            <a:r>
+              <a:rPr lang="en-US" dirty="0"/>
+              <a:t> </a:t>
+            </a:r>
+            <a:r>
+              <a:rPr lang="en-US" dirty="0" err="1"/>
+              <a:t>intégrant</a:t>
+            </a:r>
+            <a:r>
+              <a:rPr lang="en-US" dirty="0"/>
+              <a:t> Active Directory, Microsoft Entra ID, Microsoft 365, les </a:t>
+            </a:r>
+            <a:r>
+              <a:rPr lang="en-US" dirty="0" err="1"/>
+              <a:t>systèmes</a:t>
+            </a:r>
+            <a:r>
+              <a:rPr lang="en-US" dirty="0"/>
+              <a:t> RH et les </a:t>
+            </a:r>
+            <a:r>
+              <a:rPr lang="en-US" dirty="0" err="1"/>
+              <a:t>outils</a:t>
+            </a:r>
+            <a:r>
+              <a:rPr lang="en-US" dirty="0"/>
+              <a:t> ITSM.</a:t>
+            </a:r>
+          </a:p>
+        </p:txBody>
+      </p:sp>
+      <p:sp>
+        <p:nvSpPr>
+          <p:cNvPr id="4" name="Slide Number Placeholder 3"/>
+          <p:cNvSpPr>
+            <a:spLocks noGrp="1"/>
+          </p:cNvSpPr>
+          <p:nvPr>
+            <p:ph type="sldNum" sz="quarter" idx="5"/>
+          </p:nvPr>
+        </p:nvSpPr>
+        <p:spPr/>
+        <p:txBody>
+          <a:bodyPr/>
+          <a:lstStyle/>
+          <a:p>
+            <a:fld id="{8CADF99C-AF7E-4688-B727-7B33BD5CCDA3}" type="slidenum">
+              <a:rPr lang="en-US" smtClean="0"/>
+              <a:t>11</a:t>
+            </a:fld>
+            <a:endParaRPr lang="en-US"/>
+          </a:p>
+        </p:txBody>
+      </p:sp>
+    </p:spTree>
+    <p:extLst>
+      <p:ext uri="{BB962C8B-B14F-4D97-AF65-F5344CB8AC3E}">
+        <p14:creationId xmlns:p14="http://schemas.microsoft.com/office/powerpoint/2010/main" val="2736463003"/>
       </p:ext>
     </p:extLst>
   </p:cSld>
@@ -797,10 +1032,199 @@
           <a:bodyPr/>
           <a:lstStyle/>
           <a:p>
-            <a:r>
-              <a:rPr lang="fr-FR" dirty="0"/>
-              <a:t>Lorsqu'un nouvel employé rejoint l'organisation, le système valide les données RH, vérifie les règles RBAC, crée le compte utilisateur, attribue les groupes nécessaires et enregistre toutes les actions dans les journaux d'audit.</a:t>
-            </a:r>
+            <a:pPr>
+              <a:buNone/>
+            </a:pPr>
+            <a:r>
+              <a:rPr lang="en-US" sz="2000" dirty="0"/>
+              <a:t>Les </a:t>
+            </a:r>
+            <a:r>
+              <a:rPr lang="en-US" sz="2000" dirty="0" err="1"/>
+              <a:t>établissements</a:t>
+            </a:r>
+            <a:r>
+              <a:rPr lang="en-US" sz="2000" dirty="0"/>
+              <a:t> de santé </a:t>
+            </a:r>
+            <a:r>
+              <a:rPr lang="en-US" sz="2000" dirty="0" err="1"/>
+              <a:t>gèrent</a:t>
+            </a:r>
+            <a:r>
+              <a:rPr lang="en-US" sz="2000" dirty="0"/>
+              <a:t> des </a:t>
+            </a:r>
+            <a:r>
+              <a:rPr lang="en-US" sz="2000" dirty="0" err="1"/>
+              <a:t>centaines</a:t>
+            </a:r>
+            <a:r>
+              <a:rPr lang="en-US" sz="2000" dirty="0"/>
+              <a:t> </a:t>
+            </a:r>
+            <a:r>
+              <a:rPr lang="en-US" sz="2000" dirty="0" err="1"/>
+              <a:t>voire</a:t>
+            </a:r>
+            <a:r>
+              <a:rPr lang="en-US" sz="2000" dirty="0"/>
+              <a:t> des </a:t>
+            </a:r>
+            <a:r>
+              <a:rPr lang="en-US" sz="2000" dirty="0" err="1"/>
+              <a:t>milliers</a:t>
+            </a:r>
+            <a:r>
+              <a:rPr lang="en-US" sz="2000" dirty="0"/>
+              <a:t> </a:t>
+            </a:r>
+            <a:r>
+              <a:rPr lang="en-US" sz="2000" dirty="0" err="1"/>
+              <a:t>d'employés</a:t>
+            </a:r>
+            <a:r>
+              <a:rPr lang="en-US" sz="2000" dirty="0"/>
+              <a:t>. La </a:t>
+            </a:r>
+            <a:r>
+              <a:rPr lang="en-US" sz="2000" dirty="0" err="1"/>
+              <a:t>création</a:t>
+            </a:r>
+            <a:r>
+              <a:rPr lang="en-US" sz="2000" dirty="0"/>
+              <a:t> </a:t>
+            </a:r>
+            <a:r>
+              <a:rPr lang="en-US" sz="2000" dirty="0" err="1"/>
+              <a:t>manuelle</a:t>
+            </a:r>
+            <a:r>
+              <a:rPr lang="en-US" sz="2000" dirty="0"/>
+              <a:t> des </a:t>
+            </a:r>
+            <a:r>
+              <a:rPr lang="en-US" sz="2000" dirty="0" err="1"/>
+              <a:t>comptes</a:t>
+            </a:r>
+            <a:r>
+              <a:rPr lang="en-US" sz="2000" dirty="0"/>
+              <a:t> </a:t>
+            </a:r>
+            <a:r>
+              <a:rPr lang="en-US" sz="2000" dirty="0" err="1"/>
+              <a:t>peut</a:t>
+            </a:r>
+            <a:r>
+              <a:rPr lang="en-US" sz="2000" dirty="0"/>
+              <a:t> </a:t>
+            </a:r>
+            <a:r>
+              <a:rPr lang="en-US" sz="2000" dirty="0" err="1"/>
+              <a:t>entraîner</a:t>
+            </a:r>
+            <a:r>
+              <a:rPr lang="en-US" sz="2000" dirty="0"/>
+              <a:t> des retards, des </a:t>
+            </a:r>
+            <a:r>
+              <a:rPr lang="en-US" sz="2000" dirty="0" err="1"/>
+              <a:t>erreurs</a:t>
+            </a:r>
+            <a:r>
+              <a:rPr lang="en-US" sz="2000" dirty="0"/>
+              <a:t> </a:t>
+            </a:r>
+            <a:r>
+              <a:rPr lang="en-US" sz="2000" dirty="0" err="1"/>
+              <a:t>ou</a:t>
+            </a:r>
+            <a:r>
+              <a:rPr lang="en-US" sz="2000" dirty="0"/>
+              <a:t> des </a:t>
+            </a:r>
+            <a:r>
+              <a:rPr lang="en-US" sz="2000" dirty="0" err="1"/>
+              <a:t>risques</a:t>
+            </a:r>
+            <a:r>
+              <a:rPr lang="en-US" sz="2000" dirty="0"/>
+              <a:t> de sécurité. Notre </a:t>
+            </a:r>
+            <a:r>
+              <a:rPr lang="en-US" sz="2000" dirty="0" err="1"/>
+              <a:t>objectif</a:t>
+            </a:r>
+            <a:r>
+              <a:rPr lang="en-US" sz="2000" dirty="0"/>
+              <a:t> est </a:t>
+            </a:r>
+            <a:r>
+              <a:rPr lang="en-US" sz="2000" dirty="0" err="1"/>
+              <a:t>d'automatiser</a:t>
+            </a:r>
+            <a:r>
+              <a:rPr lang="en-US" sz="2000" dirty="0"/>
+              <a:t> </a:t>
+            </a:r>
+            <a:r>
+              <a:rPr lang="en-US" sz="2000" dirty="0" err="1"/>
+              <a:t>ces</a:t>
+            </a:r>
+            <a:r>
+              <a:rPr lang="en-US" sz="2000" dirty="0"/>
+              <a:t> processus </a:t>
+            </a:r>
+            <a:r>
+              <a:rPr lang="en-US" sz="2000" dirty="0" err="1"/>
+              <a:t>afin</a:t>
+            </a:r>
+            <a:r>
+              <a:rPr lang="en-US" sz="2000" dirty="0"/>
+              <a:t> de </a:t>
+            </a:r>
+            <a:r>
+              <a:rPr lang="en-US" sz="2000" dirty="0" err="1"/>
+              <a:t>réduire</a:t>
+            </a:r>
+            <a:r>
+              <a:rPr lang="en-US" sz="2000" dirty="0"/>
+              <a:t> les </a:t>
+            </a:r>
+            <a:r>
+              <a:rPr lang="en-US" sz="2000" dirty="0" err="1"/>
+              <a:t>risques</a:t>
+            </a:r>
+            <a:r>
+              <a:rPr lang="en-US" sz="2000" dirty="0"/>
+              <a:t> et </a:t>
+            </a:r>
+            <a:r>
+              <a:rPr lang="en-US" sz="2000" dirty="0" err="1"/>
+              <a:t>améliorer</a:t>
+            </a:r>
+            <a:r>
+              <a:rPr lang="en-US" sz="2000" dirty="0"/>
+              <a:t> </a:t>
+            </a:r>
+            <a:r>
+              <a:rPr lang="en-US" sz="2000" dirty="0" err="1"/>
+              <a:t>l'efficacité</a:t>
+            </a:r>
+            <a:r>
+              <a:rPr lang="en-US" sz="2000" dirty="0"/>
+              <a:t> </a:t>
+            </a:r>
+            <a:r>
+              <a:rPr lang="en-US" sz="2000" dirty="0" err="1"/>
+              <a:t>opérationnelle</a:t>
+            </a:r>
+            <a:r>
+              <a:rPr lang="en-US" sz="2000" dirty="0"/>
+              <a:t>.</a:t>
+            </a:r>
+          </a:p>
+          <a:p>
             <a:endParaRPr lang="en-US" dirty="0"/>
           </a:p>
         </p:txBody>
@@ -822,7 +1246,7 @@
           <a:p>
             <a:fld id="{8CADF99C-AF7E-4688-B727-7B33BD5CCDA3}" type="slidenum">
               <a:rPr lang="en-US" smtClean="0"/>
-              <a:t>5</a:t>
+              <a:t>2</a:t>
             </a:fld>
             <a:endParaRPr lang="en-US"/>
           </a:p>
@@ -831,7 +1255,7 @@
     </p:spTree>
     <p:extLst>
       <p:ext uri="{BB962C8B-B14F-4D97-AF65-F5344CB8AC3E}">
-        <p14:creationId xmlns:p14="http://schemas.microsoft.com/office/powerpoint/2010/main" val="4213608230"/>
+        <p14:creationId xmlns:p14="http://schemas.microsoft.com/office/powerpoint/2010/main" val="3422279232"/>
       </p:ext>
     </p:extLst>
   </p:cSld>
@@ -886,129 +1310,52 @@
           <a:lstStyle/>
           <a:p>
             <a:r>
-              <a:rPr lang="en-US" dirty="0"/>
-              <a:t>Le </a:t>
-            </a:r>
-            <a:r>
-              <a:rPr lang="en-US" dirty="0" err="1"/>
-              <a:t>système</a:t>
-            </a:r>
-            <a:r>
-              <a:rPr lang="en-US" dirty="0"/>
-              <a:t> applique le </a:t>
-            </a:r>
-            <a:r>
-              <a:rPr lang="en-US" dirty="0" err="1"/>
-              <a:t>principe</a:t>
-            </a:r>
-            <a:r>
-              <a:rPr lang="en-US" dirty="0"/>
-              <a:t> du </a:t>
-            </a:r>
-            <a:r>
-              <a:rPr lang="en-US" dirty="0" err="1"/>
-              <a:t>moindre</a:t>
-            </a:r>
-            <a:r>
-              <a:rPr lang="en-US" dirty="0"/>
-              <a:t> </a:t>
-            </a:r>
-            <a:r>
-              <a:rPr lang="en-US" dirty="0" err="1"/>
-              <a:t>privilège</a:t>
-            </a:r>
-            <a:r>
-              <a:rPr lang="en-US" dirty="0"/>
-              <a:t>. Les </a:t>
-            </a:r>
-            <a:r>
-              <a:rPr lang="en-US" dirty="0" err="1"/>
-              <a:t>accès</a:t>
-            </a:r>
-            <a:r>
-              <a:rPr lang="en-US" dirty="0"/>
-              <a:t> </a:t>
-            </a:r>
-            <a:r>
-              <a:rPr lang="en-US" dirty="0" err="1"/>
-              <a:t>sont</a:t>
-            </a:r>
-            <a:r>
-              <a:rPr lang="en-US" dirty="0"/>
-              <a:t> </a:t>
-            </a:r>
-            <a:r>
-              <a:rPr lang="en-US" dirty="0" err="1"/>
-              <a:t>attribués</a:t>
-            </a:r>
-            <a:r>
-              <a:rPr lang="en-US" dirty="0"/>
-              <a:t> </a:t>
-            </a:r>
-            <a:r>
-              <a:rPr lang="en-US" dirty="0" err="1"/>
-              <a:t>automatiquement</a:t>
-            </a:r>
-            <a:r>
-              <a:rPr lang="en-US" dirty="0"/>
-              <a:t> </a:t>
-            </a:r>
-            <a:r>
-              <a:rPr lang="en-US" dirty="0" err="1"/>
-              <a:t>selon</a:t>
-            </a:r>
-            <a:r>
-              <a:rPr lang="en-US" dirty="0"/>
-              <a:t> le </a:t>
-            </a:r>
-            <a:r>
-              <a:rPr lang="en-US" dirty="0" err="1"/>
-              <a:t>rôle</a:t>
-            </a:r>
-            <a:r>
-              <a:rPr lang="en-US" dirty="0"/>
-              <a:t> de </a:t>
-            </a:r>
-            <a:r>
-              <a:rPr lang="en-US" dirty="0" err="1"/>
-              <a:t>l'employé</a:t>
-            </a:r>
-            <a:r>
-              <a:rPr lang="en-US" dirty="0"/>
-              <a:t> </a:t>
-            </a:r>
-            <a:r>
-              <a:rPr lang="en-US" dirty="0" err="1"/>
-              <a:t>afin</a:t>
-            </a:r>
-            <a:r>
-              <a:rPr lang="en-US" dirty="0"/>
-              <a:t> de limiter les </a:t>
-            </a:r>
-            <a:r>
-              <a:rPr lang="en-US" dirty="0" err="1"/>
-              <a:t>accès</a:t>
-            </a:r>
-            <a:r>
-              <a:rPr lang="en-US" dirty="0"/>
-              <a:t> </a:t>
-            </a:r>
-            <a:r>
-              <a:rPr lang="en-US" dirty="0" err="1"/>
-              <a:t>excessifs</a:t>
-            </a:r>
-            <a:r>
-              <a:rPr lang="en-US" dirty="0"/>
-              <a:t> et </a:t>
-            </a:r>
-            <a:r>
-              <a:rPr lang="en-US" dirty="0" err="1"/>
-              <a:t>renforcer</a:t>
-            </a:r>
-            <a:r>
-              <a:rPr lang="en-US" dirty="0"/>
-              <a:t> la sécurité.</a:t>
-            </a:r>
+              <a:rPr lang="fr-CA" dirty="0"/>
+              <a:t>Processus de fonctionnement de la solution</a:t>
+            </a:r>
+            <a:br>
+              <a:rPr lang="fr-CA" dirty="0"/>
+            </a:br>
+            <a:r>
+              <a:rPr lang="fr-CA" dirty="0"/>
+              <a:t>RH: saisie des données</a:t>
+            </a:r>
+            <a:br>
+              <a:rPr lang="fr-CA" dirty="0"/>
+            </a:br>
+            <a:r>
+              <a:rPr lang="fr-CA" dirty="0"/>
+              <a:t>Validation: les contrôles de gouvernances </a:t>
+            </a:r>
+            <a:br>
+              <a:rPr lang="fr-CA" dirty="0"/>
+            </a:br>
+            <a:r>
+              <a:rPr lang="fr-CA" dirty="0"/>
+              <a:t>IAM Engine: moteur der gestion des Accès et des identité </a:t>
+            </a:r>
+            <a:br>
+              <a:rPr lang="fr-CA" dirty="0"/>
+            </a:br>
+            <a:r>
+              <a:rPr lang="fr-CA" dirty="0"/>
+              <a:t>RBAC: contrôles d'accès basé sur les rôles</a:t>
+            </a:r>
+            <a:br>
+              <a:rPr lang="fr-CA" dirty="0"/>
+            </a:br>
+            <a:r>
+              <a:rPr lang="fr-CA" dirty="0"/>
+              <a:t>Journal des audits</a:t>
+            </a:r>
+            <a:br>
+              <a:rPr lang="fr-CA" dirty="0"/>
+            </a:br>
+            <a:r>
+              <a:rPr lang="fr-CA" dirty="0"/>
+              <a:t>Rapport de visualisation des actions entreprises</a:t>
+            </a:r>
+            <a:endParaRPr lang="en-US" dirty="0"/>
           </a:p>
         </p:txBody>
       </p:sp>
@@ -1029,7 +1376,7 @@
           <a:p>
             <a:fld id="{8CADF99C-AF7E-4688-B727-7B33BD5CCDA3}" type="slidenum">
               <a:rPr lang="en-US" smtClean="0"/>
-              <a:t>8</a:t>
+              <a:t>3</a:t>
             </a:fld>
             <a:endParaRPr lang="en-US"/>
           </a:p>
@@ -1038,7 +1385,7 @@
     </p:spTree>
     <p:extLst>
       <p:ext uri="{BB962C8B-B14F-4D97-AF65-F5344CB8AC3E}">
-        <p14:creationId xmlns:p14="http://schemas.microsoft.com/office/powerpoint/2010/main" val="2516540216"/>
+        <p14:creationId xmlns:p14="http://schemas.microsoft.com/office/powerpoint/2010/main" val="2013323305"/>
       </p:ext>
     </p:extLst>
   </p:cSld>
@@ -1093,137 +1440,49 @@
           <a:lstStyle/>
           <a:p>
             <a:r>
-              <a:rPr lang="en-US" dirty="0"/>
-              <a:t>Avant toute </a:t>
-            </a:r>
-            <a:r>
-              <a:rPr lang="en-US" dirty="0" err="1"/>
-              <a:t>création</a:t>
-            </a:r>
-            <a:r>
-              <a:rPr lang="en-US" dirty="0"/>
-              <a:t> de compte, le </a:t>
-            </a:r>
-            <a:r>
-              <a:rPr lang="en-US" dirty="0" err="1"/>
-              <a:t>système</a:t>
-            </a:r>
-            <a:r>
-              <a:rPr lang="en-US" dirty="0"/>
-              <a:t> </a:t>
-            </a:r>
-            <a:r>
-              <a:rPr lang="en-US" dirty="0" err="1"/>
-              <a:t>vérifie</a:t>
-            </a:r>
-            <a:r>
-              <a:rPr lang="en-US" dirty="0"/>
-              <a:t> </a:t>
-            </a:r>
-            <a:r>
-              <a:rPr lang="en-US" dirty="0" err="1"/>
-              <a:t>que</a:t>
-            </a:r>
-            <a:r>
-              <a:rPr lang="en-US" dirty="0"/>
-              <a:t> les </a:t>
-            </a:r>
-            <a:r>
-              <a:rPr lang="en-US" dirty="0" err="1"/>
-              <a:t>informations</a:t>
-            </a:r>
-            <a:r>
-              <a:rPr lang="en-US" dirty="0"/>
-              <a:t> </a:t>
-            </a:r>
-            <a:r>
-              <a:rPr lang="en-US" dirty="0" err="1"/>
-              <a:t>essentielles</a:t>
-            </a:r>
-            <a:r>
-              <a:rPr lang="en-US" dirty="0"/>
-              <a:t> </a:t>
-            </a:r>
-            <a:r>
-              <a:rPr lang="en-US" dirty="0" err="1"/>
-              <a:t>sont</a:t>
-            </a:r>
-            <a:r>
-              <a:rPr lang="en-US" dirty="0"/>
-              <a:t> </a:t>
-            </a:r>
-            <a:r>
-              <a:rPr lang="en-US" dirty="0" err="1"/>
-              <a:t>présentes</a:t>
-            </a:r>
-            <a:r>
-              <a:rPr lang="en-US" dirty="0"/>
-              <a:t>. Si un </a:t>
-            </a:r>
-            <a:r>
-              <a:rPr lang="en-US" dirty="0" err="1"/>
-              <a:t>gestionnaire</a:t>
-            </a:r>
-            <a:r>
-              <a:rPr lang="en-US" dirty="0"/>
-              <a:t>, un département </a:t>
-            </a:r>
-            <a:r>
-              <a:rPr lang="en-US" dirty="0" err="1"/>
-              <a:t>ou</a:t>
-            </a:r>
-            <a:r>
-              <a:rPr lang="en-US" dirty="0"/>
-              <a:t> un </a:t>
-            </a:r>
-            <a:r>
-              <a:rPr lang="en-US" dirty="0" err="1"/>
-              <a:t>rôle</a:t>
-            </a:r>
-            <a:r>
-              <a:rPr lang="en-US" dirty="0"/>
-              <a:t> est </a:t>
-            </a:r>
-            <a:r>
-              <a:rPr lang="en-US" dirty="0" err="1"/>
-              <a:t>manquant</a:t>
-            </a:r>
-            <a:r>
-              <a:rPr lang="en-US" dirty="0"/>
-              <a:t>, le processus est </a:t>
-            </a:r>
-            <a:r>
-              <a:rPr lang="en-US" dirty="0" err="1"/>
-              <a:t>bloqué</a:t>
-            </a:r>
-            <a:r>
-              <a:rPr lang="en-US" dirty="0"/>
-              <a:t> </a:t>
-            </a:r>
-            <a:r>
-              <a:rPr lang="en-US" dirty="0" err="1"/>
-              <a:t>afin</a:t>
-            </a:r>
-            <a:r>
-              <a:rPr lang="en-US" dirty="0"/>
-              <a:t> </a:t>
-            </a:r>
-            <a:r>
-              <a:rPr lang="en-US" dirty="0" err="1"/>
-              <a:t>d'éviter</a:t>
-            </a:r>
-            <a:r>
-              <a:rPr lang="en-US" dirty="0"/>
-              <a:t> des </a:t>
-            </a:r>
-            <a:r>
-              <a:rPr lang="en-US" dirty="0" err="1"/>
-              <a:t>erreurs</a:t>
-            </a:r>
-            <a:r>
-              <a:rPr lang="en-US" dirty="0"/>
-              <a:t> de sécurité.</a:t>
-            </a:r>
+              <a:rPr lang="fr-CA" dirty="0"/>
+              <a:t>Employees.csv: référentiel des données saisies par les RH</a:t>
+            </a:r>
+            <a:br>
+              <a:rPr lang="fr-CA" dirty="0"/>
+            </a:br>
+            <a:r>
+              <a:rPr lang="fr-CA" dirty="0"/>
+              <a:t>Le moteur IAM: validation des données par les contrôles de gouvernances ( RBAC + données exactes)</a:t>
+            </a:r>
+            <a:br>
+              <a:rPr lang="fr-CA" dirty="0"/>
+            </a:br>
+            <a:r>
+              <a:rPr lang="fr-CA" dirty="0"/>
+              <a:t>RoleMappings.csv: le référentiel de rôles</a:t>
+            </a:r>
+            <a:br>
+              <a:rPr lang="fr-CA" dirty="0"/>
+            </a:br>
+            <a:r>
+              <a:rPr lang="fr-CA" dirty="0"/>
+              <a:t>simulated_users.csv:  le référentiel des utilisateurs</a:t>
+            </a:r>
+            <a:br>
+              <a:rPr lang="fr-CA" dirty="0"/>
+            </a:br>
+            <a:r>
+              <a:rPr lang="fr-CA" dirty="0"/>
+              <a:t>audit_log.csv: référentiel de </a:t>
+            </a:r>
+            <a:r>
+              <a:rPr lang="fr-FR" dirty="0"/>
+              <a:t>toutes les actions dans les journaux d'audit</a:t>
+            </a:r>
+            <a:br>
+              <a:rPr lang="fr-FR" dirty="0"/>
+            </a:br>
+            <a:r>
+              <a:rPr lang="fr-FR" dirty="0"/>
+              <a:t>HTML report: rapport HTML pour visualiser les résultats du traitement, les opérations réalisées ainsi que les erreurs détectées par le système</a:t>
+            </a:r>
+            <a:endParaRPr lang="en-US" dirty="0"/>
           </a:p>
         </p:txBody>
       </p:sp>
@@ -1244,7 +1503,7 @@
           <a:p>
             <a:fld id="{8CADF99C-AF7E-4688-B727-7B33BD5CCDA3}" type="slidenum">
               <a:rPr lang="en-US" smtClean="0"/>
-              <a:t>9</a:t>
+              <a:t>4</a:t>
             </a:fld>
             <a:endParaRPr lang="en-US"/>
           </a:p>
@@ -1253,7 +1512,7 @@
     </p:spTree>
     <p:extLst>
       <p:ext uri="{BB962C8B-B14F-4D97-AF65-F5344CB8AC3E}">
-        <p14:creationId xmlns:p14="http://schemas.microsoft.com/office/powerpoint/2010/main" val="4253024838"/>
+        <p14:creationId xmlns:p14="http://schemas.microsoft.com/office/powerpoint/2010/main" val="2579354217"/>
       </p:ext>
     </p:extLst>
   </p:cSld>
@@ -1308,65 +1567,20 @@
           <a:lstStyle/>
           <a:p>
             <a:r>
-              <a:rPr lang="en-US" dirty="0"/>
-              <a:t>Cette architecture </a:t>
-            </a:r>
-            <a:r>
-              <a:rPr lang="en-US" dirty="0" err="1"/>
-              <a:t>représente</a:t>
-            </a:r>
-            <a:r>
-              <a:rPr lang="en-US" dirty="0"/>
-              <a:t> </a:t>
-            </a:r>
-            <a:r>
-              <a:rPr lang="en-US" dirty="0" err="1"/>
-              <a:t>l'évolution</a:t>
-            </a:r>
-            <a:r>
-              <a:rPr lang="en-US" dirty="0"/>
-              <a:t> du MVP vers </a:t>
-            </a:r>
-            <a:r>
-              <a:rPr lang="en-US" dirty="0" err="1"/>
-              <a:t>une</a:t>
-            </a:r>
-            <a:r>
-              <a:rPr lang="en-US" dirty="0"/>
-              <a:t> solution </a:t>
-            </a:r>
-            <a:r>
-              <a:rPr lang="en-US" dirty="0" err="1"/>
-              <a:t>d'entreprise</a:t>
-            </a:r>
-            <a:r>
-              <a:rPr lang="en-US" dirty="0"/>
-              <a:t> </a:t>
-            </a:r>
-            <a:r>
-              <a:rPr lang="en-US" dirty="0" err="1"/>
-              <a:t>intégrant</a:t>
-            </a:r>
-            <a:r>
-              <a:rPr lang="en-US" dirty="0"/>
-              <a:t> Active Directory, Microsoft Entra ID, Microsoft 365, les </a:t>
-            </a:r>
-            <a:r>
-              <a:rPr lang="en-US" dirty="0" err="1"/>
-              <a:t>systèmes</a:t>
-            </a:r>
-            <a:r>
-              <a:rPr lang="en-US" dirty="0"/>
-              <a:t> RH et les </a:t>
-            </a:r>
-            <a:r>
-              <a:rPr lang="en-US" dirty="0" err="1"/>
-              <a:t>outils</a:t>
-            </a:r>
-            <a:r>
-              <a:rPr lang="en-US" dirty="0"/>
-              <a:t> ITSM.</a:t>
-            </a:r>
+              <a:rPr lang="fr-FR" dirty="0"/>
+              <a:t>Lorsqu'un nouvel employé rejoint l'organisation, le système valide les données RH, vérifie les règles RBAC, crée le compte utilisateur, attribue les groupes nécessaires et enregistre toutes les actions dans les journaux d'audit.</a:t>
+            </a:r>
+            <a:br>
+              <a:rPr lang="fr-FR" dirty="0"/>
+            </a:br>
+            <a:br>
+              <a:rPr lang="fr-FR" dirty="0"/>
+            </a:br>
+            <a:r>
+              <a:rPr lang="fr-FR" dirty="0"/>
+              <a:t>Le système commence par valider les informations fournies par les RH.</a:t>
+            </a:r>
+            <a:endParaRPr lang="en-US" dirty="0"/>
           </a:p>
         </p:txBody>
       </p:sp>
@@ -1387,7 +1601,7 @@
           <a:p>
             <a:fld id="{8CADF99C-AF7E-4688-B727-7B33BD5CCDA3}" type="slidenum">
               <a:rPr lang="en-US" smtClean="0"/>
-              <a:t>11</a:t>
+              <a:t>5</a:t>
             </a:fld>
             <a:endParaRPr lang="en-US"/>
           </a:p>
@@ -1396,7 +1610,677 @@
     </p:spTree>
     <p:extLst>
       <p:ext uri="{BB962C8B-B14F-4D97-AF65-F5344CB8AC3E}">
-        <p14:creationId xmlns:p14="http://schemas.microsoft.com/office/powerpoint/2010/main" val="2736463003"/>
+        <p14:creationId xmlns:p14="http://schemas.microsoft.com/office/powerpoint/2010/main" val="4213608230"/>
+      </p:ext>
+    </p:extLst>
+  </p:cSld>
+  <p:clrMapOvr>
+    <a:masterClrMapping/>
+  </p:clrMapOvr>
+</p:notes>
+</file>
+
+<file path=ppt/notesSlides/notesSlide6.xml><?xml version="1.0" encoding="utf-8"?>
+<p:notes xmlns:a="http://schemas.openxmlformats.org/drawingml/2006/main" xmlns:r="http://schemas.openxmlformats.org/officeDocument/2006/relationships" xmlns:p="http://schemas.openxmlformats.org/presentationml/2006/main">
+  <p:cSld>
+    <p:spTree>
+      <p:nvGrpSpPr>
+        <p:cNvPr id="1" name=""/>
+        <p:cNvGrpSpPr/>
+        <p:nvPr/>
+      </p:nvGrpSpPr>
+      <p:grpSpPr>
+        <a:xfrm>
+          <a:off x="0" y="0"/>
+          <a:ext cx="0" cy="0"/>
+          <a:chOff x="0" y="0"/>
+          <a:chExt cx="0" cy="0"/>
+        </a:xfrm>
+      </p:grpSpPr>
+      <p:sp>
+        <p:nvSpPr>
+          <p:cNvPr id="2" name="Slide Image Placeholder 1"/>
+          <p:cNvSpPr>
+            <a:spLocks noGrp="1" noRot="1" noChangeAspect="1"/>
+          </p:cNvSpPr>
+          <p:nvPr>
+            <p:ph type="sldImg"/>
+          </p:nvPr>
+        </p:nvSpPr>
+        <p:spPr/>
+      </p:sp>
+      <p:sp>
+        <p:nvSpPr>
+          <p:cNvPr id="3" name="Notes Placeholder 2"/>
+          <p:cNvSpPr>
+            <a:spLocks noGrp="1"/>
+          </p:cNvSpPr>
+          <p:nvPr>
+            <p:ph type="body" idx="1"/>
+          </p:nvPr>
+        </p:nvSpPr>
+        <p:spPr/>
+        <p:txBody>
+          <a:bodyPr/>
+          <a:lstStyle/>
+          <a:p>
+            <a:pPr marL="0" marR="0" lvl="0" indent="0" algn="l" defTabSz="914400" rtl="0" eaLnBrk="1" fontAlgn="auto" latinLnBrk="0" hangingPunct="1">
+              <a:lnSpc>
+                <a:spcPct val="100000"/>
+              </a:lnSpc>
+              <a:spcBef>
+                <a:spcPts val="0"/>
+              </a:spcBef>
+              <a:spcAft>
+                <a:spcPts val="0"/>
+              </a:spcAft>
+              <a:buClrTx/>
+              <a:buSzTx/>
+              <a:buFontTx/>
+              <a:buNone/>
+              <a:tabLst/>
+              <a:defRPr/>
+            </a:pPr>
+            <a:r>
+              <a:rPr lang="fr-FR" dirty="0"/>
+              <a:t>Lorsqu’une mobilité interne se fait dans l'organisation, le système valide les données RH, vérifie les règles RBAC, fait une mise à jour du rôle, attribue les groupes nécessaires et enregistre toutes les actions dans les journaux d'audit.</a:t>
+            </a:r>
+            <a:br>
+              <a:rPr lang="fr-FR" dirty="0"/>
+            </a:br>
+            <a:br>
+              <a:rPr lang="fr-FR" dirty="0"/>
+            </a:br>
+            <a:r>
+              <a:rPr lang="fr-FR" dirty="0"/>
+              <a:t>Le système commence par valider les informations fournies par les RH.</a:t>
+            </a:r>
+            <a:endParaRPr lang="en-US" dirty="0"/>
+          </a:p>
+          <a:p>
+            <a:endParaRPr lang="en-US" dirty="0"/>
+          </a:p>
+        </p:txBody>
+      </p:sp>
+      <p:sp>
+        <p:nvSpPr>
+          <p:cNvPr id="4" name="Slide Number Placeholder 3"/>
+          <p:cNvSpPr>
+            <a:spLocks noGrp="1"/>
+          </p:cNvSpPr>
+          <p:nvPr>
+            <p:ph type="sldNum" sz="quarter" idx="5"/>
+          </p:nvPr>
+        </p:nvSpPr>
+        <p:spPr/>
+        <p:txBody>
+          <a:bodyPr/>
+          <a:lstStyle/>
+          <a:p>
+            <a:fld id="{8CADF99C-AF7E-4688-B727-7B33BD5CCDA3}" type="slidenum">
+              <a:rPr lang="en-US" smtClean="0"/>
+              <a:t>6</a:t>
+            </a:fld>
+            <a:endParaRPr lang="en-US"/>
+          </a:p>
+        </p:txBody>
+      </p:sp>
+    </p:spTree>
+    <p:extLst>
+      <p:ext uri="{BB962C8B-B14F-4D97-AF65-F5344CB8AC3E}">
+        <p14:creationId xmlns:p14="http://schemas.microsoft.com/office/powerpoint/2010/main" val="4149853311"/>
+      </p:ext>
+    </p:extLst>
+  </p:cSld>
+  <p:clrMapOvr>
+    <a:masterClrMapping/>
+  </p:clrMapOvr>
+</p:notes>
+</file>
+
+<file path=ppt/notesSlides/notesSlide7.xml><?xml version="1.0" encoding="utf-8"?>
+<p:notes xmlns:a="http://schemas.openxmlformats.org/drawingml/2006/main" xmlns:r="http://schemas.openxmlformats.org/officeDocument/2006/relationships" xmlns:p="http://schemas.openxmlformats.org/presentationml/2006/main">
+  <p:cSld>
+    <p:spTree>
+      <p:nvGrpSpPr>
+        <p:cNvPr id="1" name=""/>
+        <p:cNvGrpSpPr/>
+        <p:nvPr/>
+      </p:nvGrpSpPr>
+      <p:grpSpPr>
+        <a:xfrm>
+          <a:off x="0" y="0"/>
+          <a:ext cx="0" cy="0"/>
+          <a:chOff x="0" y="0"/>
+          <a:chExt cx="0" cy="0"/>
+        </a:xfrm>
+      </p:grpSpPr>
+      <p:sp>
+        <p:nvSpPr>
+          <p:cNvPr id="2" name="Slide Image Placeholder 1"/>
+          <p:cNvSpPr>
+            <a:spLocks noGrp="1" noRot="1" noChangeAspect="1"/>
+          </p:cNvSpPr>
+          <p:nvPr>
+            <p:ph type="sldImg"/>
+          </p:nvPr>
+        </p:nvSpPr>
+        <p:spPr/>
+      </p:sp>
+      <p:sp>
+        <p:nvSpPr>
+          <p:cNvPr id="3" name="Notes Placeholder 2"/>
+          <p:cNvSpPr>
+            <a:spLocks noGrp="1"/>
+          </p:cNvSpPr>
+          <p:nvPr>
+            <p:ph type="body" idx="1"/>
+          </p:nvPr>
+        </p:nvSpPr>
+        <p:spPr/>
+        <p:txBody>
+          <a:bodyPr/>
+          <a:lstStyle/>
+          <a:p>
+            <a:pPr marL="0" marR="0" lvl="0" indent="0" algn="l" defTabSz="914400" rtl="0" eaLnBrk="1" fontAlgn="auto" latinLnBrk="0" hangingPunct="1">
+              <a:lnSpc>
+                <a:spcPct val="100000"/>
+              </a:lnSpc>
+              <a:spcBef>
+                <a:spcPts val="0"/>
+              </a:spcBef>
+              <a:spcAft>
+                <a:spcPts val="0"/>
+              </a:spcAft>
+              <a:buClrTx/>
+              <a:buSzTx/>
+              <a:buFontTx/>
+              <a:buNone/>
+              <a:tabLst/>
+              <a:defRPr/>
+            </a:pPr>
+            <a:r>
+              <a:rPr lang="fr-FR" dirty="0"/>
+              <a:t>Lorsqu’un départ d’employé est fait dans l'organisation, le système valide les données RH, vérifie les données employées ( validation manager ou département), désactivation du compte, retrait des groupes et enregistrement des actions dans les journaux d'audit.</a:t>
+            </a:r>
+            <a:br>
+              <a:rPr lang="fr-FR" dirty="0"/>
+            </a:br>
+            <a:br>
+              <a:rPr lang="fr-FR" dirty="0"/>
+            </a:br>
+            <a:r>
+              <a:rPr lang="fr-FR" dirty="0"/>
+              <a:t>Le système commence par valider les informations fournies par les RH.</a:t>
+            </a:r>
+            <a:endParaRPr lang="en-US" dirty="0"/>
+          </a:p>
+          <a:p>
+            <a:endParaRPr lang="en-US" dirty="0"/>
+          </a:p>
+        </p:txBody>
+      </p:sp>
+      <p:sp>
+        <p:nvSpPr>
+          <p:cNvPr id="4" name="Slide Number Placeholder 3"/>
+          <p:cNvSpPr>
+            <a:spLocks noGrp="1"/>
+          </p:cNvSpPr>
+          <p:nvPr>
+            <p:ph type="sldNum" sz="quarter" idx="5"/>
+          </p:nvPr>
+        </p:nvSpPr>
+        <p:spPr/>
+        <p:txBody>
+          <a:bodyPr/>
+          <a:lstStyle/>
+          <a:p>
+            <a:fld id="{8CADF99C-AF7E-4688-B727-7B33BD5CCDA3}" type="slidenum">
+              <a:rPr lang="en-US" smtClean="0"/>
+              <a:t>7</a:t>
+            </a:fld>
+            <a:endParaRPr lang="en-US"/>
+          </a:p>
+        </p:txBody>
+      </p:sp>
+    </p:spTree>
+    <p:extLst>
+      <p:ext uri="{BB962C8B-B14F-4D97-AF65-F5344CB8AC3E}">
+        <p14:creationId xmlns:p14="http://schemas.microsoft.com/office/powerpoint/2010/main" val="3515272549"/>
+      </p:ext>
+    </p:extLst>
+  </p:cSld>
+  <p:clrMapOvr>
+    <a:masterClrMapping/>
+  </p:clrMapOvr>
+</p:notes>
+</file>
+
+<file path=ppt/notesSlides/notesSlide8.xml><?xml version="1.0" encoding="utf-8"?>
+<p:notes xmlns:a="http://schemas.openxmlformats.org/drawingml/2006/main" xmlns:r="http://schemas.openxmlformats.org/officeDocument/2006/relationships" xmlns:p="http://schemas.openxmlformats.org/presentationml/2006/main">
+  <p:cSld>
+    <p:spTree>
+      <p:nvGrpSpPr>
+        <p:cNvPr id="1" name=""/>
+        <p:cNvGrpSpPr/>
+        <p:nvPr/>
+      </p:nvGrpSpPr>
+      <p:grpSpPr>
+        <a:xfrm>
+          <a:off x="0" y="0"/>
+          <a:ext cx="0" cy="0"/>
+          <a:chOff x="0" y="0"/>
+          <a:chExt cx="0" cy="0"/>
+        </a:xfrm>
+      </p:grpSpPr>
+      <p:sp>
+        <p:nvSpPr>
+          <p:cNvPr id="2" name="Slide Image Placeholder 1"/>
+          <p:cNvSpPr>
+            <a:spLocks noGrp="1" noRot="1" noChangeAspect="1"/>
+          </p:cNvSpPr>
+          <p:nvPr>
+            <p:ph type="sldImg"/>
+          </p:nvPr>
+        </p:nvSpPr>
+        <p:spPr/>
+      </p:sp>
+      <p:sp>
+        <p:nvSpPr>
+          <p:cNvPr id="3" name="Notes Placeholder 2"/>
+          <p:cNvSpPr>
+            <a:spLocks noGrp="1"/>
+          </p:cNvSpPr>
+          <p:nvPr>
+            <p:ph type="body" idx="1"/>
+          </p:nvPr>
+        </p:nvSpPr>
+        <p:spPr/>
+        <p:txBody>
+          <a:bodyPr/>
+          <a:lstStyle/>
+          <a:p>
+            <a:r>
+              <a:rPr lang="en-US" dirty="0"/>
+              <a:t>Le </a:t>
+            </a:r>
+            <a:r>
+              <a:rPr lang="en-US" dirty="0" err="1"/>
+              <a:t>système</a:t>
+            </a:r>
+            <a:r>
+              <a:rPr lang="en-US" dirty="0"/>
+              <a:t> applique le </a:t>
+            </a:r>
+            <a:r>
+              <a:rPr lang="en-US" dirty="0" err="1"/>
+              <a:t>principe</a:t>
+            </a:r>
+            <a:r>
+              <a:rPr lang="en-US" dirty="0"/>
+              <a:t> du </a:t>
+            </a:r>
+            <a:r>
+              <a:rPr lang="en-US" dirty="0" err="1"/>
+              <a:t>moindre</a:t>
+            </a:r>
+            <a:r>
+              <a:rPr lang="en-US" dirty="0"/>
+              <a:t> </a:t>
+            </a:r>
+            <a:r>
+              <a:rPr lang="en-US" dirty="0" err="1"/>
+              <a:t>privilège</a:t>
+            </a:r>
+            <a:r>
+              <a:rPr lang="en-US" dirty="0"/>
+              <a:t>. Les </a:t>
+            </a:r>
+            <a:r>
+              <a:rPr lang="en-US" dirty="0" err="1"/>
+              <a:t>accès</a:t>
+            </a:r>
+            <a:r>
+              <a:rPr lang="en-US" dirty="0"/>
+              <a:t> </a:t>
+            </a:r>
+            <a:r>
+              <a:rPr lang="en-US" dirty="0" err="1"/>
+              <a:t>sont</a:t>
+            </a:r>
+            <a:r>
+              <a:rPr lang="en-US" dirty="0"/>
+              <a:t> </a:t>
+            </a:r>
+            <a:r>
+              <a:rPr lang="en-US" dirty="0" err="1"/>
+              <a:t>attribués</a:t>
+            </a:r>
+            <a:r>
+              <a:rPr lang="en-US" dirty="0"/>
+              <a:t> </a:t>
+            </a:r>
+            <a:r>
+              <a:rPr lang="en-US" dirty="0" err="1"/>
+              <a:t>automatiquement</a:t>
+            </a:r>
+            <a:r>
+              <a:rPr lang="en-US" dirty="0"/>
+              <a:t> </a:t>
+            </a:r>
+            <a:r>
+              <a:rPr lang="en-US" dirty="0" err="1"/>
+              <a:t>selon</a:t>
+            </a:r>
+            <a:r>
+              <a:rPr lang="en-US" dirty="0"/>
+              <a:t> le </a:t>
+            </a:r>
+            <a:r>
+              <a:rPr lang="en-US" dirty="0" err="1"/>
+              <a:t>rôle</a:t>
+            </a:r>
+            <a:r>
+              <a:rPr lang="en-US" dirty="0"/>
+              <a:t> de </a:t>
+            </a:r>
+            <a:r>
+              <a:rPr lang="en-US" dirty="0" err="1"/>
+              <a:t>l'employé</a:t>
+            </a:r>
+            <a:r>
+              <a:rPr lang="en-US" dirty="0"/>
+              <a:t> </a:t>
+            </a:r>
+            <a:r>
+              <a:rPr lang="en-US" dirty="0" err="1"/>
+              <a:t>afin</a:t>
+            </a:r>
+            <a:r>
+              <a:rPr lang="en-US" dirty="0"/>
+              <a:t> de limiter les </a:t>
+            </a:r>
+            <a:r>
+              <a:rPr lang="en-US" dirty="0" err="1"/>
+              <a:t>accès</a:t>
+            </a:r>
+            <a:r>
+              <a:rPr lang="en-US" dirty="0"/>
+              <a:t> </a:t>
+            </a:r>
+            <a:r>
+              <a:rPr lang="en-US" dirty="0" err="1"/>
+              <a:t>excessifs</a:t>
+            </a:r>
+            <a:r>
+              <a:rPr lang="en-US" dirty="0"/>
+              <a:t> et </a:t>
+            </a:r>
+            <a:r>
+              <a:rPr lang="en-US" dirty="0" err="1"/>
+              <a:t>renforcer</a:t>
+            </a:r>
+            <a:r>
+              <a:rPr lang="en-US" dirty="0"/>
+              <a:t> la sécurité.</a:t>
+            </a:r>
+          </a:p>
+        </p:txBody>
+      </p:sp>
+      <p:sp>
+        <p:nvSpPr>
+          <p:cNvPr id="4" name="Slide Number Placeholder 3"/>
+          <p:cNvSpPr>
+            <a:spLocks noGrp="1"/>
+          </p:cNvSpPr>
+          <p:nvPr>
+            <p:ph type="sldNum" sz="quarter" idx="5"/>
+          </p:nvPr>
+        </p:nvSpPr>
+        <p:spPr/>
+        <p:txBody>
+          <a:bodyPr/>
+          <a:lstStyle/>
+          <a:p>
+            <a:fld id="{8CADF99C-AF7E-4688-B727-7B33BD5CCDA3}" type="slidenum">
+              <a:rPr lang="en-US" smtClean="0"/>
+              <a:t>8</a:t>
+            </a:fld>
+            <a:endParaRPr lang="en-US"/>
+          </a:p>
+        </p:txBody>
+      </p:sp>
+    </p:spTree>
+    <p:extLst>
+      <p:ext uri="{BB962C8B-B14F-4D97-AF65-F5344CB8AC3E}">
+        <p14:creationId xmlns:p14="http://schemas.microsoft.com/office/powerpoint/2010/main" val="2516540216"/>
+      </p:ext>
+    </p:extLst>
+  </p:cSld>
+  <p:clrMapOvr>
+    <a:masterClrMapping/>
+  </p:clrMapOvr>
+</p:notes>
+</file>
+
+<file path=ppt/notesSlides/notesSlide9.xml><?xml version="1.0" encoding="utf-8"?>
+<p:notes xmlns:a="http://schemas.openxmlformats.org/drawingml/2006/main" xmlns:r="http://schemas.openxmlformats.org/officeDocument/2006/relationships" xmlns:p="http://schemas.openxmlformats.org/presentationml/2006/main">
+  <p:cSld>
+    <p:spTree>
+      <p:nvGrpSpPr>
+        <p:cNvPr id="1" name=""/>
+        <p:cNvGrpSpPr/>
+        <p:nvPr/>
+      </p:nvGrpSpPr>
+      <p:grpSpPr>
+        <a:xfrm>
+          <a:off x="0" y="0"/>
+          <a:ext cx="0" cy="0"/>
+          <a:chOff x="0" y="0"/>
+          <a:chExt cx="0" cy="0"/>
+        </a:xfrm>
+      </p:grpSpPr>
+      <p:sp>
+        <p:nvSpPr>
+          <p:cNvPr id="2" name="Slide Image Placeholder 1"/>
+          <p:cNvSpPr>
+            <a:spLocks noGrp="1" noRot="1" noChangeAspect="1"/>
+          </p:cNvSpPr>
+          <p:nvPr>
+            <p:ph type="sldImg"/>
+          </p:nvPr>
+        </p:nvSpPr>
+        <p:spPr/>
+      </p:sp>
+      <p:sp>
+        <p:nvSpPr>
+          <p:cNvPr id="3" name="Notes Placeholder 2"/>
+          <p:cNvSpPr>
+            <a:spLocks noGrp="1"/>
+          </p:cNvSpPr>
+          <p:nvPr>
+            <p:ph type="body" idx="1"/>
+          </p:nvPr>
+        </p:nvSpPr>
+        <p:spPr/>
+        <p:txBody>
+          <a:bodyPr/>
+          <a:lstStyle/>
+          <a:p>
+            <a:r>
+              <a:rPr lang="en-US" dirty="0"/>
+              <a:t>Avant toute </a:t>
+            </a:r>
+            <a:r>
+              <a:rPr lang="en-US" dirty="0" err="1"/>
+              <a:t>création</a:t>
+            </a:r>
+            <a:r>
+              <a:rPr lang="en-US" dirty="0"/>
+              <a:t> de compte, le </a:t>
+            </a:r>
+            <a:r>
+              <a:rPr lang="en-US" dirty="0" err="1"/>
+              <a:t>système</a:t>
+            </a:r>
+            <a:r>
+              <a:rPr lang="en-US" dirty="0"/>
+              <a:t> </a:t>
+            </a:r>
+            <a:r>
+              <a:rPr lang="en-US" dirty="0" err="1"/>
+              <a:t>vérifie</a:t>
+            </a:r>
+            <a:r>
+              <a:rPr lang="en-US" dirty="0"/>
+              <a:t> </a:t>
+            </a:r>
+            <a:r>
+              <a:rPr lang="en-US" dirty="0" err="1"/>
+              <a:t>que</a:t>
+            </a:r>
+            <a:r>
+              <a:rPr lang="en-US" dirty="0"/>
+              <a:t> les </a:t>
+            </a:r>
+            <a:r>
+              <a:rPr lang="en-US" dirty="0" err="1"/>
+              <a:t>informations</a:t>
+            </a:r>
+            <a:r>
+              <a:rPr lang="en-US" dirty="0"/>
+              <a:t> </a:t>
+            </a:r>
+            <a:r>
+              <a:rPr lang="en-US" dirty="0" err="1"/>
+              <a:t>essentielles</a:t>
+            </a:r>
+            <a:r>
+              <a:rPr lang="en-US" dirty="0"/>
+              <a:t> </a:t>
+            </a:r>
+            <a:r>
+              <a:rPr lang="en-US" dirty="0" err="1"/>
+              <a:t>sont</a:t>
+            </a:r>
+            <a:r>
+              <a:rPr lang="en-US" dirty="0"/>
+              <a:t> </a:t>
+            </a:r>
+            <a:r>
+              <a:rPr lang="en-US" dirty="0" err="1"/>
+              <a:t>présentes</a:t>
+            </a:r>
+            <a:r>
+              <a:rPr lang="en-US" dirty="0"/>
+              <a:t>. Si un </a:t>
+            </a:r>
+            <a:r>
+              <a:rPr lang="en-US" dirty="0" err="1"/>
+              <a:t>gestionnaire</a:t>
+            </a:r>
+            <a:r>
+              <a:rPr lang="en-US" dirty="0"/>
+              <a:t>, un département </a:t>
+            </a:r>
+            <a:r>
+              <a:rPr lang="en-US" dirty="0" err="1"/>
+              <a:t>ou</a:t>
+            </a:r>
+            <a:r>
+              <a:rPr lang="en-US" dirty="0"/>
+              <a:t> un </a:t>
+            </a:r>
+            <a:r>
+              <a:rPr lang="en-US" dirty="0" err="1"/>
+              <a:t>rôle</a:t>
+            </a:r>
+            <a:r>
+              <a:rPr lang="en-US" dirty="0"/>
+              <a:t> est </a:t>
+            </a:r>
+            <a:r>
+              <a:rPr lang="en-US" dirty="0" err="1"/>
+              <a:t>manquant</a:t>
+            </a:r>
+            <a:r>
+              <a:rPr lang="en-US" dirty="0"/>
+              <a:t>, le processus est </a:t>
+            </a:r>
+            <a:r>
+              <a:rPr lang="en-US" dirty="0" err="1"/>
+              <a:t>bloqué</a:t>
+            </a:r>
+            <a:r>
+              <a:rPr lang="en-US" dirty="0"/>
+              <a:t> </a:t>
+            </a:r>
+            <a:r>
+              <a:rPr lang="en-US" dirty="0" err="1"/>
+              <a:t>afin</a:t>
+            </a:r>
+            <a:r>
+              <a:rPr lang="en-US" dirty="0"/>
+              <a:t> </a:t>
+            </a:r>
+            <a:r>
+              <a:rPr lang="en-US" dirty="0" err="1"/>
+              <a:t>d'éviter</a:t>
+            </a:r>
+            <a:r>
+              <a:rPr lang="en-US" dirty="0"/>
+              <a:t> des </a:t>
+            </a:r>
+            <a:r>
+              <a:rPr lang="en-US" dirty="0" err="1"/>
+              <a:t>erreurs</a:t>
+            </a:r>
+            <a:r>
+              <a:rPr lang="en-US" dirty="0"/>
+              <a:t> de sécurité.</a:t>
+            </a:r>
+            <a:br>
+              <a:rPr lang="en-US" dirty="0"/>
+            </a:br>
+            <a:r>
+              <a:rPr lang="en-US" dirty="0"/>
+              <a:t>Message de validation </a:t>
+            </a:r>
+            <a:r>
+              <a:rPr lang="en-US" dirty="0" err="1"/>
+              <a:t>indiqué</a:t>
+            </a:r>
+            <a:endParaRPr lang="en-US" dirty="0"/>
+          </a:p>
+        </p:txBody>
+      </p:sp>
+      <p:sp>
+        <p:nvSpPr>
+          <p:cNvPr id="4" name="Slide Number Placeholder 3"/>
+          <p:cNvSpPr>
+            <a:spLocks noGrp="1"/>
+          </p:cNvSpPr>
+          <p:nvPr>
+            <p:ph type="sldNum" sz="quarter" idx="5"/>
+          </p:nvPr>
+        </p:nvSpPr>
+        <p:spPr/>
+        <p:txBody>
+          <a:bodyPr/>
+          <a:lstStyle/>
+          <a:p>
+            <a:fld id="{8CADF99C-AF7E-4688-B727-7B33BD5CCDA3}" type="slidenum">
+              <a:rPr lang="en-US" smtClean="0"/>
+              <a:t>9</a:t>
+            </a:fld>
+            <a:endParaRPr lang="en-US"/>
+          </a:p>
+        </p:txBody>
+      </p:sp>
+    </p:spTree>
+    <p:extLst>
+      <p:ext uri="{BB962C8B-B14F-4D97-AF65-F5344CB8AC3E}">
+        <p14:creationId xmlns:p14="http://schemas.microsoft.com/office/powerpoint/2010/main" val="4253024838"/>
       </p:ext>
     </p:extLst>
   </p:cSld>
@@ -5199,7 +6083,7 @@
           <p:nvPr/>
         </p:nvPicPr>
         <p:blipFill>
-          <a:blip r:embed="rId2"/>
+          <a:blip r:embed="rId3"/>
           <a:stretch>
             <a:fillRect/>
           </a:stretch>
@@ -6585,8 +7469,8 @@
         </p:blipFill>
         <p:spPr>
           <a:xfrm>
-            <a:off x="6249373" y="467208"/>
-            <a:ext cx="3731857" cy="5923584"/>
+            <a:off x="5251939" y="467207"/>
+            <a:ext cx="5008708" cy="6273561"/>
           </a:xfrm>
           <a:prstGeom prst="rect">
             <a:avLst/>
@@ -7932,43 +8816,6 @@
           </a:p>
         </p:txBody>
       </p:sp>
-      <p:sp>
-        <p:nvSpPr>
-          <p:cNvPr id="7" name="Subtitle 6">
-            <a:extLst>
-              <a:ext uri="{FF2B5EF4-FFF2-40B4-BE49-F238E27FC236}">
-                <a16:creationId xmlns:a16="http://schemas.microsoft.com/office/drawing/2014/main" id="{BB06E2AE-6DB9-FDE5-F89B-EAD160B0D055}"/>
-              </a:ext>
-            </a:extLst>
-          </p:cNvPr>
-          <p:cNvSpPr>
-            <a:spLocks noGrp="1"/>
-          </p:cNvSpPr>
-          <p:nvPr>
-            <p:ph type="subTitle" idx="1"/>
-          </p:nvPr>
-        </p:nvSpPr>
-        <p:spPr>
-          <a:xfrm>
-            <a:off x="1105661" y="4800600"/>
-            <a:ext cx="5179879" cy="1200149"/>
-          </a:xfrm>
-        </p:spPr>
-        <p:txBody>
-          <a:bodyPr anchor="t">
-            <a:normAutofit/>
-          </a:bodyPr>
-          <a:lstStyle/>
-          <a:p>
-            <a:pPr algn="l"/>
-            <a:endParaRPr lang="en-US">
-              <a:solidFill>
-                <a:srgbClr val="FFFFFF"/>
-              </a:solidFill>
-            </a:endParaRPr>
-          </a:p>
-        </p:txBody>
-      </p:sp>
       <p:pic>
         <p:nvPicPr>
           <p:cNvPr id="5" name="Picture 4">
@@ -7984,7 +8831,7 @@
           <p:nvPr/>
         </p:nvPicPr>
         <p:blipFill>
-          <a:blip r:embed="rId2"/>
+          <a:blip r:embed="rId3"/>
           <a:stretch>
             <a:fillRect/>
           </a:stretch>
@@ -8438,7 +9285,7 @@
           <p:nvPr/>
         </p:nvPicPr>
         <p:blipFill>
-          <a:blip r:embed="rId2"/>
+          <a:blip r:embed="rId3"/>
           <a:stretch>
             <a:fillRect/>
           </a:stretch>
@@ -8988,8 +9835,8 @@
         </p:nvSpPr>
         <p:spPr>
           <a:xfrm>
-            <a:off x="660041" y="2767106"/>
-            <a:ext cx="2880828" cy="3071906"/>
+            <a:off x="112734" y="2767106"/>
+            <a:ext cx="3695178" cy="2481299"/>
           </a:xfrm>
         </p:spPr>
         <p:txBody>
@@ -9000,13 +9847,64 @@
           <a:p>
             <a:pPr algn="l"/>
             <a:r>
-              <a:rPr lang="en-US" sz="4000">
+              <a:rPr lang="en-US" sz="4000" dirty="0">
                 <a:solidFill>
                   <a:srgbClr val="FFFFFF"/>
                 </a:solidFill>
               </a:rPr>
               <a:t>Joiner Workflow</a:t>
             </a:r>
+            <a:br>
+              <a:rPr lang="en-US" sz="4000" dirty="0">
+                <a:solidFill>
+                  <a:srgbClr val="FFFFFF"/>
+                </a:solidFill>
+              </a:rPr>
+            </a:br>
+            <a:br>
+              <a:rPr lang="en-US" sz="4000" dirty="0">
+                <a:solidFill>
+                  <a:srgbClr val="FFFFFF"/>
+                </a:solidFill>
+              </a:rPr>
+            </a:br>
+            <a:r>
+              <a:rPr lang="en-US" sz="4000" dirty="0">
+                <a:solidFill>
+                  <a:srgbClr val="FFFFFF"/>
+                </a:solidFill>
+              </a:rPr>
+              <a:t>: </a:t>
+            </a:r>
+            <a:r>
+              <a:rPr lang="en-US" sz="4000" dirty="0" err="1">
+                <a:solidFill>
+                  <a:srgbClr val="FFFFFF"/>
+                </a:solidFill>
+              </a:rPr>
+              <a:t>Arrivées</a:t>
+            </a:r>
+            <a:r>
+              <a:rPr lang="en-US" sz="4000" dirty="0">
+                <a:solidFill>
+                  <a:srgbClr val="FFFFFF"/>
+                </a:solidFill>
+              </a:rPr>
+              <a:t> des </a:t>
+            </a:r>
+            <a:r>
+              <a:rPr lang="en-US" sz="4000" dirty="0" err="1">
+                <a:solidFill>
+                  <a:srgbClr val="FFFFFF"/>
+                </a:solidFill>
+              </a:rPr>
+              <a:t>employés</a:t>
+            </a:r>
+            <a:endParaRPr lang="en-US" sz="4000" dirty="0">
+              <a:solidFill>
+                <a:srgbClr val="FFFFFF"/>
+              </a:solidFill>
+            </a:endParaRPr>
           </a:p>
         </p:txBody>
       </p:sp>
@@ -9069,8 +9967,8 @@
         </p:blipFill>
         <p:spPr>
           <a:xfrm>
-            <a:off x="4870988" y="0"/>
-            <a:ext cx="6386292" cy="6705600"/>
+            <a:off x="4870988" y="274084"/>
+            <a:ext cx="6125258" cy="6431515"/>
           </a:xfrm>
           <a:prstGeom prst="rect">
             <a:avLst/>
@@ -9612,8 +10510,8 @@
         </p:nvSpPr>
         <p:spPr>
           <a:xfrm>
-            <a:off x="660041" y="2767106"/>
-            <a:ext cx="2880828" cy="3071906"/>
+            <a:off x="175364" y="2767106"/>
+            <a:ext cx="3757809" cy="3071906"/>
           </a:xfrm>
         </p:spPr>
         <p:txBody>
@@ -9624,12 +10522,66 @@
           <a:p>
             <a:pPr algn="l"/>
             <a:r>
-              <a:rPr lang="en-US" sz="4000">
+              <a:rPr lang="en-US" sz="4000" dirty="0">
                 <a:solidFill>
                   <a:srgbClr val="FFFFFF"/>
                 </a:solidFill>
               </a:rPr>
-              <a:t>Mover Workflow</a:t>
+              <a:t>Mover Workflow:</a:t>
+            </a:r>
+            <a:br>
+              <a:rPr lang="en-US" sz="4000" dirty="0">
+                <a:solidFill>
+                  <a:srgbClr val="FFFFFF"/>
+                </a:solidFill>
+              </a:rPr>
+            </a:br>
+            <a:br>
+              <a:rPr lang="en-US" sz="4000" dirty="0">
+                <a:solidFill>
+                  <a:srgbClr val="FFFFFF"/>
+                </a:solidFill>
+              </a:rPr>
+            </a:br>
+            <a:r>
+              <a:rPr lang="en-US" sz="4000" dirty="0">
+                <a:solidFill>
+                  <a:srgbClr val="FFFFFF"/>
+                </a:solidFill>
+              </a:rPr>
+              <a:t>changement de poste </a:t>
+            </a:r>
+            <a:r>
+              <a:rPr lang="en-US" sz="4000" dirty="0" err="1">
+                <a:solidFill>
+                  <a:srgbClr val="FFFFFF"/>
+                </a:solidFill>
+              </a:rPr>
+              <a:t>ou</a:t>
+            </a:r>
+            <a:r>
+              <a:rPr lang="en-US" sz="4000" dirty="0">
+                <a:solidFill>
+                  <a:srgbClr val="FFFFFF"/>
+                </a:solidFill>
+              </a:rPr>
+              <a:t> </a:t>
+            </a:r>
+            <a:r>
+              <a:rPr lang="en-US" sz="4000" dirty="0" err="1">
+                <a:solidFill>
+                  <a:srgbClr val="FFFFFF"/>
+                </a:solidFill>
+              </a:rPr>
+              <a:t>mobilité</a:t>
+            </a:r>
+            <a:r>
+              <a:rPr lang="en-US" sz="4000" dirty="0">
+                <a:solidFill>
+                  <a:srgbClr val="FFFFFF"/>
+                </a:solidFill>
+              </a:rPr>
+              <a:t> interne</a:t>
             </a:r>
           </a:p>
         </p:txBody>
@@ -9686,15 +10638,15 @@
           <p:nvPr/>
         </p:nvPicPr>
         <p:blipFill>
-          <a:blip r:embed="rId2"/>
+          <a:blip r:embed="rId3"/>
           <a:stretch>
             <a:fillRect/>
           </a:stretch>
         </p:blipFill>
         <p:spPr>
           <a:xfrm>
-            <a:off x="5156965" y="280067"/>
-            <a:ext cx="5328155" cy="6595752"/>
+            <a:off x="5156965" y="-18881"/>
+            <a:ext cx="5569650" cy="6894700"/>
           </a:xfrm>
           <a:prstGeom prst="rect">
             <a:avLst/>
@@ -10248,13 +11200,56 @@
           <a:p>
             <a:pPr algn="l"/>
             <a:r>
-              <a:rPr lang="en-US" sz="4000">
+              <a:rPr lang="en-US" sz="4000" dirty="0">
                 <a:solidFill>
                   <a:srgbClr val="FFFFFF"/>
                 </a:solidFill>
               </a:rPr>
               <a:t>Leaver Workflow</a:t>
             </a:r>
+            <a:br>
+              <a:rPr lang="en-US" sz="4000" dirty="0">
+                <a:solidFill>
+                  <a:srgbClr val="FFFFFF"/>
+                </a:solidFill>
+              </a:rPr>
+            </a:br>
+            <a:br>
+              <a:rPr lang="en-US" sz="4000" dirty="0">
+                <a:solidFill>
+                  <a:srgbClr val="FFFFFF"/>
+                </a:solidFill>
+              </a:rPr>
+            </a:br>
+            <a:r>
+              <a:rPr lang="en-US" sz="4000" dirty="0" err="1">
+                <a:solidFill>
+                  <a:srgbClr val="FFFFFF"/>
+                </a:solidFill>
+              </a:rPr>
+              <a:t>Départ</a:t>
+            </a:r>
+            <a:r>
+              <a:rPr lang="en-US" sz="4000" dirty="0">
+                <a:solidFill>
+                  <a:srgbClr val="FFFFFF"/>
+                </a:solidFill>
+              </a:rPr>
+              <a:t> des </a:t>
+            </a:r>
+            <a:r>
+              <a:rPr lang="en-US" sz="4000" dirty="0" err="1">
+                <a:solidFill>
+                  <a:srgbClr val="FFFFFF"/>
+                </a:solidFill>
+              </a:rPr>
+              <a:t>employés</a:t>
+            </a:r>
+            <a:endParaRPr lang="en-US" sz="4000" dirty="0">
+              <a:solidFill>
+                <a:srgbClr val="FFFFFF"/>
+              </a:solidFill>
+            </a:endParaRPr>
           </a:p>
         </p:txBody>
       </p:sp>
@@ -10310,7 +11305,7 @@
           <p:nvPr/>
         </p:nvPicPr>
         <p:blipFill>
-          <a:blip r:embed="rId2"/>
+          <a:blip r:embed="rId3"/>
           <a:stretch>
             <a:fillRect/>
           </a:stretch>

--- a/09-Presentation/IAM-Healthcare-Automation-Professional.pptx
+++ b/09-Presentation/IAM-Healthcare-Automation-Professional.pptx
@@ -915,7 +915,15 @@
             </a:r>
             <a:r>
               <a:rPr lang="en-US" dirty="0"/>
-              <a:t> solution </a:t>
+              <a:t> </a:t>
+            </a:r>
+            <a:r>
+              <a:rPr lang="en-US" dirty="0" err="1"/>
+              <a:t>plateforme</a:t>
+            </a:r>
+            <a:r>
+              <a:rPr lang="en-US" dirty="0"/>
+              <a:t> IAM </a:t>
             </a:r>
             <a:r>
               <a:rPr lang="en-US" dirty="0" err="1"/>
@@ -979,6 +987,301 @@
     <p:extLst>
       <p:ext uri="{BB962C8B-B14F-4D97-AF65-F5344CB8AC3E}">
         <p14:creationId xmlns:p14="http://schemas.microsoft.com/office/powerpoint/2010/main" val="2736463003"/>
+      </p:ext>
+    </p:extLst>
+  </p:cSld>
+  <p:clrMapOvr>
+    <a:masterClrMapping/>
+  </p:clrMapOvr>
+</p:notes>
+</file>
+
+<file path=ppt/notesSlides/notesSlide12.xml><?xml version="1.0" encoding="utf-8"?>
+<p:notes xmlns:a="http://schemas.openxmlformats.org/drawingml/2006/main" xmlns:r="http://schemas.openxmlformats.org/officeDocument/2006/relationships" xmlns:p="http://schemas.openxmlformats.org/presentationml/2006/main">
+  <p:cSld>
+    <p:spTree>
+      <p:nvGrpSpPr>
+        <p:cNvPr id="1" name=""/>
+        <p:cNvGrpSpPr/>
+        <p:nvPr/>
+      </p:nvGrpSpPr>
+      <p:grpSpPr>
+        <a:xfrm>
+          <a:off x="0" y="0"/>
+          <a:ext cx="0" cy="0"/>
+          <a:chOff x="0" y="0"/>
+          <a:chExt cx="0" cy="0"/>
+        </a:xfrm>
+      </p:grpSpPr>
+      <p:sp>
+        <p:nvSpPr>
+          <p:cNvPr id="2" name="Slide Image Placeholder 1"/>
+          <p:cNvSpPr>
+            <a:spLocks noGrp="1" noRot="1" noChangeAspect="1"/>
+          </p:cNvSpPr>
+          <p:nvPr>
+            <p:ph type="sldImg"/>
+          </p:nvPr>
+        </p:nvSpPr>
+        <p:spPr/>
+      </p:sp>
+      <p:sp>
+        <p:nvSpPr>
+          <p:cNvPr id="3" name="Notes Placeholder 2"/>
+          <p:cNvSpPr>
+            <a:spLocks noGrp="1"/>
+          </p:cNvSpPr>
+          <p:nvPr>
+            <p:ph type="body" idx="1"/>
+          </p:nvPr>
+        </p:nvSpPr>
+        <p:spPr/>
+        <p:txBody>
+          <a:bodyPr/>
+          <a:lstStyle/>
+          <a:p>
+            <a:r>
+              <a:rPr lang="en-US" dirty="0"/>
+              <a:t>Pour </a:t>
+            </a:r>
+            <a:r>
+              <a:rPr lang="en-US" dirty="0" err="1"/>
+              <a:t>conclure</a:t>
+            </a:r>
+            <a:r>
+              <a:rPr lang="en-US" dirty="0"/>
+              <a:t> , </a:t>
+            </a:r>
+            <a:r>
+              <a:rPr lang="en-US"/>
+              <a:t>cette</a:t>
+            </a:r>
+            <a:r>
+              <a:rPr lang="en-US" dirty="0"/>
+              <a:t> </a:t>
+            </a:r>
+            <a:r>
+              <a:rPr lang="en-US" dirty="0" err="1"/>
+              <a:t>preuve</a:t>
+            </a:r>
+            <a:r>
+              <a:rPr lang="en-US" dirty="0"/>
+              <a:t> de concept </a:t>
+            </a:r>
+            <a:r>
+              <a:rPr lang="en-US" dirty="0" err="1"/>
+              <a:t>démontre</a:t>
+            </a:r>
+            <a:r>
+              <a:rPr lang="en-US" dirty="0"/>
+              <a:t> </a:t>
+            </a:r>
+            <a:r>
+              <a:rPr lang="en-US" dirty="0" err="1"/>
+              <a:t>qu'il</a:t>
+            </a:r>
+            <a:r>
+              <a:rPr lang="en-US" dirty="0"/>
+              <a:t> est possible </a:t>
+            </a:r>
+            <a:r>
+              <a:rPr lang="en-US" dirty="0" err="1"/>
+              <a:t>d'automatiser</a:t>
+            </a:r>
+            <a:r>
+              <a:rPr lang="en-US" dirty="0"/>
+              <a:t> le cycle de vie des </a:t>
+            </a:r>
+            <a:r>
+              <a:rPr lang="en-US" dirty="0" err="1"/>
+              <a:t>identités</a:t>
+            </a:r>
+            <a:r>
+              <a:rPr lang="en-US" dirty="0"/>
+              <a:t> tout </a:t>
+            </a:r>
+            <a:r>
+              <a:rPr lang="en-US" dirty="0" err="1"/>
+              <a:t>en</a:t>
+            </a:r>
+            <a:r>
+              <a:rPr lang="en-US" dirty="0"/>
+              <a:t> </a:t>
+            </a:r>
+            <a:r>
+              <a:rPr lang="en-US" dirty="0" err="1"/>
+              <a:t>appliquant</a:t>
+            </a:r>
+            <a:r>
+              <a:rPr lang="en-US" dirty="0"/>
+              <a:t> les principes de sécurité, de </a:t>
+            </a:r>
+            <a:r>
+              <a:rPr lang="en-US" dirty="0" err="1"/>
+              <a:t>gouvernance</a:t>
+            </a:r>
+            <a:r>
+              <a:rPr lang="en-US" dirty="0"/>
+              <a:t>, de </a:t>
+            </a:r>
+            <a:r>
+              <a:rPr lang="en-US" dirty="0" err="1"/>
+              <a:t>contrôle</a:t>
+            </a:r>
+            <a:r>
+              <a:rPr lang="en-US" dirty="0"/>
+              <a:t> </a:t>
+            </a:r>
+            <a:r>
+              <a:rPr lang="en-US" dirty="0" err="1"/>
+              <a:t>d'accès</a:t>
+            </a:r>
+            <a:r>
+              <a:rPr lang="en-US" dirty="0"/>
+              <a:t> </a:t>
+            </a:r>
+            <a:r>
+              <a:rPr lang="en-US" dirty="0" err="1"/>
+              <a:t>basé</a:t>
+            </a:r>
+            <a:r>
+              <a:rPr lang="en-US" dirty="0"/>
+              <a:t> sur les </a:t>
+            </a:r>
+            <a:r>
+              <a:rPr lang="en-US" dirty="0" err="1"/>
+              <a:t>rôles</a:t>
+            </a:r>
+            <a:r>
+              <a:rPr lang="en-US" dirty="0"/>
+              <a:t>, </a:t>
+            </a:r>
+            <a:r>
+              <a:rPr lang="en-US" dirty="0" err="1"/>
+              <a:t>d'audit</a:t>
+            </a:r>
+            <a:r>
+              <a:rPr lang="en-US" dirty="0"/>
+              <a:t> et de </a:t>
+            </a:r>
+            <a:r>
+              <a:rPr lang="en-US" dirty="0" err="1"/>
+              <a:t>conformité</a:t>
+            </a:r>
+            <a:r>
+              <a:rPr lang="en-US" dirty="0"/>
+              <a:t>. La </a:t>
+            </a:r>
+            <a:r>
+              <a:rPr lang="en-US" dirty="0" err="1"/>
+              <a:t>prochaine</a:t>
+            </a:r>
+            <a:r>
+              <a:rPr lang="en-US" dirty="0"/>
+              <a:t> étape </a:t>
+            </a:r>
+            <a:r>
+              <a:rPr lang="en-US" dirty="0" err="1"/>
+              <a:t>consiste</a:t>
+            </a:r>
+            <a:r>
+              <a:rPr lang="en-US" dirty="0"/>
+              <a:t> à </a:t>
+            </a:r>
+            <a:r>
+              <a:rPr lang="en-US" dirty="0" err="1"/>
+              <a:t>intégrer</a:t>
+            </a:r>
+            <a:r>
+              <a:rPr lang="en-US" dirty="0"/>
+              <a:t> Active Directory, Microsoft Entra ID et les </a:t>
+            </a:r>
+            <a:r>
+              <a:rPr lang="en-US" dirty="0" err="1"/>
+              <a:t>systèmes</a:t>
+            </a:r>
+            <a:r>
+              <a:rPr lang="en-US" dirty="0"/>
+              <a:t> RH et ITSM </a:t>
+            </a:r>
+            <a:r>
+              <a:rPr lang="en-US" dirty="0" err="1"/>
+              <a:t>afin</a:t>
+            </a:r>
+            <a:r>
+              <a:rPr lang="en-US" dirty="0"/>
+              <a:t> </a:t>
+            </a:r>
+            <a:r>
+              <a:rPr lang="en-US" dirty="0" err="1"/>
+              <a:t>d'évoluer</a:t>
+            </a:r>
+            <a:r>
+              <a:rPr lang="en-US" dirty="0"/>
+              <a:t> vers </a:t>
+            </a:r>
+            <a:r>
+              <a:rPr lang="en-US" dirty="0" err="1"/>
+              <a:t>une</a:t>
+            </a:r>
+            <a:r>
+              <a:rPr lang="en-US" dirty="0"/>
+              <a:t> </a:t>
+            </a:r>
+            <a:r>
+              <a:rPr lang="en-US" dirty="0" err="1"/>
+              <a:t>véritable</a:t>
+            </a:r>
+            <a:r>
+              <a:rPr lang="en-US" dirty="0"/>
+              <a:t> </a:t>
+            </a:r>
+            <a:r>
+              <a:rPr lang="en-US" dirty="0" err="1"/>
+              <a:t>plateforme</a:t>
+            </a:r>
+            <a:r>
+              <a:rPr lang="en-US" dirty="0"/>
+              <a:t> IAM </a:t>
+            </a:r>
+            <a:r>
+              <a:rPr lang="en-US" dirty="0" err="1"/>
+              <a:t>d'entreprise</a:t>
+            </a:r>
+            <a:r>
+              <a:rPr lang="en-US" dirty="0"/>
+              <a:t>.</a:t>
+            </a:r>
+          </a:p>
+        </p:txBody>
+      </p:sp>
+      <p:sp>
+        <p:nvSpPr>
+          <p:cNvPr id="4" name="Slide Number Placeholder 3"/>
+          <p:cNvSpPr>
+            <a:spLocks noGrp="1"/>
+          </p:cNvSpPr>
+          <p:nvPr>
+            <p:ph type="sldNum" sz="quarter" idx="5"/>
+          </p:nvPr>
+        </p:nvSpPr>
+        <p:spPr/>
+        <p:txBody>
+          <a:bodyPr/>
+          <a:lstStyle/>
+          <a:p>
+            <a:fld id="{8CADF99C-AF7E-4688-B727-7B33BD5CCDA3}" type="slidenum">
+              <a:rPr lang="en-US" smtClean="0"/>
+              <a:t>12</a:t>
+            </a:fld>
+            <a:endParaRPr lang="en-US"/>
+          </a:p>
+        </p:txBody>
+      </p:sp>
+    </p:spTree>
+    <p:extLst>
+      <p:ext uri="{BB962C8B-B14F-4D97-AF65-F5344CB8AC3E}">
+        <p14:creationId xmlns:p14="http://schemas.microsoft.com/office/powerpoint/2010/main" val="3163639794"/>
       </p:ext>
     </p:extLst>
   </p:cSld>
@@ -7462,7 +7765,7 @@
           <p:nvPr/>
         </p:nvPicPr>
         <p:blipFill>
-          <a:blip r:embed="rId2"/>
+          <a:blip r:embed="rId3"/>
           <a:stretch>
             <a:fillRect/>
           </a:stretch>

--- a/09-Presentation/IAM-Healthcare-Automation-Professional.pptx
+++ b/09-Presentation/IAM-Healthcare-Automation-Professional.pptx
@@ -209,7 +209,7 @@
           <a:p>
             <a:fld id="{280E9DBE-3662-4895-B281-A721E3F5222D}" type="datetimeFigureOut">
               <a:rPr lang="en-US" smtClean="0"/>
-              <a:t>6/8/2026</a:t>
+              <a:t>6/10/2026</a:t>
             </a:fld>
             <a:endParaRPr lang="en-US"/>
           </a:p>
@@ -522,11 +522,11 @@
           <a:p>
             <a:r>
               <a:rPr lang="en-US" dirty="0"/>
-              <a:t>Le </a:t>
-            </a:r>
-            <a:r>
-              <a:rPr lang="en-US" dirty="0" err="1"/>
-              <a:t>projet</a:t>
+              <a:t>Speech1: “Bonjour et merci de </a:t>
+            </a:r>
+            <a:r>
+              <a:rPr lang="en-US" dirty="0" err="1"/>
+              <a:t>votre</a:t>
             </a:r>
             <a:r>
               <a:rPr lang="en-US" dirty="0"/>
@@ -534,15 +534,15 @@
             </a:r>
             <a:r>
               <a:rPr lang="en-US" dirty="0" err="1"/>
-              <a:t>répond</a:t>
-            </a:r>
-            <a:r>
-              <a:rPr lang="en-US" dirty="0"/>
-              <a:t> à un </a:t>
-            </a:r>
-            <a:r>
-              <a:rPr lang="en-US" dirty="0" err="1"/>
-              <a:t>problème</a:t>
+              <a:t>présence</a:t>
+            </a:r>
+            <a:r>
+              <a:rPr lang="en-US" dirty="0"/>
+              <a:t>. Suite à </a:t>
+            </a:r>
+            <a:r>
+              <a:rPr lang="en-US" dirty="0" err="1"/>
+              <a:t>votre</a:t>
             </a:r>
             <a:r>
               <a:rPr lang="en-US" dirty="0"/>
@@ -550,19 +550,139 @@
             </a:r>
             <a:r>
               <a:rPr lang="en-US" dirty="0" err="1"/>
-              <a:t>fréquent</a:t>
-            </a:r>
-            <a:r>
-              <a:rPr lang="en-US" dirty="0"/>
-              <a:t> dans les </a:t>
-            </a:r>
-            <a:r>
-              <a:rPr lang="en-US" dirty="0" err="1"/>
-              <a:t>établissements</a:t>
-            </a:r>
-            <a:r>
-              <a:rPr lang="en-US" dirty="0"/>
-              <a:t> de santé : la gestion du cycle de vie des </a:t>
+              <a:t>besoin</a:t>
+            </a:r>
+            <a:r>
+              <a:rPr lang="en-US" dirty="0"/>
+              <a:t> </a:t>
+            </a:r>
+            <a:r>
+              <a:rPr lang="en-US" dirty="0" err="1"/>
+              <a:t>concernant</a:t>
+            </a:r>
+            <a:r>
+              <a:rPr lang="en-US" dirty="0"/>
+              <a:t> </a:t>
+            </a:r>
+            <a:r>
+              <a:rPr lang="en-US" dirty="0" err="1"/>
+              <a:t>l'automatisation</a:t>
+            </a:r>
+            <a:r>
+              <a:rPr lang="en-US" dirty="0"/>
+              <a:t> de la gestion des </a:t>
+            </a:r>
+            <a:r>
+              <a:rPr lang="en-US" dirty="0" err="1"/>
+              <a:t>identités</a:t>
+            </a:r>
+            <a:r>
+              <a:rPr lang="en-US" dirty="0"/>
+              <a:t> et des </a:t>
+            </a:r>
+            <a:r>
+              <a:rPr lang="en-US" dirty="0" err="1"/>
+              <a:t>accès</a:t>
+            </a:r>
+            <a:r>
+              <a:rPr lang="en-US" dirty="0"/>
+              <a:t>, </a:t>
+            </a:r>
+            <a:r>
+              <a:rPr lang="en-US" dirty="0" err="1"/>
+              <a:t>j'ai</a:t>
+            </a:r>
+            <a:r>
+              <a:rPr lang="en-US" dirty="0"/>
+              <a:t> </a:t>
+            </a:r>
+            <a:r>
+              <a:rPr lang="en-US" dirty="0" err="1"/>
+              <a:t>réalisé</a:t>
+            </a:r>
+            <a:r>
+              <a:rPr lang="en-US" dirty="0"/>
+              <a:t> </a:t>
+            </a:r>
+            <a:r>
+              <a:rPr lang="en-US" dirty="0" err="1"/>
+              <a:t>cette</a:t>
+            </a:r>
+            <a:r>
+              <a:rPr lang="en-US" dirty="0"/>
+              <a:t> </a:t>
+            </a:r>
+            <a:r>
+              <a:rPr lang="en-US" dirty="0" err="1"/>
+              <a:t>preuve</a:t>
+            </a:r>
+            <a:r>
+              <a:rPr lang="en-US" dirty="0"/>
+              <a:t> de concept </a:t>
+            </a:r>
+            <a:r>
+              <a:rPr lang="en-US" dirty="0" err="1"/>
+              <a:t>intitulée</a:t>
+            </a:r>
+            <a:r>
+              <a:rPr lang="en-US" dirty="0"/>
+              <a:t> « </a:t>
+            </a:r>
+            <a:r>
+              <a:rPr lang="en-US" dirty="0" err="1"/>
+              <a:t>Automatisation</a:t>
+            </a:r>
+            <a:r>
+              <a:rPr lang="en-US" dirty="0"/>
+              <a:t> du cycle de vie des </a:t>
+            </a:r>
+            <a:r>
+              <a:rPr lang="en-US" dirty="0" err="1"/>
+              <a:t>identités</a:t>
+            </a:r>
+            <a:r>
+              <a:rPr lang="en-US" dirty="0"/>
+              <a:t> ». </a:t>
+            </a:r>
+            <a:r>
+              <a:rPr lang="en-US" dirty="0" err="1"/>
+              <a:t>L'objectif</a:t>
+            </a:r>
+            <a:r>
+              <a:rPr lang="en-US" dirty="0"/>
+              <a:t> principal est de </a:t>
+            </a:r>
+            <a:r>
+              <a:rPr lang="en-US" dirty="0" err="1"/>
+              <a:t>démontrer</a:t>
+            </a:r>
+            <a:r>
+              <a:rPr lang="en-US" dirty="0"/>
+              <a:t> comment il est possible </a:t>
+            </a:r>
+            <a:r>
+              <a:rPr lang="en-US" dirty="0" err="1"/>
+              <a:t>d'automatiser</a:t>
+            </a:r>
+            <a:r>
+              <a:rPr lang="en-US" dirty="0"/>
+              <a:t> </a:t>
+            </a:r>
+            <a:r>
+              <a:rPr lang="en-US" dirty="0" err="1"/>
+              <a:t>l'arrivée</a:t>
+            </a:r>
+            <a:r>
+              <a:rPr lang="en-US" dirty="0"/>
+              <a:t>, les changements de poste et le </a:t>
+            </a:r>
+            <a:r>
+              <a:rPr lang="en-US" dirty="0" err="1"/>
+              <a:t>départ</a:t>
+            </a:r>
+            <a:r>
+              <a:rPr lang="en-US" dirty="0"/>
+              <a:t> des </a:t>
             </a:r>
             <a:r>
               <a:rPr lang="en-US" dirty="0" err="1"/>
@@ -570,11 +690,11 @@
             </a:r>
             <a:r>
               <a:rPr lang="en-US" dirty="0"/>
-              <a:t> et des </a:t>
-            </a:r>
-            <a:r>
-              <a:rPr lang="en-US" dirty="0" err="1"/>
-              <a:t>accès</a:t>
+              <a:t> tout </a:t>
+            </a:r>
+            <a:r>
+              <a:rPr lang="en-US" dirty="0" err="1"/>
+              <a:t>en</a:t>
             </a:r>
             <a:r>
               <a:rPr lang="en-US" dirty="0"/>
@@ -582,23 +702,23 @@
             </a:r>
             <a:r>
               <a:rPr lang="en-US" dirty="0" err="1"/>
-              <a:t>associés</a:t>
-            </a:r>
-            <a:r>
-              <a:rPr lang="en-US" dirty="0"/>
-              <a:t>. </a:t>
-            </a:r>
-            <a:r>
-              <a:rPr lang="en-US" dirty="0" err="1"/>
-              <a:t>L'objectif</a:t>
-            </a:r>
-            <a:r>
-              <a:rPr lang="en-US" dirty="0"/>
-              <a:t> est </a:t>
-            </a:r>
-            <a:r>
-              <a:rPr lang="en-US" dirty="0" err="1"/>
-              <a:t>d'automatiser</a:t>
+              <a:t>appliquant</a:t>
+            </a:r>
+            <a:r>
+              <a:rPr lang="en-US" dirty="0"/>
+              <a:t> les principes de sécurité, de </a:t>
+            </a:r>
+            <a:r>
+              <a:rPr lang="en-US" dirty="0" err="1"/>
+              <a:t>gouvernance</a:t>
+            </a:r>
+            <a:r>
+              <a:rPr lang="en-US" dirty="0"/>
+              <a:t>, de </a:t>
+            </a:r>
+            <a:r>
+              <a:rPr lang="en-US" dirty="0" err="1"/>
+              <a:t>contrôle</a:t>
             </a:r>
             <a:r>
               <a:rPr lang="en-US" dirty="0"/>
@@ -606,31 +726,7 @@
             </a:r>
             <a:r>
               <a:rPr lang="en-US" dirty="0" err="1"/>
-              <a:t>l'arrivée</a:t>
-            </a:r>
-            <a:r>
-              <a:rPr lang="en-US" dirty="0"/>
-              <a:t>, les changements de poste et le </a:t>
-            </a:r>
-            <a:r>
-              <a:rPr lang="en-US" dirty="0" err="1"/>
-              <a:t>départ</a:t>
-            </a:r>
-            <a:r>
-              <a:rPr lang="en-US" dirty="0"/>
-              <a:t> des </a:t>
-            </a:r>
-            <a:r>
-              <a:rPr lang="en-US" dirty="0" err="1"/>
-              <a:t>employés</a:t>
-            </a:r>
-            <a:r>
-              <a:rPr lang="en-US" dirty="0"/>
-              <a:t> tout </a:t>
-            </a:r>
-            <a:r>
-              <a:rPr lang="en-US" dirty="0" err="1"/>
-              <a:t>en</a:t>
+              <a:t>d'accès</a:t>
             </a:r>
             <a:r>
               <a:rPr lang="en-US" dirty="0"/>
@@ -638,15 +734,15 @@
             </a:r>
             <a:r>
               <a:rPr lang="en-US" dirty="0" err="1"/>
-              <a:t>appliquant</a:t>
-            </a:r>
-            <a:r>
-              <a:rPr lang="en-US" dirty="0"/>
-              <a:t> les principes de sécurité, de </a:t>
-            </a:r>
-            <a:r>
-              <a:rPr lang="en-US" dirty="0" err="1"/>
-              <a:t>gouvernance</a:t>
+              <a:t>basé</a:t>
+            </a:r>
+            <a:r>
+              <a:rPr lang="en-US" dirty="0"/>
+              <a:t> sur les </a:t>
+            </a:r>
+            <a:r>
+              <a:rPr lang="en-US" dirty="0" err="1"/>
+              <a:t>rôles</a:t>
             </a:r>
             <a:r>
               <a:rPr lang="en-US" dirty="0"/>
@@ -658,7 +754,7 @@
             </a:r>
             <a:r>
               <a:rPr lang="en-US" dirty="0"/>
-              <a:t>.</a:t>
+              <a:t>.”</a:t>
             </a:r>
             <a:br>
               <a:rPr lang="en-US" dirty="0"/>
@@ -666,6 +762,161 @@
             <a:br>
               <a:rPr lang="en-US" dirty="0"/>
             </a:br>
+            <a:br>
+              <a:rPr lang="en-US" dirty="0"/>
+            </a:br>
+            <a:br>
+              <a:rPr lang="en-US" dirty="0"/>
+            </a:br>
+            <a:br>
+              <a:rPr lang="en-US" dirty="0"/>
+            </a:br>
+            <a:r>
+              <a:rPr lang="en-US" dirty="0"/>
+              <a:t>Speech2: “Le </a:t>
+            </a:r>
+            <a:r>
+              <a:rPr lang="en-US" dirty="0" err="1"/>
+              <a:t>projet</a:t>
+            </a:r>
+            <a:r>
+              <a:rPr lang="en-US" dirty="0"/>
+              <a:t> </a:t>
+            </a:r>
+            <a:r>
+              <a:rPr lang="en-US" dirty="0" err="1"/>
+              <a:t>répond</a:t>
+            </a:r>
+            <a:r>
+              <a:rPr lang="en-US" dirty="0"/>
+              <a:t> à un </a:t>
+            </a:r>
+            <a:r>
+              <a:rPr lang="en-US" dirty="0" err="1"/>
+              <a:t>problème</a:t>
+            </a:r>
+            <a:r>
+              <a:rPr lang="en-US" dirty="0"/>
+              <a:t> </a:t>
+            </a:r>
+            <a:r>
+              <a:rPr lang="en-US" dirty="0" err="1"/>
+              <a:t>fréquent</a:t>
+            </a:r>
+            <a:r>
+              <a:rPr lang="en-US" dirty="0"/>
+              <a:t> dans les </a:t>
+            </a:r>
+            <a:r>
+              <a:rPr lang="en-US" dirty="0" err="1"/>
+              <a:t>établissements</a:t>
+            </a:r>
+            <a:r>
+              <a:rPr lang="en-US" dirty="0"/>
+              <a:t> de santé : la gestion du cycle de vie des </a:t>
+            </a:r>
+            <a:r>
+              <a:rPr lang="en-US" dirty="0" err="1"/>
+              <a:t>employés</a:t>
+            </a:r>
+            <a:r>
+              <a:rPr lang="en-US" dirty="0"/>
+              <a:t> et des </a:t>
+            </a:r>
+            <a:r>
+              <a:rPr lang="en-US" dirty="0" err="1"/>
+              <a:t>accès</a:t>
+            </a:r>
+            <a:r>
+              <a:rPr lang="en-US" dirty="0"/>
+              <a:t> </a:t>
+            </a:r>
+            <a:r>
+              <a:rPr lang="en-US" dirty="0" err="1"/>
+              <a:t>associés</a:t>
+            </a:r>
+            <a:r>
+              <a:rPr lang="en-US" dirty="0"/>
+              <a:t>. </a:t>
+            </a:r>
+            <a:r>
+              <a:rPr lang="en-US" dirty="0" err="1"/>
+              <a:t>L'objectif</a:t>
+            </a:r>
+            <a:r>
+              <a:rPr lang="en-US" dirty="0"/>
+              <a:t> est </a:t>
+            </a:r>
+            <a:r>
+              <a:rPr lang="en-US" dirty="0" err="1"/>
+              <a:t>d'automatiser</a:t>
+            </a:r>
+            <a:r>
+              <a:rPr lang="en-US" dirty="0"/>
+              <a:t> </a:t>
+            </a:r>
+            <a:r>
+              <a:rPr lang="en-US" dirty="0" err="1"/>
+              <a:t>l'arrivée</a:t>
+            </a:r>
+            <a:r>
+              <a:rPr lang="en-US" dirty="0"/>
+              <a:t>, les changements de poste et le </a:t>
+            </a:r>
+            <a:r>
+              <a:rPr lang="en-US" dirty="0" err="1"/>
+              <a:t>départ</a:t>
+            </a:r>
+            <a:r>
+              <a:rPr lang="en-US" dirty="0"/>
+              <a:t> des </a:t>
+            </a:r>
+            <a:r>
+              <a:rPr lang="en-US" dirty="0" err="1"/>
+              <a:t>employés</a:t>
+            </a:r>
+            <a:r>
+              <a:rPr lang="en-US" dirty="0"/>
+              <a:t> tout </a:t>
+            </a:r>
+            <a:r>
+              <a:rPr lang="en-US" dirty="0" err="1"/>
+              <a:t>en</a:t>
+            </a:r>
+            <a:r>
+              <a:rPr lang="en-US" dirty="0"/>
+              <a:t> </a:t>
+            </a:r>
+            <a:r>
+              <a:rPr lang="en-US" dirty="0" err="1"/>
+              <a:t>appliquant</a:t>
+            </a:r>
+            <a:r>
+              <a:rPr lang="en-US" dirty="0"/>
+              <a:t> les principes de sécurité, de </a:t>
+            </a:r>
+            <a:r>
+              <a:rPr lang="en-US" dirty="0" err="1"/>
+              <a:t>gouvernance</a:t>
+            </a:r>
+            <a:r>
+              <a:rPr lang="en-US" dirty="0"/>
+              <a:t> et de </a:t>
+            </a:r>
+            <a:r>
+              <a:rPr lang="en-US" dirty="0" err="1"/>
+              <a:t>traçabilité</a:t>
+            </a:r>
+            <a:r>
+              <a:rPr lang="en-US" dirty="0"/>
+              <a:t>.</a:t>
+            </a:r>
+            <a:br>
+              <a:rPr lang="en-US" dirty="0"/>
+            </a:br>
+            <a:br>
+              <a:rPr lang="en-US" dirty="0"/>
+            </a:br>
             <a:r>
               <a:rPr lang="en-US" dirty="0"/>
               <a:t>Pour </a:t>
@@ -716,7 +967,7 @@
             </a:r>
             <a:r>
               <a:rPr lang="en-US" dirty="0"/>
-              <a:t> CSV et un rapport HTML</a:t>
+              <a:t> CSV et un rapport HTML”</a:t>
             </a:r>
           </a:p>
         </p:txBody>
@@ -803,7 +1054,117 @@
           <a:p>
             <a:r>
               <a:rPr lang="fr-FR" dirty="0"/>
-              <a:t>Le rapport HTML permet de visualiser les résultats du traitement, les opérations réalisées ainsi que les erreurs détectées par le système. Il constitue également un élément important pour l'audit et la conformité.</a:t>
+              <a:t>Speech1:  </a:t>
+            </a:r>
+            <a:r>
+              <a:rPr lang="en-US" dirty="0"/>
+              <a:t>“</a:t>
+            </a:r>
+            <a:r>
+              <a:rPr lang="en-US" dirty="0" err="1"/>
+              <a:t>Toutes</a:t>
+            </a:r>
+            <a:r>
+              <a:rPr lang="en-US" dirty="0"/>
+              <a:t> les </a:t>
+            </a:r>
+            <a:r>
+              <a:rPr lang="en-US" dirty="0" err="1"/>
+              <a:t>opérations</a:t>
+            </a:r>
+            <a:r>
+              <a:rPr lang="en-US" dirty="0"/>
+              <a:t> </a:t>
+            </a:r>
+            <a:r>
+              <a:rPr lang="en-US" dirty="0" err="1"/>
+              <a:t>effectuées</a:t>
+            </a:r>
+            <a:r>
+              <a:rPr lang="en-US" dirty="0"/>
+              <a:t> </a:t>
+            </a:r>
+            <a:r>
+              <a:rPr lang="en-US" dirty="0" err="1"/>
+              <a:t>sont</a:t>
+            </a:r>
+            <a:r>
+              <a:rPr lang="en-US" dirty="0"/>
+              <a:t> </a:t>
+            </a:r>
+            <a:r>
+              <a:rPr lang="en-US" dirty="0" err="1"/>
+              <a:t>enregistrées</a:t>
+            </a:r>
+            <a:r>
+              <a:rPr lang="en-US" dirty="0"/>
+              <a:t> et un rapport est </a:t>
+            </a:r>
+            <a:r>
+              <a:rPr lang="en-US" dirty="0" err="1"/>
+              <a:t>généré</a:t>
+            </a:r>
+            <a:r>
+              <a:rPr lang="en-US" dirty="0"/>
+              <a:t> </a:t>
+            </a:r>
+            <a:r>
+              <a:rPr lang="en-US" dirty="0" err="1"/>
+              <a:t>automatiquement</a:t>
+            </a:r>
+            <a:r>
+              <a:rPr lang="en-US" dirty="0"/>
+              <a:t>. Cela </a:t>
+            </a:r>
+            <a:r>
+              <a:rPr lang="en-US" dirty="0" err="1"/>
+              <a:t>permet</a:t>
+            </a:r>
+            <a:r>
+              <a:rPr lang="en-US" dirty="0"/>
+              <a:t> de </a:t>
+            </a:r>
+            <a:r>
+              <a:rPr lang="en-US" dirty="0" err="1"/>
+              <a:t>renforcer</a:t>
+            </a:r>
+            <a:r>
+              <a:rPr lang="en-US" dirty="0"/>
+              <a:t> la </a:t>
+            </a:r>
+            <a:r>
+              <a:rPr lang="en-US" dirty="0" err="1"/>
+              <a:t>traçabilité</a:t>
+            </a:r>
+            <a:r>
+              <a:rPr lang="en-US" dirty="0"/>
+              <a:t>, la </a:t>
+            </a:r>
+            <a:r>
+              <a:rPr lang="en-US" dirty="0" err="1"/>
+              <a:t>conformité</a:t>
+            </a:r>
+            <a:r>
+              <a:rPr lang="en-US" dirty="0"/>
+              <a:t> et de </a:t>
+            </a:r>
+            <a:r>
+              <a:rPr lang="en-US" dirty="0" err="1"/>
+              <a:t>faciliter</a:t>
+            </a:r>
+            <a:r>
+              <a:rPr lang="en-US" dirty="0"/>
+              <a:t> les audits.”</a:t>
+            </a:r>
+            <a:br>
+              <a:rPr lang="fr-FR" dirty="0"/>
+            </a:br>
+            <a:br>
+              <a:rPr lang="fr-FR" dirty="0"/>
+            </a:br>
+            <a:r>
+              <a:rPr lang="fr-FR" dirty="0"/>
+              <a:t>Speech2: « Le rapport HTML permet de visualiser les résultats du traitement, les opérations réalisées ainsi que les erreurs détectées par le système. Il constitue également un élément important pour l'audit et la conformité. »</a:t>
             </a:r>
             <a:endParaRPr lang="en-US" dirty="0"/>
           </a:p>
@@ -891,7 +1252,90 @@
           <a:p>
             <a:r>
               <a:rPr lang="en-US" dirty="0"/>
-              <a:t>Cette architecture </a:t>
+              <a:t>Speech1: “Cette </a:t>
+            </a:r>
+            <a:r>
+              <a:rPr lang="en-US" dirty="0" err="1"/>
+              <a:t>preuve</a:t>
+            </a:r>
+            <a:r>
+              <a:rPr lang="en-US" dirty="0"/>
+              <a:t> de concept </a:t>
+            </a:r>
+            <a:r>
+              <a:rPr lang="en-US" dirty="0" err="1"/>
+              <a:t>constitue</a:t>
+            </a:r>
+            <a:r>
+              <a:rPr lang="en-US" dirty="0"/>
+              <a:t> la première étape </a:t>
+            </a:r>
+            <a:r>
+              <a:rPr lang="en-US" dirty="0" err="1"/>
+              <a:t>d'une</a:t>
+            </a:r>
+            <a:r>
+              <a:rPr lang="en-US" dirty="0"/>
+              <a:t> future </a:t>
+            </a:r>
+            <a:r>
+              <a:rPr lang="en-US" dirty="0" err="1"/>
+              <a:t>plateforme</a:t>
+            </a:r>
+            <a:r>
+              <a:rPr lang="en-US" dirty="0"/>
+              <a:t> IAM </a:t>
+            </a:r>
+            <a:r>
+              <a:rPr lang="en-US" dirty="0" err="1"/>
+              <a:t>d'entreprise</a:t>
+            </a:r>
+            <a:r>
+              <a:rPr lang="en-US" dirty="0"/>
+              <a:t> </a:t>
+            </a:r>
+            <a:r>
+              <a:rPr lang="en-US" dirty="0" err="1"/>
+              <a:t>intégrant</a:t>
+            </a:r>
+            <a:r>
+              <a:rPr lang="en-US" dirty="0"/>
+              <a:t> Active Directory, Microsoft Entra ID, Microsoft 365, les </a:t>
+            </a:r>
+            <a:r>
+              <a:rPr lang="en-US" dirty="0" err="1"/>
+              <a:t>systèmes</a:t>
+            </a:r>
+            <a:r>
+              <a:rPr lang="en-US" dirty="0"/>
+              <a:t> RH et les </a:t>
+            </a:r>
+            <a:r>
+              <a:rPr lang="en-US" dirty="0" err="1"/>
+              <a:t>outils</a:t>
+            </a:r>
+            <a:r>
+              <a:rPr lang="en-US" dirty="0"/>
+              <a:t> ITSM”</a:t>
+            </a:r>
+            <a:br>
+              <a:rPr lang="en-US" dirty="0"/>
+            </a:br>
+            <a:br>
+              <a:rPr lang="en-US" dirty="0"/>
+            </a:br>
+            <a:br>
+              <a:rPr lang="en-US" dirty="0"/>
+            </a:br>
+            <a:br>
+              <a:rPr lang="en-US" dirty="0"/>
+            </a:br>
+            <a:br>
+              <a:rPr lang="en-US" dirty="0"/>
+            </a:br>
+            <a:r>
+              <a:rPr lang="en-US" dirty="0"/>
+              <a:t>Speech2: “Cette architecture </a:t>
             </a:r>
             <a:r>
               <a:rPr lang="en-US" dirty="0" err="1"/>
@@ -955,7 +1399,7 @@
             </a:r>
             <a:r>
               <a:rPr lang="en-US" dirty="0"/>
-              <a:t> ITSM.</a:t>
+              <a:t> ITSM.”</a:t>
             </a:r>
           </a:p>
         </p:txBody>
@@ -1042,7 +1486,224 @@
           <a:p>
             <a:r>
               <a:rPr lang="en-US" dirty="0"/>
-              <a:t>Pour </a:t>
+              <a:t>Speech1:” Cette </a:t>
+            </a:r>
+            <a:r>
+              <a:rPr lang="en-US" dirty="0" err="1"/>
+              <a:t>preuve</a:t>
+            </a:r>
+            <a:r>
+              <a:rPr lang="en-US" dirty="0"/>
+              <a:t> de concept </a:t>
+            </a:r>
+            <a:r>
+              <a:rPr lang="en-US" dirty="0" err="1"/>
+              <a:t>démontre</a:t>
+            </a:r>
+            <a:r>
+              <a:rPr lang="en-US" dirty="0"/>
+              <a:t> </a:t>
+            </a:r>
+            <a:r>
+              <a:rPr lang="en-US" dirty="0" err="1"/>
+              <a:t>qu'il</a:t>
+            </a:r>
+            <a:r>
+              <a:rPr lang="en-US" dirty="0"/>
+              <a:t> est possible </a:t>
+            </a:r>
+            <a:r>
+              <a:rPr lang="en-US" dirty="0" err="1"/>
+              <a:t>d'automatiser</a:t>
+            </a:r>
+            <a:r>
+              <a:rPr lang="en-US" dirty="0"/>
+              <a:t> le cycle de vie des </a:t>
+            </a:r>
+            <a:r>
+              <a:rPr lang="en-US" dirty="0" err="1"/>
+              <a:t>identités</a:t>
+            </a:r>
+            <a:r>
+              <a:rPr lang="en-US" dirty="0"/>
+              <a:t> tout </a:t>
+            </a:r>
+            <a:r>
+              <a:rPr lang="en-US" dirty="0" err="1"/>
+              <a:t>en</a:t>
+            </a:r>
+            <a:r>
+              <a:rPr lang="en-US" dirty="0"/>
+              <a:t> </a:t>
+            </a:r>
+            <a:r>
+              <a:rPr lang="en-US" dirty="0" err="1"/>
+              <a:t>appliquant</a:t>
+            </a:r>
+            <a:r>
+              <a:rPr lang="en-US" dirty="0"/>
+              <a:t> les principes de sécurité, de </a:t>
+            </a:r>
+            <a:r>
+              <a:rPr lang="en-US" dirty="0" err="1"/>
+              <a:t>gouvernance</a:t>
+            </a:r>
+            <a:r>
+              <a:rPr lang="en-US" dirty="0"/>
+              <a:t>, de </a:t>
+            </a:r>
+            <a:r>
+              <a:rPr lang="en-US" dirty="0" err="1"/>
+              <a:t>contrôle</a:t>
+            </a:r>
+            <a:r>
+              <a:rPr lang="en-US" dirty="0"/>
+              <a:t> </a:t>
+            </a:r>
+            <a:r>
+              <a:rPr lang="en-US" dirty="0" err="1"/>
+              <a:t>d'accès</a:t>
+            </a:r>
+            <a:r>
+              <a:rPr lang="en-US" dirty="0"/>
+              <a:t> </a:t>
+            </a:r>
+            <a:r>
+              <a:rPr lang="en-US" dirty="0" err="1"/>
+              <a:t>basé</a:t>
+            </a:r>
+            <a:r>
+              <a:rPr lang="en-US" dirty="0"/>
+              <a:t> sur les </a:t>
+            </a:r>
+            <a:r>
+              <a:rPr lang="en-US" dirty="0" err="1"/>
+              <a:t>rôles</a:t>
+            </a:r>
+            <a:r>
+              <a:rPr lang="en-US" dirty="0"/>
+              <a:t>, </a:t>
+            </a:r>
+            <a:r>
+              <a:rPr lang="en-US" dirty="0" err="1"/>
+              <a:t>d'audit</a:t>
+            </a:r>
+            <a:r>
+              <a:rPr lang="en-US" dirty="0"/>
+              <a:t> et de </a:t>
+            </a:r>
+            <a:r>
+              <a:rPr lang="en-US" dirty="0" err="1"/>
+              <a:t>conformité</a:t>
+            </a:r>
+            <a:r>
+              <a:rPr lang="en-US" dirty="0"/>
+              <a:t>. La </a:t>
+            </a:r>
+            <a:r>
+              <a:rPr lang="en-US" dirty="0" err="1"/>
+              <a:t>prochaine</a:t>
+            </a:r>
+            <a:r>
+              <a:rPr lang="en-US" dirty="0"/>
+              <a:t> étape </a:t>
+            </a:r>
+            <a:r>
+              <a:rPr lang="en-US" dirty="0" err="1"/>
+              <a:t>consistera</a:t>
+            </a:r>
+            <a:r>
+              <a:rPr lang="en-US" dirty="0"/>
+              <a:t> à </a:t>
+            </a:r>
+            <a:r>
+              <a:rPr lang="en-US" dirty="0" err="1"/>
+              <a:t>intégrer</a:t>
+            </a:r>
+            <a:r>
+              <a:rPr lang="en-US" dirty="0"/>
+              <a:t> Active Directory, Microsoft Entra ID et les </a:t>
+            </a:r>
+            <a:r>
+              <a:rPr lang="en-US" dirty="0" err="1"/>
+              <a:t>systèmes</a:t>
+            </a:r>
+            <a:r>
+              <a:rPr lang="en-US" dirty="0"/>
+              <a:t> RH </a:t>
+            </a:r>
+            <a:r>
+              <a:rPr lang="en-US" dirty="0" err="1"/>
+              <a:t>afin</a:t>
+            </a:r>
+            <a:r>
+              <a:rPr lang="en-US" dirty="0"/>
+              <a:t> </a:t>
+            </a:r>
+            <a:r>
+              <a:rPr lang="en-US" dirty="0" err="1"/>
+              <a:t>d'évoluer</a:t>
+            </a:r>
+            <a:r>
+              <a:rPr lang="en-US" dirty="0"/>
+              <a:t> vers </a:t>
+            </a:r>
+            <a:r>
+              <a:rPr lang="en-US" dirty="0" err="1"/>
+              <a:t>une</a:t>
+            </a:r>
+            <a:r>
+              <a:rPr lang="en-US" dirty="0"/>
+              <a:t> </a:t>
+            </a:r>
+            <a:r>
+              <a:rPr lang="en-US" dirty="0" err="1"/>
+              <a:t>véritable</a:t>
+            </a:r>
+            <a:r>
+              <a:rPr lang="en-US" dirty="0"/>
+              <a:t> </a:t>
+            </a:r>
+            <a:r>
+              <a:rPr lang="en-US" dirty="0" err="1"/>
+              <a:t>plateforme</a:t>
+            </a:r>
+            <a:r>
+              <a:rPr lang="en-US" dirty="0"/>
+              <a:t> IAM </a:t>
+            </a:r>
+            <a:r>
+              <a:rPr lang="en-US" dirty="0" err="1"/>
+              <a:t>d'entreprise</a:t>
+            </a:r>
+            <a:r>
+              <a:rPr lang="en-US" dirty="0"/>
+              <a:t>“</a:t>
+            </a:r>
+          </a:p>
+          <a:p>
+            <a:endParaRPr lang="en-US" dirty="0"/>
+          </a:p>
+          <a:p>
+            <a:endParaRPr lang="en-US" dirty="0"/>
+          </a:p>
+          <a:p>
+            <a:endParaRPr lang="en-US" dirty="0"/>
+          </a:p>
+          <a:p>
+            <a:endParaRPr lang="en-US"/>
+          </a:p>
+          <a:p>
+            <a:br>
+              <a:rPr lang="en-US"/>
+            </a:br>
+            <a:r>
+              <a:rPr lang="en-US"/>
+              <a:t>Speech2</a:t>
+            </a:r>
+            <a:r>
+              <a:rPr lang="en-US" dirty="0"/>
+              <a:t>: “Pour </a:t>
             </a:r>
             <a:r>
               <a:rPr lang="en-US" dirty="0" err="1"/>
@@ -1053,7 +1714,7 @@
               <a:t> , </a:t>
             </a:r>
             <a:r>
-              <a:rPr lang="en-US"/>
+              <a:rPr lang="en-US" dirty="0" err="1"/>
               <a:t>cette</a:t>
             </a:r>
             <a:r>
@@ -1250,7 +1911,7 @@
             </a:r>
             <a:r>
               <a:rPr lang="en-US" dirty="0"/>
-              <a:t>.</a:t>
+              <a:t>.”</a:t>
             </a:r>
           </a:p>
         </p:txBody>
@@ -1340,7 +2001,7 @@
             </a:pPr>
             <a:r>
               <a:rPr lang="en-US" sz="2000" dirty="0"/>
-              <a:t>Les </a:t>
+              <a:t>Seepch1: “Dans les </a:t>
             </a:r>
             <a:r>
               <a:rPr lang="en-US" sz="2000" dirty="0" err="1"/>
@@ -1348,6 +2009,233 @@
             </a:r>
             <a:r>
               <a:rPr lang="en-US" sz="2000" dirty="0"/>
+              <a:t> de santé, des </a:t>
+            </a:r>
+            <a:r>
+              <a:rPr lang="en-US" sz="2000" dirty="0" err="1"/>
+              <a:t>centaines</a:t>
+            </a:r>
+            <a:r>
+              <a:rPr lang="en-US" sz="2000" dirty="0"/>
+              <a:t> </a:t>
+            </a:r>
+            <a:r>
+              <a:rPr lang="en-US" sz="2000" dirty="0" err="1"/>
+              <a:t>voire</a:t>
+            </a:r>
+            <a:r>
+              <a:rPr lang="en-US" sz="2000" dirty="0"/>
+              <a:t> des </a:t>
+            </a:r>
+            <a:r>
+              <a:rPr lang="en-US" sz="2000" dirty="0" err="1"/>
+              <a:t>milliers</a:t>
+            </a:r>
+            <a:r>
+              <a:rPr lang="en-US" sz="2000" dirty="0"/>
+              <a:t> </a:t>
+            </a:r>
+            <a:r>
+              <a:rPr lang="en-US" sz="2000" dirty="0" err="1"/>
+              <a:t>d'employés</a:t>
+            </a:r>
+            <a:r>
+              <a:rPr lang="en-US" sz="2000" dirty="0"/>
+              <a:t> </a:t>
+            </a:r>
+            <a:r>
+              <a:rPr lang="en-US" sz="2000" dirty="0" err="1"/>
+              <a:t>doivent</a:t>
+            </a:r>
+            <a:r>
+              <a:rPr lang="en-US" sz="2000" dirty="0"/>
+              <a:t> disposer des bons </a:t>
+            </a:r>
+            <a:r>
+              <a:rPr lang="en-US" sz="2000" dirty="0" err="1"/>
+              <a:t>accès</a:t>
+            </a:r>
+            <a:r>
+              <a:rPr lang="en-US" sz="2000" dirty="0"/>
+              <a:t> au bon moment. Une gestion </a:t>
+            </a:r>
+            <a:r>
+              <a:rPr lang="en-US" sz="2000" dirty="0" err="1"/>
+              <a:t>manuelle</a:t>
+            </a:r>
+            <a:r>
+              <a:rPr lang="en-US" sz="2000" dirty="0"/>
+              <a:t> des </a:t>
+            </a:r>
+            <a:r>
+              <a:rPr lang="en-US" sz="2000" dirty="0" err="1"/>
+              <a:t>comptes</a:t>
+            </a:r>
+            <a:r>
+              <a:rPr lang="en-US" sz="2000" dirty="0"/>
+              <a:t> </a:t>
+            </a:r>
+            <a:r>
+              <a:rPr lang="en-US" sz="2000" dirty="0" err="1"/>
+              <a:t>peut</a:t>
+            </a:r>
+            <a:r>
+              <a:rPr lang="en-US" sz="2000" dirty="0"/>
+              <a:t> </a:t>
+            </a:r>
+            <a:r>
+              <a:rPr lang="en-US" sz="2000" dirty="0" err="1"/>
+              <a:t>entraîner</a:t>
+            </a:r>
+            <a:r>
+              <a:rPr lang="en-US" sz="2000" dirty="0"/>
+              <a:t> des retards, des </a:t>
+            </a:r>
+            <a:r>
+              <a:rPr lang="en-US" sz="2000" dirty="0" err="1"/>
+              <a:t>erreurs</a:t>
+            </a:r>
+            <a:r>
+              <a:rPr lang="en-US" sz="2000" dirty="0"/>
+              <a:t>, des </a:t>
+            </a:r>
+            <a:r>
+              <a:rPr lang="en-US" sz="2000" dirty="0" err="1"/>
+              <a:t>privilèges</a:t>
+            </a:r>
+            <a:r>
+              <a:rPr lang="en-US" sz="2000" dirty="0"/>
+              <a:t> </a:t>
+            </a:r>
+            <a:r>
+              <a:rPr lang="en-US" sz="2000" dirty="0" err="1"/>
+              <a:t>excessifs</a:t>
+            </a:r>
+            <a:r>
+              <a:rPr lang="en-US" sz="2000" dirty="0"/>
+              <a:t> </a:t>
+            </a:r>
+            <a:r>
+              <a:rPr lang="en-US" sz="2000" dirty="0" err="1"/>
+              <a:t>ou</a:t>
+            </a:r>
+            <a:r>
+              <a:rPr lang="en-US" sz="2000" dirty="0"/>
+              <a:t> encore des </a:t>
+            </a:r>
+            <a:r>
+              <a:rPr lang="en-US" sz="2000" dirty="0" err="1"/>
+              <a:t>risques</a:t>
+            </a:r>
+            <a:r>
+              <a:rPr lang="en-US" sz="2000" dirty="0"/>
+              <a:t> de sécurité. </a:t>
+            </a:r>
+            <a:r>
+              <a:rPr lang="en-US" sz="2000" dirty="0" err="1"/>
+              <a:t>L'objectif</a:t>
+            </a:r>
+            <a:r>
+              <a:rPr lang="en-US" sz="2000" dirty="0"/>
+              <a:t> de </a:t>
+            </a:r>
+            <a:r>
+              <a:rPr lang="en-US" sz="2000" dirty="0" err="1"/>
+              <a:t>cette</a:t>
+            </a:r>
+            <a:r>
+              <a:rPr lang="en-US" sz="2000" dirty="0"/>
+              <a:t> solution est </a:t>
+            </a:r>
+            <a:r>
+              <a:rPr lang="en-US" sz="2000" dirty="0" err="1"/>
+              <a:t>donc</a:t>
+            </a:r>
+            <a:r>
+              <a:rPr lang="en-US" sz="2000" dirty="0"/>
+              <a:t> </a:t>
+            </a:r>
+            <a:r>
+              <a:rPr lang="en-US" sz="2000" dirty="0" err="1"/>
+              <a:t>d'améliorer</a:t>
+            </a:r>
+            <a:r>
+              <a:rPr lang="en-US" sz="2000" dirty="0"/>
+              <a:t> </a:t>
+            </a:r>
+            <a:r>
+              <a:rPr lang="en-US" sz="2000" dirty="0" err="1"/>
+              <a:t>l'efficacité</a:t>
+            </a:r>
+            <a:r>
+              <a:rPr lang="en-US" sz="2000" dirty="0"/>
+              <a:t> </a:t>
+            </a:r>
+            <a:r>
+              <a:rPr lang="en-US" sz="2000" dirty="0" err="1"/>
+              <a:t>opérationnelle</a:t>
+            </a:r>
+            <a:r>
+              <a:rPr lang="en-US" sz="2000" dirty="0"/>
+              <a:t> tout </a:t>
+            </a:r>
+            <a:r>
+              <a:rPr lang="en-US" sz="2000" dirty="0" err="1"/>
+              <a:t>en</a:t>
+            </a:r>
+            <a:r>
+              <a:rPr lang="en-US" sz="2000" dirty="0"/>
+              <a:t> </a:t>
+            </a:r>
+            <a:r>
+              <a:rPr lang="en-US" sz="2000" dirty="0" err="1"/>
+              <a:t>réduisant</a:t>
+            </a:r>
+            <a:r>
+              <a:rPr lang="en-US" sz="2000" dirty="0"/>
+              <a:t> </a:t>
+            </a:r>
+            <a:r>
+              <a:rPr lang="en-US" sz="2000" dirty="0" err="1"/>
+              <a:t>ces</a:t>
+            </a:r>
+            <a:r>
+              <a:rPr lang="en-US" sz="2000" dirty="0"/>
+              <a:t> </a:t>
+            </a:r>
+            <a:r>
+              <a:rPr lang="en-US" sz="2000" dirty="0" err="1"/>
+              <a:t>risques</a:t>
+            </a:r>
+            <a:r>
+              <a:rPr lang="en-US" sz="2000" dirty="0"/>
+              <a:t>.”</a:t>
+            </a:r>
+            <a:br>
+              <a:rPr lang="en-US" sz="2000" dirty="0"/>
+            </a:br>
+            <a:br>
+              <a:rPr lang="en-US" sz="2000" dirty="0"/>
+            </a:br>
+            <a:br>
+              <a:rPr lang="en-US" sz="2000" dirty="0"/>
+            </a:br>
+            <a:br>
+              <a:rPr lang="en-US" sz="2000" dirty="0"/>
+            </a:br>
+            <a:br>
+              <a:rPr lang="en-US" sz="2000" dirty="0"/>
+            </a:br>
+            <a:r>
+              <a:rPr lang="en-US" sz="2000" dirty="0"/>
+              <a:t>Speech2: “Les </a:t>
+            </a:r>
+            <a:r>
+              <a:rPr lang="en-US" sz="2000" dirty="0" err="1"/>
+              <a:t>établissements</a:t>
+            </a:r>
+            <a:r>
+              <a:rPr lang="en-US" sz="2000" dirty="0"/>
               <a:t> de santé </a:t>
             </a:r>
             <a:r>
@@ -1524,7 +2412,7 @@
             </a:r>
             <a:r>
               <a:rPr lang="en-US" sz="2000" dirty="0"/>
-              <a:t>.</a:t>
+              <a:t>.”</a:t>
             </a:r>
           </a:p>
           <a:p>
@@ -1614,49 +2502,276 @@
           <a:p>
             <a:r>
               <a:rPr lang="fr-CA" dirty="0"/>
-              <a:t>Processus de fonctionnement de la solution</a:t>
+              <a:t>Speech1: « </a:t>
+            </a:r>
+            <a:r>
+              <a:rPr lang="en-US" dirty="0"/>
+              <a:t>Le processus commence avec les </a:t>
+            </a:r>
+            <a:r>
+              <a:rPr lang="en-US" dirty="0" err="1"/>
+              <a:t>informations</a:t>
+            </a:r>
+            <a:r>
+              <a:rPr lang="en-US" dirty="0"/>
+              <a:t> </a:t>
+            </a:r>
+            <a:r>
+              <a:rPr lang="en-US" dirty="0" err="1"/>
+              <a:t>fournies</a:t>
+            </a:r>
+            <a:r>
+              <a:rPr lang="en-US" dirty="0"/>
+              <a:t> par les </a:t>
+            </a:r>
+            <a:r>
+              <a:rPr lang="en-US" dirty="0" err="1"/>
+              <a:t>ressources</a:t>
+            </a:r>
+            <a:r>
+              <a:rPr lang="en-US" dirty="0"/>
+              <a:t> </a:t>
+            </a:r>
+            <a:r>
+              <a:rPr lang="en-US" dirty="0" err="1"/>
+              <a:t>humaines</a:t>
+            </a:r>
+            <a:r>
+              <a:rPr lang="en-US" dirty="0"/>
+              <a:t>. </a:t>
+            </a:r>
+            <a:r>
+              <a:rPr lang="en-US" dirty="0" err="1"/>
+              <a:t>Ces</a:t>
+            </a:r>
+            <a:r>
+              <a:rPr lang="en-US" dirty="0"/>
+              <a:t> </a:t>
+            </a:r>
+            <a:r>
+              <a:rPr lang="en-US" dirty="0" err="1"/>
+              <a:t>informations</a:t>
+            </a:r>
+            <a:r>
+              <a:rPr lang="en-US" dirty="0"/>
+              <a:t> </a:t>
+            </a:r>
+            <a:r>
+              <a:rPr lang="en-US" dirty="0" err="1"/>
+              <a:t>sont</a:t>
+            </a:r>
+            <a:r>
+              <a:rPr lang="en-US" dirty="0"/>
+              <a:t> ensuite </a:t>
+            </a:r>
+            <a:r>
+              <a:rPr lang="en-US" dirty="0" err="1"/>
+              <a:t>validées</a:t>
+            </a:r>
+            <a:r>
+              <a:rPr lang="en-US" dirty="0"/>
+              <a:t>. Le </a:t>
+            </a:r>
+            <a:r>
+              <a:rPr lang="en-US" dirty="0" err="1"/>
+              <a:t>moteur</a:t>
+            </a:r>
+            <a:r>
+              <a:rPr lang="en-US" dirty="0"/>
+              <a:t> IAM applique ensuite les </a:t>
+            </a:r>
+            <a:r>
+              <a:rPr lang="en-US" dirty="0" err="1"/>
+              <a:t>règles</a:t>
+            </a:r>
+            <a:r>
+              <a:rPr lang="en-US" dirty="0"/>
+              <a:t> de sécurité et les </a:t>
+            </a:r>
+            <a:r>
+              <a:rPr lang="en-US" dirty="0" err="1"/>
+              <a:t>règles</a:t>
+            </a:r>
+            <a:r>
+              <a:rPr lang="en-US" dirty="0"/>
+              <a:t> RBAC </a:t>
+            </a:r>
+            <a:r>
+              <a:rPr lang="en-US" dirty="0" err="1"/>
+              <a:t>afin</a:t>
+            </a:r>
+            <a:r>
+              <a:rPr lang="en-US" dirty="0"/>
+              <a:t> </a:t>
+            </a:r>
+            <a:r>
+              <a:rPr lang="en-US" dirty="0" err="1"/>
+              <a:t>d'attribuer</a:t>
+            </a:r>
+            <a:r>
+              <a:rPr lang="en-US" dirty="0"/>
+              <a:t> les </a:t>
+            </a:r>
+            <a:r>
+              <a:rPr lang="en-US" dirty="0" err="1"/>
+              <a:t>accès</a:t>
+            </a:r>
+            <a:r>
+              <a:rPr lang="en-US" dirty="0"/>
+              <a:t> </a:t>
+            </a:r>
+            <a:r>
+              <a:rPr lang="en-US" dirty="0" err="1"/>
+              <a:t>appropriés</a:t>
+            </a:r>
+            <a:r>
+              <a:rPr lang="en-US" dirty="0"/>
+              <a:t>. </a:t>
+            </a:r>
+            <a:r>
+              <a:rPr lang="en-US" dirty="0" err="1"/>
+              <a:t>Toutes</a:t>
+            </a:r>
+            <a:r>
+              <a:rPr lang="en-US" dirty="0"/>
+              <a:t> les actions </a:t>
+            </a:r>
+            <a:r>
+              <a:rPr lang="en-US" dirty="0" err="1"/>
+              <a:t>sont</a:t>
+            </a:r>
+            <a:r>
+              <a:rPr lang="en-US" dirty="0"/>
+              <a:t> </a:t>
+            </a:r>
+            <a:r>
+              <a:rPr lang="en-US" dirty="0" err="1"/>
+              <a:t>enregistrées</a:t>
+            </a:r>
+            <a:r>
+              <a:rPr lang="en-US" dirty="0"/>
+              <a:t> dans les </a:t>
+            </a:r>
+            <a:r>
+              <a:rPr lang="en-US" dirty="0" err="1"/>
+              <a:t>journaux</a:t>
+            </a:r>
+            <a:r>
+              <a:rPr lang="en-US" dirty="0"/>
+              <a:t> </a:t>
+            </a:r>
+            <a:r>
+              <a:rPr lang="en-US" dirty="0" err="1"/>
+              <a:t>d'audit</a:t>
+            </a:r>
+            <a:r>
+              <a:rPr lang="en-US" dirty="0"/>
+              <a:t> et un rapport est </a:t>
+            </a:r>
+            <a:r>
+              <a:rPr lang="en-US" dirty="0" err="1"/>
+              <a:t>généré</a:t>
+            </a:r>
+            <a:r>
+              <a:rPr lang="en-US" dirty="0"/>
+              <a:t> </a:t>
+            </a:r>
+            <a:r>
+              <a:rPr lang="en-US" dirty="0" err="1"/>
+              <a:t>afin</a:t>
+            </a:r>
+            <a:r>
+              <a:rPr lang="en-US" dirty="0"/>
+              <a:t> de </a:t>
+            </a:r>
+            <a:r>
+              <a:rPr lang="en-US" dirty="0" err="1"/>
+              <a:t>garantir</a:t>
+            </a:r>
+            <a:r>
+              <a:rPr lang="en-US" dirty="0"/>
+              <a:t> la </a:t>
+            </a:r>
+            <a:r>
+              <a:rPr lang="en-US" dirty="0" err="1"/>
+              <a:t>traçabilité</a:t>
+            </a:r>
+            <a:r>
+              <a:rPr lang="en-US" dirty="0"/>
+              <a:t> et la </a:t>
+            </a:r>
+            <a:r>
+              <a:rPr lang="en-US" dirty="0" err="1"/>
+              <a:t>conformité</a:t>
+            </a:r>
+            <a:r>
+              <a:rPr lang="en-US" dirty="0"/>
+              <a:t>.</a:t>
+            </a:r>
+            <a:r>
+              <a:rPr lang="fr-CA" dirty="0"/>
+              <a:t>»</a:t>
             </a:r>
             <a:br>
               <a:rPr lang="fr-CA" dirty="0"/>
             </a:br>
-            <a:r>
-              <a:rPr lang="fr-CA" dirty="0"/>
-              <a:t>RH: saisie des données</a:t>
-            </a:r>
             <a:br>
               <a:rPr lang="fr-CA" dirty="0"/>
             </a:br>
-            <a:r>
-              <a:rPr lang="fr-CA" dirty="0"/>
-              <a:t>Validation: les contrôles de gouvernances </a:t>
-            </a:r>
             <a:br>
               <a:rPr lang="fr-CA" dirty="0"/>
             </a:br>
-            <a:r>
-              <a:rPr lang="fr-CA" dirty="0"/>
-              <a:t>IAM Engine: moteur der gestion des Accès et des identité </a:t>
-            </a:r>
             <a:br>
               <a:rPr lang="fr-CA" dirty="0"/>
             </a:br>
-            <a:r>
-              <a:rPr lang="fr-CA" dirty="0"/>
-              <a:t>RBAC: contrôles d'accès basé sur les rôles</a:t>
-            </a:r>
             <a:br>
               <a:rPr lang="fr-CA" dirty="0"/>
             </a:br>
             <a:r>
               <a:rPr lang="fr-CA" dirty="0"/>
-              <a:t>Journal des audits</a:t>
+              <a:t>Speech2: « Processus de fonctionnement de la solution</a:t>
             </a:r>
             <a:br>
               <a:rPr lang="fr-CA" dirty="0"/>
             </a:br>
             <a:r>
               <a:rPr lang="fr-CA" dirty="0"/>
-              <a:t>Rapport de visualisation des actions entreprises</a:t>
+              <a:t>RH: saisie des données</a:t>
+            </a:r>
+            <a:br>
+              <a:rPr lang="fr-CA" dirty="0"/>
+            </a:br>
+            <a:r>
+              <a:rPr lang="fr-CA" dirty="0"/>
+              <a:t>Validation: les contrôles de gouvernances </a:t>
+            </a:r>
+            <a:br>
+              <a:rPr lang="fr-CA" dirty="0"/>
+            </a:br>
+            <a:r>
+              <a:rPr lang="fr-CA" dirty="0"/>
+              <a:t>IAM Engine: moteur der gestion des Accès et des identités </a:t>
+            </a:r>
+            <a:br>
+              <a:rPr lang="fr-CA" dirty="0"/>
+            </a:br>
+            <a:r>
+              <a:rPr lang="fr-CA" dirty="0"/>
+              <a:t>RBAC: contrôles d'accès basé sur les rôles</a:t>
+            </a:r>
+            <a:br>
+              <a:rPr lang="fr-CA" dirty="0"/>
+            </a:br>
+            <a:r>
+              <a:rPr lang="fr-CA" dirty="0"/>
+              <a:t>Journal des audits</a:t>
+            </a:r>
+            <a:br>
+              <a:rPr lang="fr-CA" dirty="0"/>
+            </a:br>
+            <a:r>
+              <a:rPr lang="fr-CA" dirty="0"/>
+              <a:t>Rapport de visualisation des actions entreprises »</a:t>
             </a:r>
             <a:endParaRPr lang="en-US" dirty="0"/>
           </a:p>
@@ -1744,32 +2859,193 @@
           <a:p>
             <a:r>
               <a:rPr lang="fr-CA" dirty="0"/>
-              <a:t>Employees.csv: référentiel des données saisies par les RH</a:t>
+              <a:t>Speech1: « </a:t>
             </a:r>
             <a:br>
               <a:rPr lang="fr-CA" dirty="0"/>
             </a:br>
-            <a:r>
-              <a:rPr lang="fr-CA" dirty="0"/>
-              <a:t>Le moteur IAM: validation des données par les contrôles de gouvernances ( RBAC + données exactes)</a:t>
-            </a:r>
             <a:br>
               <a:rPr lang="fr-CA" dirty="0"/>
             </a:br>
             <a:r>
               <a:rPr lang="fr-CA" dirty="0"/>
-              <a:t>RoleMappings.csv: le référentiel de rôles</a:t>
+              <a:t>1-</a:t>
+            </a:r>
+            <a:r>
+              <a:rPr lang="en-US" dirty="0"/>
+              <a:t>les données </a:t>
+            </a:r>
+            <a:r>
+              <a:rPr lang="en-US" dirty="0" err="1"/>
+              <a:t>provenant</a:t>
+            </a:r>
+            <a:r>
+              <a:rPr lang="en-US" dirty="0"/>
+              <a:t> du </a:t>
+            </a:r>
+            <a:r>
+              <a:rPr lang="en-US" dirty="0" err="1"/>
+              <a:t>système</a:t>
+            </a:r>
+            <a:r>
+              <a:rPr lang="en-US" dirty="0"/>
+              <a:t> RH</a:t>
+            </a:r>
+            <a:br>
+              <a:rPr lang="en-US" dirty="0"/>
+            </a:br>
+            <a:r>
+              <a:rPr lang="en-US" dirty="0"/>
+              <a:t>2-le </a:t>
+            </a:r>
+            <a:r>
+              <a:rPr lang="en-US" dirty="0" err="1"/>
+              <a:t>référentiel</a:t>
+            </a:r>
+            <a:r>
+              <a:rPr lang="en-US" dirty="0"/>
+              <a:t> des </a:t>
+            </a:r>
+            <a:r>
+              <a:rPr lang="en-US" dirty="0" err="1"/>
+              <a:t>rôles</a:t>
+            </a:r>
+            <a:br>
+              <a:rPr lang="en-US" dirty="0"/>
+            </a:br>
+            <a:r>
+              <a:rPr lang="en-US" dirty="0"/>
+              <a:t>3-le </a:t>
+            </a:r>
+            <a:r>
+              <a:rPr lang="en-US" dirty="0" err="1"/>
+              <a:t>référentiel</a:t>
+            </a:r>
+            <a:r>
+              <a:rPr lang="en-US" dirty="0"/>
+              <a:t> des </a:t>
+            </a:r>
+            <a:r>
+              <a:rPr lang="en-US" dirty="0" err="1"/>
+              <a:t>identités</a:t>
+            </a:r>
+            <a:r>
+              <a:rPr lang="en-US" dirty="0"/>
+              <a:t> </a:t>
+            </a:r>
+            <a:r>
+              <a:rPr lang="en-US" dirty="0" err="1"/>
+              <a:t>ou</a:t>
+            </a:r>
+            <a:r>
+              <a:rPr lang="en-US" dirty="0"/>
+              <a:t> </a:t>
+            </a:r>
+            <a:r>
+              <a:rPr lang="en-US" dirty="0" err="1"/>
+              <a:t>l'annuaire</a:t>
+            </a:r>
+            <a:r>
+              <a:rPr lang="en-US" dirty="0"/>
+              <a:t> des </a:t>
+            </a:r>
+            <a:r>
+              <a:rPr lang="en-US" dirty="0" err="1"/>
+              <a:t>utilisateurs</a:t>
+            </a:r>
+            <a:br>
+              <a:rPr lang="en-US" dirty="0"/>
+            </a:br>
+            <a:r>
+              <a:rPr lang="en-US" dirty="0"/>
+              <a:t>4-le </a:t>
+            </a:r>
+            <a:r>
+              <a:rPr lang="en-US" dirty="0" err="1"/>
+              <a:t>référentiel</a:t>
+            </a:r>
+            <a:r>
+              <a:rPr lang="en-US" dirty="0"/>
+              <a:t> des </a:t>
+            </a:r>
+            <a:r>
+              <a:rPr lang="en-US" dirty="0" err="1"/>
+              <a:t>journaux</a:t>
+            </a:r>
+            <a:r>
+              <a:rPr lang="en-US" dirty="0"/>
+              <a:t> </a:t>
+            </a:r>
+            <a:r>
+              <a:rPr lang="en-US" dirty="0" err="1"/>
+              <a:t>d’audit</a:t>
+            </a:r>
+            <a:br>
+              <a:rPr lang="en-US" dirty="0"/>
+            </a:br>
+            <a:r>
+              <a:rPr lang="en-US" dirty="0"/>
+              <a:t>5-le rapport des actions men</a:t>
+            </a:r>
+            <a:r>
+              <a:rPr lang="fr-CA" dirty="0"/>
+              <a:t>é</a:t>
+            </a:r>
+            <a:r>
+              <a:rPr lang="en-US" dirty="0"/>
+              <a:t>es par </a:t>
+            </a:r>
+            <a:r>
+              <a:rPr lang="en-US" dirty="0" err="1"/>
+              <a:t>visualisation</a:t>
+            </a:r>
+            <a:r>
+              <a:rPr lang="fr-CA" dirty="0"/>
+              <a:t>»</a:t>
             </a:r>
             <a:br>
               <a:rPr lang="fr-CA" dirty="0"/>
             </a:br>
-            <a:r>
-              <a:rPr lang="fr-CA" dirty="0"/>
-              <a:t>simulated_users.csv:  le référentiel des utilisateurs</a:t>
-            </a:r>
             <a:br>
               <a:rPr lang="fr-CA" dirty="0"/>
             </a:br>
+            <a:br>
+              <a:rPr lang="fr-CA" dirty="0"/>
+            </a:br>
+            <a:br>
+              <a:rPr lang="fr-CA" dirty="0"/>
+            </a:br>
+            <a:br>
+              <a:rPr lang="fr-CA" dirty="0"/>
+            </a:br>
+            <a:r>
+              <a:rPr lang="fr-CA" dirty="0"/>
+              <a:t>Speech2: « Employees.csv: référentiel des données saisies par les RH</a:t>
+            </a:r>
+            <a:br>
+              <a:rPr lang="fr-CA" dirty="0"/>
+            </a:br>
+            <a:r>
+              <a:rPr lang="fr-CA" dirty="0"/>
+              <a:t>Le moteur IAM: validation des données par les contrôles de gouvernances ( RBAC + données exactes)</a:t>
+            </a:r>
+            <a:br>
+              <a:rPr lang="fr-CA" dirty="0"/>
+            </a:br>
+            <a:r>
+              <a:rPr lang="fr-CA" dirty="0"/>
+              <a:t>RoleMappings.csv: le référentiel de rôles</a:t>
+            </a:r>
+            <a:br>
+              <a:rPr lang="fr-CA" dirty="0"/>
+            </a:br>
+            <a:r>
+              <a:rPr lang="fr-CA" dirty="0"/>
+              <a:t>simulated_users.csv:  le référentiel des utilisateurs</a:t>
+            </a:r>
+            <a:br>
+              <a:rPr lang="fr-CA" dirty="0"/>
+            </a:br>
             <a:r>
               <a:rPr lang="fr-CA" dirty="0"/>
               <a:t>audit_log.csv: référentiel de </a:t>
@@ -1783,7 +3059,7 @@
             </a:br>
             <a:r>
               <a:rPr lang="fr-FR" dirty="0"/>
-              <a:t>HTML report: rapport HTML pour visualiser les résultats du traitement, les opérations réalisées ainsi que les erreurs détectées par le système</a:t>
+              <a:t>HTML report: rapport HTML pour visualiser les résultats du traitement, les opérations réalisées ainsi que les erreurs détectées par le système »</a:t>
             </a:r>
             <a:endParaRPr lang="en-US" dirty="0"/>
           </a:p>
@@ -1871,7 +3147,219 @@
           <a:p>
             <a:r>
               <a:rPr lang="fr-FR" dirty="0"/>
-              <a:t>Lorsqu'un nouvel employé rejoint l'organisation, le système valide les données RH, vérifie les règles RBAC, crée le compte utilisateur, attribue les groupes nécessaires et enregistre toutes les actions dans les journaux d'audit.</a:t>
+              <a:t>Speech1: «</a:t>
+            </a:r>
+            <a:r>
+              <a:rPr lang="en-US" dirty="0" err="1"/>
+              <a:t>Lorsqu'un</a:t>
+            </a:r>
+            <a:r>
+              <a:rPr lang="en-US" dirty="0"/>
+              <a:t> </a:t>
+            </a:r>
+            <a:r>
+              <a:rPr lang="en-US" dirty="0" err="1"/>
+              <a:t>nouvel</a:t>
+            </a:r>
+            <a:r>
+              <a:rPr lang="en-US" dirty="0"/>
+              <a:t> </a:t>
+            </a:r>
+            <a:r>
+              <a:rPr lang="en-US" dirty="0" err="1"/>
+              <a:t>employé</a:t>
+            </a:r>
+            <a:r>
+              <a:rPr lang="en-US" dirty="0"/>
+              <a:t> rejoint </a:t>
+            </a:r>
+            <a:r>
+              <a:rPr lang="en-US" dirty="0" err="1"/>
+              <a:t>l'organisation</a:t>
+            </a:r>
+            <a:r>
+              <a:rPr lang="en-US" dirty="0"/>
+              <a:t>, le </a:t>
+            </a:r>
+            <a:r>
+              <a:rPr lang="en-US" dirty="0" err="1"/>
+              <a:t>système</a:t>
+            </a:r>
+            <a:r>
+              <a:rPr lang="en-US" dirty="0"/>
+              <a:t> commence par </a:t>
+            </a:r>
+            <a:r>
+              <a:rPr lang="en-US" dirty="0" err="1"/>
+              <a:t>valider</a:t>
+            </a:r>
+            <a:r>
+              <a:rPr lang="en-US" dirty="0"/>
+              <a:t> les </a:t>
+            </a:r>
+            <a:r>
+              <a:rPr lang="en-US" dirty="0" err="1"/>
+              <a:t>informations</a:t>
+            </a:r>
+            <a:r>
+              <a:rPr lang="en-US" dirty="0"/>
+              <a:t> </a:t>
+            </a:r>
+            <a:r>
+              <a:rPr lang="en-US" dirty="0" err="1"/>
+              <a:t>fournies</a:t>
+            </a:r>
+            <a:r>
+              <a:rPr lang="en-US" dirty="0"/>
+              <a:t> par les RH. Une </a:t>
+            </a:r>
+            <a:r>
+              <a:rPr lang="en-US" dirty="0" err="1"/>
+              <a:t>fois</a:t>
+            </a:r>
+            <a:r>
+              <a:rPr lang="en-US" dirty="0"/>
+              <a:t> </a:t>
+            </a:r>
+            <a:r>
+              <a:rPr lang="en-US" dirty="0" err="1"/>
+              <a:t>ces</a:t>
+            </a:r>
+            <a:r>
+              <a:rPr lang="en-US" dirty="0"/>
+              <a:t> validations </a:t>
+            </a:r>
+            <a:r>
+              <a:rPr lang="en-US" dirty="0" err="1"/>
+              <a:t>effectuées</a:t>
+            </a:r>
+            <a:r>
+              <a:rPr lang="en-US" dirty="0"/>
+              <a:t>, les </a:t>
+            </a:r>
+            <a:r>
+              <a:rPr lang="en-US" dirty="0" err="1"/>
+              <a:t>règles</a:t>
+            </a:r>
+            <a:r>
+              <a:rPr lang="en-US" dirty="0"/>
+              <a:t> RBAC </a:t>
+            </a:r>
+            <a:r>
+              <a:rPr lang="en-US" dirty="0" err="1"/>
+              <a:t>sont</a:t>
+            </a:r>
+            <a:r>
+              <a:rPr lang="en-US" dirty="0"/>
+              <a:t> </a:t>
+            </a:r>
+            <a:r>
+              <a:rPr lang="en-US" dirty="0" err="1"/>
+              <a:t>appliquées</a:t>
+            </a:r>
+            <a:r>
+              <a:rPr lang="en-US" dirty="0"/>
+              <a:t> </a:t>
+            </a:r>
+            <a:r>
+              <a:rPr lang="en-US" dirty="0" err="1"/>
+              <a:t>afin</a:t>
+            </a:r>
+            <a:r>
+              <a:rPr lang="en-US" dirty="0"/>
+              <a:t> </a:t>
+            </a:r>
+            <a:r>
+              <a:rPr lang="en-US" dirty="0" err="1"/>
+              <a:t>d'attribuer</a:t>
+            </a:r>
+            <a:r>
+              <a:rPr lang="en-US" dirty="0"/>
+              <a:t> </a:t>
+            </a:r>
+            <a:r>
+              <a:rPr lang="en-US" dirty="0" err="1"/>
+              <a:t>automatiquement</a:t>
+            </a:r>
+            <a:r>
+              <a:rPr lang="en-US" dirty="0"/>
+              <a:t> les </a:t>
+            </a:r>
+            <a:r>
+              <a:rPr lang="en-US" dirty="0" err="1"/>
+              <a:t>accès</a:t>
+            </a:r>
+            <a:r>
+              <a:rPr lang="en-US" dirty="0"/>
+              <a:t> </a:t>
+            </a:r>
+            <a:r>
+              <a:rPr lang="en-US" dirty="0" err="1"/>
+              <a:t>nécessaires</a:t>
+            </a:r>
+            <a:r>
+              <a:rPr lang="en-US" dirty="0"/>
+              <a:t>. Les </a:t>
+            </a:r>
+            <a:r>
+              <a:rPr lang="en-US" dirty="0" err="1"/>
+              <a:t>opérations</a:t>
+            </a:r>
+            <a:r>
+              <a:rPr lang="en-US" dirty="0"/>
+              <a:t> </a:t>
+            </a:r>
+            <a:r>
+              <a:rPr lang="en-US" dirty="0" err="1"/>
+              <a:t>réalisées</a:t>
+            </a:r>
+            <a:r>
+              <a:rPr lang="en-US" dirty="0"/>
+              <a:t> </a:t>
+            </a:r>
+            <a:r>
+              <a:rPr lang="en-US" dirty="0" err="1"/>
+              <a:t>sont</a:t>
+            </a:r>
+            <a:r>
+              <a:rPr lang="en-US" dirty="0"/>
+              <a:t> ensuite </a:t>
+            </a:r>
+            <a:r>
+              <a:rPr lang="en-US" dirty="0" err="1"/>
+              <a:t>enregistrées</a:t>
+            </a:r>
+            <a:r>
+              <a:rPr lang="en-US" dirty="0"/>
+              <a:t> dans les </a:t>
+            </a:r>
+            <a:r>
+              <a:rPr lang="en-US" dirty="0" err="1"/>
+              <a:t>journaux</a:t>
+            </a:r>
+            <a:r>
+              <a:rPr lang="en-US" dirty="0"/>
+              <a:t> </a:t>
+            </a:r>
+            <a:r>
+              <a:rPr lang="en-US" dirty="0" err="1"/>
+              <a:t>d'audit</a:t>
+            </a:r>
+            <a:r>
+              <a:rPr lang="en-US" dirty="0"/>
+              <a:t> et un rapport est </a:t>
+            </a:r>
+            <a:r>
+              <a:rPr lang="en-US" dirty="0" err="1"/>
+              <a:t>généré</a:t>
+            </a:r>
+            <a:r>
+              <a:rPr lang="en-US" dirty="0"/>
+              <a:t>.</a:t>
+            </a:r>
+            <a:r>
+              <a:rPr lang="fr-FR" dirty="0"/>
+              <a:t> »</a:t>
             </a:r>
             <a:br>
               <a:rPr lang="fr-FR" dirty="0"/>
@@ -1879,9 +3367,36 @@
             <a:br>
               <a:rPr lang="fr-FR" dirty="0"/>
             </a:br>
-            <a:r>
+            <a:br>
               <a:rPr lang="fr-FR" dirty="0"/>
-              <a:t>Le système commence par valider les informations fournies par les RH.</a:t>
+            </a:br>
+            <a:br>
+              <a:rPr lang="fr-FR" dirty="0"/>
+            </a:br>
+            <a:br>
+              <a:rPr lang="fr-FR" dirty="0"/>
+            </a:br>
+            <a:br>
+              <a:rPr lang="fr-FR" dirty="0"/>
+            </a:br>
+            <a:r>
+              <a:rPr lang="fr-FR" dirty="0"/>
+              <a:t>Speech2: </a:t>
+            </a:r>
+            <a:r>
+              <a:rPr lang="en-CA" dirty="0"/>
+              <a:t>“</a:t>
+            </a:r>
+            <a:r>
+              <a:rPr lang="fr-FR" dirty="0"/>
+              <a:t>Lorsqu'un nouvel employé rejoint l'organisation, le système valide les données RH, vérifie les règles RBAC, crée le compte utilisateur, attribue les groupes nécessaires et enregistre toutes les actions dans les journaux d'audit.</a:t>
+            </a:r>
+            <a:br>
+              <a:rPr lang="fr-FR" dirty="0"/>
+            </a:br>
+            <a:r>
+              <a:rPr lang="fr-FR" dirty="0"/>
+              <a:t>Le système commence par valider les informations fournies par les RH. »</a:t>
             </a:r>
             <a:endParaRPr lang="en-US" dirty="0"/>
           </a:p>
@@ -1986,7 +3501,147 @@
             </a:pPr>
             <a:r>
               <a:rPr lang="fr-FR" dirty="0"/>
-              <a:t>Lorsqu’une mobilité interne se fait dans l'organisation, le système valide les données RH, vérifie les règles RBAC, fait une mise à jour du rôle, attribue les groupes nécessaires et enregistre toutes les actions dans les journaux d'audit.</a:t>
+              <a:t>Speech1: «</a:t>
+            </a:r>
+            <a:r>
+              <a:rPr lang="en-US" dirty="0" err="1"/>
+              <a:t>Lorsqu'un</a:t>
+            </a:r>
+            <a:r>
+              <a:rPr lang="en-US" dirty="0"/>
+              <a:t> </a:t>
+            </a:r>
+            <a:r>
+              <a:rPr lang="en-US" dirty="0" err="1"/>
+              <a:t>employé</a:t>
+            </a:r>
+            <a:r>
+              <a:rPr lang="en-US" dirty="0"/>
+              <a:t> change de </a:t>
+            </a:r>
+            <a:r>
+              <a:rPr lang="en-US" dirty="0" err="1"/>
+              <a:t>fonction</a:t>
+            </a:r>
+            <a:r>
+              <a:rPr lang="en-US" dirty="0"/>
+              <a:t>, le </a:t>
+            </a:r>
+            <a:r>
+              <a:rPr lang="en-US" dirty="0" err="1"/>
+              <a:t>système</a:t>
+            </a:r>
+            <a:r>
+              <a:rPr lang="en-US" dirty="0"/>
+              <a:t> met à jour les </a:t>
+            </a:r>
+            <a:r>
+              <a:rPr lang="en-US" dirty="0" err="1"/>
+              <a:t>accès</a:t>
+            </a:r>
+            <a:r>
+              <a:rPr lang="en-US" dirty="0"/>
+              <a:t> </a:t>
+            </a:r>
+            <a:r>
+              <a:rPr lang="en-US" dirty="0" err="1"/>
+              <a:t>afin</a:t>
+            </a:r>
+            <a:r>
+              <a:rPr lang="en-US" dirty="0"/>
+              <a:t> de respecter le </a:t>
+            </a:r>
+            <a:r>
+              <a:rPr lang="en-US" dirty="0" err="1"/>
+              <a:t>principe</a:t>
+            </a:r>
+            <a:r>
+              <a:rPr lang="en-US" dirty="0"/>
+              <a:t> du </a:t>
+            </a:r>
+            <a:r>
+              <a:rPr lang="en-US" dirty="0" err="1"/>
+              <a:t>moindre</a:t>
+            </a:r>
+            <a:r>
+              <a:rPr lang="en-US" dirty="0"/>
+              <a:t> </a:t>
+            </a:r>
+            <a:r>
+              <a:rPr lang="en-US" dirty="0" err="1"/>
+              <a:t>privilège</a:t>
+            </a:r>
+            <a:r>
+              <a:rPr lang="en-US" dirty="0"/>
+              <a:t>. </a:t>
+            </a:r>
+            <a:r>
+              <a:rPr lang="en-US" dirty="0" err="1"/>
+              <a:t>L'utilisateur</a:t>
+            </a:r>
+            <a:r>
+              <a:rPr lang="en-US" dirty="0"/>
+              <a:t> </a:t>
+            </a:r>
+            <a:r>
+              <a:rPr lang="en-US" dirty="0" err="1"/>
+              <a:t>reçoit</a:t>
+            </a:r>
+            <a:r>
+              <a:rPr lang="en-US" dirty="0"/>
+              <a:t> </a:t>
+            </a:r>
+            <a:r>
+              <a:rPr lang="en-US" dirty="0" err="1"/>
+              <a:t>uniquement</a:t>
+            </a:r>
+            <a:r>
+              <a:rPr lang="en-US" dirty="0"/>
+              <a:t> les </a:t>
+            </a:r>
+            <a:r>
+              <a:rPr lang="en-US" dirty="0" err="1"/>
+              <a:t>accès</a:t>
+            </a:r>
+            <a:r>
+              <a:rPr lang="en-US" dirty="0"/>
+              <a:t> </a:t>
+            </a:r>
+            <a:r>
+              <a:rPr lang="en-US" dirty="0" err="1"/>
+              <a:t>correspondant</a:t>
+            </a:r>
+            <a:r>
+              <a:rPr lang="en-US" dirty="0"/>
+              <a:t> à </a:t>
+            </a:r>
+            <a:r>
+              <a:rPr lang="en-US" dirty="0" err="1"/>
+              <a:t>ses</a:t>
+            </a:r>
+            <a:r>
+              <a:rPr lang="en-US" dirty="0"/>
+              <a:t> </a:t>
+            </a:r>
+            <a:r>
+              <a:rPr lang="en-US" dirty="0" err="1"/>
+              <a:t>nouvelles</a:t>
+            </a:r>
+            <a:r>
+              <a:rPr lang="en-US" dirty="0"/>
+              <a:t> </a:t>
+            </a:r>
+            <a:r>
+              <a:rPr lang="en-US" dirty="0" err="1"/>
+              <a:t>responsabilités</a:t>
+            </a:r>
+            <a:r>
+              <a:rPr lang="en-US" dirty="0"/>
+              <a:t>.</a:t>
+            </a:r>
+            <a:r>
+              <a:rPr lang="fr-FR" dirty="0"/>
+              <a:t>  »</a:t>
             </a:r>
             <a:br>
               <a:rPr lang="fr-FR" dirty="0"/>
@@ -1994,9 +3649,28 @@
             <a:br>
               <a:rPr lang="fr-FR" dirty="0"/>
             </a:br>
-            <a:r>
+            <a:br>
               <a:rPr lang="fr-FR" dirty="0"/>
-              <a:t>Le système commence par valider les informations fournies par les RH.</a:t>
+            </a:br>
+            <a:br>
+              <a:rPr lang="fr-FR" dirty="0"/>
+            </a:br>
+            <a:br>
+              <a:rPr lang="fr-FR" dirty="0"/>
+            </a:br>
+            <a:r>
+              <a:rPr lang="fr-FR" dirty="0"/>
+              <a:t>Speech2: « Lorsqu’une mobilité interne se fait dans l'organisation, le système valide les données RH, vérifie les règles RBAC, fait une mise à jour du rôle, attribue les groupes nécessaires et enregistre toutes les actions dans les journaux d'audit.</a:t>
+            </a:r>
+            <a:br>
+              <a:rPr lang="fr-FR" dirty="0"/>
+            </a:br>
+            <a:br>
+              <a:rPr lang="fr-FR" dirty="0"/>
+            </a:br>
+            <a:r>
+              <a:rPr lang="fr-FR" dirty="0"/>
+              <a:t>Le système commence par valider les informations fournies par les RH. »</a:t>
             </a:r>
             <a:endParaRPr lang="en-US" dirty="0"/>
           </a:p>
@@ -2104,7 +3778,147 @@
             </a:pPr>
             <a:r>
               <a:rPr lang="fr-FR" dirty="0"/>
-              <a:t>Lorsqu’un départ d’employé est fait dans l'organisation, le système valide les données RH, vérifie les données employées ( validation manager ou département), désactivation du compte, retrait des groupes et enregistrement des actions dans les journaux d'audit.</a:t>
+              <a:t>Speech1: « </a:t>
+            </a:r>
+            <a:r>
+              <a:rPr lang="en-US" dirty="0" err="1"/>
+              <a:t>Lorsqu'un</a:t>
+            </a:r>
+            <a:r>
+              <a:rPr lang="en-US" dirty="0"/>
+              <a:t> </a:t>
+            </a:r>
+            <a:r>
+              <a:rPr lang="en-US" dirty="0" err="1"/>
+              <a:t>employé</a:t>
+            </a:r>
+            <a:r>
+              <a:rPr lang="en-US" dirty="0"/>
+              <a:t> </a:t>
+            </a:r>
+            <a:r>
+              <a:rPr lang="en-US" dirty="0" err="1"/>
+              <a:t>quitte</a:t>
+            </a:r>
+            <a:r>
+              <a:rPr lang="en-US" dirty="0"/>
+              <a:t> </a:t>
+            </a:r>
+            <a:r>
+              <a:rPr lang="en-US" dirty="0" err="1"/>
+              <a:t>l'organisation</a:t>
+            </a:r>
+            <a:r>
+              <a:rPr lang="en-US" dirty="0"/>
+              <a:t>, son compte est </a:t>
+            </a:r>
+            <a:r>
+              <a:rPr lang="en-US" dirty="0" err="1"/>
+              <a:t>désactivé</a:t>
+            </a:r>
+            <a:r>
+              <a:rPr lang="en-US" dirty="0"/>
+              <a:t> et </a:t>
+            </a:r>
+            <a:r>
+              <a:rPr lang="en-US" dirty="0" err="1"/>
+              <a:t>ses</a:t>
+            </a:r>
+            <a:r>
+              <a:rPr lang="en-US" dirty="0"/>
+              <a:t> </a:t>
+            </a:r>
+            <a:r>
+              <a:rPr lang="en-US" dirty="0" err="1"/>
+              <a:t>accès</a:t>
+            </a:r>
+            <a:r>
+              <a:rPr lang="en-US" dirty="0"/>
+              <a:t> </a:t>
+            </a:r>
+            <a:r>
+              <a:rPr lang="en-US" dirty="0" err="1"/>
+              <a:t>sont</a:t>
+            </a:r>
+            <a:r>
+              <a:rPr lang="en-US" dirty="0"/>
+              <a:t> </a:t>
+            </a:r>
+            <a:r>
+              <a:rPr lang="en-US" dirty="0" err="1"/>
+              <a:t>retirés</a:t>
+            </a:r>
+            <a:r>
+              <a:rPr lang="en-US" dirty="0"/>
+              <a:t>. </a:t>
+            </a:r>
+            <a:r>
+              <a:rPr lang="en-US" dirty="0" err="1"/>
+              <a:t>Toutes</a:t>
+            </a:r>
+            <a:r>
+              <a:rPr lang="en-US" dirty="0"/>
+              <a:t> </a:t>
+            </a:r>
+            <a:r>
+              <a:rPr lang="en-US" dirty="0" err="1"/>
+              <a:t>ces</a:t>
+            </a:r>
+            <a:r>
+              <a:rPr lang="en-US" dirty="0"/>
+              <a:t> actions </a:t>
+            </a:r>
+            <a:r>
+              <a:rPr lang="en-US" dirty="0" err="1"/>
+              <a:t>sont</a:t>
+            </a:r>
+            <a:r>
+              <a:rPr lang="en-US" dirty="0"/>
+              <a:t> </a:t>
+            </a:r>
+            <a:r>
+              <a:rPr lang="en-US" dirty="0" err="1"/>
+              <a:t>enregistrées</a:t>
+            </a:r>
+            <a:r>
+              <a:rPr lang="en-US" dirty="0"/>
+              <a:t> </a:t>
+            </a:r>
+            <a:r>
+              <a:rPr lang="en-US" dirty="0" err="1"/>
+              <a:t>afin</a:t>
+            </a:r>
+            <a:r>
+              <a:rPr lang="en-US" dirty="0"/>
+              <a:t> </a:t>
+            </a:r>
+            <a:r>
+              <a:rPr lang="en-US" dirty="0" err="1"/>
+              <a:t>d'assurer</a:t>
+            </a:r>
+            <a:r>
+              <a:rPr lang="en-US" dirty="0"/>
+              <a:t> la </a:t>
+            </a:r>
+            <a:r>
+              <a:rPr lang="en-US" dirty="0" err="1"/>
+              <a:t>traçabilité</a:t>
+            </a:r>
+            <a:r>
+              <a:rPr lang="en-US" dirty="0"/>
+              <a:t> et la </a:t>
+            </a:r>
+            <a:r>
+              <a:rPr lang="en-US" dirty="0" err="1"/>
+              <a:t>conformité</a:t>
+            </a:r>
+            <a:r>
+              <a:rPr lang="en-US" dirty="0"/>
+              <a:t>.</a:t>
+            </a:r>
+            <a:r>
+              <a:rPr lang="fr-FR" dirty="0"/>
+              <a:t> »</a:t>
             </a:r>
             <a:br>
               <a:rPr lang="fr-FR" dirty="0"/>
@@ -2112,9 +3926,28 @@
             <a:br>
               <a:rPr lang="fr-FR" dirty="0"/>
             </a:br>
-            <a:r>
+            <a:br>
               <a:rPr lang="fr-FR" dirty="0"/>
-              <a:t>Le système commence par valider les informations fournies par les RH.</a:t>
+            </a:br>
+            <a:br>
+              <a:rPr lang="fr-FR" dirty="0"/>
+            </a:br>
+            <a:br>
+              <a:rPr lang="fr-FR" dirty="0"/>
+            </a:br>
+            <a:r>
+              <a:rPr lang="fr-FR" dirty="0"/>
+              <a:t>Speech2: « Lorsqu’un départ d’employé est fait dans l'organisation, le système valide les données RH, vérifie les données employées ( validation manager ou département), désactivation du compte, retrait des groupes et enregistrement des actions dans les journaux d'audit.</a:t>
+            </a:r>
+            <a:br>
+              <a:rPr lang="fr-FR" dirty="0"/>
+            </a:br>
+            <a:br>
+              <a:rPr lang="fr-FR" dirty="0"/>
+            </a:br>
+            <a:r>
+              <a:rPr lang="fr-FR" dirty="0"/>
+              <a:t>Le système commence par valider les informations fournies par les RH. »</a:t>
             </a:r>
             <a:endParaRPr lang="en-US" dirty="0"/>
           </a:p>
@@ -2205,7 +4038,189 @@
           <a:p>
             <a:r>
               <a:rPr lang="en-US" dirty="0"/>
-              <a:t>Le </a:t>
+              <a:t>Speech1: “Cette solution applique le </a:t>
+            </a:r>
+            <a:r>
+              <a:rPr lang="en-US" dirty="0" err="1"/>
+              <a:t>principe</a:t>
+            </a:r>
+            <a:r>
+              <a:rPr lang="en-US" dirty="0"/>
+              <a:t> du </a:t>
+            </a:r>
+            <a:r>
+              <a:rPr lang="en-US" dirty="0" err="1"/>
+              <a:t>moindre</a:t>
+            </a:r>
+            <a:r>
+              <a:rPr lang="en-US" dirty="0"/>
+              <a:t> </a:t>
+            </a:r>
+            <a:r>
+              <a:rPr lang="en-US" dirty="0" err="1"/>
+              <a:t>privilège</a:t>
+            </a:r>
+            <a:r>
+              <a:rPr lang="en-US" dirty="0"/>
+              <a:t>. Les </a:t>
+            </a:r>
+            <a:r>
+              <a:rPr lang="en-US" dirty="0" err="1"/>
+              <a:t>accès</a:t>
+            </a:r>
+            <a:r>
+              <a:rPr lang="en-US" dirty="0"/>
+              <a:t> </a:t>
+            </a:r>
+            <a:r>
+              <a:rPr lang="en-US" dirty="0" err="1"/>
+              <a:t>sont</a:t>
+            </a:r>
+            <a:r>
+              <a:rPr lang="en-US" dirty="0"/>
+              <a:t> </a:t>
+            </a:r>
+            <a:r>
+              <a:rPr lang="en-US" dirty="0" err="1"/>
+              <a:t>attribués</a:t>
+            </a:r>
+            <a:r>
+              <a:rPr lang="en-US" dirty="0"/>
+              <a:t> </a:t>
+            </a:r>
+            <a:r>
+              <a:rPr lang="en-US" dirty="0" err="1"/>
+              <a:t>automatiquement</a:t>
+            </a:r>
+            <a:r>
+              <a:rPr lang="en-US" dirty="0"/>
+              <a:t> </a:t>
+            </a:r>
+            <a:r>
+              <a:rPr lang="en-US" dirty="0" err="1"/>
+              <a:t>en</a:t>
+            </a:r>
+            <a:r>
+              <a:rPr lang="en-US" dirty="0"/>
+              <a:t> </a:t>
+            </a:r>
+            <a:r>
+              <a:rPr lang="en-US" dirty="0" err="1"/>
+              <a:t>fonction</a:t>
+            </a:r>
+            <a:r>
+              <a:rPr lang="en-US" dirty="0"/>
+              <a:t> des </a:t>
+            </a:r>
+            <a:r>
+              <a:rPr lang="en-US" dirty="0" err="1"/>
+              <a:t>responsabilités</a:t>
+            </a:r>
+            <a:r>
+              <a:rPr lang="en-US" dirty="0"/>
+              <a:t> de </a:t>
+            </a:r>
+            <a:r>
+              <a:rPr lang="en-US" dirty="0" err="1"/>
+              <a:t>chaque</a:t>
+            </a:r>
+            <a:r>
+              <a:rPr lang="en-US" dirty="0"/>
+              <a:t> poste. </a:t>
+            </a:r>
+            <a:r>
+              <a:rPr lang="en-US" dirty="0" err="1"/>
+              <a:t>Ainsi</a:t>
+            </a:r>
+            <a:r>
+              <a:rPr lang="en-US" dirty="0"/>
+              <a:t>, </a:t>
+            </a:r>
+            <a:r>
+              <a:rPr lang="en-US" dirty="0" err="1"/>
+              <a:t>chaque</a:t>
+            </a:r>
+            <a:r>
+              <a:rPr lang="en-US" dirty="0"/>
+              <a:t> </a:t>
+            </a:r>
+            <a:r>
+              <a:rPr lang="en-US" dirty="0" err="1"/>
+              <a:t>utilisateur</a:t>
+            </a:r>
+            <a:r>
+              <a:rPr lang="en-US" dirty="0"/>
+              <a:t> </a:t>
+            </a:r>
+            <a:r>
+              <a:rPr lang="en-US" dirty="0" err="1"/>
+              <a:t>reçoit</a:t>
+            </a:r>
+            <a:r>
+              <a:rPr lang="en-US" dirty="0"/>
+              <a:t> </a:t>
+            </a:r>
+            <a:r>
+              <a:rPr lang="en-US" dirty="0" err="1"/>
+              <a:t>uniquement</a:t>
+            </a:r>
+            <a:r>
+              <a:rPr lang="en-US" dirty="0"/>
+              <a:t> les droits </a:t>
+            </a:r>
+            <a:r>
+              <a:rPr lang="en-US" dirty="0" err="1"/>
+              <a:t>nécessaires</a:t>
+            </a:r>
+            <a:r>
+              <a:rPr lang="en-US" dirty="0"/>
+              <a:t> à </a:t>
+            </a:r>
+            <a:r>
+              <a:rPr lang="en-US" dirty="0" err="1"/>
+              <a:t>l'exercice</a:t>
+            </a:r>
+            <a:r>
+              <a:rPr lang="en-US" dirty="0"/>
+              <a:t> de </a:t>
+            </a:r>
+            <a:r>
+              <a:rPr lang="en-US" dirty="0" err="1"/>
+              <a:t>ses</a:t>
+            </a:r>
+            <a:r>
+              <a:rPr lang="en-US" dirty="0"/>
+              <a:t> </a:t>
+            </a:r>
+            <a:r>
+              <a:rPr lang="en-US" dirty="0" err="1"/>
+              <a:t>fonctions</a:t>
+            </a:r>
+            <a:r>
+              <a:rPr lang="en-US" dirty="0"/>
+              <a:t>.”</a:t>
+            </a:r>
+            <a:br>
+              <a:rPr lang="en-US" dirty="0"/>
+            </a:br>
+            <a:br>
+              <a:rPr lang="en-US" dirty="0"/>
+            </a:br>
+            <a:br>
+              <a:rPr lang="en-US" dirty="0"/>
+            </a:br>
+            <a:br>
+              <a:rPr lang="en-US" dirty="0"/>
+            </a:br>
+            <a:br>
+              <a:rPr lang="en-US" dirty="0"/>
+            </a:br>
+            <a:br>
+              <a:rPr lang="en-US" dirty="0"/>
+            </a:br>
+            <a:r>
+              <a:rPr lang="en-US" dirty="0"/>
+              <a:t>Speech2: “Le </a:t>
             </a:r>
             <a:r>
               <a:rPr lang="en-US" dirty="0" err="1"/>
@@ -2325,7 +4340,7 @@
             </a:r>
             <a:r>
               <a:rPr lang="en-US" dirty="0"/>
-              <a:t> la sécurité.</a:t>
+              <a:t> la sécurité.”</a:t>
             </a:r>
           </a:p>
         </p:txBody>
@@ -2412,7 +4427,7 @@
           <a:p>
             <a:r>
               <a:rPr lang="en-US" dirty="0"/>
-              <a:t>Avant toute </a:t>
+              <a:t>Speech1: “Avant toute </a:t>
             </a:r>
             <a:r>
               <a:rPr lang="en-US" dirty="0" err="1"/>
@@ -2444,6 +4459,14 @@
             </a:r>
             <a:r>
               <a:rPr lang="en-US" dirty="0"/>
+              <a:t> </a:t>
+            </a:r>
+            <a:r>
+              <a:rPr lang="en-US" dirty="0" err="1"/>
+              <a:t>toutes</a:t>
+            </a:r>
+            <a:r>
+              <a:rPr lang="en-US" dirty="0"/>
               <a:t> les </a:t>
             </a:r>
             <a:r>
@@ -2456,6 +4479,161 @@
             </a:r>
             <a:r>
               <a:rPr lang="en-US" dirty="0" err="1"/>
+              <a:t>obligatoires</a:t>
+            </a:r>
+            <a:r>
+              <a:rPr lang="en-US" dirty="0"/>
+              <a:t> </a:t>
+            </a:r>
+            <a:r>
+              <a:rPr lang="en-US" dirty="0" err="1"/>
+              <a:t>sont</a:t>
+            </a:r>
+            <a:r>
+              <a:rPr lang="en-US" dirty="0"/>
+              <a:t> </a:t>
+            </a:r>
+            <a:r>
+              <a:rPr lang="en-US" dirty="0" err="1"/>
+              <a:t>présentes</a:t>
+            </a:r>
+            <a:r>
+              <a:rPr lang="en-US" dirty="0"/>
+              <a:t>. Si </a:t>
+            </a:r>
+            <a:r>
+              <a:rPr lang="en-US" dirty="0" err="1"/>
+              <a:t>certaines</a:t>
+            </a:r>
+            <a:r>
+              <a:rPr lang="en-US" dirty="0"/>
+              <a:t> données </a:t>
+            </a:r>
+            <a:r>
+              <a:rPr lang="en-US" dirty="0" err="1"/>
+              <a:t>sont</a:t>
+            </a:r>
+            <a:r>
+              <a:rPr lang="en-US" dirty="0"/>
+              <a:t> </a:t>
+            </a:r>
+            <a:r>
+              <a:rPr lang="en-US" dirty="0" err="1"/>
+              <a:t>manquantes</a:t>
+            </a:r>
+            <a:r>
+              <a:rPr lang="en-US" dirty="0"/>
+              <a:t>, le processus est </a:t>
+            </a:r>
+            <a:r>
+              <a:rPr lang="en-US" dirty="0" err="1"/>
+              <a:t>interrompu</a:t>
+            </a:r>
+            <a:r>
+              <a:rPr lang="en-US" dirty="0"/>
+              <a:t> </a:t>
+            </a:r>
+            <a:r>
+              <a:rPr lang="en-US" dirty="0" err="1"/>
+              <a:t>afin</a:t>
+            </a:r>
+            <a:r>
+              <a:rPr lang="en-US" dirty="0"/>
+              <a:t> </a:t>
+            </a:r>
+            <a:r>
+              <a:rPr lang="en-US" dirty="0" err="1"/>
+              <a:t>d'éviter</a:t>
+            </a:r>
+            <a:r>
+              <a:rPr lang="en-US" dirty="0"/>
+              <a:t> des </a:t>
+            </a:r>
+            <a:r>
+              <a:rPr lang="en-US" dirty="0" err="1"/>
+              <a:t>erreurs</a:t>
+            </a:r>
+            <a:r>
+              <a:rPr lang="en-US" dirty="0"/>
+              <a:t> </a:t>
+            </a:r>
+            <a:r>
+              <a:rPr lang="en-US" dirty="0" err="1"/>
+              <a:t>ou</a:t>
+            </a:r>
+            <a:r>
+              <a:rPr lang="en-US" dirty="0"/>
+              <a:t> des </a:t>
+            </a:r>
+            <a:r>
+              <a:rPr lang="en-US" dirty="0" err="1"/>
+              <a:t>risques</a:t>
+            </a:r>
+            <a:r>
+              <a:rPr lang="en-US" dirty="0"/>
+              <a:t> de sécurité.”</a:t>
+            </a:r>
+            <a:br>
+              <a:rPr lang="en-US" dirty="0"/>
+            </a:br>
+            <a:br>
+              <a:rPr lang="en-US" dirty="0"/>
+            </a:br>
+            <a:br>
+              <a:rPr lang="en-US" dirty="0"/>
+            </a:br>
+            <a:br>
+              <a:rPr lang="en-US" dirty="0"/>
+            </a:br>
+            <a:br>
+              <a:rPr lang="en-US" dirty="0"/>
+            </a:br>
+            <a:r>
+              <a:rPr lang="en-US" dirty="0"/>
+              <a:t>Speech2: “Avant toute </a:t>
+            </a:r>
+            <a:r>
+              <a:rPr lang="en-US" dirty="0" err="1"/>
+              <a:t>création</a:t>
+            </a:r>
+            <a:r>
+              <a:rPr lang="en-US" dirty="0"/>
+              <a:t> de compte, le </a:t>
+            </a:r>
+            <a:r>
+              <a:rPr lang="en-US" dirty="0" err="1"/>
+              <a:t>système</a:t>
+            </a:r>
+            <a:r>
+              <a:rPr lang="en-US" dirty="0"/>
+              <a:t> </a:t>
+            </a:r>
+            <a:r>
+              <a:rPr lang="en-US" dirty="0" err="1"/>
+              <a:t>vérifie</a:t>
+            </a:r>
+            <a:r>
+              <a:rPr lang="en-US" dirty="0"/>
+              <a:t> </a:t>
+            </a:r>
+            <a:r>
+              <a:rPr lang="en-US" dirty="0" err="1"/>
+              <a:t>que</a:t>
+            </a:r>
+            <a:r>
+              <a:rPr lang="en-US" dirty="0"/>
+              <a:t> les </a:t>
+            </a:r>
+            <a:r>
+              <a:rPr lang="en-US" dirty="0" err="1"/>
+              <a:t>informations</a:t>
+            </a:r>
+            <a:r>
+              <a:rPr lang="en-US" dirty="0"/>
+              <a:t> </a:t>
+            </a:r>
+            <a:r>
+              <a:rPr lang="en-US" dirty="0" err="1"/>
               <a:t>essentielles</a:t>
             </a:r>
             <a:r>
@@ -2553,7 +4731,10 @@
               <a:rPr lang="en-US" dirty="0" err="1"/>
               <a:t>indiqué</a:t>
             </a:r>
-            <a:endParaRPr lang="en-US" dirty="0"/>
+            <a:r>
+              <a:rPr lang="en-US" dirty="0"/>
+              <a:t>”</a:t>
+            </a:r>
           </a:p>
         </p:txBody>
       </p:sp>
@@ -2740,7 +4921,7 @@
           <a:p>
             <a:fld id="{6EC124F2-B461-4993-8DAA-E392A8E68310}" type="datetimeFigureOut">
               <a:rPr lang="en-US" smtClean="0"/>
-              <a:t>6/8/2026</a:t>
+              <a:t>6/10/2026</a:t>
             </a:fld>
             <a:endParaRPr lang="en-US"/>
           </a:p>
@@ -2938,7 +5119,7 @@
           <a:p>
             <a:fld id="{6EC124F2-B461-4993-8DAA-E392A8E68310}" type="datetimeFigureOut">
               <a:rPr lang="en-US" smtClean="0"/>
-              <a:t>6/8/2026</a:t>
+              <a:t>6/10/2026</a:t>
             </a:fld>
             <a:endParaRPr lang="en-US"/>
           </a:p>
@@ -3146,7 +5327,7 @@
           <a:p>
             <a:fld id="{6EC124F2-B461-4993-8DAA-E392A8E68310}" type="datetimeFigureOut">
               <a:rPr lang="en-US" smtClean="0"/>
-              <a:t>6/8/2026</a:t>
+              <a:t>6/10/2026</a:t>
             </a:fld>
             <a:endParaRPr lang="en-US"/>
           </a:p>
@@ -3344,7 +5525,7 @@
           <a:p>
             <a:fld id="{6EC124F2-B461-4993-8DAA-E392A8E68310}" type="datetimeFigureOut">
               <a:rPr lang="en-US" smtClean="0"/>
-              <a:t>6/8/2026</a:t>
+              <a:t>6/10/2026</a:t>
             </a:fld>
             <a:endParaRPr lang="en-US"/>
           </a:p>
@@ -3619,7 +5800,7 @@
           <a:p>
             <a:fld id="{6EC124F2-B461-4993-8DAA-E392A8E68310}" type="datetimeFigureOut">
               <a:rPr lang="en-US" smtClean="0"/>
-              <a:t>6/8/2026</a:t>
+              <a:t>6/10/2026</a:t>
             </a:fld>
             <a:endParaRPr lang="en-US"/>
           </a:p>
@@ -3884,7 +6065,7 @@
           <a:p>
             <a:fld id="{6EC124F2-B461-4993-8DAA-E392A8E68310}" type="datetimeFigureOut">
               <a:rPr lang="en-US" smtClean="0"/>
-              <a:t>6/8/2026</a:t>
+              <a:t>6/10/2026</a:t>
             </a:fld>
             <a:endParaRPr lang="en-US"/>
           </a:p>
@@ -4296,7 +6477,7 @@
           <a:p>
             <a:fld id="{6EC124F2-B461-4993-8DAA-E392A8E68310}" type="datetimeFigureOut">
               <a:rPr lang="en-US" smtClean="0"/>
-              <a:t>6/8/2026</a:t>
+              <a:t>6/10/2026</a:t>
             </a:fld>
             <a:endParaRPr lang="en-US"/>
           </a:p>
@@ -4437,7 +6618,7 @@
           <a:p>
             <a:fld id="{6EC124F2-B461-4993-8DAA-E392A8E68310}" type="datetimeFigureOut">
               <a:rPr lang="en-US" smtClean="0"/>
-              <a:t>6/8/2026</a:t>
+              <a:t>6/10/2026</a:t>
             </a:fld>
             <a:endParaRPr lang="en-US"/>
           </a:p>
@@ -4550,7 +6731,7 @@
           <a:p>
             <a:fld id="{6EC124F2-B461-4993-8DAA-E392A8E68310}" type="datetimeFigureOut">
               <a:rPr lang="en-US" smtClean="0"/>
-              <a:t>6/8/2026</a:t>
+              <a:t>6/10/2026</a:t>
             </a:fld>
             <a:endParaRPr lang="en-US"/>
           </a:p>
@@ -4861,7 +7042,7 @@
           <a:p>
             <a:fld id="{6EC124F2-B461-4993-8DAA-E392A8E68310}" type="datetimeFigureOut">
               <a:rPr lang="en-US" smtClean="0"/>
-              <a:t>6/8/2026</a:t>
+              <a:t>6/10/2026</a:t>
             </a:fld>
             <a:endParaRPr lang="en-US"/>
           </a:p>
@@ -5149,7 +7330,7 @@
           <a:p>
             <a:fld id="{6EC124F2-B461-4993-8DAA-E392A8E68310}" type="datetimeFigureOut">
               <a:rPr lang="en-US" smtClean="0"/>
-              <a:t>6/8/2026</a:t>
+              <a:t>6/10/2026</a:t>
             </a:fld>
             <a:endParaRPr lang="en-US"/>
           </a:p>
@@ -5390,7 +7571,7 @@
           <a:p>
             <a:fld id="{6EC124F2-B461-4993-8DAA-E392A8E68310}" type="datetimeFigureOut">
               <a:rPr lang="en-US" smtClean="0"/>
-              <a:t>6/8/2026</a:t>
+              <a:t>6/10/2026</a:t>
             </a:fld>
             <a:endParaRPr lang="en-US"/>
           </a:p>
